--- a/docs/QorAI-Idea-Battle.pptx
+++ b/docs/QorAI-Idea-Battle.pptx
@@ -2,20 +2,22 @@
 <file path=ppt/presentation.xml><?xml version="1.0" encoding="utf-8"?>
 <p:presentation xmlns:p="http://schemas.openxmlformats.org/presentationml/2006/main">
   <p:sldMasterIdLst>
-    <p:sldMasterId xmlns:r="http://schemas.openxmlformats.org/officeDocument/2006/relationships" id="2147483648" r:id="Rf4a695a4f4d243d2"/>
+    <p:sldMasterId xmlns:r="http://schemas.openxmlformats.org/officeDocument/2006/relationships" id="2147483648" r:id="Re9249e6ca72e4ba0"/>
   </p:sldMasterIdLst>
   <p:notesMasterIdLst>
-    <p:notesMasterId xmlns:r="http://schemas.openxmlformats.org/officeDocument/2006/relationships" r:id="Ra07c6ef1254941bc"/>
+    <p:notesMasterId xmlns:r="http://schemas.openxmlformats.org/officeDocument/2006/relationships" r:id="R376dac87d9f14b78"/>
   </p:notesMasterIdLst>
   <p:sldIdLst>
-    <p:sldId xmlns:r="http://schemas.openxmlformats.org/officeDocument/2006/relationships" id="256" r:id="R8c828bdcc65442b9"/>
-    <p:sldId xmlns:r="http://schemas.openxmlformats.org/officeDocument/2006/relationships" id="257" r:id="R6c6f54db4e294fe0"/>
-    <p:sldId xmlns:r="http://schemas.openxmlformats.org/officeDocument/2006/relationships" id="258" r:id="R5260df7ee2cb44e5"/>
-    <p:sldId xmlns:r="http://schemas.openxmlformats.org/officeDocument/2006/relationships" id="259" r:id="R5b2a9b4b8f304cdd"/>
-    <p:sldId xmlns:r="http://schemas.openxmlformats.org/officeDocument/2006/relationships" id="260" r:id="Rce6a3e08e72c44b1"/>
-    <p:sldId xmlns:r="http://schemas.openxmlformats.org/officeDocument/2006/relationships" id="261" r:id="Rbf83610df9284ee7"/>
-    <p:sldId xmlns:r="http://schemas.openxmlformats.org/officeDocument/2006/relationships" id="262" r:id="R8d1660b49f324e43"/>
-    <p:sldId xmlns:r="http://schemas.openxmlformats.org/officeDocument/2006/relationships" id="263" r:id="R986424a1c2a442aa"/>
+    <p:sldId xmlns:r="http://schemas.openxmlformats.org/officeDocument/2006/relationships" id="256" r:id="R1f7fcd71650c4934"/>
+    <p:sldId xmlns:r="http://schemas.openxmlformats.org/officeDocument/2006/relationships" id="257" r:id="R009c443a023345df"/>
+    <p:sldId xmlns:r="http://schemas.openxmlformats.org/officeDocument/2006/relationships" id="258" r:id="Rb81f9657c3df48d0"/>
+    <p:sldId xmlns:r="http://schemas.openxmlformats.org/officeDocument/2006/relationships" id="259" r:id="Rabdb852f40564e3a"/>
+    <p:sldId xmlns:r="http://schemas.openxmlformats.org/officeDocument/2006/relationships" id="260" r:id="R50b96f92114242e2"/>
+    <p:sldId xmlns:r="http://schemas.openxmlformats.org/officeDocument/2006/relationships" id="261" r:id="R37a5e0ff810e48a5"/>
+    <p:sldId xmlns:r="http://schemas.openxmlformats.org/officeDocument/2006/relationships" id="262" r:id="R439ffbd2823745c5"/>
+    <p:sldId xmlns:r="http://schemas.openxmlformats.org/officeDocument/2006/relationships" id="263" r:id="R40333ec326004bdb"/>
+    <p:sldId xmlns:r="http://schemas.openxmlformats.org/officeDocument/2006/relationships" id="264" r:id="R94f9d9d2832a4b1d"/>
+    <p:sldId xmlns:r="http://schemas.openxmlformats.org/officeDocument/2006/relationships" id="265" r:id="Re4358ef50bf6495c"/>
   </p:sldIdLst>
   <p:sldSz cx="12192000" cy="6858000"/>
   <p:notesSz cx="6858000" cy="9144000"/>
@@ -449,7 +451,122 @@
           <a:lstStyle xmlns:a="http://schemas.openxmlformats.org/drawingml/2006/main"/>
           <a:p xmlns:a="http://schemas.openxmlformats.org/drawingml/2006/main">
             <a:r>
-              <a:t>0:00–0:30. Представьтесь: мы команда QorAI. Представьте владельца небольшой кофейни. После смены у него накладные, закупки и непонятные остатки. Мы хотим сократить эту рутину. Qor по-казахски означает запас. QorAI помогает превратить закупки в понятный учёт прямо со смартфона.</a:t>
+              <a:t>0:00–0:20</a:t>
+            </a:r>
+          </a:p>
+          <a:p xmlns:a="http://schemas.openxmlformats.org/drawingml/2006/main">
+            <a:r>
+              <a:t>Здравствуйте! Мы команда QorAI. Делаем помощника для владельцев кафе и магазинов Тараза. Он помогает вести склад и готовить закупки с телефона. Наша цель простая: чтобы владелец понимал, что осталось, какие продукты пора использовать и что нужно заказать к следующему дню.</a:t>
+            </a:r>
+          </a:p>
+          <a:p xmlns:a="http://schemas.openxmlformats.org/drawingml/2006/main">
+            <a:r>
+              <a:t/>
+            </a:r>
+          </a:p>
+          <a:p xmlns:a="http://schemas.openxmlformats.org/drawingml/2006/main">
+            <a:r>
+              <a:t>Проверка фактов: функциональность подтверждена локальным кодом и снимками публичного сайта 17.10.2026. Склад и поставщики на снимках учебные. Пилот и цена являются планом и гипотезой.</a:t>
+            </a:r>
+          </a:p>
+          <a:p xmlns:a="http://schemas.openxmlformats.org/drawingml/2006/main">
+            <a:r>
+              <a:t>Фотография: Long Chung, Unsplash. https://unsplash.com/es/fotos/barista-trabajando-detras-de-un-mostrador-de-cafe-H7PLuaYW6UQ</a:t>
+            </a:r>
+          </a:p>
+          <a:p xmlns:a="http://schemas.openxmlformats.org/drawingml/2006/main">
+            <a:r>
+              <a:t>Лицензия: https://unsplash.com/license</a:t>
+            </a:r>
+          </a:p>
+          <a:p xmlns:a="http://schemas.openxmlformats.org/drawingml/2006/main">
+            <a:r>
+              <a:t>Иллюстративное фото. Оно не изображает заявленного клиента или бизнес Тараза.</a:t>
+            </a:r>
+          </a:p>
+        </p:txBody>
+      </p:sp>
+      <p:sp>
+        <p:nvSpPr>
+          <p:cNvPr id="4" name="Slide Number Placeholder 3"/>
+          <p:cNvSpPr>
+            <a:spLocks xmlns:a="http://schemas.openxmlformats.org/drawingml/2006/main" noGrp="1"/>
+          </p:cNvSpPr>
+          <p:nvPr>
+            <p:ph type="sldNum" idx="5"/>
+          </p:nvPr>
+        </p:nvSpPr>
+        <p:spPr/>
+        <p:txBody>
+          <a:bodyPr xmlns:a="http://schemas.openxmlformats.org/drawingml/2006/main"/>
+          <a:lstStyle xmlns:a="http://schemas.openxmlformats.org/drawingml/2006/main"/>
+          <a:p xmlns:a="http://schemas.openxmlformats.org/drawingml/2006/main"/>
+        </p:txBody>
+      </p:sp>
+    </p:spTree>
+  </p:cSld>
+  <p:clrMapOvr>
+    <a:masterClrMapping xmlns:a="http://schemas.openxmlformats.org/drawingml/2006/main"/>
+  </p:clrMapOvr>
+</p:notes>
+</file>
+
+<file path=ppt/notesSlides/notesSlide10.xml><?xml version="1.0" encoding="utf-8"?>
+<p:notes xmlns:p="http://schemas.openxmlformats.org/presentationml/2006/main">
+  <p:cSld>
+    <p:spTree>
+      <p:nvGrpSpPr>
+        <p:cNvPr id="1" name=""/>
+        <p:cNvGrpSpPr/>
+        <p:nvPr/>
+      </p:nvGrpSpPr>
+      <p:grpSpPr>
+        <a:xfrm xmlns:a="http://schemas.openxmlformats.org/drawingml/2006/main"/>
+      </p:grpSpPr>
+      <p:sp>
+        <p:nvSpPr>
+          <p:cNvPr id="2" name="Slide Image Placeholder 1"/>
+          <p:cNvSpPr>
+            <a:spLocks xmlns:a="http://schemas.openxmlformats.org/drawingml/2006/main" noGrp="1"/>
+          </p:cNvSpPr>
+          <p:nvPr>
+            <p:ph type="sldImg" idx="0"/>
+          </p:nvPr>
+        </p:nvSpPr>
+        <p:spPr/>
+      </p:sp>
+      <p:sp>
+        <p:nvSpPr>
+          <p:cNvPr id="3" name="Notes Placeholder 2"/>
+          <p:cNvSpPr>
+            <a:spLocks xmlns:a="http://schemas.openxmlformats.org/drawingml/2006/main" noGrp="1"/>
+          </p:cNvSpPr>
+          <p:nvPr>
+            <p:ph type="body" idx="1"/>
+          </p:nvPr>
+        </p:nvSpPr>
+        <p:spPr/>
+        <p:txBody>
+          <a:bodyPr xmlns:a="http://schemas.openxmlformats.org/drawingml/2006/main"/>
+          <a:lstStyle xmlns:a="http://schemas.openxmlformats.org/drawingml/2006/main"/>
+          <a:p xmlns:a="http://schemas.openxmlformats.org/drawingml/2006/main">
+            <a:r>
+              <a:t>4:25–5:00</a:t>
+            </a:r>
+          </a:p>
+          <a:p xmlns:a="http://schemas.openxmlformats.org/drawingml/2006/main">
+            <a:r>
+              <a:t>Сейчас у нас есть публичный сайт с демонстрацией, склад с сохранением данных, история операций, план закупок и контакты поставщиков с переходом в мессенджеры. Следующий шаг — три пилотные точки в Таразе. Ищем владельцев, с которыми сможем проверить сценарий на реальных приходах и продажах. Откройте демонстрацию по ссылке на экране. Спасибо! Мы команда QorAI.</a:t>
+            </a:r>
+          </a:p>
+          <a:p xmlns:a="http://schemas.openxmlformats.org/drawingml/2006/main">
+            <a:r>
+              <a:t/>
+            </a:r>
+          </a:p>
+          <a:p xmlns:a="http://schemas.openxmlformats.org/drawingml/2006/main">
+            <a:r>
+              <a:t>Проверка фактов: функциональность подтверждена локальным кодом и снимками публичного сайта 17.10.2026. Склад и поставщики на снимках учебные. Пилот и цена являются планом и гипотезой.</a:t>
             </a:r>
           </a:p>
         </p:txBody>
@@ -519,7 +636,37 @@
           <a:lstStyle xmlns:a="http://schemas.openxmlformats.org/drawingml/2006/main"/>
           <a:p xmlns:a="http://schemas.openxmlformats.org/drawingml/2006/main">
             <a:r>
-              <a:t>0:30–1:05. Проблема, которую мы проверяем: в небольшом кафе или магазине владелец часто сам отвечает и за закупки, и за учёт. Когда информация хранится в разных местах, легко пропустить срок годности или купить лишнее. Мы пока не заявляем процент потерь. Это гипотеза проблемы для интервью и пилота.</a:t>
+              <a:t>0:20–0:45</a:t>
+            </a:r>
+          </a:p>
+          <a:p xmlns:a="http://schemas.openxmlformats.org/drawingml/2006/main">
+            <a:r>
+              <a:t>В небольшой точке собственник часто сам принимает товар, работает с клиентами и договаривается с поставщиками. Остатки считают вручную, накладные остаются в переписке, а закупки делают по памяти. Избыток приводит к списаниям, дефицит мешает продажам. Мы начинаем с этой повседневной задачи. Размер потерь будем измерять вместе с первыми участниками пилота.</a:t>
+            </a:r>
+          </a:p>
+          <a:p xmlns:a="http://schemas.openxmlformats.org/drawingml/2006/main">
+            <a:r>
+              <a:t/>
+            </a:r>
+          </a:p>
+          <a:p xmlns:a="http://schemas.openxmlformats.org/drawingml/2006/main">
+            <a:r>
+              <a:t>Проверка фактов: функциональность подтверждена локальным кодом и снимками публичного сайта 17.10.2026. Склад и поставщики на снимках учебные. Пилот и цена являются планом и гипотезой.</a:t>
+            </a:r>
+          </a:p>
+          <a:p xmlns:a="http://schemas.openxmlformats.org/drawingml/2006/main">
+            <a:r>
+              <a:t>Фотография: Sean Thoman, Unsplash. https://unsplash.com/photos/fresh-lettuce-and-vegetables-displayed-at-a-market-V-j4JAw_mFk</a:t>
+            </a:r>
+          </a:p>
+          <a:p xmlns:a="http://schemas.openxmlformats.org/drawingml/2006/main">
+            <a:r>
+              <a:t>Лицензия: https://unsplash.com/license</a:t>
+            </a:r>
+          </a:p>
+          <a:p xmlns:a="http://schemas.openxmlformats.org/drawingml/2006/main">
+            <a:r>
+              <a:t>Иллюстративное фото. Оно не изображает заявленного клиента или бизнес Тараза.</a:t>
             </a:r>
           </a:p>
         </p:txBody>
@@ -589,7 +736,22 @@
           <a:lstStyle xmlns:a="http://schemas.openxmlformats.org/drawingml/2006/main"/>
           <a:p xmlns:a="http://schemas.openxmlformats.org/drawingml/2006/main">
             <a:r>
-              <a:t>1:05–1:50. Покажите живое приложение. Откройте демосклад. Нажмите Добавить закупку, введите Молоко 20 л по 450. Разберите текст, проверьте количество и цену и подтвердите приход. Без API-ключа работает разбор по шаблону. Фото и аудио направляются Gemini после подключения серверного ключа. Мы не говорим, что эта интеграция проверена живым запросом, пока ключ не подключён.</a:t>
+              <a:t>0:45–1:15</a:t>
+            </a:r>
+          </a:p>
+          <a:p xmlns:a="http://schemas.openxmlformats.org/drawingml/2006/main">
+            <a:r>
+              <a:t>Вот настоящий интерфейс нового сайта. На одном экране владелец видит стоимость запасов, позиции к закупке и товары, у которых скоро истечёт срок. Рядом находится движение товаров. Сейчас на экране учебные данные, чтобы любой человек мог открыть публичную демонстрацию без регистрации. После входа пользователь работает со своим складом, а сервер сохраняет изменения в базе данных.</a:t>
+            </a:r>
+          </a:p>
+          <a:p xmlns:a="http://schemas.openxmlformats.org/drawingml/2006/main">
+            <a:r>
+              <a:t/>
+            </a:r>
+          </a:p>
+          <a:p xmlns:a="http://schemas.openxmlformats.org/drawingml/2006/main">
+            <a:r>
+              <a:t>Проверка фактов: функциональность подтверждена локальным кодом и снимками публичного сайта 17.10.2026. Склад и поставщики на снимках учебные. Пилот и цена являются планом и гипотезой.</a:t>
             </a:r>
           </a:p>
         </p:txBody>
@@ -659,12 +821,27 @@
           <a:lstStyle xmlns:a="http://schemas.openxmlformats.org/drawingml/2006/main"/>
           <a:p xmlns:a="http://schemas.openxmlformats.org/drawingml/2006/main">
             <a:r>
-              <a:t>1:50–2:30. Перейдите в план закупок. Базовый спрос считаем по истории продаж, затем учитываем срок поставки и запас. Просроченные партии не доступны для продажи. Для выходных и погоды используем простые коэффициенты, это гипотезы MVP, а не обученная модель. При отсутствии истории ориентируемся на минимум владельца. Погода приходит из Open-Meteo, если сервис недоступен, расчёт работает без неё.</a:t>
-            </a:r>
-          </a:p>
-          <a:p xmlns:a="http://schemas.openxmlformats.org/drawingml/2006/main">
-            <a:r>
-              <a:t>Источники интеграций: https://ai.google.dev/api/generate-content и https://open-meteo.com/en/docs</a:t>
+              <a:t>1:15–1:55</a:t>
+            </a:r>
+          </a:p>
+          <a:p xmlns:a="http://schemas.openxmlformats.org/drawingml/2006/main">
+            <a:r>
+              <a:t>Приход начинается с накладной, голосового сообщения или текста. После разбора человек проверяет названия, количество, цену и срок годности. Только подтверждение владельца меняет остатки. Текст по шаблону и ручной ввод уже работают без внешнего ИИ. Для распознавания фотографий и голоса предусмотрена интеграция Gemini, ей нужен отдельный серверный ключ. На этих кадрах показан реальный разбор текста «Молоко двадцать литров по четыреста пятьдесят тенге».</a:t>
+            </a:r>
+          </a:p>
+          <a:p xmlns:a="http://schemas.openxmlformats.org/drawingml/2006/main">
+            <a:r>
+              <a:t/>
+            </a:r>
+          </a:p>
+          <a:p xmlns:a="http://schemas.openxmlformats.org/drawingml/2006/main">
+            <a:r>
+              <a:t>Проверка фактов: функциональность подтверждена локальным кодом и снимками публичного сайта 17.10.2026. Склад и поставщики на снимках учебные. Пилот и цена являются планом и гипотезой.</a:t>
+            </a:r>
+          </a:p>
+          <a:p xmlns:a="http://schemas.openxmlformats.org/drawingml/2006/main">
+            <a:r>
+              <a:t>Фото и аудио в публичном демо не отправлялись в Gemini. Серверный Gemini API key ещё требуется для реального распознавания.</a:t>
             </a:r>
           </a:p>
         </p:txBody>
@@ -734,7 +911,27 @@
           <a:lstStyle xmlns:a="http://schemas.openxmlformats.org/drawingml/2006/main"/>
           <a:p xmlns:a="http://schemas.openxmlformats.org/drawingml/2006/main">
             <a:r>
-              <a:t>2:30–3:00. Наш первый сегмент — небольшие независимые точки, которым нужен простой ежедневный учёт на телефоне. Мы не подменяем весь кассовый и бухгалтерский учёт. Следующий шаг — десять интервью и пилот в трёх точках. Это план, а не уже привлечённые клиенты. Рыночный размер нужно подтвердить отдельным исследованием.</a:t>
+              <a:t>1:55–2:30</a:t>
+            </a:r>
+          </a:p>
+          <a:p xmlns:a="http://schemas.openxmlformats.org/drawingml/2006/main">
+            <a:r>
+              <a:t>QorAI рассчитывает, сколько докупить, из истории продаж, доступных остатков и нужного покрытия. Он учитывает срок доставки, минимальный запас и пригодность партий. История может охватывать до двадцати восьми дней. Если продаж ещё нет, используем минимальный остаток. Поправки на выходные и погоду пока условные, их нужно проверить на данных пилота. Это прозрачный расчёт MVP, точность машинного обучения мы пока не заявляем.</a:t>
+            </a:r>
+          </a:p>
+          <a:p xmlns:a="http://schemas.openxmlformats.org/drawingml/2006/main">
+            <a:r>
+              <a:t/>
+            </a:r>
+          </a:p>
+          <a:p xmlns:a="http://schemas.openxmlformats.org/drawingml/2006/main">
+            <a:r>
+              <a:t>Проверка фактов: функциональность подтверждена локальным кодом и снимками публичного сайта 17.10.2026. Склад и поставщики на снимках учебные. Пилот и цена являются планом и гипотезой.</a:t>
+            </a:r>
+          </a:p>
+          <a:p xmlns:a="http://schemas.openxmlformats.org/drawingml/2006/main">
+            <a:r>
+              <a:t>Расчёт спроса в исходниках: src/lib/domain.ts. Поправки на погоду и выходные не являются обученной ML-моделью. Экономия не измерена.</a:t>
             </a:r>
           </a:p>
         </p:txBody>
@@ -804,7 +1001,22 @@
           <a:lstStyle xmlns:a="http://schemas.openxmlformats.org/drawingml/2006/main"/>
           <a:p xmlns:a="http://schemas.openxmlformats.org/drawingml/2006/main">
             <a:r>
-              <a:t>3:00–3:35. Предлагаем проверить подписку девять тысяч девятьсот тенге за точку. Тридцать платящих клиентов дали бы двести девяносто семь тысяч тенге месячной выручки. Это сценарий, не текущий доход и не прогноз. Нужно проверить стоимость обработки фото и аудио, поддержку и готовность платить. Тариф не подключён в MVP, платежей пока нет.</a:t>
+              <a:t>2:30–3:05</a:t>
+            </a:r>
+          </a:p>
+          <a:p xmlns:a="http://schemas.openxmlformats.org/drawingml/2006/main">
+            <a:r>
+              <a:t>Мы добавили поставщиков. Владелец сохраняет компанию, контактное лицо, телефон, Telegram и условия поставки. Из плана закупок он открывает черновик заказа и редактирует список под выбранного поставщика. После нажатия WhatsApp или Telegram открывается нужный мессенджер. Сообщение отправляет сам пользователь. На снимке учебный контакт, поэтому презентация не раскрывает реальные номера поставщиков.</a:t>
+            </a:r>
+          </a:p>
+          <a:p xmlns:a="http://schemas.openxmlformats.org/drawingml/2006/main">
+            <a:r>
+              <a:t/>
+            </a:r>
+          </a:p>
+          <a:p xmlns:a="http://schemas.openxmlformats.org/drawingml/2006/main">
+            <a:r>
+              <a:t>Проверка фактов: функциональность подтверждена локальным кодом и снимками публичного сайта 17.10.2026. Склад и поставщики на снимках учебные. Пилот и цена являются планом и гипотезой.</a:t>
             </a:r>
           </a:p>
         </p:txBody>
@@ -874,7 +1086,22 @@
           <a:lstStyle xmlns:a="http://schemas.openxmlformats.org/drawingml/2006/main"/>
           <a:p xmlns:a="http://schemas.openxmlformats.org/drawingml/2006/main">
             <a:r>
-              <a:t>3:35–4:20. Мы сделали интерфейс и сервер с постоянным хранением. Есть партии, сроки, приход, продажи, списания и журнал. Защита от повторных запросов и конфликтов помогает сохранять согласованные остатки. Для круглосуточной работы нужен опубликованный сервер и мониторинг, а не открытый ноутбук. Не обещаем измеренную доступность 24 на 7: нагрузочные испытания и длительное наблюдение ещё впереди.</a:t>
+              <a:t>3:05–3:25</a:t>
+            </a:r>
+          </a:p>
+          <a:p xmlns:a="http://schemas.openxmlformats.org/drawingml/2006/main">
+            <a:r>
+              <a:t>Сайт адаптирован под компьютер и телефон. На смартфоне навигация находится внизу, а товары показаны удобными карточками. PWA можно добавить на главный экран. Данные личного аккаунта хранятся на сервере. Владелец также может выгрузить учёт в CSV или JSON. На слайде реальные мобильные экраны, открытые в браузере.</a:t>
+            </a:r>
+          </a:p>
+          <a:p xmlns:a="http://schemas.openxmlformats.org/drawingml/2006/main">
+            <a:r>
+              <a:t/>
+            </a:r>
+          </a:p>
+          <a:p xmlns:a="http://schemas.openxmlformats.org/drawingml/2006/main">
+            <a:r>
+              <a:t>Проверка фактов: функциональность подтверждена локальным кодом и снимками публичного сайта 17.10.2026. Склад и поставщики на снимках учебные. Пилот и цена являются планом и гипотезой.</a:t>
             </a:r>
           </a:p>
         </p:txBody>
@@ -944,7 +1171,122 @@
           <a:lstStyle xmlns:a="http://schemas.openxmlformats.org/drawingml/2006/main"/>
           <a:p xmlns:a="http://schemas.openxmlformats.org/drawingml/2006/main">
             <a:r>
-              <a:t>4:20–5:00. Наш следующий шаг — проверить решение вместе с тремя владельцами бизнеса. Будем измерять время ввода, долю исправлений распознавания и ежедневное использование. Приз поможет оплатить пилот, работу ИИ и улучшения на основании реальных операций. Завершите демонстрацией и приглашением к вопросам. Даты мероприятия взяты из объявления организаторов, перед выступлением уточните их. Убедитесь, что проект соответствует правилу об отсутствии предыдущего призового места на конкурсах Astana Hub или региональных хабов.</a:t>
+              <a:t>3:25–4:00</a:t>
+            </a:r>
+          </a:p>
+          <a:p xmlns:a="http://schemas.openxmlformats.org/drawingml/2006/main">
+            <a:r>
+              <a:t>Первый рынок для нас — независимые кафе, кофейни и небольшие магазины Тараза. Планируем десять интервью и пилот с тремя точками. Сравним время на ввод прихода, частоту ошибок и регулярность использования плана закупок. Если участники продолжат пользоваться сервисом и увидят пользу, проверим оплату. Эти цифры описывают план, привлечённых клиентов и подтверждённой экономии у нас пока нет.</a:t>
+            </a:r>
+          </a:p>
+          <a:p xmlns:a="http://schemas.openxmlformats.org/drawingml/2006/main">
+            <a:r>
+              <a:t/>
+            </a:r>
+          </a:p>
+          <a:p xmlns:a="http://schemas.openxmlformats.org/drawingml/2006/main">
+            <a:r>
+              <a:t>Проверка фактов: функциональность подтверждена локальным кодом и снимками публичного сайта 17.10.2026. Склад и поставщики на снимках учебные. Пилот и цена являются планом и гипотезой.</a:t>
+            </a:r>
+          </a:p>
+          <a:p xmlns:a="http://schemas.openxmlformats.org/drawingml/2006/main">
+            <a:r>
+              <a:t>Фотография: Lawrence Chismorie, Unsplash. https://unsplash.com/photos/a-vendor-arranges-fresh-produce-at-an-outdoor-market-oKw2DRoL2QM</a:t>
+            </a:r>
+          </a:p>
+          <a:p xmlns:a="http://schemas.openxmlformats.org/drawingml/2006/main">
+            <a:r>
+              <a:t>Лицензия: https://unsplash.com/license</a:t>
+            </a:r>
+          </a:p>
+          <a:p xmlns:a="http://schemas.openxmlformats.org/drawingml/2006/main">
+            <a:r>
+              <a:t>Иллюстративное фото. Оно не изображает заявленного клиента или бизнес Тараза.</a:t>
+            </a:r>
+          </a:p>
+        </p:txBody>
+      </p:sp>
+      <p:sp>
+        <p:nvSpPr>
+          <p:cNvPr id="4" name="Slide Number Placeholder 3"/>
+          <p:cNvSpPr>
+            <a:spLocks xmlns:a="http://schemas.openxmlformats.org/drawingml/2006/main" noGrp="1"/>
+          </p:cNvSpPr>
+          <p:nvPr>
+            <p:ph type="sldNum" idx="5"/>
+          </p:nvPr>
+        </p:nvSpPr>
+        <p:spPr/>
+        <p:txBody>
+          <a:bodyPr xmlns:a="http://schemas.openxmlformats.org/drawingml/2006/main"/>
+          <a:lstStyle xmlns:a="http://schemas.openxmlformats.org/drawingml/2006/main"/>
+          <a:p xmlns:a="http://schemas.openxmlformats.org/drawingml/2006/main"/>
+        </p:txBody>
+      </p:sp>
+    </p:spTree>
+  </p:cSld>
+  <p:clrMapOvr>
+    <a:masterClrMapping xmlns:a="http://schemas.openxmlformats.org/drawingml/2006/main"/>
+  </p:clrMapOvr>
+</p:notes>
+</file>
+
+<file path=ppt/notesSlides/notesSlide9.xml><?xml version="1.0" encoding="utf-8"?>
+<p:notes xmlns:p="http://schemas.openxmlformats.org/presentationml/2006/main">
+  <p:cSld>
+    <p:spTree>
+      <p:nvGrpSpPr>
+        <p:cNvPr id="1" name=""/>
+        <p:cNvGrpSpPr/>
+        <p:nvPr/>
+      </p:nvGrpSpPr>
+      <p:grpSpPr>
+        <a:xfrm xmlns:a="http://schemas.openxmlformats.org/drawingml/2006/main"/>
+      </p:grpSpPr>
+      <p:sp>
+        <p:nvSpPr>
+          <p:cNvPr id="2" name="Slide Image Placeholder 1"/>
+          <p:cNvSpPr>
+            <a:spLocks xmlns:a="http://schemas.openxmlformats.org/drawingml/2006/main" noGrp="1"/>
+          </p:cNvSpPr>
+          <p:nvPr>
+            <p:ph type="sldImg" idx="0"/>
+          </p:nvPr>
+        </p:nvSpPr>
+        <p:spPr/>
+      </p:sp>
+      <p:sp>
+        <p:nvSpPr>
+          <p:cNvPr id="3" name="Notes Placeholder 2"/>
+          <p:cNvSpPr>
+            <a:spLocks xmlns:a="http://schemas.openxmlformats.org/drawingml/2006/main" noGrp="1"/>
+          </p:cNvSpPr>
+          <p:nvPr>
+            <p:ph type="body" idx="1"/>
+          </p:nvPr>
+        </p:nvSpPr>
+        <p:spPr/>
+        <p:txBody>
+          <a:bodyPr xmlns:a="http://schemas.openxmlformats.org/drawingml/2006/main"/>
+          <a:lstStyle xmlns:a="http://schemas.openxmlformats.org/drawingml/2006/main"/>
+          <a:p xmlns:a="http://schemas.openxmlformats.org/drawingml/2006/main">
+            <a:r>
+              <a:t>4:00–4:25</a:t>
+            </a:r>
+          </a:p>
+          <a:p xmlns:a="http://schemas.openxmlformats.org/drawingml/2006/main">
+            <a:r>
+              <a:t>Наша ценовая гипотеза — девять тысяч девятьсот тенге в месяц за одну торговую точку. Это ещё не действующий платный тариф. При тридцати платящих точках месячная выручка составит двести девяносто семь тысяч тенге до расходов на ИИ, хостинг и поддержку. Готовность платить и расходы на обслуживание проверим на пилоте.</a:t>
+            </a:r>
+          </a:p>
+          <a:p xmlns:a="http://schemas.openxmlformats.org/drawingml/2006/main">
+            <a:r>
+              <a:t/>
+            </a:r>
+          </a:p>
+          <a:p xmlns:a="http://schemas.openxmlformats.org/drawingml/2006/main">
+            <a:r>
+              <a:t>Проверка фактов: функциональность подтверждена локальным кодом и снимками публичного сайта 17.10.2026. Склад и поставщики на снимках учебные. Пилот и цена являются планом и гипотезой.</a:t>
             </a:r>
           </a:p>
         </p:txBody>
@@ -991,7 +1333,7 @@
           <p:cNvPr id="3" name="Title">
             <a:extLst xmlns:a="http://schemas.openxmlformats.org/drawingml/2006/main">
               <a:ext uri="{FF2B5EF4-FFF2-40B4-BE49-F238E27FC236}">
-                <a16:creationId xmlns:a16="http://schemas.microsoft.com/office/drawing/2014/main" id="{DF60F6F5-49F4-47E1-A6F1-A868CEA1922B}"/>
+                <a16:creationId xmlns:a16="http://schemas.microsoft.com/office/drawing/2014/main" id="{85FAF772-43C3-40EC-973F-D5BCE1CF7897}"/>
               </a:ext>
             </a:extLst>
           </p:cNvPr>
@@ -1148,7 +1490,7 @@
           <p:cNvPr id="2" name="Subtitle">
             <a:extLst xmlns:a="http://schemas.openxmlformats.org/drawingml/2006/main">
               <a:ext uri="{FF2B5EF4-FFF2-40B4-BE49-F238E27FC236}">
-                <a16:creationId xmlns:a16="http://schemas.microsoft.com/office/drawing/2014/main" id="{5EB15CDC-8C6D-4AF1-823C-F07DC4031B80}"/>
+                <a16:creationId xmlns:a16="http://schemas.microsoft.com/office/drawing/2014/main" id="{664B1038-12CE-4A07-8020-82D7E99F623D}"/>
               </a:ext>
             </a:extLst>
           </p:cNvPr>
@@ -1322,7 +1664,7 @@
           <p:cNvPr id="2" name="Section title">
             <a:extLst xmlns:a="http://schemas.openxmlformats.org/drawingml/2006/main">
               <a:ext uri="{FF2B5EF4-FFF2-40B4-BE49-F238E27FC236}">
-                <a16:creationId xmlns:a16="http://schemas.microsoft.com/office/drawing/2014/main" id="{CCB8E0A8-D762-41C4-A27D-71BF7C0B98CC}"/>
+                <a16:creationId xmlns:a16="http://schemas.microsoft.com/office/drawing/2014/main" id="{23AAC2A1-6519-4EE8-9661-A8848844EB38}"/>
               </a:ext>
             </a:extLst>
           </p:cNvPr>
@@ -1496,7 +1838,7 @@
           <p:cNvPr id="3" name="Title">
             <a:extLst xmlns:a="http://schemas.openxmlformats.org/drawingml/2006/main">
               <a:ext uri="{FF2B5EF4-FFF2-40B4-BE49-F238E27FC236}">
-                <a16:creationId xmlns:a16="http://schemas.microsoft.com/office/drawing/2014/main" id="{26CE92D6-61BA-40F6-8774-08DFB5CDAF41}"/>
+                <a16:creationId xmlns:a16="http://schemas.microsoft.com/office/drawing/2014/main" id="{B8A19BC0-9B5E-4944-8E30-AAD8559EBAFC}"/>
               </a:ext>
             </a:extLst>
           </p:cNvPr>
@@ -1653,7 +1995,7 @@
           <p:cNvPr id="2" name="Body">
             <a:extLst xmlns:a="http://schemas.openxmlformats.org/drawingml/2006/main">
               <a:ext uri="{FF2B5EF4-FFF2-40B4-BE49-F238E27FC236}">
-                <a16:creationId xmlns:a16="http://schemas.microsoft.com/office/drawing/2014/main" id="{3DD0E498-633A-48EA-BB3D-91A4A4299821}"/>
+                <a16:creationId xmlns:a16="http://schemas.microsoft.com/office/drawing/2014/main" id="{2FCB1E4D-855A-46DB-BB63-A8D36B46D353}"/>
               </a:ext>
             </a:extLst>
           </p:cNvPr>
@@ -1827,7 +2169,7 @@
           <p:cNvPr id="4" name="Title">
             <a:extLst xmlns:a="http://schemas.openxmlformats.org/drawingml/2006/main">
               <a:ext uri="{FF2B5EF4-FFF2-40B4-BE49-F238E27FC236}">
-                <a16:creationId xmlns:a16="http://schemas.microsoft.com/office/drawing/2014/main" id="{F816AFE4-8D4C-4213-80FC-A438804D888D}"/>
+                <a16:creationId xmlns:a16="http://schemas.microsoft.com/office/drawing/2014/main" id="{4F8ADF0A-D189-4DC5-A612-1BBB4DB5F495}"/>
               </a:ext>
             </a:extLst>
           </p:cNvPr>
@@ -1984,7 +2326,7 @@
           <p:cNvPr id="2" name="Left column">
             <a:extLst xmlns:a="http://schemas.openxmlformats.org/drawingml/2006/main">
               <a:ext uri="{FF2B5EF4-FFF2-40B4-BE49-F238E27FC236}">
-                <a16:creationId xmlns:a16="http://schemas.microsoft.com/office/drawing/2014/main" id="{28A6406B-FA88-4434-A69F-8D07326E9DD1}"/>
+                <a16:creationId xmlns:a16="http://schemas.microsoft.com/office/drawing/2014/main" id="{30F13DA3-8AA7-45E9-814F-492240292F6D}"/>
               </a:ext>
             </a:extLst>
           </p:cNvPr>
@@ -2141,7 +2483,7 @@
           <p:cNvPr id="3" name="Right column">
             <a:extLst xmlns:a="http://schemas.openxmlformats.org/drawingml/2006/main">
               <a:ext uri="{FF2B5EF4-FFF2-40B4-BE49-F238E27FC236}">
-                <a16:creationId xmlns:a16="http://schemas.microsoft.com/office/drawing/2014/main" id="{A6C6855C-C9BD-4432-8C29-02189A69E9E9}"/>
+                <a16:creationId xmlns:a16="http://schemas.microsoft.com/office/drawing/2014/main" id="{BE76B2E9-9C27-4E04-9069-0D24E286BA29}"/>
               </a:ext>
             </a:extLst>
           </p:cNvPr>
@@ -2315,7 +2657,7 @@
           <p:cNvPr id="3" name="Title">
             <a:extLst xmlns:a="http://schemas.openxmlformats.org/drawingml/2006/main">
               <a:ext uri="{FF2B5EF4-FFF2-40B4-BE49-F238E27FC236}">
-                <a16:creationId xmlns:a16="http://schemas.microsoft.com/office/drawing/2014/main" id="{F5B3707A-1A23-47F2-8792-99CB496547EA}"/>
+                <a16:creationId xmlns:a16="http://schemas.microsoft.com/office/drawing/2014/main" id="{90597E9A-D85A-4D9B-822E-AC7EB4D7770A}"/>
               </a:ext>
             </a:extLst>
           </p:cNvPr>
@@ -2472,7 +2814,7 @@
           <p:cNvPr id="2" name="Left column">
             <a:extLst xmlns:a="http://schemas.openxmlformats.org/drawingml/2006/main">
               <a:ext uri="{FF2B5EF4-FFF2-40B4-BE49-F238E27FC236}">
-                <a16:creationId xmlns:a16="http://schemas.microsoft.com/office/drawing/2014/main" id="{92C17224-4214-4BCE-8964-F4EDF200CD67}"/>
+                <a16:creationId xmlns:a16="http://schemas.microsoft.com/office/drawing/2014/main" id="{5809051F-19BF-48CB-9F63-712799CFC338}"/>
               </a:ext>
             </a:extLst>
           </p:cNvPr>
@@ -2667,12 +3009,12 @@
   </p:cSld>
   <p:clrMap bg1="lt1" tx1="dk1" bg2="lt2" tx2="dk2" accent1="accent1" accent2="accent2" accent3="accent3" accent4="accent4" accent5="accent5" accent6="accent6" hlink="hlink" folHlink="folHlink"/>
   <p:sldLayoutIdLst>
-    <p:sldLayoutId xmlns:r="http://schemas.openxmlformats.org/officeDocument/2006/relationships" id="2147483649" r:id="R27220b79e7c84e02"/>
-    <p:sldLayoutId xmlns:r="http://schemas.openxmlformats.org/officeDocument/2006/relationships" id="2147483650" r:id="R306cb505cb0c459c"/>
-    <p:sldLayoutId xmlns:r="http://schemas.openxmlformats.org/officeDocument/2006/relationships" id="2147483651" r:id="Rae30d21dbf334054"/>
-    <p:sldLayoutId xmlns:r="http://schemas.openxmlformats.org/officeDocument/2006/relationships" id="2147483652" r:id="Ra1033abb2f3b41ac"/>
-    <p:sldLayoutId xmlns:r="http://schemas.openxmlformats.org/officeDocument/2006/relationships" id="2147483653" r:id="R4887c3fb67a14f8f"/>
-    <p:sldLayoutId xmlns:r="http://schemas.openxmlformats.org/officeDocument/2006/relationships" id="2147483654" r:id="R1d4dd4f3e37c4957"/>
+    <p:sldLayoutId xmlns:r="http://schemas.openxmlformats.org/officeDocument/2006/relationships" id="2147483649" r:id="R84ba9c0873704f20"/>
+    <p:sldLayoutId xmlns:r="http://schemas.openxmlformats.org/officeDocument/2006/relationships" id="2147483650" r:id="R0cfa4a4f32e34cd0"/>
+    <p:sldLayoutId xmlns:r="http://schemas.openxmlformats.org/officeDocument/2006/relationships" id="2147483651" r:id="Rdba0e7151386471f"/>
+    <p:sldLayoutId xmlns:r="http://schemas.openxmlformats.org/officeDocument/2006/relationships" id="2147483652" r:id="Rb8a7be30f6da47b2"/>
+    <p:sldLayoutId xmlns:r="http://schemas.openxmlformats.org/officeDocument/2006/relationships" id="2147483653" r:id="R8da053bd8b03461c"/>
+    <p:sldLayoutId xmlns:r="http://schemas.openxmlformats.org/officeDocument/2006/relationships" id="2147483654" r:id="R755c41e450734435"/>
   </p:sldLayoutIdLst>
   <p:txStyles>
     <p:titleStyle>
@@ -3205,7 +3547,7 @@
     <p:bg>
       <p:bgPr>
         <a:solidFill xmlns:a="http://schemas.openxmlformats.org/drawingml/2006/main">
-          <a:srgbClr val="142E25"/>
+          <a:srgbClr val="173F33"/>
         </a:solidFill>
       </p:bgPr>
     </p:bg>
@@ -3218,24 +3560,53 @@
       <p:grpSpPr>
         <a:xfrm xmlns:a="http://schemas.openxmlformats.org/drawingml/2006/main"/>
       </p:grpSpPr>
-      <p:sp>
-        <p:nvSpPr>
-          <p:cNvPr id="6" name="">
+      <p:pic>
+        <p:nvPicPr>
+          <p:cNvPr id="7" name="">
             <a:extLst xmlns:a="http://schemas.openxmlformats.org/drawingml/2006/main">
               <a:ext uri="{FF2B5EF4-FFF2-40B4-BE49-F238E27FC236}">
-                <a16:creationId xmlns:a16="http://schemas.microsoft.com/office/drawing/2014/main" id="{B5818CF2-39CD-4F23-8770-5737A89C8F5C}"/>
+                <a16:creationId xmlns:a16="http://schemas.microsoft.com/office/drawing/2014/main" id="{1922F5AB-5BC9-4156-8AAE-4F02DE7FCCA1}"/>
               </a:ext>
             </a:extLst>
           </p:cNvPr>
-          <p:cNvSpPr>
-            <a:spLocks xmlns:a="http://schemas.openxmlformats.org/drawingml/2006/main" noGrp="1"/>
-          </p:cNvSpPr>
+          <p:cNvPicPr>
+            <a:picLocks xmlns:a="http://schemas.openxmlformats.org/drawingml/2006/main" noChangeAspect="1"/>
+          </p:cNvPicPr>
           <p:nvPr/>
-        </p:nvSpPr>
+        </p:nvPicPr>
+        <p:blipFill>
+          <a:blip xmlns:r="http://schemas.openxmlformats.org/officeDocument/2006/relationships" xmlns:a="http://schemas.openxmlformats.org/drawingml/2006/main" r:embed="Rd9e41e2e87ed43a9"/>
+          <a:srcRect xmlns:a="http://schemas.openxmlformats.org/drawingml/2006/main" l="30000" t="0" r="5000" b="0"/>
+          <a:stretch xmlns:a="http://schemas.openxmlformats.org/drawingml/2006/main"/>
+        </p:blipFill>
         <p:spPr>
           <a:xfrm xmlns:a="http://schemas.openxmlformats.org/drawingml/2006/main">
-            <a:off x="685800" y="361950"/>
-            <a:ext cx="4762500" cy="381000"/>
+            <a:off x="5848350" y="0"/>
+            <a:ext cx="6343650" cy="6858000"/>
+          </a:xfrm>
+          <a:prstGeom xmlns:a="http://schemas.openxmlformats.org/drawingml/2006/main" prst="rect">
+            <a:avLst/>
+          </a:prstGeom>
+        </p:spPr>
+      </p:pic>
+      <p:sp>
+        <p:nvSpPr>
+          <p:cNvPr id="2" name="">
+            <a:extLst xmlns:a="http://schemas.openxmlformats.org/drawingml/2006/main">
+              <a:ext uri="{FF2B5EF4-FFF2-40B4-BE49-F238E27FC236}">
+                <a16:creationId xmlns:a16="http://schemas.microsoft.com/office/drawing/2014/main" id="{1CEE1F10-9BE2-4649-BB53-65F435DE8911}"/>
+              </a:ext>
+            </a:extLst>
+          </p:cNvPr>
+          <p:cNvSpPr>
+            <a:spLocks xmlns:a="http://schemas.openxmlformats.org/drawingml/2006/main" noGrp="1"/>
+          </p:cNvSpPr>
+          <p:nvPr/>
+        </p:nvSpPr>
+        <p:spPr>
+          <a:xfrm xmlns:a="http://schemas.openxmlformats.org/drawingml/2006/main">
+            <a:off x="590550" y="447675"/>
+            <a:ext cx="4286250" cy="285750"/>
           </a:xfrm>
           <a:prstGeom xmlns:a="http://schemas.openxmlformats.org/drawingml/2006/main" prst="rect">
             <a:avLst/>
@@ -3249,9 +3620,9 @@
           <a:bodyPr xmlns:a="http://schemas.openxmlformats.org/drawingml/2006/main"/>
           <a:lstStyle xmlns:a="http://schemas.openxmlformats.org/drawingml/2006/main">
             <a:defPPr>
-              <a:defRPr sz="1650" b="1">
-                <a:solidFill>
-                  <a:srgbClr val="A5C99A"/>
+              <a:defRPr sz="1500" b="1">
+                <a:solidFill>
+                  <a:srgbClr val="D5E8B6"/>
                 </a:solidFill>
                 <a:latin typeface="Liberation Sans"/>
                 <a:ea typeface="Liberation Sans"/>
@@ -3261,35 +3632,35 @@
           </a:lstStyle>
           <a:p xmlns:a="http://schemas.openxmlformats.org/drawingml/2006/main">
             <a:pPr>
-              <a:defRPr sz="1650" b="1">
-                <a:solidFill>
-                  <a:srgbClr val="A5C99A"/>
-                </a:solidFill>
-                <a:latin typeface="Liberation Sans"/>
-                <a:ea typeface="Liberation Sans"/>
-                <a:cs typeface="Liberation Sans"/>
-              </a:defRPr>
-            </a:pPr>
-            <a:r>
-              <a:rPr sz="1650" b="1">
-                <a:solidFill>
-                  <a:srgbClr val="A5C99A"/>
-                </a:solidFill>
-                <a:latin typeface="Liberation Sans"/>
-                <a:ea typeface="Liberation Sans"/>
-                <a:cs typeface="Liberation Sans"/>
-              </a:rPr>
-              <a:t>QorAI</a:t>
-            </a:r>
-          </a:p>
-        </p:txBody>
-      </p:sp>
-      <p:sp>
-        <p:nvSpPr>
-          <p:cNvPr id="2" name="">
+              <a:defRPr sz="1500" b="1">
+                <a:solidFill>
+                  <a:srgbClr val="D5E8B6"/>
+                </a:solidFill>
+                <a:latin typeface="Liberation Sans"/>
+                <a:ea typeface="Liberation Sans"/>
+                <a:cs typeface="Liberation Sans"/>
+              </a:defRPr>
+            </a:pPr>
+            <a:r>
+              <a:rPr sz="1500" b="1">
+                <a:solidFill>
+                  <a:srgbClr val="D5E8B6"/>
+                </a:solidFill>
+                <a:latin typeface="Liberation Sans"/>
+                <a:ea typeface="Liberation Sans"/>
+                <a:cs typeface="Liberation Sans"/>
+              </a:rPr>
+              <a:t>КОМАНДА QORAI</a:t>
+            </a:r>
+          </a:p>
+        </p:txBody>
+      </p:sp>
+      <p:sp>
+        <p:nvSpPr>
+          <p:cNvPr id="3" name="">
             <a:extLst xmlns:a="http://schemas.openxmlformats.org/drawingml/2006/main">
               <a:ext uri="{FF2B5EF4-FFF2-40B4-BE49-F238E27FC236}">
-                <a16:creationId xmlns:a16="http://schemas.microsoft.com/office/drawing/2014/main" id="{194C1AC9-C466-4CB5-A1CC-1F009D3FD0C9}"/>
+                <a16:creationId xmlns:a16="http://schemas.microsoft.com/office/drawing/2014/main" id="{23A78FEF-0C62-4608-B2E8-19359B5BDBCE}"/>
               </a:ext>
             </a:extLst>
           </p:cNvPr>
@@ -3300,8 +3671,8 @@
         </p:nvSpPr>
         <p:spPr>
           <a:xfrm xmlns:a="http://schemas.openxmlformats.org/drawingml/2006/main">
-            <a:off x="10810875" y="381000"/>
-            <a:ext cx="666750" cy="333375"/>
+            <a:off x="514350" y="1476375"/>
+            <a:ext cx="5286375" cy="1428750"/>
           </a:xfrm>
           <a:prstGeom xmlns:a="http://schemas.openxmlformats.org/drawingml/2006/main" prst="rect">
             <a:avLst/>
@@ -3315,9 +3686,9 @@
           <a:bodyPr xmlns:a="http://schemas.openxmlformats.org/drawingml/2006/main"/>
           <a:lstStyle xmlns:a="http://schemas.openxmlformats.org/drawingml/2006/main">
             <a:defPPr>
-              <a:defRPr sz="1350" b="0">
-                <a:solidFill>
-                  <a:srgbClr val="A5C99A"/>
+              <a:defRPr sz="8400" b="1">
+                <a:solidFill>
+                  <a:srgbClr val="FFFFFF"/>
                 </a:solidFill>
                 <a:latin typeface="Liberation Sans"/>
                 <a:ea typeface="Liberation Sans"/>
@@ -3327,35 +3698,35 @@
           </a:lstStyle>
           <a:p xmlns:a="http://schemas.openxmlformats.org/drawingml/2006/main">
             <a:pPr>
-              <a:defRPr sz="1350" b="0">
-                <a:solidFill>
-                  <a:srgbClr val="A5C99A"/>
-                </a:solidFill>
-                <a:latin typeface="Liberation Sans"/>
-                <a:ea typeface="Liberation Sans"/>
-                <a:cs typeface="Liberation Sans"/>
-              </a:defRPr>
-            </a:pPr>
-            <a:r>
-              <a:rPr sz="1350" b="0">
-                <a:solidFill>
-                  <a:srgbClr val="A5C99A"/>
-                </a:solidFill>
-                <a:latin typeface="Liberation Sans"/>
-                <a:ea typeface="Liberation Sans"/>
-                <a:cs typeface="Liberation Sans"/>
-              </a:rPr>
-              <a:t>01</a:t>
-            </a:r>
-          </a:p>
-        </p:txBody>
-      </p:sp>
-      <p:sp>
-        <p:nvSpPr>
-          <p:cNvPr id="3" name="">
+              <a:defRPr sz="8400" b="1">
+                <a:solidFill>
+                  <a:srgbClr val="FFFFFF"/>
+                </a:solidFill>
+                <a:latin typeface="Liberation Sans"/>
+                <a:ea typeface="Liberation Sans"/>
+                <a:cs typeface="Liberation Sans"/>
+              </a:defRPr>
+            </a:pPr>
+            <a:r>
+              <a:rPr sz="8400" b="1">
+                <a:solidFill>
+                  <a:srgbClr val="FFFFFF"/>
+                </a:solidFill>
+                <a:latin typeface="Liberation Sans"/>
+                <a:ea typeface="Liberation Sans"/>
+                <a:cs typeface="Liberation Sans"/>
+              </a:rPr>
+              <a:t>QorAI</a:t>
+            </a:r>
+          </a:p>
+        </p:txBody>
+      </p:sp>
+      <p:sp>
+        <p:nvSpPr>
+          <p:cNvPr id="4" name="">
             <a:extLst xmlns:a="http://schemas.openxmlformats.org/drawingml/2006/main">
               <a:ext uri="{FF2B5EF4-FFF2-40B4-BE49-F238E27FC236}">
-                <a16:creationId xmlns:a16="http://schemas.microsoft.com/office/drawing/2014/main" id="{D7ACC82E-E398-4620-A834-8004158F21AF}"/>
+                <a16:creationId xmlns:a16="http://schemas.microsoft.com/office/drawing/2014/main" id="{1C751980-FA12-4851-90B8-35C14123787B}"/>
               </a:ext>
             </a:extLst>
           </p:cNvPr>
@@ -3366,8 +3737,8 @@
         </p:nvSpPr>
         <p:spPr>
           <a:xfrm xmlns:a="http://schemas.openxmlformats.org/drawingml/2006/main">
-            <a:off x="685800" y="1314450"/>
-            <a:ext cx="10477500" cy="1238250"/>
+            <a:off x="590550" y="3171825"/>
+            <a:ext cx="4857750" cy="1095375"/>
           </a:xfrm>
           <a:prstGeom xmlns:a="http://schemas.openxmlformats.org/drawingml/2006/main" prst="rect">
             <a:avLst/>
@@ -3381,9 +3752,9 @@
           <a:bodyPr xmlns:a="http://schemas.openxmlformats.org/drawingml/2006/main"/>
           <a:lstStyle xmlns:a="http://schemas.openxmlformats.org/drawingml/2006/main">
             <a:defPPr>
-              <a:defRPr sz="8100" b="1">
-                <a:solidFill>
-                  <a:srgbClr val="E5EEDF"/>
+              <a:defRPr sz="2925" b="0">
+                <a:solidFill>
+                  <a:srgbClr val="D5E8B6"/>
                 </a:solidFill>
                 <a:latin typeface="Liberation Sans"/>
                 <a:ea typeface="Liberation Sans"/>
@@ -3393,35 +3764,58 @@
           </a:lstStyle>
           <a:p xmlns:a="http://schemas.openxmlformats.org/drawingml/2006/main">
             <a:pPr>
-              <a:defRPr sz="8100" b="1">
-                <a:solidFill>
-                  <a:srgbClr val="E5EEDF"/>
-                </a:solidFill>
-                <a:latin typeface="Liberation Sans"/>
-                <a:ea typeface="Liberation Sans"/>
-                <a:cs typeface="Liberation Sans"/>
-              </a:defRPr>
-            </a:pPr>
-            <a:r>
-              <a:rPr sz="8100" b="1">
-                <a:solidFill>
-                  <a:srgbClr val="E5EEDF"/>
-                </a:solidFill>
-                <a:latin typeface="Liberation Sans"/>
-                <a:ea typeface="Liberation Sans"/>
-                <a:cs typeface="Liberation Sans"/>
-              </a:rPr>
-              <a:t>QorAI</a:t>
-            </a:r>
-          </a:p>
-        </p:txBody>
-      </p:sp>
-      <p:sp>
-        <p:nvSpPr>
-          <p:cNvPr id="4" name="">
+              <a:defRPr sz="2925" b="0">
+                <a:solidFill>
+                  <a:srgbClr val="D5E8B6"/>
+                </a:solidFill>
+                <a:latin typeface="Liberation Sans"/>
+                <a:ea typeface="Liberation Sans"/>
+                <a:cs typeface="Liberation Sans"/>
+              </a:defRPr>
+            </a:pPr>
+            <a:r>
+              <a:rPr sz="2925" b="0">
+                <a:solidFill>
+                  <a:srgbClr val="D5E8B6"/>
+                </a:solidFill>
+                <a:latin typeface="Liberation Sans"/>
+                <a:ea typeface="Liberation Sans"/>
+                <a:cs typeface="Liberation Sans"/>
+              </a:rPr>
+              <a:t>Запасы под контролем.</a:t>
+            </a:r>
+          </a:p>
+          <a:p xmlns:a="http://schemas.openxmlformats.org/drawingml/2006/main">
+            <a:pPr>
+              <a:defRPr sz="2925" b="0">
+                <a:solidFill>
+                  <a:srgbClr val="D5E8B6"/>
+                </a:solidFill>
+                <a:latin typeface="Liberation Sans"/>
+                <a:ea typeface="Liberation Sans"/>
+                <a:cs typeface="Liberation Sans"/>
+              </a:defRPr>
+            </a:pPr>
+            <a:r>
+              <a:rPr sz="2925" b="0">
+                <a:solidFill>
+                  <a:srgbClr val="D5E8B6"/>
+                </a:solidFill>
+                <a:latin typeface="Liberation Sans"/>
+                <a:ea typeface="Liberation Sans"/>
+                <a:cs typeface="Liberation Sans"/>
+              </a:rPr>
+              <a:t>Закупки без хаоса.</a:t>
+            </a:r>
+          </a:p>
+        </p:txBody>
+      </p:sp>
+      <p:sp>
+        <p:nvSpPr>
+          <p:cNvPr id="5" name="">
             <a:extLst xmlns:a="http://schemas.openxmlformats.org/drawingml/2006/main">
               <a:ext uri="{FF2B5EF4-FFF2-40B4-BE49-F238E27FC236}">
-                <a16:creationId xmlns:a16="http://schemas.microsoft.com/office/drawing/2014/main" id="{4259CC3B-D2CF-45AF-A53C-42692F86BF54}"/>
+                <a16:creationId xmlns:a16="http://schemas.microsoft.com/office/drawing/2014/main" id="{4F5156B1-F924-4B4B-AA6C-8153D4FD4D2C}"/>
               </a:ext>
             </a:extLst>
           </p:cNvPr>
@@ -3432,8 +3826,8 @@
         </p:nvSpPr>
         <p:spPr>
           <a:xfrm xmlns:a="http://schemas.openxmlformats.org/drawingml/2006/main">
-            <a:off x="723900" y="2876550"/>
-            <a:ext cx="10572750" cy="1524000"/>
+            <a:off x="609600" y="5029200"/>
+            <a:ext cx="4572000" cy="742950"/>
           </a:xfrm>
           <a:prstGeom xmlns:a="http://schemas.openxmlformats.org/drawingml/2006/main" prst="rect">
             <a:avLst/>
@@ -3447,9 +3841,9 @@
           <a:bodyPr xmlns:a="http://schemas.openxmlformats.org/drawingml/2006/main"/>
           <a:lstStyle xmlns:a="http://schemas.openxmlformats.org/drawingml/2006/main">
             <a:defPPr>
-              <a:defRPr sz="3600" b="0">
-                <a:solidFill>
-                  <a:srgbClr val="A5C99A"/>
+              <a:defRPr sz="2025" b="0">
+                <a:solidFill>
+                  <a:srgbClr val="FFFFFF"/>
                 </a:solidFill>
                 <a:latin typeface="Liberation Sans"/>
                 <a:ea typeface="Liberation Sans"/>
@@ -3459,58 +3853,58 @@
           </a:lstStyle>
           <a:p xmlns:a="http://schemas.openxmlformats.org/drawingml/2006/main">
             <a:pPr>
-              <a:defRPr sz="3600" b="0">
-                <a:solidFill>
-                  <a:srgbClr val="A5C99A"/>
-                </a:solidFill>
-                <a:latin typeface="Liberation Sans"/>
-                <a:ea typeface="Liberation Sans"/>
-                <a:cs typeface="Liberation Sans"/>
-              </a:defRPr>
-            </a:pPr>
-            <a:r>
-              <a:rPr sz="3600" b="0">
-                <a:solidFill>
-                  <a:srgbClr val="A5C99A"/>
-                </a:solidFill>
-                <a:latin typeface="Liberation Sans"/>
-                <a:ea typeface="Liberation Sans"/>
-                <a:cs typeface="Liberation Sans"/>
-              </a:rPr>
-              <a:t>Запасы под контролем.</a:t>
-            </a:r>
-          </a:p>
-          <a:p xmlns:a="http://schemas.openxmlformats.org/drawingml/2006/main">
-            <a:pPr>
-              <a:defRPr sz="3600" b="0">
-                <a:solidFill>
-                  <a:srgbClr val="A5C99A"/>
-                </a:solidFill>
-                <a:latin typeface="Liberation Sans"/>
-                <a:ea typeface="Liberation Sans"/>
-                <a:cs typeface="Liberation Sans"/>
-              </a:defRPr>
-            </a:pPr>
-            <a:r>
-              <a:rPr sz="3600" b="0">
-                <a:solidFill>
-                  <a:srgbClr val="A5C99A"/>
-                </a:solidFill>
-                <a:latin typeface="Liberation Sans"/>
-                <a:ea typeface="Liberation Sans"/>
-                <a:cs typeface="Liberation Sans"/>
-              </a:rPr>
-              <a:t>Больше времени на своё дело.</a:t>
-            </a:r>
-          </a:p>
-        </p:txBody>
-      </p:sp>
-      <p:sp>
-        <p:nvSpPr>
-          <p:cNvPr id="5" name="">
+              <a:defRPr sz="2025" b="0">
+                <a:solidFill>
+                  <a:srgbClr val="FFFFFF"/>
+                </a:solidFill>
+                <a:latin typeface="Liberation Sans"/>
+                <a:ea typeface="Liberation Sans"/>
+                <a:cs typeface="Liberation Sans"/>
+              </a:defRPr>
+            </a:pPr>
+            <a:r>
+              <a:rPr sz="2025" b="0">
+                <a:solidFill>
+                  <a:srgbClr val="FFFFFF"/>
+                </a:solidFill>
+                <a:latin typeface="Liberation Sans"/>
+                <a:ea typeface="Liberation Sans"/>
+                <a:cs typeface="Liberation Sans"/>
+              </a:rPr>
+              <a:t>Помощник для кафе</a:t>
+            </a:r>
+          </a:p>
+          <a:p xmlns:a="http://schemas.openxmlformats.org/drawingml/2006/main">
+            <a:pPr>
+              <a:defRPr sz="2025" b="0">
+                <a:solidFill>
+                  <a:srgbClr val="FFFFFF"/>
+                </a:solidFill>
+                <a:latin typeface="Liberation Sans"/>
+                <a:ea typeface="Liberation Sans"/>
+                <a:cs typeface="Liberation Sans"/>
+              </a:defRPr>
+            </a:pPr>
+            <a:r>
+              <a:rPr sz="2025" b="0">
+                <a:solidFill>
+                  <a:srgbClr val="FFFFFF"/>
+                </a:solidFill>
+                <a:latin typeface="Liberation Sans"/>
+                <a:ea typeface="Liberation Sans"/>
+                <a:cs typeface="Liberation Sans"/>
+              </a:rPr>
+              <a:t>и магазинов Тараза</a:t>
+            </a:r>
+          </a:p>
+        </p:txBody>
+      </p:sp>
+      <p:sp>
+        <p:nvSpPr>
+          <p:cNvPr id="6" name="">
             <a:extLst xmlns:a="http://schemas.openxmlformats.org/drawingml/2006/main">
               <a:ext uri="{FF2B5EF4-FFF2-40B4-BE49-F238E27FC236}">
-                <a16:creationId xmlns:a16="http://schemas.microsoft.com/office/drawing/2014/main" id="{8794386D-CFD8-4EEE-A5F9-19CD9D235EC4}"/>
+                <a16:creationId xmlns:a16="http://schemas.microsoft.com/office/drawing/2014/main" id="{82C4D9D4-3013-42DE-8AC4-946542AF0CAF}"/>
               </a:ext>
             </a:extLst>
           </p:cNvPr>
@@ -3521,8 +3915,8 @@
         </p:nvSpPr>
         <p:spPr>
           <a:xfrm xmlns:a="http://schemas.openxmlformats.org/drawingml/2006/main">
-            <a:off x="733425" y="5048250"/>
-            <a:ext cx="10477500" cy="666750"/>
+            <a:off x="609600" y="6324600"/>
+            <a:ext cx="4667250" cy="285750"/>
           </a:xfrm>
           <a:prstGeom xmlns:a="http://schemas.openxmlformats.org/drawingml/2006/main" prst="rect">
             <a:avLst/>
@@ -3536,9 +3930,9 @@
           <a:bodyPr xmlns:a="http://schemas.openxmlformats.org/drawingml/2006/main"/>
           <a:lstStyle xmlns:a="http://schemas.openxmlformats.org/drawingml/2006/main">
             <a:defPPr>
-              <a:defRPr sz="1875" b="0">
-                <a:solidFill>
-                  <a:srgbClr val="E5EEDF"/>
+              <a:defRPr sz="1350" b="0">
+                <a:solidFill>
+                  <a:srgbClr val="D5E8B6"/>
                 </a:solidFill>
                 <a:latin typeface="Liberation Sans"/>
                 <a:ea typeface="Liberation Sans"/>
@@ -3548,25 +3942,25 @@
           </a:lstStyle>
           <a:p xmlns:a="http://schemas.openxmlformats.org/drawingml/2006/main">
             <a:pPr>
-              <a:defRPr sz="1875" b="0">
-                <a:solidFill>
-                  <a:srgbClr val="E5EEDF"/>
-                </a:solidFill>
-                <a:latin typeface="Liberation Sans"/>
-                <a:ea typeface="Liberation Sans"/>
-                <a:cs typeface="Liberation Sans"/>
-              </a:defRPr>
-            </a:pPr>
-            <a:r>
-              <a:rPr sz="1875" b="0">
-                <a:solidFill>
-                  <a:srgbClr val="E5EEDF"/>
-                </a:solidFill>
-                <a:latin typeface="Liberation Sans"/>
-                <a:ea typeface="Liberation Sans"/>
-                <a:cs typeface="Liberation Sans"/>
-              </a:rPr>
-              <a:t>Умный помощник для кафе и магазинов Тараза</a:t>
+              <a:defRPr sz="1350" b="0">
+                <a:solidFill>
+                  <a:srgbClr val="D5E8B6"/>
+                </a:solidFill>
+                <a:latin typeface="Liberation Sans"/>
+                <a:ea typeface="Liberation Sans"/>
+                <a:cs typeface="Liberation Sans"/>
+              </a:defRPr>
+            </a:pPr>
+            <a:r>
+              <a:rPr sz="1350" b="0">
+                <a:solidFill>
+                  <a:srgbClr val="D5E8B6"/>
+                </a:solidFill>
+                <a:latin typeface="Liberation Sans"/>
+                <a:ea typeface="Liberation Sans"/>
+                <a:cs typeface="Liberation Sans"/>
+              </a:rPr>
+              <a:t>IDEA BATTLE 2026</a:t>
             </a:r>
           </a:p>
         </p:txBody>
@@ -3574,7 +3968,530 @@
     </p:spTree>
     <p:extLst>
       <p:ext uri="{BB962C8B-B14F-4D97-AF65-F5344CB8AC3E}">
-        <p14:creationId xmlns:p14="http://schemas.microsoft.com/office/powerpoint/2010/main" val="1210736500"/>
+        <p14:creationId xmlns:p14="http://schemas.microsoft.com/office/powerpoint/2010/main" val="384529866"/>
+      </p:ext>
+    </p:extLst>
+  </p:cSld>
+</p:sld>
+</file>
+
+<file path=ppt/slides/slide10.xml><?xml version="1.0" encoding="utf-8"?>
+<p:sld xmlns:p="http://schemas.openxmlformats.org/presentationml/2006/main">
+  <p:cSld>
+    <p:bg>
+      <p:bgPr>
+        <a:solidFill xmlns:a="http://schemas.openxmlformats.org/drawingml/2006/main">
+          <a:srgbClr val="F5F6F0"/>
+        </a:solidFill>
+      </p:bgPr>
+    </p:bg>
+    <p:spTree>
+      <p:nvGrpSpPr>
+        <p:cNvPr id="1" name=""/>
+        <p:cNvGrpSpPr/>
+        <p:nvPr/>
+      </p:nvGrpSpPr>
+      <p:grpSpPr>
+        <a:xfrm xmlns:a="http://schemas.openxmlformats.org/drawingml/2006/main"/>
+      </p:grpSpPr>
+      <p:sp>
+        <p:nvSpPr>
+          <p:cNvPr id="8" name="">
+            <a:extLst xmlns:a="http://schemas.openxmlformats.org/drawingml/2006/main">
+              <a:ext uri="{FF2B5EF4-FFF2-40B4-BE49-F238E27FC236}">
+                <a16:creationId xmlns:a16="http://schemas.microsoft.com/office/drawing/2014/main" id="{A6F3ADF8-68ED-4116-AE38-322F8FD0332E}"/>
+              </a:ext>
+            </a:extLst>
+          </p:cNvPr>
+          <p:cNvSpPr>
+            <a:spLocks xmlns:a="http://schemas.openxmlformats.org/drawingml/2006/main" noGrp="1"/>
+          </p:cNvSpPr>
+          <p:nvPr/>
+        </p:nvSpPr>
+        <p:spPr>
+          <a:xfrm xmlns:a="http://schemas.openxmlformats.org/drawingml/2006/main">
+            <a:off x="10553700" y="323850"/>
+            <a:ext cx="1143000" cy="266700"/>
+          </a:xfrm>
+          <a:prstGeom xmlns:a="http://schemas.openxmlformats.org/drawingml/2006/main" prst="rect">
+            <a:avLst/>
+          </a:prstGeom>
+          <a:noFill xmlns:a="http://schemas.openxmlformats.org/drawingml/2006/main"/>
+          <a:ln xmlns:a="http://schemas.openxmlformats.org/drawingml/2006/main" w="0">
+            <a:noFill/>
+          </a:ln>
+        </p:spPr>
+        <p:txBody>
+          <a:bodyPr xmlns:a="http://schemas.openxmlformats.org/drawingml/2006/main"/>
+          <a:lstStyle xmlns:a="http://schemas.openxmlformats.org/drawingml/2006/main">
+            <a:defPPr>
+              <a:defRPr sz="1200" b="0">
+                <a:solidFill>
+                  <a:srgbClr val="667B6D"/>
+                </a:solidFill>
+                <a:latin typeface="Liberation Sans"/>
+                <a:ea typeface="Liberation Sans"/>
+                <a:cs typeface="Liberation Sans"/>
+              </a:defRPr>
+            </a:defPPr>
+          </a:lstStyle>
+          <a:p xmlns:a="http://schemas.openxmlformats.org/drawingml/2006/main">
+            <a:pPr>
+              <a:defRPr sz="1200" b="0">
+                <a:solidFill>
+                  <a:srgbClr val="667B6D"/>
+                </a:solidFill>
+                <a:latin typeface="Liberation Sans"/>
+                <a:ea typeface="Liberation Sans"/>
+                <a:cs typeface="Liberation Sans"/>
+              </a:defRPr>
+            </a:pPr>
+            <a:r>
+              <a:rPr sz="1200" b="0">
+                <a:solidFill>
+                  <a:srgbClr val="667B6D"/>
+                </a:solidFill>
+                <a:latin typeface="Liberation Sans"/>
+                <a:ea typeface="Liberation Sans"/>
+                <a:cs typeface="Liberation Sans"/>
+              </a:rPr>
+              <a:t>10 / 10</a:t>
+            </a:r>
+          </a:p>
+        </p:txBody>
+      </p:sp>
+      <p:sp>
+        <p:nvSpPr>
+          <p:cNvPr id="2" name="">
+            <a:extLst xmlns:a="http://schemas.openxmlformats.org/drawingml/2006/main">
+              <a:ext uri="{FF2B5EF4-FFF2-40B4-BE49-F238E27FC236}">
+                <a16:creationId xmlns:a16="http://schemas.microsoft.com/office/drawing/2014/main" id="{9774AA4D-E28F-40AF-A64A-993F5CBAD57E}"/>
+              </a:ext>
+            </a:extLst>
+          </p:cNvPr>
+          <p:cNvSpPr>
+            <a:spLocks xmlns:a="http://schemas.openxmlformats.org/drawingml/2006/main" noGrp="1"/>
+          </p:cNvSpPr>
+          <p:nvPr/>
+        </p:nvSpPr>
+        <p:spPr>
+          <a:xfrm xmlns:a="http://schemas.openxmlformats.org/drawingml/2006/main">
+            <a:off x="552450" y="1162050"/>
+            <a:ext cx="6600825" cy="2047875"/>
+          </a:xfrm>
+          <a:prstGeom xmlns:a="http://schemas.openxmlformats.org/drawingml/2006/main" prst="rect">
+            <a:avLst/>
+          </a:prstGeom>
+          <a:noFill xmlns:a="http://schemas.openxmlformats.org/drawingml/2006/main"/>
+          <a:ln xmlns:a="http://schemas.openxmlformats.org/drawingml/2006/main" w="0">
+            <a:noFill/>
+          </a:ln>
+        </p:spPr>
+        <p:txBody>
+          <a:bodyPr xmlns:a="http://schemas.openxmlformats.org/drawingml/2006/main"/>
+          <a:lstStyle xmlns:a="http://schemas.openxmlformats.org/drawingml/2006/main">
+            <a:defPPr>
+              <a:defRPr sz="3900" b="1">
+                <a:solidFill>
+                  <a:srgbClr val="1C382E"/>
+                </a:solidFill>
+                <a:latin typeface="Liberation Sans"/>
+                <a:ea typeface="Liberation Sans"/>
+                <a:cs typeface="Liberation Sans"/>
+              </a:defRPr>
+            </a:defPPr>
+          </a:lstStyle>
+          <a:p xmlns:a="http://schemas.openxmlformats.org/drawingml/2006/main">
+            <a:pPr>
+              <a:defRPr sz="3900" b="1">
+                <a:solidFill>
+                  <a:srgbClr val="1C382E"/>
+                </a:solidFill>
+                <a:latin typeface="Liberation Sans"/>
+                <a:ea typeface="Liberation Sans"/>
+                <a:cs typeface="Liberation Sans"/>
+              </a:defRPr>
+            </a:pPr>
+            <a:r>
+              <a:rPr sz="3900" b="1">
+                <a:solidFill>
+                  <a:srgbClr val="1C382E"/>
+                </a:solidFill>
+                <a:latin typeface="Liberation Sans"/>
+                <a:ea typeface="Liberation Sans"/>
+                <a:cs typeface="Liberation Sans"/>
+              </a:rPr>
+              <a:t>Ищем 3 кафе</a:t>
+            </a:r>
+          </a:p>
+          <a:p xmlns:a="http://schemas.openxmlformats.org/drawingml/2006/main">
+            <a:pPr>
+              <a:defRPr sz="3900" b="1">
+                <a:solidFill>
+                  <a:srgbClr val="1C382E"/>
+                </a:solidFill>
+                <a:latin typeface="Liberation Sans"/>
+                <a:ea typeface="Liberation Sans"/>
+                <a:cs typeface="Liberation Sans"/>
+              </a:defRPr>
+            </a:pPr>
+            <a:r>
+              <a:rPr sz="3900" b="1">
+                <a:solidFill>
+                  <a:srgbClr val="1C382E"/>
+                </a:solidFill>
+                <a:latin typeface="Liberation Sans"/>
+                <a:ea typeface="Liberation Sans"/>
+                <a:cs typeface="Liberation Sans"/>
+              </a:rPr>
+              <a:t>или магазина</a:t>
+            </a:r>
+          </a:p>
+          <a:p xmlns:a="http://schemas.openxmlformats.org/drawingml/2006/main">
+            <a:pPr>
+              <a:defRPr sz="3900" b="1">
+                <a:solidFill>
+                  <a:srgbClr val="1C382E"/>
+                </a:solidFill>
+                <a:latin typeface="Liberation Sans"/>
+                <a:ea typeface="Liberation Sans"/>
+                <a:cs typeface="Liberation Sans"/>
+              </a:defRPr>
+            </a:pPr>
+            <a:r>
+              <a:rPr sz="3900" b="1">
+                <a:solidFill>
+                  <a:srgbClr val="1C382E"/>
+                </a:solidFill>
+                <a:latin typeface="Liberation Sans"/>
+                <a:ea typeface="Liberation Sans"/>
+                <a:cs typeface="Liberation Sans"/>
+              </a:rPr>
+              <a:t>для пилота в Таразе</a:t>
+            </a:r>
+          </a:p>
+        </p:txBody>
+      </p:sp>
+      <p:sp>
+        <p:nvSpPr>
+          <p:cNvPr id="3" name="">
+            <a:extLst xmlns:a="http://schemas.openxmlformats.org/drawingml/2006/main">
+              <a:ext uri="{FF2B5EF4-FFF2-40B4-BE49-F238E27FC236}">
+                <a16:creationId xmlns:a16="http://schemas.microsoft.com/office/drawing/2014/main" id="{D782E199-DF73-47D1-B5F2-BC171D86C3FD}"/>
+              </a:ext>
+            </a:extLst>
+          </p:cNvPr>
+          <p:cNvSpPr>
+            <a:spLocks xmlns:a="http://schemas.openxmlformats.org/drawingml/2006/main" noGrp="1"/>
+          </p:cNvSpPr>
+          <p:nvPr/>
+        </p:nvSpPr>
+        <p:spPr>
+          <a:xfrm xmlns:a="http://schemas.openxmlformats.org/drawingml/2006/main">
+            <a:off x="590550" y="3924300"/>
+            <a:ext cx="5905500" cy="485775"/>
+          </a:xfrm>
+          <a:prstGeom xmlns:a="http://schemas.openxmlformats.org/drawingml/2006/main" prst="rect">
+            <a:avLst/>
+          </a:prstGeom>
+          <a:noFill xmlns:a="http://schemas.openxmlformats.org/drawingml/2006/main"/>
+          <a:ln xmlns:a="http://schemas.openxmlformats.org/drawingml/2006/main" w="0">
+            <a:noFill/>
+          </a:ln>
+        </p:spPr>
+        <p:txBody>
+          <a:bodyPr xmlns:a="http://schemas.openxmlformats.org/drawingml/2006/main"/>
+          <a:lstStyle xmlns:a="http://schemas.openxmlformats.org/drawingml/2006/main">
+            <a:defPPr>
+              <a:defRPr sz="2250" b="1">
+                <a:solidFill>
+                  <a:srgbClr val="24664F"/>
+                </a:solidFill>
+                <a:latin typeface="Liberation Sans"/>
+                <a:ea typeface="Liberation Sans"/>
+                <a:cs typeface="Liberation Sans"/>
+              </a:defRPr>
+            </a:defPPr>
+          </a:lstStyle>
+          <a:p xmlns:a="http://schemas.openxmlformats.org/drawingml/2006/main">
+            <a:pPr>
+              <a:defRPr sz="2250" b="1">
+                <a:solidFill>
+                  <a:srgbClr val="24664F"/>
+                </a:solidFill>
+                <a:latin typeface="Liberation Sans"/>
+                <a:ea typeface="Liberation Sans"/>
+                <a:cs typeface="Liberation Sans"/>
+              </a:defRPr>
+            </a:pPr>
+            <a:r>
+              <a:rPr sz="2250" b="1">
+                <a:solidFill>
+                  <a:srgbClr val="24664F"/>
+                </a:solidFill>
+                <a:latin typeface="Liberation Sans"/>
+                <a:ea typeface="Liberation Sans"/>
+                <a:cs typeface="Liberation Sans"/>
+              </a:rPr>
+              <a:t>Демо открыто для всех</a:t>
+            </a:r>
+          </a:p>
+        </p:txBody>
+      </p:sp>
+      <p:sp>
+        <p:nvSpPr>
+          <p:cNvPr id="4" name="">
+            <a:extLst xmlns:a="http://schemas.openxmlformats.org/drawingml/2006/main">
+              <a:ext uri="{FF2B5EF4-FFF2-40B4-BE49-F238E27FC236}">
+                <a16:creationId xmlns:a16="http://schemas.microsoft.com/office/drawing/2014/main" id="{44F1AC7A-6052-4484-A80F-3807FB6FA59B}"/>
+              </a:ext>
+            </a:extLst>
+          </p:cNvPr>
+          <p:cNvSpPr>
+            <a:spLocks xmlns:a="http://schemas.openxmlformats.org/drawingml/2006/main" noGrp="1"/>
+          </p:cNvSpPr>
+          <p:nvPr/>
+        </p:nvSpPr>
+        <p:spPr>
+          <a:xfrm xmlns:a="http://schemas.openxmlformats.org/drawingml/2006/main">
+            <a:off x="590550" y="4552950"/>
+            <a:ext cx="6200775" cy="819150"/>
+          </a:xfrm>
+          <a:prstGeom xmlns:a="http://schemas.openxmlformats.org/drawingml/2006/main" prst="rect">
+            <a:avLst/>
+          </a:prstGeom>
+          <a:noFill xmlns:a="http://schemas.openxmlformats.org/drawingml/2006/main"/>
+          <a:ln xmlns:a="http://schemas.openxmlformats.org/drawingml/2006/main" w="0">
+            <a:noFill/>
+          </a:ln>
+        </p:spPr>
+        <p:txBody>
+          <a:bodyPr xmlns:a="http://schemas.openxmlformats.org/drawingml/2006/main"/>
+          <a:lstStyle xmlns:a="http://schemas.openxmlformats.org/drawingml/2006/main">
+            <a:defPPr>
+              <a:defRPr sz="1800" b="0">
+                <a:solidFill>
+                  <a:srgbClr val="1C382E"/>
+                </a:solidFill>
+                <a:latin typeface="Liberation Sans"/>
+                <a:ea typeface="Liberation Sans"/>
+                <a:cs typeface="Liberation Sans"/>
+              </a:defRPr>
+            </a:defPPr>
+          </a:lstStyle>
+          <a:p xmlns:a="http://schemas.openxmlformats.org/drawingml/2006/main">
+            <a:pPr>
+              <a:defRPr sz="1800" b="0">
+                <a:solidFill>
+                  <a:srgbClr val="1C382E"/>
+                </a:solidFill>
+                <a:latin typeface="Liberation Sans"/>
+                <a:ea typeface="Liberation Sans"/>
+                <a:cs typeface="Liberation Sans"/>
+              </a:defRPr>
+            </a:pPr>
+            <a:r>
+              <a:rPr sz="1800" b="0">
+                <a:solidFill>
+                  <a:srgbClr val="1C382E"/>
+                </a:solidFill>
+                <a:latin typeface="Liberation Sans"/>
+                <a:ea typeface="Liberation Sans"/>
+                <a:cs typeface="Liberation Sans"/>
+              </a:rPr>
+              <a:t>qorai-taraz.nursultantulegen11.chatgpt.site</a:t>
+            </a:r>
+          </a:p>
+        </p:txBody>
+      </p:sp>
+      <p:sp>
+        <p:nvSpPr>
+          <p:cNvPr id="5" name="">
+            <a:extLst xmlns:a="http://schemas.openxmlformats.org/drawingml/2006/main">
+              <a:ext uri="{FF2B5EF4-FFF2-40B4-BE49-F238E27FC236}">
+                <a16:creationId xmlns:a16="http://schemas.microsoft.com/office/drawing/2014/main" id="{64FC9B93-A6E9-4767-8CDC-157FEA414CCD}"/>
+              </a:ext>
+            </a:extLst>
+          </p:cNvPr>
+          <p:cNvSpPr>
+            <a:spLocks xmlns:a="http://schemas.openxmlformats.org/drawingml/2006/main" noGrp="1"/>
+          </p:cNvSpPr>
+          <p:nvPr/>
+        </p:nvSpPr>
+        <p:spPr>
+          <a:xfrm xmlns:a="http://schemas.openxmlformats.org/drawingml/2006/main">
+            <a:off x="609600" y="5657850"/>
+            <a:ext cx="6048375" cy="657225"/>
+          </a:xfrm>
+          <a:prstGeom xmlns:a="http://schemas.openxmlformats.org/drawingml/2006/main" prst="rect">
+            <a:avLst/>
+          </a:prstGeom>
+          <a:noFill xmlns:a="http://schemas.openxmlformats.org/drawingml/2006/main"/>
+          <a:ln xmlns:a="http://schemas.openxmlformats.org/drawingml/2006/main" w="0">
+            <a:noFill/>
+          </a:ln>
+        </p:spPr>
+        <p:txBody>
+          <a:bodyPr xmlns:a="http://schemas.openxmlformats.org/drawingml/2006/main"/>
+          <a:lstStyle xmlns:a="http://schemas.openxmlformats.org/drawingml/2006/main">
+            <a:defPPr>
+              <a:defRPr sz="1800" b="0">
+                <a:solidFill>
+                  <a:srgbClr val="667B6D"/>
+                </a:solidFill>
+                <a:latin typeface="Liberation Sans"/>
+                <a:ea typeface="Liberation Sans"/>
+                <a:cs typeface="Liberation Sans"/>
+              </a:defRPr>
+            </a:defPPr>
+          </a:lstStyle>
+          <a:p xmlns:a="http://schemas.openxmlformats.org/drawingml/2006/main">
+            <a:pPr>
+              <a:defRPr sz="1800" b="0">
+                <a:solidFill>
+                  <a:srgbClr val="667B6D"/>
+                </a:solidFill>
+                <a:latin typeface="Liberation Sans"/>
+                <a:ea typeface="Liberation Sans"/>
+                <a:cs typeface="Liberation Sans"/>
+              </a:defRPr>
+            </a:pPr>
+            <a:r>
+              <a:rPr sz="1800" b="0">
+                <a:solidFill>
+                  <a:srgbClr val="667B6D"/>
+                </a:solidFill>
+                <a:latin typeface="Liberation Sans"/>
+                <a:ea typeface="Liberation Sans"/>
+                <a:cs typeface="Liberation Sans"/>
+              </a:rPr>
+              <a:t>Команда QorAI</a:t>
+            </a:r>
+          </a:p>
+          <a:p xmlns:a="http://schemas.openxmlformats.org/drawingml/2006/main">
+            <a:pPr>
+              <a:defRPr sz="1800" b="0">
+                <a:solidFill>
+                  <a:srgbClr val="667B6D"/>
+                </a:solidFill>
+                <a:latin typeface="Liberation Sans"/>
+                <a:ea typeface="Liberation Sans"/>
+                <a:cs typeface="Liberation Sans"/>
+              </a:defRPr>
+            </a:pPr>
+            <a:r>
+              <a:rPr sz="1800" b="0">
+                <a:solidFill>
+                  <a:srgbClr val="667B6D"/>
+                </a:solidFill>
+                <a:latin typeface="Liberation Sans"/>
+                <a:ea typeface="Liberation Sans"/>
+                <a:cs typeface="Liberation Sans"/>
+              </a:rPr>
+              <a:t>Idea Battle, 22 октября 2026</a:t>
+            </a:r>
+          </a:p>
+        </p:txBody>
+      </p:sp>
+      <p:pic>
+        <p:nvPicPr>
+          <p:cNvPr id="6" name="">
+            <a:extLst xmlns:a="http://schemas.openxmlformats.org/drawingml/2006/main">
+              <a:ext uri="{FF2B5EF4-FFF2-40B4-BE49-F238E27FC236}">
+                <a16:creationId xmlns:a16="http://schemas.microsoft.com/office/drawing/2014/main" id="{C6B5C768-F31C-4433-8477-1A9E849AB449}"/>
+              </a:ext>
+            </a:extLst>
+          </p:cNvPr>
+          <p:cNvPicPr>
+            <a:picLocks xmlns:a="http://schemas.openxmlformats.org/drawingml/2006/main" noChangeAspect="1"/>
+          </p:cNvPicPr>
+          <p:nvPr/>
+        </p:nvPicPr>
+        <p:blipFill>
+          <a:blip xmlns:r="http://schemas.openxmlformats.org/officeDocument/2006/relationships" xmlns:a="http://schemas.openxmlformats.org/drawingml/2006/main" r:embed="R8112e4b8374246b0"/>
+          <a:srcRect xmlns:a="http://schemas.openxmlformats.org/drawingml/2006/main" l="19000" t="7500" r="2000" b="4000"/>
+          <a:stretch xmlns:a="http://schemas.openxmlformats.org/drawingml/2006/main"/>
+        </p:blipFill>
+        <p:spPr>
+          <a:xfrm xmlns:a="http://schemas.openxmlformats.org/drawingml/2006/main">
+            <a:off x="7229475" y="1571625"/>
+            <a:ext cx="4429125" cy="4162425"/>
+          </a:xfrm>
+          <a:prstGeom xmlns:a="http://schemas.openxmlformats.org/drawingml/2006/main" prst="rect">
+            <a:avLst/>
+          </a:prstGeom>
+        </p:spPr>
+      </p:pic>
+      <p:sp>
+        <p:nvSpPr>
+          <p:cNvPr id="7" name="">
+            <a:extLst xmlns:a="http://schemas.openxmlformats.org/drawingml/2006/main">
+              <a:ext uri="{FF2B5EF4-FFF2-40B4-BE49-F238E27FC236}">
+                <a16:creationId xmlns:a16="http://schemas.microsoft.com/office/drawing/2014/main" id="{1A488AEC-19A5-4266-96F5-5CFD845B18EB}"/>
+              </a:ext>
+            </a:extLst>
+          </p:cNvPr>
+          <p:cNvSpPr>
+            <a:spLocks xmlns:a="http://schemas.openxmlformats.org/drawingml/2006/main" noGrp="1"/>
+          </p:cNvSpPr>
+          <p:nvPr/>
+        </p:nvSpPr>
+        <p:spPr>
+          <a:xfrm xmlns:a="http://schemas.openxmlformats.org/drawingml/2006/main">
+            <a:off x="552450" y="285750"/>
+            <a:ext cx="1524000" cy="381000"/>
+          </a:xfrm>
+          <a:prstGeom xmlns:a="http://schemas.openxmlformats.org/drawingml/2006/main" prst="rect">
+            <a:avLst/>
+          </a:prstGeom>
+          <a:noFill xmlns:a="http://schemas.openxmlformats.org/drawingml/2006/main"/>
+          <a:ln xmlns:a="http://schemas.openxmlformats.org/drawingml/2006/main" w="0">
+            <a:noFill/>
+          </a:ln>
+        </p:spPr>
+        <p:txBody>
+          <a:bodyPr xmlns:a="http://schemas.openxmlformats.org/drawingml/2006/main"/>
+          <a:lstStyle xmlns:a="http://schemas.openxmlformats.org/drawingml/2006/main">
+            <a:defPPr>
+              <a:defRPr sz="1800" b="1">
+                <a:solidFill>
+                  <a:srgbClr val="24664F"/>
+                </a:solidFill>
+                <a:latin typeface="Liberation Sans"/>
+                <a:ea typeface="Liberation Sans"/>
+                <a:cs typeface="Liberation Sans"/>
+              </a:defRPr>
+            </a:defPPr>
+          </a:lstStyle>
+          <a:p xmlns:a="http://schemas.openxmlformats.org/drawingml/2006/main">
+            <a:pPr>
+              <a:defRPr sz="1800" b="1">
+                <a:solidFill>
+                  <a:srgbClr val="24664F"/>
+                </a:solidFill>
+                <a:latin typeface="Liberation Sans"/>
+                <a:ea typeface="Liberation Sans"/>
+                <a:cs typeface="Liberation Sans"/>
+              </a:defRPr>
+            </a:pPr>
+            <a:r>
+              <a:rPr sz="1800" b="1">
+                <a:solidFill>
+                  <a:srgbClr val="24664F"/>
+                </a:solidFill>
+                <a:latin typeface="Liberation Sans"/>
+                <a:ea typeface="Liberation Sans"/>
+                <a:cs typeface="Liberation Sans"/>
+              </a:rPr>
+              <a:t>QorAI</a:t>
+            </a:r>
+          </a:p>
+        </p:txBody>
+      </p:sp>
+    </p:spTree>
+    <p:extLst>
+      <p:ext uri="{BB962C8B-B14F-4D97-AF65-F5344CB8AC3E}">
+        <p14:creationId xmlns:p14="http://schemas.microsoft.com/office/powerpoint/2010/main" val="736211834"/>
       </p:ext>
     </p:extLst>
   </p:cSld>
@@ -3587,7 +4504,7 @@
     <p:bg>
       <p:bgPr>
         <a:solidFill xmlns:a="http://schemas.openxmlformats.org/drawingml/2006/main">
-          <a:srgbClr val="F7F8F5"/>
+          <a:srgbClr val="F5F6F0"/>
         </a:solidFill>
       </p:bgPr>
     </p:bg>
@@ -3600,24 +4517,53 @@
       <p:grpSpPr>
         <a:xfrm xmlns:a="http://schemas.openxmlformats.org/drawingml/2006/main"/>
       </p:grpSpPr>
-      <p:sp>
-        <p:nvSpPr>
-          <p:cNvPr id="6" name="">
+      <p:pic>
+        <p:nvPicPr>
+          <p:cNvPr id="7" name="">
             <a:extLst xmlns:a="http://schemas.openxmlformats.org/drawingml/2006/main">
               <a:ext uri="{FF2B5EF4-FFF2-40B4-BE49-F238E27FC236}">
-                <a16:creationId xmlns:a16="http://schemas.microsoft.com/office/drawing/2014/main" id="{83F0ECA0-6962-4E46-9132-F02EF5D737A5}"/>
+                <a16:creationId xmlns:a16="http://schemas.microsoft.com/office/drawing/2014/main" id="{B65D9887-28F2-4881-BBA7-00D779580CC6}"/>
               </a:ext>
             </a:extLst>
           </p:cNvPr>
-          <p:cNvSpPr>
-            <a:spLocks xmlns:a="http://schemas.openxmlformats.org/drawingml/2006/main" noGrp="1"/>
-          </p:cNvSpPr>
+          <p:cNvPicPr>
+            <a:picLocks xmlns:a="http://schemas.openxmlformats.org/drawingml/2006/main" noChangeAspect="1"/>
+          </p:cNvPicPr>
           <p:nvPr/>
-        </p:nvSpPr>
+        </p:nvPicPr>
+        <p:blipFill>
+          <a:blip xmlns:r="http://schemas.openxmlformats.org/officeDocument/2006/relationships" xmlns:a="http://schemas.openxmlformats.org/drawingml/2006/main" r:embed="Rd2db8592f9e2483a"/>
+          <a:srcRect xmlns:a="http://schemas.openxmlformats.org/drawingml/2006/main" l="14000" t="0" r="20000" b="0"/>
+          <a:stretch xmlns:a="http://schemas.openxmlformats.org/drawingml/2006/main"/>
+        </p:blipFill>
         <p:spPr>
           <a:xfrm xmlns:a="http://schemas.openxmlformats.org/drawingml/2006/main">
-            <a:off x="685800" y="361950"/>
-            <a:ext cx="4762500" cy="381000"/>
+            <a:off x="6334125" y="0"/>
+            <a:ext cx="5857875" cy="6858000"/>
+          </a:xfrm>
+          <a:prstGeom xmlns:a="http://schemas.openxmlformats.org/drawingml/2006/main" prst="rect">
+            <a:avLst/>
+          </a:prstGeom>
+        </p:spPr>
+      </p:pic>
+      <p:sp>
+        <p:nvSpPr>
+          <p:cNvPr id="2" name="">
+            <a:extLst xmlns:a="http://schemas.openxmlformats.org/drawingml/2006/main">
+              <a:ext uri="{FF2B5EF4-FFF2-40B4-BE49-F238E27FC236}">
+                <a16:creationId xmlns:a16="http://schemas.microsoft.com/office/drawing/2014/main" id="{0CD6EB52-0CC6-41CE-AF87-932C9EAE0A4B}"/>
+              </a:ext>
+            </a:extLst>
+          </p:cNvPr>
+          <p:cNvSpPr>
+            <a:spLocks xmlns:a="http://schemas.openxmlformats.org/drawingml/2006/main" noGrp="1"/>
+          </p:cNvSpPr>
+          <p:nvPr/>
+        </p:nvSpPr>
+        <p:spPr>
+          <a:xfrm xmlns:a="http://schemas.openxmlformats.org/drawingml/2006/main">
+            <a:off x="552450" y="1238250"/>
+            <a:ext cx="5572125" cy="2238375"/>
           </a:xfrm>
           <a:prstGeom xmlns:a="http://schemas.openxmlformats.org/drawingml/2006/main" prst="rect">
             <a:avLst/>
@@ -3631,9 +4577,9 @@
           <a:bodyPr xmlns:a="http://schemas.openxmlformats.org/drawingml/2006/main"/>
           <a:lstStyle xmlns:a="http://schemas.openxmlformats.org/drawingml/2006/main">
             <a:defPPr>
-              <a:defRPr sz="1650" b="1">
-                <a:solidFill>
-                  <a:srgbClr val="668354"/>
+              <a:defRPr sz="4050" b="1">
+                <a:solidFill>
+                  <a:srgbClr val="1C382E"/>
                 </a:solidFill>
                 <a:latin typeface="Liberation Sans"/>
                 <a:ea typeface="Liberation Sans"/>
@@ -3643,35 +4589,81 @@
           </a:lstStyle>
           <a:p xmlns:a="http://schemas.openxmlformats.org/drawingml/2006/main">
             <a:pPr>
-              <a:defRPr sz="1650" b="1">
-                <a:solidFill>
-                  <a:srgbClr val="668354"/>
-                </a:solidFill>
-                <a:latin typeface="Liberation Sans"/>
-                <a:ea typeface="Liberation Sans"/>
-                <a:cs typeface="Liberation Sans"/>
-              </a:defRPr>
-            </a:pPr>
-            <a:r>
-              <a:rPr sz="1650" b="1">
-                <a:solidFill>
-                  <a:srgbClr val="668354"/>
-                </a:solidFill>
-                <a:latin typeface="Liberation Sans"/>
-                <a:ea typeface="Liberation Sans"/>
-                <a:cs typeface="Liberation Sans"/>
-              </a:rPr>
-              <a:t>QorAI</a:t>
-            </a:r>
-          </a:p>
-        </p:txBody>
-      </p:sp>
-      <p:sp>
-        <p:nvSpPr>
-          <p:cNvPr id="2" name="">
+              <a:defRPr sz="4050" b="1">
+                <a:solidFill>
+                  <a:srgbClr val="1C382E"/>
+                </a:solidFill>
+                <a:latin typeface="Liberation Sans"/>
+                <a:ea typeface="Liberation Sans"/>
+                <a:cs typeface="Liberation Sans"/>
+              </a:defRPr>
+            </a:pPr>
+            <a:r>
+              <a:rPr sz="4050" b="1">
+                <a:solidFill>
+                  <a:srgbClr val="1C382E"/>
+                </a:solidFill>
+                <a:latin typeface="Liberation Sans"/>
+                <a:ea typeface="Liberation Sans"/>
+                <a:cs typeface="Liberation Sans"/>
+              </a:rPr>
+              <a:t>Деньги теряются</a:t>
+            </a:r>
+          </a:p>
+          <a:p xmlns:a="http://schemas.openxmlformats.org/drawingml/2006/main">
+            <a:pPr>
+              <a:defRPr sz="4050" b="1">
+                <a:solidFill>
+                  <a:srgbClr val="1C382E"/>
+                </a:solidFill>
+                <a:latin typeface="Liberation Sans"/>
+                <a:ea typeface="Liberation Sans"/>
+                <a:cs typeface="Liberation Sans"/>
+              </a:defRPr>
+            </a:pPr>
+            <a:r>
+              <a:rPr sz="4050" b="1">
+                <a:solidFill>
+                  <a:srgbClr val="1C382E"/>
+                </a:solidFill>
+                <a:latin typeface="Liberation Sans"/>
+                <a:ea typeface="Liberation Sans"/>
+                <a:cs typeface="Liberation Sans"/>
+              </a:rPr>
+              <a:t>между закупкой</a:t>
+            </a:r>
+          </a:p>
+          <a:p xmlns:a="http://schemas.openxmlformats.org/drawingml/2006/main">
+            <a:pPr>
+              <a:defRPr sz="4050" b="1">
+                <a:solidFill>
+                  <a:srgbClr val="1C382E"/>
+                </a:solidFill>
+                <a:latin typeface="Liberation Sans"/>
+                <a:ea typeface="Liberation Sans"/>
+                <a:cs typeface="Liberation Sans"/>
+              </a:defRPr>
+            </a:pPr>
+            <a:r>
+              <a:rPr sz="4050" b="1">
+                <a:solidFill>
+                  <a:srgbClr val="1C382E"/>
+                </a:solidFill>
+                <a:latin typeface="Liberation Sans"/>
+                <a:ea typeface="Liberation Sans"/>
+                <a:cs typeface="Liberation Sans"/>
+              </a:rPr>
+              <a:t>и продажей</a:t>
+            </a:r>
+          </a:p>
+        </p:txBody>
+      </p:sp>
+      <p:sp>
+        <p:nvSpPr>
+          <p:cNvPr id="3" name="">
             <a:extLst xmlns:a="http://schemas.openxmlformats.org/drawingml/2006/main">
               <a:ext uri="{FF2B5EF4-FFF2-40B4-BE49-F238E27FC236}">
-                <a16:creationId xmlns:a16="http://schemas.microsoft.com/office/drawing/2014/main" id="{F7850A72-5AA5-4850-BF25-715BEA227EA1}"/>
+                <a16:creationId xmlns:a16="http://schemas.microsoft.com/office/drawing/2014/main" id="{BF28F64C-1D35-454C-AC15-A5F4C5C09A2E}"/>
               </a:ext>
             </a:extLst>
           </p:cNvPr>
@@ -3682,8 +4674,8 @@
         </p:nvSpPr>
         <p:spPr>
           <a:xfrm xmlns:a="http://schemas.openxmlformats.org/drawingml/2006/main">
-            <a:off x="10810875" y="381000"/>
-            <a:ext cx="666750" cy="333375"/>
+            <a:off x="590550" y="3800475"/>
+            <a:ext cx="5286375" cy="2047875"/>
           </a:xfrm>
           <a:prstGeom xmlns:a="http://schemas.openxmlformats.org/drawingml/2006/main" prst="rect">
             <a:avLst/>
@@ -3697,9 +4689,9 @@
           <a:bodyPr xmlns:a="http://schemas.openxmlformats.org/drawingml/2006/main"/>
           <a:lstStyle xmlns:a="http://schemas.openxmlformats.org/drawingml/2006/main">
             <a:defPPr>
-              <a:defRPr sz="1350" b="0">
-                <a:solidFill>
-                  <a:srgbClr val="668354"/>
+              <a:defRPr sz="2025" b="0">
+                <a:solidFill>
+                  <a:srgbClr val="667B6D"/>
                 </a:solidFill>
                 <a:latin typeface="Liberation Sans"/>
                 <a:ea typeface="Liberation Sans"/>
@@ -3709,35 +4701,91 @@
           </a:lstStyle>
           <a:p xmlns:a="http://schemas.openxmlformats.org/drawingml/2006/main">
             <a:pPr>
-              <a:defRPr sz="1350" b="0">
-                <a:solidFill>
-                  <a:srgbClr val="668354"/>
-                </a:solidFill>
-                <a:latin typeface="Liberation Sans"/>
-                <a:ea typeface="Liberation Sans"/>
-                <a:cs typeface="Liberation Sans"/>
-              </a:defRPr>
-            </a:pPr>
-            <a:r>
-              <a:rPr sz="1350" b="0">
-                <a:solidFill>
-                  <a:srgbClr val="668354"/>
-                </a:solidFill>
-                <a:latin typeface="Liberation Sans"/>
-                <a:ea typeface="Liberation Sans"/>
-                <a:cs typeface="Liberation Sans"/>
-              </a:rPr>
-              <a:t>02</a:t>
-            </a:r>
-          </a:p>
-        </p:txBody>
-      </p:sp>
-      <p:sp>
-        <p:nvSpPr>
-          <p:cNvPr id="3" name="">
+              <a:defRPr sz="2025" b="0">
+                <a:solidFill>
+                  <a:srgbClr val="667B6D"/>
+                </a:solidFill>
+                <a:latin typeface="Liberation Sans"/>
+                <a:ea typeface="Liberation Sans"/>
+                <a:cs typeface="Liberation Sans"/>
+              </a:defRPr>
+            </a:pPr>
+            <a:r>
+              <a:rPr sz="2025" b="0">
+                <a:solidFill>
+                  <a:srgbClr val="667B6D"/>
+                </a:solidFill>
+                <a:latin typeface="Liberation Sans"/>
+                <a:ea typeface="Liberation Sans"/>
+                <a:cs typeface="Liberation Sans"/>
+              </a:rPr>
+              <a:t>Избыток ведёт к списаниям.</a:t>
+            </a:r>
+          </a:p>
+          <a:p xmlns:a="http://schemas.openxmlformats.org/drawingml/2006/main">
+            <a:r>
+              <a:t/>
+            </a:r>
+          </a:p>
+          <a:p xmlns:a="http://schemas.openxmlformats.org/drawingml/2006/main">
+            <a:pPr>
+              <a:defRPr sz="2025" b="0">
+                <a:solidFill>
+                  <a:srgbClr val="667B6D"/>
+                </a:solidFill>
+                <a:latin typeface="Liberation Sans"/>
+                <a:ea typeface="Liberation Sans"/>
+                <a:cs typeface="Liberation Sans"/>
+              </a:defRPr>
+            </a:pPr>
+            <a:r>
+              <a:rPr sz="2025" b="0">
+                <a:solidFill>
+                  <a:srgbClr val="667B6D"/>
+                </a:solidFill>
+                <a:latin typeface="Liberation Sans"/>
+                <a:ea typeface="Liberation Sans"/>
+                <a:cs typeface="Liberation Sans"/>
+              </a:rPr>
+              <a:t>Дефицит срывает продажи.</a:t>
+            </a:r>
+          </a:p>
+          <a:p xmlns:a="http://schemas.openxmlformats.org/drawingml/2006/main">
+            <a:r>
+              <a:t/>
+            </a:r>
+          </a:p>
+          <a:p xmlns:a="http://schemas.openxmlformats.org/drawingml/2006/main">
+            <a:pPr>
+              <a:defRPr sz="2025" b="0">
+                <a:solidFill>
+                  <a:srgbClr val="667B6D"/>
+                </a:solidFill>
+                <a:latin typeface="Liberation Sans"/>
+                <a:ea typeface="Liberation Sans"/>
+                <a:cs typeface="Liberation Sans"/>
+              </a:defRPr>
+            </a:pPr>
+            <a:r>
+              <a:rPr sz="2025" b="0">
+                <a:solidFill>
+                  <a:srgbClr val="667B6D"/>
+                </a:solidFill>
+                <a:latin typeface="Liberation Sans"/>
+                <a:ea typeface="Liberation Sans"/>
+                <a:cs typeface="Liberation Sans"/>
+              </a:rPr>
+              <a:t>Ручной учёт отнимает время.</a:t>
+            </a:r>
+          </a:p>
+        </p:txBody>
+      </p:sp>
+      <p:sp>
+        <p:nvSpPr>
+          <p:cNvPr id="4" name="">
             <a:extLst xmlns:a="http://schemas.openxmlformats.org/drawingml/2006/main">
               <a:ext uri="{FF2B5EF4-FFF2-40B4-BE49-F238E27FC236}">
-                <a16:creationId xmlns:a16="http://schemas.microsoft.com/office/drawing/2014/main" id="{415B5FC4-7339-4F75-B3DB-41222B788BE2}"/>
+                <a16:creationId xmlns:a16="http://schemas.microsoft.com/office/drawing/2014/main" id="{32AB8B75-D700-43B1-AF08-F862EF6C21CD}"/>
               </a:ext>
             </a:extLst>
           </p:cNvPr>
@@ -3748,8 +4796,8 @@
         </p:nvSpPr>
         <p:spPr>
           <a:xfrm xmlns:a="http://schemas.openxmlformats.org/drawingml/2006/main">
-            <a:off x="685800" y="1171575"/>
-            <a:ext cx="10820400" cy="1476375"/>
+            <a:off x="571500" y="6400800"/>
+            <a:ext cx="11010900" cy="266700"/>
           </a:xfrm>
           <a:prstGeom xmlns:a="http://schemas.openxmlformats.org/drawingml/2006/main" prst="rect">
             <a:avLst/>
@@ -3763,9 +4811,9 @@
           <a:bodyPr xmlns:a="http://schemas.openxmlformats.org/drawingml/2006/main"/>
           <a:lstStyle xmlns:a="http://schemas.openxmlformats.org/drawingml/2006/main">
             <a:defPPr>
-              <a:defRPr sz="4350" b="1">
-                <a:solidFill>
-                  <a:srgbClr val="233C32"/>
+              <a:defRPr sz="1275" b="0">
+                <a:solidFill>
+                  <a:srgbClr val="667B6D"/>
                 </a:solidFill>
                 <a:latin typeface="Liberation Sans"/>
                 <a:ea typeface="Liberation Sans"/>
@@ -3775,58 +4823,35 @@
           </a:lstStyle>
           <a:p xmlns:a="http://schemas.openxmlformats.org/drawingml/2006/main">
             <a:pPr>
-              <a:defRPr sz="4350" b="1">
-                <a:solidFill>
-                  <a:srgbClr val="233C32"/>
-                </a:solidFill>
-                <a:latin typeface="Liberation Sans"/>
-                <a:ea typeface="Liberation Sans"/>
-                <a:cs typeface="Liberation Sans"/>
-              </a:defRPr>
-            </a:pPr>
-            <a:r>
-              <a:rPr sz="4350" b="1">
-                <a:solidFill>
-                  <a:srgbClr val="233C32"/>
-                </a:solidFill>
-                <a:latin typeface="Liberation Sans"/>
-                <a:ea typeface="Liberation Sans"/>
-                <a:cs typeface="Liberation Sans"/>
-              </a:rPr>
-              <a:t>Товар закончился.</a:t>
-            </a:r>
-          </a:p>
-          <a:p xmlns:a="http://schemas.openxmlformats.org/drawingml/2006/main">
-            <a:pPr>
-              <a:defRPr sz="4350" b="1">
-                <a:solidFill>
-                  <a:srgbClr val="233C32"/>
-                </a:solidFill>
-                <a:latin typeface="Liberation Sans"/>
-                <a:ea typeface="Liberation Sans"/>
-                <a:cs typeface="Liberation Sans"/>
-              </a:defRPr>
-            </a:pPr>
-            <a:r>
-              <a:rPr sz="4350" b="1">
-                <a:solidFill>
-                  <a:srgbClr val="233C32"/>
-                </a:solidFill>
-                <a:latin typeface="Liberation Sans"/>
-                <a:ea typeface="Liberation Sans"/>
-                <a:cs typeface="Liberation Sans"/>
-              </a:rPr>
-              <a:t>Или испортился на полке.</a:t>
-            </a:r>
-          </a:p>
-        </p:txBody>
-      </p:sp>
-      <p:sp>
-        <p:nvSpPr>
-          <p:cNvPr id="4" name="">
+              <a:defRPr sz="1275" b="0">
+                <a:solidFill>
+                  <a:srgbClr val="667B6D"/>
+                </a:solidFill>
+                <a:latin typeface="Liberation Sans"/>
+                <a:ea typeface="Liberation Sans"/>
+                <a:cs typeface="Liberation Sans"/>
+              </a:defRPr>
+            </a:pPr>
+            <a:r>
+              <a:rPr sz="1275" b="0">
+                <a:solidFill>
+                  <a:srgbClr val="667B6D"/>
+                </a:solidFill>
+                <a:latin typeface="Liberation Sans"/>
+                <a:ea typeface="Liberation Sans"/>
+                <a:cs typeface="Liberation Sans"/>
+              </a:rPr>
+              <a:t>Проблема, которую проверяем с владельцами</a:t>
+            </a:r>
+          </a:p>
+        </p:txBody>
+      </p:sp>
+      <p:sp>
+        <p:nvSpPr>
+          <p:cNvPr id="5" name="">
             <a:extLst xmlns:a="http://schemas.openxmlformats.org/drawingml/2006/main">
               <a:ext uri="{FF2B5EF4-FFF2-40B4-BE49-F238E27FC236}">
-                <a16:creationId xmlns:a16="http://schemas.microsoft.com/office/drawing/2014/main" id="{5DC7CA95-E008-4DA0-ADCD-A0E8344B6F46}"/>
+                <a16:creationId xmlns:a16="http://schemas.microsoft.com/office/drawing/2014/main" id="{33238D30-4AC4-452B-A7F9-49B30E95892F}"/>
               </a:ext>
             </a:extLst>
           </p:cNvPr>
@@ -3837,8 +4862,8 @@
         </p:nvSpPr>
         <p:spPr>
           <a:xfrm xmlns:a="http://schemas.openxmlformats.org/drawingml/2006/main">
-            <a:off x="723900" y="2809875"/>
-            <a:ext cx="10477500" cy="571500"/>
+            <a:off x="552450" y="285750"/>
+            <a:ext cx="1524000" cy="381000"/>
           </a:xfrm>
           <a:prstGeom xmlns:a="http://schemas.openxmlformats.org/drawingml/2006/main" prst="rect">
             <a:avLst/>
@@ -3852,9 +4877,9 @@
           <a:bodyPr xmlns:a="http://schemas.openxmlformats.org/drawingml/2006/main"/>
           <a:lstStyle xmlns:a="http://schemas.openxmlformats.org/drawingml/2006/main">
             <a:defPPr>
-              <a:defRPr sz="1950" b="0">
-                <a:solidFill>
-                  <a:srgbClr val="668354"/>
+              <a:defRPr sz="1800" b="1">
+                <a:solidFill>
+                  <a:srgbClr val="24664F"/>
                 </a:solidFill>
                 <a:latin typeface="Liberation Sans"/>
                 <a:ea typeface="Liberation Sans"/>
@@ -3864,35 +4889,35 @@
           </a:lstStyle>
           <a:p xmlns:a="http://schemas.openxmlformats.org/drawingml/2006/main">
             <a:pPr>
-              <a:defRPr sz="1950" b="0">
-                <a:solidFill>
-                  <a:srgbClr val="668354"/>
-                </a:solidFill>
-                <a:latin typeface="Liberation Sans"/>
-                <a:ea typeface="Liberation Sans"/>
-                <a:cs typeface="Liberation Sans"/>
-              </a:defRPr>
-            </a:pPr>
-            <a:r>
-              <a:rPr sz="1950" b="0">
-                <a:solidFill>
-                  <a:srgbClr val="668354"/>
-                </a:solidFill>
-                <a:latin typeface="Liberation Sans"/>
-                <a:ea typeface="Liberation Sans"/>
-                <a:cs typeface="Liberation Sans"/>
-              </a:rPr>
-              <a:t>Владелец узнаёт о проблеме слишком поздно</a:t>
-            </a:r>
-          </a:p>
-        </p:txBody>
-      </p:sp>
-      <p:sp>
-        <p:nvSpPr>
-          <p:cNvPr id="5" name="">
+              <a:defRPr sz="1800" b="1">
+                <a:solidFill>
+                  <a:srgbClr val="24664F"/>
+                </a:solidFill>
+                <a:latin typeface="Liberation Sans"/>
+                <a:ea typeface="Liberation Sans"/>
+                <a:cs typeface="Liberation Sans"/>
+              </a:defRPr>
+            </a:pPr>
+            <a:r>
+              <a:rPr sz="1800" b="1">
+                <a:solidFill>
+                  <a:srgbClr val="24664F"/>
+                </a:solidFill>
+                <a:latin typeface="Liberation Sans"/>
+                <a:ea typeface="Liberation Sans"/>
+                <a:cs typeface="Liberation Sans"/>
+              </a:rPr>
+              <a:t>QorAI</a:t>
+            </a:r>
+          </a:p>
+        </p:txBody>
+      </p:sp>
+      <p:sp>
+        <p:nvSpPr>
+          <p:cNvPr id="6" name="">
             <a:extLst xmlns:a="http://schemas.openxmlformats.org/drawingml/2006/main">
               <a:ext uri="{FF2B5EF4-FFF2-40B4-BE49-F238E27FC236}">
-                <a16:creationId xmlns:a16="http://schemas.microsoft.com/office/drawing/2014/main" id="{4AE486E3-04AE-4C46-B183-409CF6406016}"/>
+                <a16:creationId xmlns:a16="http://schemas.microsoft.com/office/drawing/2014/main" id="{F96A944E-920D-4105-9181-0E19F1D9CCC2}"/>
               </a:ext>
             </a:extLst>
           </p:cNvPr>
@@ -3903,8 +4928,8 @@
         </p:nvSpPr>
         <p:spPr>
           <a:xfrm xmlns:a="http://schemas.openxmlformats.org/drawingml/2006/main">
-            <a:off x="723900" y="3714750"/>
-            <a:ext cx="10668000" cy="2381250"/>
+            <a:off x="10553700" y="323850"/>
+            <a:ext cx="1143000" cy="266700"/>
           </a:xfrm>
           <a:prstGeom xmlns:a="http://schemas.openxmlformats.org/drawingml/2006/main" prst="rect">
             <a:avLst/>
@@ -3918,9 +4943,9 @@
           <a:bodyPr xmlns:a="http://schemas.openxmlformats.org/drawingml/2006/main"/>
           <a:lstStyle xmlns:a="http://schemas.openxmlformats.org/drawingml/2006/main">
             <a:defPPr>
-              <a:defRPr sz="2025" b="0">
-                <a:solidFill>
-                  <a:srgbClr val="233C32"/>
+              <a:defRPr sz="1200" b="0">
+                <a:solidFill>
+                  <a:srgbClr val="FFFFFF"/>
                 </a:solidFill>
                 <a:latin typeface="Liberation Sans"/>
                 <a:ea typeface="Liberation Sans"/>
@@ -3930,94 +4955,25 @@
           </a:lstStyle>
           <a:p xmlns:a="http://schemas.openxmlformats.org/drawingml/2006/main">
             <a:pPr>
-              <a:defRPr sz="2025" b="0">
-                <a:solidFill>
-                  <a:srgbClr val="233C32"/>
-                </a:solidFill>
-                <a:latin typeface="Liberation Sans"/>
-                <a:ea typeface="Liberation Sans"/>
-                <a:cs typeface="Liberation Sans"/>
-              </a:defRPr>
-            </a:pPr>
-            <a:r>
-              <a:rPr sz="2025" b="0">
-                <a:solidFill>
-                  <a:srgbClr val="233C32"/>
-                </a:solidFill>
-                <a:latin typeface="Liberation Sans"/>
-                <a:ea typeface="Liberation Sans"/>
-                <a:cs typeface="Liberation Sans"/>
-              </a:rPr>
-              <a:t>Накладные лежат в переписке</a:t>
-            </a:r>
-          </a:p>
-          <a:p xmlns:a="http://schemas.openxmlformats.org/drawingml/2006/main">
-            <a:pPr>
-              <a:defRPr sz="2025" b="0">
-                <a:solidFill>
-                  <a:srgbClr val="233C32"/>
-                </a:solidFill>
-                <a:latin typeface="Liberation Sans"/>
-                <a:ea typeface="Liberation Sans"/>
-                <a:cs typeface="Liberation Sans"/>
-              </a:defRPr>
-            </a:pPr>
-            <a:r>
-              <a:rPr sz="2025" b="0">
-                <a:solidFill>
-                  <a:srgbClr val="233C32"/>
-                </a:solidFill>
-                <a:latin typeface="Liberation Sans"/>
-                <a:ea typeface="Liberation Sans"/>
-                <a:cs typeface="Liberation Sans"/>
-              </a:rPr>
-              <a:t>Остатки считают вручную</a:t>
-            </a:r>
-          </a:p>
-          <a:p xmlns:a="http://schemas.openxmlformats.org/drawingml/2006/main">
-            <a:pPr>
-              <a:defRPr sz="2025" b="0">
-                <a:solidFill>
-                  <a:srgbClr val="233C32"/>
-                </a:solidFill>
-                <a:latin typeface="Liberation Sans"/>
-                <a:ea typeface="Liberation Sans"/>
-                <a:cs typeface="Liberation Sans"/>
-              </a:defRPr>
-            </a:pPr>
-            <a:r>
-              <a:rPr sz="2025" b="0">
-                <a:solidFill>
-                  <a:srgbClr val="233C32"/>
-                </a:solidFill>
-                <a:latin typeface="Liberation Sans"/>
-                <a:ea typeface="Liberation Sans"/>
-                <a:cs typeface="Liberation Sans"/>
-              </a:rPr>
-              <a:t>Закупают по памяти</a:t>
-            </a:r>
-          </a:p>
-          <a:p xmlns:a="http://schemas.openxmlformats.org/drawingml/2006/main">
-            <a:pPr>
-              <a:defRPr sz="2025" b="0">
-                <a:solidFill>
-                  <a:srgbClr val="233C32"/>
-                </a:solidFill>
-                <a:latin typeface="Liberation Sans"/>
-                <a:ea typeface="Liberation Sans"/>
-                <a:cs typeface="Liberation Sans"/>
-              </a:defRPr>
-            </a:pPr>
-            <a:r>
-              <a:rPr sz="2025" b="0">
-                <a:solidFill>
-                  <a:srgbClr val="233C32"/>
-                </a:solidFill>
-                <a:latin typeface="Liberation Sans"/>
-                <a:ea typeface="Liberation Sans"/>
-                <a:cs typeface="Liberation Sans"/>
-              </a:rPr>
-              <a:t>Сроки годности теряются</a:t>
+              <a:defRPr sz="1200" b="0">
+                <a:solidFill>
+                  <a:srgbClr val="FFFFFF"/>
+                </a:solidFill>
+                <a:latin typeface="Liberation Sans"/>
+                <a:ea typeface="Liberation Sans"/>
+                <a:cs typeface="Liberation Sans"/>
+              </a:defRPr>
+            </a:pPr>
+            <a:r>
+              <a:rPr sz="1200" b="0">
+                <a:solidFill>
+                  <a:srgbClr val="FFFFFF"/>
+                </a:solidFill>
+                <a:latin typeface="Liberation Sans"/>
+                <a:ea typeface="Liberation Sans"/>
+                <a:cs typeface="Liberation Sans"/>
+              </a:rPr>
+              <a:t>02 / 10</a:t>
             </a:r>
           </a:p>
         </p:txBody>
@@ -4025,7 +4981,7 @@
     </p:spTree>
     <p:extLst>
       <p:ext uri="{BB962C8B-B14F-4D97-AF65-F5344CB8AC3E}">
-        <p14:creationId xmlns:p14="http://schemas.microsoft.com/office/powerpoint/2010/main" val="1281603839"/>
+        <p14:creationId xmlns:p14="http://schemas.microsoft.com/office/powerpoint/2010/main" val="1213761075"/>
       </p:ext>
     </p:extLst>
   </p:cSld>
@@ -4038,7 +4994,7 @@
     <p:bg>
       <p:bgPr>
         <a:solidFill xmlns:a="http://schemas.openxmlformats.org/drawingml/2006/main">
-          <a:srgbClr val="F7F8F5"/>
+          <a:srgbClr val="F5F6F0"/>
         </a:solidFill>
       </p:bgPr>
     </p:bg>
@@ -4056,7 +5012,7 @@
           <p:cNvPr id="7" name="">
             <a:extLst xmlns:a="http://schemas.openxmlformats.org/drawingml/2006/main">
               <a:ext uri="{FF2B5EF4-FFF2-40B4-BE49-F238E27FC236}">
-                <a16:creationId xmlns:a16="http://schemas.microsoft.com/office/drawing/2014/main" id="{C7B97C3B-655A-4F98-B7C4-B7596086AC7E}"/>
+                <a16:creationId xmlns:a16="http://schemas.microsoft.com/office/drawing/2014/main" id="{D9FE1029-1AF1-40EE-99A8-3A9DBCF9941B}"/>
               </a:ext>
             </a:extLst>
           </p:cNvPr>
@@ -4067,8 +5023,8 @@
         </p:nvSpPr>
         <p:spPr>
           <a:xfrm xmlns:a="http://schemas.openxmlformats.org/drawingml/2006/main">
-            <a:off x="685800" y="361950"/>
-            <a:ext cx="4762500" cy="381000"/>
+            <a:off x="10553700" y="323850"/>
+            <a:ext cx="1143000" cy="266700"/>
           </a:xfrm>
           <a:prstGeom xmlns:a="http://schemas.openxmlformats.org/drawingml/2006/main" prst="rect">
             <a:avLst/>
@@ -4082,9 +5038,9 @@
           <a:bodyPr xmlns:a="http://schemas.openxmlformats.org/drawingml/2006/main"/>
           <a:lstStyle xmlns:a="http://schemas.openxmlformats.org/drawingml/2006/main">
             <a:defPPr>
-              <a:defRPr sz="1650" b="1">
-                <a:solidFill>
-                  <a:srgbClr val="668354"/>
+              <a:defRPr sz="1200" b="0">
+                <a:solidFill>
+                  <a:srgbClr val="667B6D"/>
                 </a:solidFill>
                 <a:latin typeface="Liberation Sans"/>
                 <a:ea typeface="Liberation Sans"/>
@@ -4094,25 +5050,25 @@
           </a:lstStyle>
           <a:p xmlns:a="http://schemas.openxmlformats.org/drawingml/2006/main">
             <a:pPr>
-              <a:defRPr sz="1650" b="1">
-                <a:solidFill>
-                  <a:srgbClr val="668354"/>
-                </a:solidFill>
-                <a:latin typeface="Liberation Sans"/>
-                <a:ea typeface="Liberation Sans"/>
-                <a:cs typeface="Liberation Sans"/>
-              </a:defRPr>
-            </a:pPr>
-            <a:r>
-              <a:rPr sz="1650" b="1">
-                <a:solidFill>
-                  <a:srgbClr val="668354"/>
-                </a:solidFill>
-                <a:latin typeface="Liberation Sans"/>
-                <a:ea typeface="Liberation Sans"/>
-                <a:cs typeface="Liberation Sans"/>
-              </a:rPr>
-              <a:t>QorAI</a:t>
+              <a:defRPr sz="1200" b="0">
+                <a:solidFill>
+                  <a:srgbClr val="667B6D"/>
+                </a:solidFill>
+                <a:latin typeface="Liberation Sans"/>
+                <a:ea typeface="Liberation Sans"/>
+                <a:cs typeface="Liberation Sans"/>
+              </a:defRPr>
+            </a:pPr>
+            <a:r>
+              <a:rPr sz="1200" b="0">
+                <a:solidFill>
+                  <a:srgbClr val="667B6D"/>
+                </a:solidFill>
+                <a:latin typeface="Liberation Sans"/>
+                <a:ea typeface="Liberation Sans"/>
+                <a:cs typeface="Liberation Sans"/>
+              </a:rPr>
+              <a:t>03 / 10</a:t>
             </a:r>
           </a:p>
         </p:txBody>
@@ -4122,7 +5078,7 @@
           <p:cNvPr id="2" name="">
             <a:extLst xmlns:a="http://schemas.openxmlformats.org/drawingml/2006/main">
               <a:ext uri="{FF2B5EF4-FFF2-40B4-BE49-F238E27FC236}">
-                <a16:creationId xmlns:a16="http://schemas.microsoft.com/office/drawing/2014/main" id="{8DAC0496-03D8-4088-894C-EFD2D66928ED}"/>
+                <a16:creationId xmlns:a16="http://schemas.microsoft.com/office/drawing/2014/main" id="{F7B9D48F-1D01-44BF-947F-4B757E9A2491}"/>
               </a:ext>
             </a:extLst>
           </p:cNvPr>
@@ -4133,8 +5089,8 @@
         </p:nvSpPr>
         <p:spPr>
           <a:xfrm xmlns:a="http://schemas.openxmlformats.org/drawingml/2006/main">
-            <a:off x="10810875" y="381000"/>
-            <a:ext cx="666750" cy="333375"/>
+            <a:off x="552450" y="1333500"/>
+            <a:ext cx="3505200" cy="2105025"/>
           </a:xfrm>
           <a:prstGeom xmlns:a="http://schemas.openxmlformats.org/drawingml/2006/main" prst="rect">
             <a:avLst/>
@@ -4148,9 +5104,9 @@
           <a:bodyPr xmlns:a="http://schemas.openxmlformats.org/drawingml/2006/main"/>
           <a:lstStyle xmlns:a="http://schemas.openxmlformats.org/drawingml/2006/main">
             <a:defPPr>
-              <a:defRPr sz="1350" b="0">
-                <a:solidFill>
-                  <a:srgbClr val="668354"/>
+              <a:defRPr sz="4050" b="1">
+                <a:solidFill>
+                  <a:srgbClr val="1C382E"/>
                 </a:solidFill>
                 <a:latin typeface="Liberation Sans"/>
                 <a:ea typeface="Liberation Sans"/>
@@ -4160,25 +5116,71 @@
           </a:lstStyle>
           <a:p xmlns:a="http://schemas.openxmlformats.org/drawingml/2006/main">
             <a:pPr>
-              <a:defRPr sz="1350" b="0">
-                <a:solidFill>
-                  <a:srgbClr val="668354"/>
-                </a:solidFill>
-                <a:latin typeface="Liberation Sans"/>
-                <a:ea typeface="Liberation Sans"/>
-                <a:cs typeface="Liberation Sans"/>
-              </a:defRPr>
-            </a:pPr>
-            <a:r>
-              <a:rPr sz="1350" b="0">
-                <a:solidFill>
-                  <a:srgbClr val="668354"/>
-                </a:solidFill>
-                <a:latin typeface="Liberation Sans"/>
-                <a:ea typeface="Liberation Sans"/>
-                <a:cs typeface="Liberation Sans"/>
-              </a:rPr>
-              <a:t>03</a:t>
+              <a:defRPr sz="4050" b="1">
+                <a:solidFill>
+                  <a:srgbClr val="1C382E"/>
+                </a:solidFill>
+                <a:latin typeface="Liberation Sans"/>
+                <a:ea typeface="Liberation Sans"/>
+                <a:cs typeface="Liberation Sans"/>
+              </a:defRPr>
+            </a:pPr>
+            <a:r>
+              <a:rPr sz="4050" b="1">
+                <a:solidFill>
+                  <a:srgbClr val="1C382E"/>
+                </a:solidFill>
+                <a:latin typeface="Liberation Sans"/>
+                <a:ea typeface="Liberation Sans"/>
+                <a:cs typeface="Liberation Sans"/>
+              </a:rPr>
+              <a:t>Весь склад</a:t>
+            </a:r>
+          </a:p>
+          <a:p xmlns:a="http://schemas.openxmlformats.org/drawingml/2006/main">
+            <a:pPr>
+              <a:defRPr sz="4050" b="1">
+                <a:solidFill>
+                  <a:srgbClr val="1C382E"/>
+                </a:solidFill>
+                <a:latin typeface="Liberation Sans"/>
+                <a:ea typeface="Liberation Sans"/>
+                <a:cs typeface="Liberation Sans"/>
+              </a:defRPr>
+            </a:pPr>
+            <a:r>
+              <a:rPr sz="4050" b="1">
+                <a:solidFill>
+                  <a:srgbClr val="1C382E"/>
+                </a:solidFill>
+                <a:latin typeface="Liberation Sans"/>
+                <a:ea typeface="Liberation Sans"/>
+                <a:cs typeface="Liberation Sans"/>
+              </a:rPr>
+              <a:t>на одном</a:t>
+            </a:r>
+          </a:p>
+          <a:p xmlns:a="http://schemas.openxmlformats.org/drawingml/2006/main">
+            <a:pPr>
+              <a:defRPr sz="4050" b="1">
+                <a:solidFill>
+                  <a:srgbClr val="1C382E"/>
+                </a:solidFill>
+                <a:latin typeface="Liberation Sans"/>
+                <a:ea typeface="Liberation Sans"/>
+                <a:cs typeface="Liberation Sans"/>
+              </a:defRPr>
+            </a:pPr>
+            <a:r>
+              <a:rPr sz="4050" b="1">
+                <a:solidFill>
+                  <a:srgbClr val="1C382E"/>
+                </a:solidFill>
+                <a:latin typeface="Liberation Sans"/>
+                <a:ea typeface="Liberation Sans"/>
+                <a:cs typeface="Liberation Sans"/>
+              </a:rPr>
+              <a:t>экране</a:t>
             </a:r>
           </a:p>
         </p:txBody>
@@ -4188,7 +5190,7 @@
           <p:cNvPr id="3" name="">
             <a:extLst xmlns:a="http://schemas.openxmlformats.org/drawingml/2006/main">
               <a:ext uri="{FF2B5EF4-FFF2-40B4-BE49-F238E27FC236}">
-                <a16:creationId xmlns:a16="http://schemas.microsoft.com/office/drawing/2014/main" id="{0BF6CB02-2306-4D14-97CB-20111091949C}"/>
+                <a16:creationId xmlns:a16="http://schemas.microsoft.com/office/drawing/2014/main" id="{9FB2FC81-82D0-44B4-9CAD-99D079948800}"/>
               </a:ext>
             </a:extLst>
           </p:cNvPr>
@@ -4199,8 +5201,8 @@
         </p:nvSpPr>
         <p:spPr>
           <a:xfrm xmlns:a="http://schemas.openxmlformats.org/drawingml/2006/main">
-            <a:off x="685800" y="1257300"/>
-            <a:ext cx="5524500" cy="1476375"/>
+            <a:off x="590550" y="3905250"/>
+            <a:ext cx="3286125" cy="1381125"/>
           </a:xfrm>
           <a:prstGeom xmlns:a="http://schemas.openxmlformats.org/drawingml/2006/main" prst="rect">
             <a:avLst/>
@@ -4214,9 +5216,9 @@
           <a:bodyPr xmlns:a="http://schemas.openxmlformats.org/drawingml/2006/main"/>
           <a:lstStyle xmlns:a="http://schemas.openxmlformats.org/drawingml/2006/main">
             <a:defPPr>
-              <a:defRPr sz="4200" b="1">
-                <a:solidFill>
-                  <a:srgbClr val="233C32"/>
+              <a:defRPr sz="2025" b="0">
+                <a:solidFill>
+                  <a:srgbClr val="667B6D"/>
                 </a:solidFill>
                 <a:latin typeface="Liberation Sans"/>
                 <a:ea typeface="Liberation Sans"/>
@@ -4226,70 +5228,122 @@
           </a:lstStyle>
           <a:p xmlns:a="http://schemas.openxmlformats.org/drawingml/2006/main">
             <a:pPr>
-              <a:defRPr sz="4200" b="1">
-                <a:solidFill>
-                  <a:srgbClr val="233C32"/>
-                </a:solidFill>
-                <a:latin typeface="Liberation Sans"/>
-                <a:ea typeface="Liberation Sans"/>
-                <a:cs typeface="Liberation Sans"/>
-              </a:defRPr>
-            </a:pPr>
-            <a:r>
-              <a:rPr sz="4200" b="1">
-                <a:solidFill>
-                  <a:srgbClr val="233C32"/>
-                </a:solidFill>
-                <a:latin typeface="Liberation Sans"/>
-                <a:ea typeface="Liberation Sans"/>
-                <a:cs typeface="Liberation Sans"/>
-              </a:rPr>
-              <a:t>От накладной</a:t>
-            </a:r>
-          </a:p>
-          <a:p xmlns:a="http://schemas.openxmlformats.org/drawingml/2006/main">
-            <a:pPr>
-              <a:defRPr sz="4200" b="1">
-                <a:solidFill>
-                  <a:srgbClr val="233C32"/>
-                </a:solidFill>
-                <a:latin typeface="Liberation Sans"/>
-                <a:ea typeface="Liberation Sans"/>
-                <a:cs typeface="Liberation Sans"/>
-              </a:defRPr>
-            </a:pPr>
-            <a:r>
-              <a:rPr sz="4200" b="1">
-                <a:solidFill>
-                  <a:srgbClr val="233C32"/>
-                </a:solidFill>
-                <a:latin typeface="Liberation Sans"/>
-                <a:ea typeface="Liberation Sans"/>
-                <a:cs typeface="Liberation Sans"/>
-              </a:rPr>
-              <a:t>к понятному складу</a:t>
-            </a:r>
-          </a:p>
-        </p:txBody>
-      </p:sp>
-      <p:sp>
-        <p:nvSpPr>
+              <a:defRPr sz="2025" b="0">
+                <a:solidFill>
+                  <a:srgbClr val="667B6D"/>
+                </a:solidFill>
+                <a:latin typeface="Liberation Sans"/>
+                <a:ea typeface="Liberation Sans"/>
+                <a:cs typeface="Liberation Sans"/>
+              </a:defRPr>
+            </a:pPr>
+            <a:r>
+              <a:rPr sz="2025" b="0">
+                <a:solidFill>
+                  <a:srgbClr val="667B6D"/>
+                </a:solidFill>
+                <a:latin typeface="Liberation Sans"/>
+                <a:ea typeface="Liberation Sans"/>
+                <a:cs typeface="Liberation Sans"/>
+              </a:rPr>
+              <a:t>Остатки в тенге.</a:t>
+            </a:r>
+          </a:p>
+          <a:p xmlns:a="http://schemas.openxmlformats.org/drawingml/2006/main">
+            <a:pPr>
+              <a:defRPr sz="2025" b="0">
+                <a:solidFill>
+                  <a:srgbClr val="667B6D"/>
+                </a:solidFill>
+                <a:latin typeface="Liberation Sans"/>
+                <a:ea typeface="Liberation Sans"/>
+                <a:cs typeface="Liberation Sans"/>
+              </a:defRPr>
+            </a:pPr>
+            <a:r>
+              <a:rPr sz="2025" b="0">
+                <a:solidFill>
+                  <a:srgbClr val="667B6D"/>
+                </a:solidFill>
+                <a:latin typeface="Liberation Sans"/>
+                <a:ea typeface="Liberation Sans"/>
+                <a:cs typeface="Liberation Sans"/>
+              </a:rPr>
+              <a:t>Товары к закупке.</a:t>
+            </a:r>
+          </a:p>
+          <a:p xmlns:a="http://schemas.openxmlformats.org/drawingml/2006/main">
+            <a:pPr>
+              <a:defRPr sz="2025" b="0">
+                <a:solidFill>
+                  <a:srgbClr val="667B6D"/>
+                </a:solidFill>
+                <a:latin typeface="Liberation Sans"/>
+                <a:ea typeface="Liberation Sans"/>
+                <a:cs typeface="Liberation Sans"/>
+              </a:defRPr>
+            </a:pPr>
+            <a:r>
+              <a:rPr sz="2025" b="0">
+                <a:solidFill>
+                  <a:srgbClr val="667B6D"/>
+                </a:solidFill>
+                <a:latin typeface="Liberation Sans"/>
+                <a:ea typeface="Liberation Sans"/>
+                <a:cs typeface="Liberation Sans"/>
+              </a:rPr>
+              <a:t>Ближайшие сроки.</a:t>
+            </a:r>
+          </a:p>
+        </p:txBody>
+      </p:sp>
+      <p:pic>
+        <p:nvPicPr>
           <p:cNvPr id="4" name="">
             <a:extLst xmlns:a="http://schemas.openxmlformats.org/drawingml/2006/main">
               <a:ext uri="{FF2B5EF4-FFF2-40B4-BE49-F238E27FC236}">
-                <a16:creationId xmlns:a16="http://schemas.microsoft.com/office/drawing/2014/main" id="{18710370-C25F-40CA-9536-BF8CA87CCBA1}"/>
+                <a16:creationId xmlns:a16="http://schemas.microsoft.com/office/drawing/2014/main" id="{E7985EE9-AC0F-46C2-BF07-BBF145C9722B}"/>
               </a:ext>
             </a:extLst>
           </p:cNvPr>
-          <p:cNvSpPr>
-            <a:spLocks xmlns:a="http://schemas.openxmlformats.org/drawingml/2006/main" noGrp="1"/>
-          </p:cNvSpPr>
+          <p:cNvPicPr>
+            <a:picLocks xmlns:a="http://schemas.openxmlformats.org/drawingml/2006/main" noChangeAspect="1"/>
+          </p:cNvPicPr>
           <p:nvPr/>
-        </p:nvSpPr>
+        </p:nvPicPr>
+        <p:blipFill>
+          <a:blip xmlns:r="http://schemas.openxmlformats.org/officeDocument/2006/relationships" xmlns:a="http://schemas.openxmlformats.org/drawingml/2006/main" r:embed="R4e5970df815c43a6"/>
+          <a:srcRect xmlns:a="http://schemas.openxmlformats.org/drawingml/2006/main" l="0" t="4500" r="0" b="46000"/>
+          <a:stretch xmlns:a="http://schemas.openxmlformats.org/drawingml/2006/main"/>
+        </p:blipFill>
         <p:spPr>
           <a:xfrm xmlns:a="http://schemas.openxmlformats.org/drawingml/2006/main">
-            <a:off x="714375" y="2886075"/>
-            <a:ext cx="5381625" cy="666750"/>
+            <a:off x="4210050" y="1228725"/>
+            <a:ext cx="7448550" cy="4867275"/>
+          </a:xfrm>
+          <a:prstGeom xmlns:a="http://schemas.openxmlformats.org/drawingml/2006/main" prst="rect">
+            <a:avLst/>
+          </a:prstGeom>
+        </p:spPr>
+      </p:pic>
+      <p:sp>
+        <p:nvSpPr>
+          <p:cNvPr id="5" name="">
+            <a:extLst xmlns:a="http://schemas.openxmlformats.org/drawingml/2006/main">
+              <a:ext uri="{FF2B5EF4-FFF2-40B4-BE49-F238E27FC236}">
+                <a16:creationId xmlns:a16="http://schemas.microsoft.com/office/drawing/2014/main" id="{F4A7D750-FC18-4ACD-B841-5E8EF43B67C4}"/>
+              </a:ext>
+            </a:extLst>
+          </p:cNvPr>
+          <p:cNvSpPr>
+            <a:spLocks xmlns:a="http://schemas.openxmlformats.org/drawingml/2006/main" noGrp="1"/>
+          </p:cNvSpPr>
+          <p:nvPr/>
+        </p:nvSpPr>
+        <p:spPr>
+          <a:xfrm xmlns:a="http://schemas.openxmlformats.org/drawingml/2006/main">
+            <a:off x="571500" y="6400800"/>
+            <a:ext cx="11010900" cy="266700"/>
           </a:xfrm>
           <a:prstGeom xmlns:a="http://schemas.openxmlformats.org/drawingml/2006/main" prst="rect">
             <a:avLst/>
@@ -4303,9 +5357,9 @@
           <a:bodyPr xmlns:a="http://schemas.openxmlformats.org/drawingml/2006/main"/>
           <a:lstStyle xmlns:a="http://schemas.openxmlformats.org/drawingml/2006/main">
             <a:defPPr>
-              <a:defRPr sz="1800" b="0">
-                <a:solidFill>
-                  <a:srgbClr val="668354"/>
+              <a:defRPr sz="1275" b="0">
+                <a:solidFill>
+                  <a:srgbClr val="667B6D"/>
                 </a:solidFill>
                 <a:latin typeface="Liberation Sans"/>
                 <a:ea typeface="Liberation Sans"/>
@@ -4315,35 +5369,35 @@
           </a:lstStyle>
           <a:p xmlns:a="http://schemas.openxmlformats.org/drawingml/2006/main">
             <a:pPr>
-              <a:defRPr sz="1800" b="0">
-                <a:solidFill>
-                  <a:srgbClr val="668354"/>
-                </a:solidFill>
-                <a:latin typeface="Liberation Sans"/>
-                <a:ea typeface="Liberation Sans"/>
-                <a:cs typeface="Liberation Sans"/>
-              </a:defRPr>
-            </a:pPr>
-            <a:r>
-              <a:rPr sz="1800" b="0">
-                <a:solidFill>
-                  <a:srgbClr val="668354"/>
-                </a:solidFill>
-                <a:latin typeface="Liberation Sans"/>
-                <a:ea typeface="Liberation Sans"/>
-                <a:cs typeface="Liberation Sans"/>
-              </a:rPr>
-              <a:t>Проверка владельцем остаётся обязательной</a:t>
-            </a:r>
-          </a:p>
-        </p:txBody>
-      </p:sp>
-      <p:sp>
-        <p:nvSpPr>
-          <p:cNvPr id="5" name="">
+              <a:defRPr sz="1275" b="0">
+                <a:solidFill>
+                  <a:srgbClr val="667B6D"/>
+                </a:solidFill>
+                <a:latin typeface="Liberation Sans"/>
+                <a:ea typeface="Liberation Sans"/>
+                <a:cs typeface="Liberation Sans"/>
+              </a:defRPr>
+            </a:pPr>
+            <a:r>
+              <a:rPr sz="1275" b="0">
+                <a:solidFill>
+                  <a:srgbClr val="667B6D"/>
+                </a:solidFill>
+                <a:latin typeface="Liberation Sans"/>
+                <a:ea typeface="Liberation Sans"/>
+                <a:cs typeface="Liberation Sans"/>
+              </a:rPr>
+              <a:t>Рабочий сайт QorAI. На экранах учебные данные.</a:t>
+            </a:r>
+          </a:p>
+        </p:txBody>
+      </p:sp>
+      <p:sp>
+        <p:nvSpPr>
+          <p:cNvPr id="6" name="">
             <a:extLst xmlns:a="http://schemas.openxmlformats.org/drawingml/2006/main">
               <a:ext uri="{FF2B5EF4-FFF2-40B4-BE49-F238E27FC236}">
-                <a16:creationId xmlns:a16="http://schemas.microsoft.com/office/drawing/2014/main" id="{1CAB5216-4304-44DC-B454-8CB0E9BCF4F4}"/>
+                <a16:creationId xmlns:a16="http://schemas.microsoft.com/office/drawing/2014/main" id="{85A4108C-053B-4516-B4E4-4B5984F38B1E}"/>
               </a:ext>
             </a:extLst>
           </p:cNvPr>
@@ -4354,8 +5408,8 @@
         </p:nvSpPr>
         <p:spPr>
           <a:xfrm xmlns:a="http://schemas.openxmlformats.org/drawingml/2006/main">
-            <a:off x="723900" y="3810000"/>
-            <a:ext cx="5429250" cy="2190750"/>
+            <a:off x="552450" y="285750"/>
+            <a:ext cx="1524000" cy="381000"/>
           </a:xfrm>
           <a:prstGeom xmlns:a="http://schemas.openxmlformats.org/drawingml/2006/main" prst="rect">
             <a:avLst/>
@@ -4369,9 +5423,9 @@
           <a:bodyPr xmlns:a="http://schemas.openxmlformats.org/drawingml/2006/main"/>
           <a:lstStyle xmlns:a="http://schemas.openxmlformats.org/drawingml/2006/main">
             <a:defPPr>
-              <a:defRPr sz="1875" b="0">
-                <a:solidFill>
-                  <a:srgbClr val="233C32"/>
+              <a:defRPr sz="1800" b="1">
+                <a:solidFill>
+                  <a:srgbClr val="24664F"/>
                 </a:solidFill>
                 <a:latin typeface="Liberation Sans"/>
                 <a:ea typeface="Liberation Sans"/>
@@ -4381,130 +5435,33 @@
           </a:lstStyle>
           <a:p xmlns:a="http://schemas.openxmlformats.org/drawingml/2006/main">
             <a:pPr>
-              <a:defRPr sz="1875" b="0">
-                <a:solidFill>
-                  <a:srgbClr val="233C32"/>
-                </a:solidFill>
-                <a:latin typeface="Liberation Sans"/>
-                <a:ea typeface="Liberation Sans"/>
-                <a:cs typeface="Liberation Sans"/>
-              </a:defRPr>
-            </a:pPr>
-            <a:r>
-              <a:rPr sz="1875" b="0">
-                <a:solidFill>
-                  <a:srgbClr val="233C32"/>
-                </a:solidFill>
-                <a:latin typeface="Liberation Sans"/>
-                <a:ea typeface="Liberation Sans"/>
-                <a:cs typeface="Liberation Sans"/>
-              </a:rPr>
-              <a:t>1. Фото, голос или текст закупки</a:t>
-            </a:r>
-          </a:p>
-          <a:p xmlns:a="http://schemas.openxmlformats.org/drawingml/2006/main">
-            <a:pPr>
-              <a:defRPr sz="1875" b="0">
-                <a:solidFill>
-                  <a:srgbClr val="233C32"/>
-                </a:solidFill>
-                <a:latin typeface="Liberation Sans"/>
-                <a:ea typeface="Liberation Sans"/>
-                <a:cs typeface="Liberation Sans"/>
-              </a:defRPr>
-            </a:pPr>
-            <a:r>
-              <a:rPr sz="1875" b="0">
-                <a:solidFill>
-                  <a:srgbClr val="233C32"/>
-                </a:solidFill>
-                <a:latin typeface="Liberation Sans"/>
-                <a:ea typeface="Liberation Sans"/>
-                <a:cs typeface="Liberation Sans"/>
-              </a:rPr>
-              <a:t>2. Проверка распознанных позиций</a:t>
-            </a:r>
-          </a:p>
-          <a:p xmlns:a="http://schemas.openxmlformats.org/drawingml/2006/main">
-            <a:pPr>
-              <a:defRPr sz="1875" b="0">
-                <a:solidFill>
-                  <a:srgbClr val="233C32"/>
-                </a:solidFill>
-                <a:latin typeface="Liberation Sans"/>
-                <a:ea typeface="Liberation Sans"/>
-                <a:cs typeface="Liberation Sans"/>
-              </a:defRPr>
-            </a:pPr>
-            <a:r>
-              <a:rPr sz="1875" b="0">
-                <a:solidFill>
-                  <a:srgbClr val="233C32"/>
-                </a:solidFill>
-                <a:latin typeface="Liberation Sans"/>
-                <a:ea typeface="Liberation Sans"/>
-                <a:cs typeface="Liberation Sans"/>
-              </a:rPr>
-              <a:t>3. Подтверждённый приход на склад</a:t>
-            </a:r>
-          </a:p>
-          <a:p xmlns:a="http://schemas.openxmlformats.org/drawingml/2006/main">
-            <a:pPr>
-              <a:defRPr sz="1875" b="0">
-                <a:solidFill>
-                  <a:srgbClr val="233C32"/>
-                </a:solidFill>
-                <a:latin typeface="Liberation Sans"/>
-                <a:ea typeface="Liberation Sans"/>
-                <a:cs typeface="Liberation Sans"/>
-              </a:defRPr>
-            </a:pPr>
-            <a:r>
-              <a:rPr sz="1875" b="0">
-                <a:solidFill>
-                  <a:srgbClr val="233C32"/>
-                </a:solidFill>
-                <a:latin typeface="Liberation Sans"/>
-                <a:ea typeface="Liberation Sans"/>
-                <a:cs typeface="Liberation Sans"/>
-              </a:rPr>
-              <a:t>4. Продажи, списания и план закупок</a:t>
-            </a:r>
-          </a:p>
-        </p:txBody>
-      </p:sp>
-      <p:pic>
-        <p:nvPicPr>
-          <p:cNvPr id="6" name="">
-            <a:extLst xmlns:a="http://schemas.openxmlformats.org/drawingml/2006/main">
-              <a:ext uri="{FF2B5EF4-FFF2-40B4-BE49-F238E27FC236}">
-                <a16:creationId xmlns:a16="http://schemas.microsoft.com/office/drawing/2014/main" id="{A982BB5C-7570-4747-BD88-1B20C1CA9713}"/>
-              </a:ext>
-            </a:extLst>
-          </p:cNvPr>
-          <p:cNvPicPr>
-            <a:picLocks xmlns:a="http://schemas.openxmlformats.org/drawingml/2006/main" noChangeAspect="1"/>
-          </p:cNvPicPr>
-          <p:nvPr/>
-        </p:nvPicPr>
-        <p:blipFill>
-          <a:blip xmlns:r="http://schemas.openxmlformats.org/officeDocument/2006/relationships" xmlns:a="http://schemas.openxmlformats.org/drawingml/2006/main" r:embed="R8ec4f89aa2ec4169"/>
-          <a:stretch xmlns:a="http://schemas.openxmlformats.org/drawingml/2006/main"/>
-        </p:blipFill>
-        <p:spPr>
-          <a:xfrm xmlns:a="http://schemas.openxmlformats.org/drawingml/2006/main">
-            <a:off x="7959944" y="1047750"/>
-            <a:ext cx="2463362" cy="5334000"/>
-          </a:xfrm>
-          <a:prstGeom xmlns:a="http://schemas.openxmlformats.org/drawingml/2006/main" prst="rect">
-            <a:avLst/>
-          </a:prstGeom>
-        </p:spPr>
-      </p:pic>
+              <a:defRPr sz="1800" b="1">
+                <a:solidFill>
+                  <a:srgbClr val="24664F"/>
+                </a:solidFill>
+                <a:latin typeface="Liberation Sans"/>
+                <a:ea typeface="Liberation Sans"/>
+                <a:cs typeface="Liberation Sans"/>
+              </a:defRPr>
+            </a:pPr>
+            <a:r>
+              <a:rPr sz="1800" b="1">
+                <a:solidFill>
+                  <a:srgbClr val="24664F"/>
+                </a:solidFill>
+                <a:latin typeface="Liberation Sans"/>
+                <a:ea typeface="Liberation Sans"/>
+                <a:cs typeface="Liberation Sans"/>
+              </a:rPr>
+              <a:t>QorAI</a:t>
+            </a:r>
+          </a:p>
+        </p:txBody>
+      </p:sp>
     </p:spTree>
     <p:extLst>
       <p:ext uri="{BB962C8B-B14F-4D97-AF65-F5344CB8AC3E}">
-        <p14:creationId xmlns:p14="http://schemas.microsoft.com/office/powerpoint/2010/main" val="1130751885"/>
+        <p14:creationId xmlns:p14="http://schemas.microsoft.com/office/powerpoint/2010/main" val="1953414228"/>
       </p:ext>
     </p:extLst>
   </p:cSld>
@@ -4517,7 +5474,7 @@
     <p:bg>
       <p:bgPr>
         <a:solidFill xmlns:a="http://schemas.openxmlformats.org/drawingml/2006/main">
-          <a:srgbClr val="F7F8F5"/>
+          <a:srgbClr val="173F33"/>
         </a:solidFill>
       </p:bgPr>
     </p:bg>
@@ -4532,10 +5489,10 @@
       </p:grpSpPr>
       <p:sp>
         <p:nvSpPr>
-          <p:cNvPr id="6" name="">
+          <p:cNvPr id="10" name="">
             <a:extLst xmlns:a="http://schemas.openxmlformats.org/drawingml/2006/main">
               <a:ext uri="{FF2B5EF4-FFF2-40B4-BE49-F238E27FC236}">
-                <a16:creationId xmlns:a16="http://schemas.microsoft.com/office/drawing/2014/main" id="{6A17FEA4-224D-4C58-A856-7501C1C3A915}"/>
+                <a16:creationId xmlns:a16="http://schemas.microsoft.com/office/drawing/2014/main" id="{27421E1E-3EBE-4A74-9245-93862A5CFA04}"/>
               </a:ext>
             </a:extLst>
           </p:cNvPr>
@@ -4546,8 +5503,8 @@
         </p:nvSpPr>
         <p:spPr>
           <a:xfrm xmlns:a="http://schemas.openxmlformats.org/drawingml/2006/main">
-            <a:off x="685800" y="361950"/>
-            <a:ext cx="4762500" cy="381000"/>
+            <a:off x="10553700" y="323850"/>
+            <a:ext cx="1143000" cy="266700"/>
           </a:xfrm>
           <a:prstGeom xmlns:a="http://schemas.openxmlformats.org/drawingml/2006/main" prst="rect">
             <a:avLst/>
@@ -4561,9 +5518,9 @@
           <a:bodyPr xmlns:a="http://schemas.openxmlformats.org/drawingml/2006/main"/>
           <a:lstStyle xmlns:a="http://schemas.openxmlformats.org/drawingml/2006/main">
             <a:defPPr>
-              <a:defRPr sz="1650" b="1">
-                <a:solidFill>
-                  <a:srgbClr val="668354"/>
+              <a:defRPr sz="1200" b="0">
+                <a:solidFill>
+                  <a:srgbClr val="D5E8B6"/>
                 </a:solidFill>
                 <a:latin typeface="Liberation Sans"/>
                 <a:ea typeface="Liberation Sans"/>
@@ -4573,25 +5530,25 @@
           </a:lstStyle>
           <a:p xmlns:a="http://schemas.openxmlformats.org/drawingml/2006/main">
             <a:pPr>
-              <a:defRPr sz="1650" b="1">
-                <a:solidFill>
-                  <a:srgbClr val="668354"/>
-                </a:solidFill>
-                <a:latin typeface="Liberation Sans"/>
-                <a:ea typeface="Liberation Sans"/>
-                <a:cs typeface="Liberation Sans"/>
-              </a:defRPr>
-            </a:pPr>
-            <a:r>
-              <a:rPr sz="1650" b="1">
-                <a:solidFill>
-                  <a:srgbClr val="668354"/>
-                </a:solidFill>
-                <a:latin typeface="Liberation Sans"/>
-                <a:ea typeface="Liberation Sans"/>
-                <a:cs typeface="Liberation Sans"/>
-              </a:rPr>
-              <a:t>QorAI</a:t>
+              <a:defRPr sz="1200" b="0">
+                <a:solidFill>
+                  <a:srgbClr val="D5E8B6"/>
+                </a:solidFill>
+                <a:latin typeface="Liberation Sans"/>
+                <a:ea typeface="Liberation Sans"/>
+                <a:cs typeface="Liberation Sans"/>
+              </a:defRPr>
+            </a:pPr>
+            <a:r>
+              <a:rPr sz="1200" b="0">
+                <a:solidFill>
+                  <a:srgbClr val="D5E8B6"/>
+                </a:solidFill>
+                <a:latin typeface="Liberation Sans"/>
+                <a:ea typeface="Liberation Sans"/>
+                <a:cs typeface="Liberation Sans"/>
+              </a:rPr>
+              <a:t>04 / 10</a:t>
             </a:r>
           </a:p>
         </p:txBody>
@@ -4601,7 +5558,7 @@
           <p:cNvPr id="2" name="">
             <a:extLst xmlns:a="http://schemas.openxmlformats.org/drawingml/2006/main">
               <a:ext uri="{FF2B5EF4-FFF2-40B4-BE49-F238E27FC236}">
-                <a16:creationId xmlns:a16="http://schemas.microsoft.com/office/drawing/2014/main" id="{4D5E939A-4519-4A46-9515-BE574B89D783}"/>
+                <a16:creationId xmlns:a16="http://schemas.microsoft.com/office/drawing/2014/main" id="{9D261FB0-522D-4911-9634-78FCB658567F}"/>
               </a:ext>
             </a:extLst>
           </p:cNvPr>
@@ -4612,8 +5569,8 @@
         </p:nvSpPr>
         <p:spPr>
           <a:xfrm xmlns:a="http://schemas.openxmlformats.org/drawingml/2006/main">
-            <a:off x="10810875" y="381000"/>
-            <a:ext cx="666750" cy="333375"/>
+            <a:off x="552450" y="1352550"/>
+            <a:ext cx="4953000" cy="2143125"/>
           </a:xfrm>
           <a:prstGeom xmlns:a="http://schemas.openxmlformats.org/drawingml/2006/main" prst="rect">
             <a:avLst/>
@@ -4627,9 +5584,9 @@
           <a:bodyPr xmlns:a="http://schemas.openxmlformats.org/drawingml/2006/main"/>
           <a:lstStyle xmlns:a="http://schemas.openxmlformats.org/drawingml/2006/main">
             <a:defPPr>
-              <a:defRPr sz="1350" b="0">
-                <a:solidFill>
-                  <a:srgbClr val="668354"/>
+              <a:defRPr sz="4050" b="1">
+                <a:solidFill>
+                  <a:srgbClr val="FFFFFF"/>
                 </a:solidFill>
                 <a:latin typeface="Liberation Sans"/>
                 <a:ea typeface="Liberation Sans"/>
@@ -4639,25 +5596,71 @@
           </a:lstStyle>
           <a:p xmlns:a="http://schemas.openxmlformats.org/drawingml/2006/main">
             <a:pPr>
-              <a:defRPr sz="1350" b="0">
-                <a:solidFill>
-                  <a:srgbClr val="668354"/>
-                </a:solidFill>
-                <a:latin typeface="Liberation Sans"/>
-                <a:ea typeface="Liberation Sans"/>
-                <a:cs typeface="Liberation Sans"/>
-              </a:defRPr>
-            </a:pPr>
-            <a:r>
-              <a:rPr sz="1350" b="0">
-                <a:solidFill>
-                  <a:srgbClr val="668354"/>
-                </a:solidFill>
-                <a:latin typeface="Liberation Sans"/>
-                <a:ea typeface="Liberation Sans"/>
-                <a:cs typeface="Liberation Sans"/>
-              </a:rPr>
-              <a:t>04</a:t>
+              <a:defRPr sz="4050" b="1">
+                <a:solidFill>
+                  <a:srgbClr val="FFFFFF"/>
+                </a:solidFill>
+                <a:latin typeface="Liberation Sans"/>
+                <a:ea typeface="Liberation Sans"/>
+                <a:cs typeface="Liberation Sans"/>
+              </a:defRPr>
+            </a:pPr>
+            <a:r>
+              <a:rPr sz="4050" b="1">
+                <a:solidFill>
+                  <a:srgbClr val="FFFFFF"/>
+                </a:solidFill>
+                <a:latin typeface="Liberation Sans"/>
+                <a:ea typeface="Liberation Sans"/>
+                <a:cs typeface="Liberation Sans"/>
+              </a:rPr>
+              <a:t>От накладной</a:t>
+            </a:r>
+          </a:p>
+          <a:p xmlns:a="http://schemas.openxmlformats.org/drawingml/2006/main">
+            <a:pPr>
+              <a:defRPr sz="4050" b="1">
+                <a:solidFill>
+                  <a:srgbClr val="FFFFFF"/>
+                </a:solidFill>
+                <a:latin typeface="Liberation Sans"/>
+                <a:ea typeface="Liberation Sans"/>
+                <a:cs typeface="Liberation Sans"/>
+              </a:defRPr>
+            </a:pPr>
+            <a:r>
+              <a:rPr sz="4050" b="1">
+                <a:solidFill>
+                  <a:srgbClr val="FFFFFF"/>
+                </a:solidFill>
+                <a:latin typeface="Liberation Sans"/>
+                <a:ea typeface="Liberation Sans"/>
+                <a:cs typeface="Liberation Sans"/>
+              </a:rPr>
+              <a:t>к приходу</a:t>
+            </a:r>
+          </a:p>
+          <a:p xmlns:a="http://schemas.openxmlformats.org/drawingml/2006/main">
+            <a:pPr>
+              <a:defRPr sz="4050" b="1">
+                <a:solidFill>
+                  <a:srgbClr val="FFFFFF"/>
+                </a:solidFill>
+                <a:latin typeface="Liberation Sans"/>
+                <a:ea typeface="Liberation Sans"/>
+                <a:cs typeface="Liberation Sans"/>
+              </a:defRPr>
+            </a:pPr>
+            <a:r>
+              <a:rPr sz="4050" b="1">
+                <a:solidFill>
+                  <a:srgbClr val="FFFFFF"/>
+                </a:solidFill>
+                <a:latin typeface="Liberation Sans"/>
+                <a:ea typeface="Liberation Sans"/>
+                <a:cs typeface="Liberation Sans"/>
+              </a:rPr>
+              <a:t>на склад</a:t>
             </a:r>
           </a:p>
         </p:txBody>
@@ -4667,7 +5670,7 @@
           <p:cNvPr id="3" name="">
             <a:extLst xmlns:a="http://schemas.openxmlformats.org/drawingml/2006/main">
               <a:ext uri="{FF2B5EF4-FFF2-40B4-BE49-F238E27FC236}">
-                <a16:creationId xmlns:a16="http://schemas.microsoft.com/office/drawing/2014/main" id="{9A84D536-5AB0-43B8-A398-182AC316035A}"/>
+                <a16:creationId xmlns:a16="http://schemas.microsoft.com/office/drawing/2014/main" id="{164C1E83-2C6B-4BA4-82EF-1647CC0399B6}"/>
               </a:ext>
             </a:extLst>
           </p:cNvPr>
@@ -4678,8 +5681,8 @@
         </p:nvSpPr>
         <p:spPr>
           <a:xfrm xmlns:a="http://schemas.openxmlformats.org/drawingml/2006/main">
-            <a:off x="685800" y="1171575"/>
-            <a:ext cx="10820400" cy="1476375"/>
+            <a:off x="590550" y="3905250"/>
+            <a:ext cx="5048250" cy="1362075"/>
           </a:xfrm>
           <a:prstGeom xmlns:a="http://schemas.openxmlformats.org/drawingml/2006/main" prst="rect">
             <a:avLst/>
@@ -4693,9 +5696,9 @@
           <a:bodyPr xmlns:a="http://schemas.openxmlformats.org/drawingml/2006/main"/>
           <a:lstStyle xmlns:a="http://schemas.openxmlformats.org/drawingml/2006/main">
             <a:defPPr>
-              <a:defRPr sz="4350" b="1">
-                <a:solidFill>
-                  <a:srgbClr val="233C32"/>
+              <a:defRPr sz="1950" b="0">
+                <a:solidFill>
+                  <a:srgbClr val="D5E8B6"/>
                 </a:solidFill>
                 <a:latin typeface="Liberation Sans"/>
                 <a:ea typeface="Liberation Sans"/>
@@ -4705,48 +5708,71 @@
           </a:lstStyle>
           <a:p xmlns:a="http://schemas.openxmlformats.org/drawingml/2006/main">
             <a:pPr>
-              <a:defRPr sz="4350" b="1">
-                <a:solidFill>
-                  <a:srgbClr val="233C32"/>
-                </a:solidFill>
-                <a:latin typeface="Liberation Sans"/>
-                <a:ea typeface="Liberation Sans"/>
-                <a:cs typeface="Liberation Sans"/>
-              </a:defRPr>
-            </a:pPr>
-            <a:r>
-              <a:rPr sz="4350" b="1">
-                <a:solidFill>
-                  <a:srgbClr val="233C32"/>
-                </a:solidFill>
-                <a:latin typeface="Liberation Sans"/>
-                <a:ea typeface="Liberation Sans"/>
-                <a:cs typeface="Liberation Sans"/>
-              </a:rPr>
-              <a:t>Рекомендация объясняет,</a:t>
-            </a:r>
-          </a:p>
-          <a:p xmlns:a="http://schemas.openxmlformats.org/drawingml/2006/main">
-            <a:pPr>
-              <a:defRPr sz="4350" b="1">
-                <a:solidFill>
-                  <a:srgbClr val="233C32"/>
-                </a:solidFill>
-                <a:latin typeface="Liberation Sans"/>
-                <a:ea typeface="Liberation Sans"/>
-                <a:cs typeface="Liberation Sans"/>
-              </a:defRPr>
-            </a:pPr>
-            <a:r>
-              <a:rPr sz="4350" b="1">
-                <a:solidFill>
-                  <a:srgbClr val="233C32"/>
-                </a:solidFill>
-                <a:latin typeface="Liberation Sans"/>
-                <a:ea typeface="Liberation Sans"/>
-                <a:cs typeface="Liberation Sans"/>
-              </a:rPr>
-              <a:t>откуда взялось число</a:t>
+              <a:defRPr sz="1950" b="0">
+                <a:solidFill>
+                  <a:srgbClr val="D5E8B6"/>
+                </a:solidFill>
+                <a:latin typeface="Liberation Sans"/>
+                <a:ea typeface="Liberation Sans"/>
+                <a:cs typeface="Liberation Sans"/>
+              </a:defRPr>
+            </a:pPr>
+            <a:r>
+              <a:rPr sz="1950" b="0">
+                <a:solidFill>
+                  <a:srgbClr val="D5E8B6"/>
+                </a:solidFill>
+                <a:latin typeface="Liberation Sans"/>
+                <a:ea typeface="Liberation Sans"/>
+                <a:cs typeface="Liberation Sans"/>
+              </a:rPr>
+              <a:t>Фото, голос или текст.</a:t>
+            </a:r>
+          </a:p>
+          <a:p xmlns:a="http://schemas.openxmlformats.org/drawingml/2006/main">
+            <a:pPr>
+              <a:defRPr sz="1950" b="0">
+                <a:solidFill>
+                  <a:srgbClr val="D5E8B6"/>
+                </a:solidFill>
+                <a:latin typeface="Liberation Sans"/>
+                <a:ea typeface="Liberation Sans"/>
+                <a:cs typeface="Liberation Sans"/>
+              </a:defRPr>
+            </a:pPr>
+            <a:r>
+              <a:rPr sz="1950" b="0">
+                <a:solidFill>
+                  <a:srgbClr val="D5E8B6"/>
+                </a:solidFill>
+                <a:latin typeface="Liberation Sans"/>
+                <a:ea typeface="Liberation Sans"/>
+                <a:cs typeface="Liberation Sans"/>
+              </a:rPr>
+              <a:t>Проверка позиций владельцем.</a:t>
+            </a:r>
+          </a:p>
+          <a:p xmlns:a="http://schemas.openxmlformats.org/drawingml/2006/main">
+            <a:pPr>
+              <a:defRPr sz="1950" b="0">
+                <a:solidFill>
+                  <a:srgbClr val="D5E8B6"/>
+                </a:solidFill>
+                <a:latin typeface="Liberation Sans"/>
+                <a:ea typeface="Liberation Sans"/>
+                <a:cs typeface="Liberation Sans"/>
+              </a:defRPr>
+            </a:pPr>
+            <a:r>
+              <a:rPr sz="1950" b="0">
+                <a:solidFill>
+                  <a:srgbClr val="D5E8B6"/>
+                </a:solidFill>
+                <a:latin typeface="Liberation Sans"/>
+                <a:ea typeface="Liberation Sans"/>
+                <a:cs typeface="Liberation Sans"/>
+              </a:rPr>
+              <a:t>Подтверждение прихода.</a:t>
             </a:r>
           </a:p>
         </p:txBody>
@@ -4756,7 +5782,7 @@
           <p:cNvPr id="4" name="">
             <a:extLst xmlns:a="http://schemas.openxmlformats.org/drawingml/2006/main">
               <a:ext uri="{FF2B5EF4-FFF2-40B4-BE49-F238E27FC236}">
-                <a16:creationId xmlns:a16="http://schemas.microsoft.com/office/drawing/2014/main" id="{EDB6B42C-CFD8-44CB-AFD0-2ECC9A0A3F15}"/>
+                <a16:creationId xmlns:a16="http://schemas.microsoft.com/office/drawing/2014/main" id="{BB579632-3352-431B-8837-3B7CD31D9DCA}"/>
               </a:ext>
             </a:extLst>
           </p:cNvPr>
@@ -4767,8 +5793,8 @@
         </p:nvSpPr>
         <p:spPr>
           <a:xfrm xmlns:a="http://schemas.openxmlformats.org/drawingml/2006/main">
-            <a:off x="723900" y="2809875"/>
-            <a:ext cx="10477500" cy="571500"/>
+            <a:off x="6286500" y="981075"/>
+            <a:ext cx="2428875" cy="333375"/>
           </a:xfrm>
           <a:prstGeom xmlns:a="http://schemas.openxmlformats.org/drawingml/2006/main" prst="rect">
             <a:avLst/>
@@ -4782,9 +5808,9 @@
           <a:bodyPr xmlns:a="http://schemas.openxmlformats.org/drawingml/2006/main"/>
           <a:lstStyle xmlns:a="http://schemas.openxmlformats.org/drawingml/2006/main">
             <a:defPPr>
-              <a:defRPr sz="1950" b="0">
-                <a:solidFill>
-                  <a:srgbClr val="668354"/>
+              <a:defRPr sz="1725" b="1">
+                <a:solidFill>
+                  <a:srgbClr val="D5E8B6"/>
                 </a:solidFill>
                 <a:latin typeface="Liberation Sans"/>
                 <a:ea typeface="Liberation Sans"/>
@@ -4794,25 +5820,25 @@
           </a:lstStyle>
           <a:p xmlns:a="http://schemas.openxmlformats.org/drawingml/2006/main">
             <a:pPr>
-              <a:defRPr sz="1950" b="0">
-                <a:solidFill>
-                  <a:srgbClr val="668354"/>
-                </a:solidFill>
-                <a:latin typeface="Liberation Sans"/>
-                <a:ea typeface="Liberation Sans"/>
-                <a:cs typeface="Liberation Sans"/>
-              </a:defRPr>
-            </a:pPr>
-            <a:r>
-              <a:rPr sz="1950" b="0">
-                <a:solidFill>
-                  <a:srgbClr val="668354"/>
-                </a:solidFill>
-                <a:latin typeface="Liberation Sans"/>
-                <a:ea typeface="Liberation Sans"/>
-                <a:cs typeface="Liberation Sans"/>
-              </a:rPr>
-              <a:t>Прогноз MVP на основе продаж и остатков</a:t>
+              <a:defRPr sz="1725" b="1">
+                <a:solidFill>
+                  <a:srgbClr val="D5E8B6"/>
+                </a:solidFill>
+                <a:latin typeface="Liberation Sans"/>
+                <a:ea typeface="Liberation Sans"/>
+                <a:cs typeface="Liberation Sans"/>
+              </a:defRPr>
+            </a:pPr>
+            <a:r>
+              <a:rPr sz="1725" b="1">
+                <a:solidFill>
+                  <a:srgbClr val="D5E8B6"/>
+                </a:solidFill>
+                <a:latin typeface="Liberation Sans"/>
+                <a:ea typeface="Liberation Sans"/>
+                <a:cs typeface="Liberation Sans"/>
+              </a:rPr>
+              <a:t>Ввод закупки</a:t>
             </a:r>
           </a:p>
         </p:txBody>
@@ -4822,7 +5848,7 @@
           <p:cNvPr id="5" name="">
             <a:extLst xmlns:a="http://schemas.openxmlformats.org/drawingml/2006/main">
               <a:ext uri="{FF2B5EF4-FFF2-40B4-BE49-F238E27FC236}">
-                <a16:creationId xmlns:a16="http://schemas.microsoft.com/office/drawing/2014/main" id="{0213CC8C-BAD8-42A6-ADE9-53999233F660}"/>
+                <a16:creationId xmlns:a16="http://schemas.microsoft.com/office/drawing/2014/main" id="{F8930CE5-07D8-4E18-B774-D39CCC4FD7E3}"/>
               </a:ext>
             </a:extLst>
           </p:cNvPr>
@@ -4833,8 +5859,8 @@
         </p:nvSpPr>
         <p:spPr>
           <a:xfrm xmlns:a="http://schemas.openxmlformats.org/drawingml/2006/main">
-            <a:off x="723900" y="3714750"/>
-            <a:ext cx="10668000" cy="2381250"/>
+            <a:off x="9124950" y="981075"/>
+            <a:ext cx="2428875" cy="333375"/>
           </a:xfrm>
           <a:prstGeom xmlns:a="http://schemas.openxmlformats.org/drawingml/2006/main" prst="rect">
             <a:avLst/>
@@ -4848,9 +5874,9 @@
           <a:bodyPr xmlns:a="http://schemas.openxmlformats.org/drawingml/2006/main"/>
           <a:lstStyle xmlns:a="http://schemas.openxmlformats.org/drawingml/2006/main">
             <a:defPPr>
-              <a:defRPr sz="2025" b="0">
-                <a:solidFill>
-                  <a:srgbClr val="233C32"/>
+              <a:defRPr sz="1725" b="1">
+                <a:solidFill>
+                  <a:srgbClr val="D5E8B6"/>
                 </a:solidFill>
                 <a:latin typeface="Liberation Sans"/>
                 <a:ea typeface="Liberation Sans"/>
@@ -4860,94 +5886,215 @@
           </a:lstStyle>
           <a:p xmlns:a="http://schemas.openxmlformats.org/drawingml/2006/main">
             <a:pPr>
-              <a:defRPr sz="2025" b="0">
-                <a:solidFill>
-                  <a:srgbClr val="233C32"/>
-                </a:solidFill>
-                <a:latin typeface="Liberation Sans"/>
-                <a:ea typeface="Liberation Sans"/>
-                <a:cs typeface="Liberation Sans"/>
-              </a:defRPr>
-            </a:pPr>
-            <a:r>
-              <a:rPr sz="2025" b="0">
-                <a:solidFill>
-                  <a:srgbClr val="233C32"/>
-                </a:solidFill>
-                <a:latin typeface="Liberation Sans"/>
-                <a:ea typeface="Liberation Sans"/>
-                <a:cs typeface="Liberation Sans"/>
-              </a:rPr>
-              <a:t>История продаж до 28 дней</a:t>
-            </a:r>
-          </a:p>
-          <a:p xmlns:a="http://schemas.openxmlformats.org/drawingml/2006/main">
-            <a:pPr>
-              <a:defRPr sz="2025" b="0">
-                <a:solidFill>
-                  <a:srgbClr val="233C32"/>
-                </a:solidFill>
-                <a:latin typeface="Liberation Sans"/>
-                <a:ea typeface="Liberation Sans"/>
-                <a:cs typeface="Liberation Sans"/>
-              </a:defRPr>
-            </a:pPr>
-            <a:r>
-              <a:rPr sz="2025" b="0">
-                <a:solidFill>
-                  <a:srgbClr val="233C32"/>
-                </a:solidFill>
-                <a:latin typeface="Liberation Sans"/>
-                <a:ea typeface="Liberation Sans"/>
-                <a:cs typeface="Liberation Sans"/>
-              </a:rPr>
-              <a:t>Горизонт поставки и запас</a:t>
-            </a:r>
-          </a:p>
-          <a:p xmlns:a="http://schemas.openxmlformats.org/drawingml/2006/main">
-            <a:pPr>
-              <a:defRPr sz="2025" b="0">
-                <a:solidFill>
-                  <a:srgbClr val="233C32"/>
-                </a:solidFill>
-                <a:latin typeface="Liberation Sans"/>
-                <a:ea typeface="Liberation Sans"/>
-                <a:cs typeface="Liberation Sans"/>
-              </a:defRPr>
-            </a:pPr>
-            <a:r>
-              <a:rPr sz="2025" b="0">
-                <a:solidFill>
-                  <a:srgbClr val="233C32"/>
-                </a:solidFill>
-                <a:latin typeface="Liberation Sans"/>
-                <a:ea typeface="Liberation Sans"/>
-                <a:cs typeface="Liberation Sans"/>
-              </a:rPr>
-              <a:t>Поправки на выходные и погоду</a:t>
-            </a:r>
-          </a:p>
-          <a:p xmlns:a="http://schemas.openxmlformats.org/drawingml/2006/main">
-            <a:pPr>
-              <a:defRPr sz="2025" b="0">
-                <a:solidFill>
-                  <a:srgbClr val="233C32"/>
-                </a:solidFill>
-                <a:latin typeface="Liberation Sans"/>
-                <a:ea typeface="Liberation Sans"/>
-                <a:cs typeface="Liberation Sans"/>
-              </a:defRPr>
-            </a:pPr>
-            <a:r>
-              <a:rPr sz="2025" b="0">
-                <a:solidFill>
-                  <a:srgbClr val="233C32"/>
-                </a:solidFill>
-                <a:latin typeface="Liberation Sans"/>
-                <a:ea typeface="Liberation Sans"/>
-                <a:cs typeface="Liberation Sans"/>
-              </a:rPr>
-              <a:t>Отдельный контроль сроков партий</a:t>
+              <a:defRPr sz="1725" b="1">
+                <a:solidFill>
+                  <a:srgbClr val="D5E8B6"/>
+                </a:solidFill>
+                <a:latin typeface="Liberation Sans"/>
+                <a:ea typeface="Liberation Sans"/>
+                <a:cs typeface="Liberation Sans"/>
+              </a:defRPr>
+            </a:pPr>
+            <a:r>
+              <a:rPr sz="1725" b="1">
+                <a:solidFill>
+                  <a:srgbClr val="D5E8B6"/>
+                </a:solidFill>
+                <a:latin typeface="Liberation Sans"/>
+                <a:ea typeface="Liberation Sans"/>
+                <a:cs typeface="Liberation Sans"/>
+              </a:rPr>
+              <a:t>Проверка</a:t>
+            </a:r>
+          </a:p>
+        </p:txBody>
+      </p:sp>
+      <p:pic>
+        <p:nvPicPr>
+          <p:cNvPr id="6" name="">
+            <a:extLst xmlns:a="http://schemas.openxmlformats.org/drawingml/2006/main">
+              <a:ext uri="{FF2B5EF4-FFF2-40B4-BE49-F238E27FC236}">
+                <a16:creationId xmlns:a16="http://schemas.microsoft.com/office/drawing/2014/main" id="{DC27F432-168A-4517-B324-70D1AE1852D6}"/>
+              </a:ext>
+            </a:extLst>
+          </p:cNvPr>
+          <p:cNvPicPr>
+            <a:picLocks xmlns:a="http://schemas.openxmlformats.org/drawingml/2006/main" noChangeAspect="1"/>
+          </p:cNvPicPr>
+          <p:nvPr/>
+        </p:nvPicPr>
+        <p:blipFill>
+          <a:blip xmlns:r="http://schemas.openxmlformats.org/officeDocument/2006/relationships" xmlns:a="http://schemas.openxmlformats.org/drawingml/2006/main" r:embed="R8813e4597bbd4046"/>
+          <a:srcRect xmlns:a="http://schemas.openxmlformats.org/drawingml/2006/main" l="2000" t="28000" r="2000" b="2000"/>
+          <a:stretch xmlns:a="http://schemas.openxmlformats.org/drawingml/2006/main"/>
+        </p:blipFill>
+        <p:spPr>
+          <a:xfrm xmlns:a="http://schemas.openxmlformats.org/drawingml/2006/main">
+            <a:off x="6191250" y="1543050"/>
+            <a:ext cx="2533650" cy="4343400"/>
+          </a:xfrm>
+          <a:prstGeom xmlns:a="http://schemas.openxmlformats.org/drawingml/2006/main" prst="rect">
+            <a:avLst/>
+          </a:prstGeom>
+        </p:spPr>
+      </p:pic>
+      <p:pic>
+        <p:nvPicPr>
+          <p:cNvPr id="7" name="">
+            <a:extLst xmlns:a="http://schemas.openxmlformats.org/drawingml/2006/main">
+              <a:ext uri="{FF2B5EF4-FFF2-40B4-BE49-F238E27FC236}">
+                <a16:creationId xmlns:a16="http://schemas.microsoft.com/office/drawing/2014/main" id="{E81C2364-28A2-40D1-8D46-0053FCF56607}"/>
+              </a:ext>
+            </a:extLst>
+          </p:cNvPr>
+          <p:cNvPicPr>
+            <a:picLocks xmlns:a="http://schemas.openxmlformats.org/drawingml/2006/main" noChangeAspect="1"/>
+          </p:cNvPicPr>
+          <p:nvPr/>
+        </p:nvPicPr>
+        <p:blipFill>
+          <a:blip xmlns:r="http://schemas.openxmlformats.org/officeDocument/2006/relationships" xmlns:a="http://schemas.openxmlformats.org/drawingml/2006/main" r:embed="Rcaee248a0b5e4c7d"/>
+          <a:srcRect xmlns:a="http://schemas.openxmlformats.org/drawingml/2006/main" l="2000" t="5500" r="2000" b="2000"/>
+          <a:stretch xmlns:a="http://schemas.openxmlformats.org/drawingml/2006/main"/>
+        </p:blipFill>
+        <p:spPr>
+          <a:xfrm xmlns:a="http://schemas.openxmlformats.org/drawingml/2006/main">
+            <a:off x="9086850" y="1419225"/>
+            <a:ext cx="2514600" cy="4857750"/>
+          </a:xfrm>
+          <a:prstGeom xmlns:a="http://schemas.openxmlformats.org/drawingml/2006/main" prst="rect">
+            <a:avLst/>
+          </a:prstGeom>
+        </p:spPr>
+      </p:pic>
+      <p:sp>
+        <p:nvSpPr>
+          <p:cNvPr id="8" name="">
+            <a:extLst xmlns:a="http://schemas.openxmlformats.org/drawingml/2006/main">
+              <a:ext uri="{FF2B5EF4-FFF2-40B4-BE49-F238E27FC236}">
+                <a16:creationId xmlns:a16="http://schemas.microsoft.com/office/drawing/2014/main" id="{34EC0840-C0C1-4923-8637-C1F5F2CB461F}"/>
+              </a:ext>
+            </a:extLst>
+          </p:cNvPr>
+          <p:cNvSpPr>
+            <a:spLocks xmlns:a="http://schemas.openxmlformats.org/drawingml/2006/main" noGrp="1"/>
+          </p:cNvSpPr>
+          <p:nvPr/>
+        </p:nvSpPr>
+        <p:spPr>
+          <a:xfrm xmlns:a="http://schemas.openxmlformats.org/drawingml/2006/main">
+            <a:off x="571500" y="6400800"/>
+            <a:ext cx="11010900" cy="266700"/>
+          </a:xfrm>
+          <a:prstGeom xmlns:a="http://schemas.openxmlformats.org/drawingml/2006/main" prst="rect">
+            <a:avLst/>
+          </a:prstGeom>
+          <a:noFill xmlns:a="http://schemas.openxmlformats.org/drawingml/2006/main"/>
+          <a:ln xmlns:a="http://schemas.openxmlformats.org/drawingml/2006/main" w="0">
+            <a:noFill/>
+          </a:ln>
+        </p:spPr>
+        <p:txBody>
+          <a:bodyPr xmlns:a="http://schemas.openxmlformats.org/drawingml/2006/main"/>
+          <a:lstStyle xmlns:a="http://schemas.openxmlformats.org/drawingml/2006/main">
+            <a:defPPr>
+              <a:defRPr sz="1275" b="0">
+                <a:solidFill>
+                  <a:srgbClr val="D5E8B6"/>
+                </a:solidFill>
+                <a:latin typeface="Liberation Sans"/>
+                <a:ea typeface="Liberation Sans"/>
+                <a:cs typeface="Liberation Sans"/>
+              </a:defRPr>
+            </a:defPPr>
+          </a:lstStyle>
+          <a:p xmlns:a="http://schemas.openxmlformats.org/drawingml/2006/main">
+            <a:pPr>
+              <a:defRPr sz="1275" b="0">
+                <a:solidFill>
+                  <a:srgbClr val="D5E8B6"/>
+                </a:solidFill>
+                <a:latin typeface="Liberation Sans"/>
+                <a:ea typeface="Liberation Sans"/>
+                <a:cs typeface="Liberation Sans"/>
+              </a:defRPr>
+            </a:pPr>
+            <a:r>
+              <a:rPr sz="1275" b="0">
+                <a:solidFill>
+                  <a:srgbClr val="D5E8B6"/>
+                </a:solidFill>
+                <a:latin typeface="Liberation Sans"/>
+                <a:ea typeface="Liberation Sans"/>
+                <a:cs typeface="Liberation Sans"/>
+              </a:rPr>
+              <a:t>Для фото и голоса нужен серверный ключ Gemini.</a:t>
+            </a:r>
+          </a:p>
+        </p:txBody>
+      </p:sp>
+      <p:sp>
+        <p:nvSpPr>
+          <p:cNvPr id="9" name="">
+            <a:extLst xmlns:a="http://schemas.openxmlformats.org/drawingml/2006/main">
+              <a:ext uri="{FF2B5EF4-FFF2-40B4-BE49-F238E27FC236}">
+                <a16:creationId xmlns:a16="http://schemas.microsoft.com/office/drawing/2014/main" id="{C8781B96-D0D8-4BC9-896A-458246DBBA88}"/>
+              </a:ext>
+            </a:extLst>
+          </p:cNvPr>
+          <p:cNvSpPr>
+            <a:spLocks xmlns:a="http://schemas.openxmlformats.org/drawingml/2006/main" noGrp="1"/>
+          </p:cNvSpPr>
+          <p:nvPr/>
+        </p:nvSpPr>
+        <p:spPr>
+          <a:xfrm xmlns:a="http://schemas.openxmlformats.org/drawingml/2006/main">
+            <a:off x="552450" y="285750"/>
+            <a:ext cx="1524000" cy="381000"/>
+          </a:xfrm>
+          <a:prstGeom xmlns:a="http://schemas.openxmlformats.org/drawingml/2006/main" prst="rect">
+            <a:avLst/>
+          </a:prstGeom>
+          <a:noFill xmlns:a="http://schemas.openxmlformats.org/drawingml/2006/main"/>
+          <a:ln xmlns:a="http://schemas.openxmlformats.org/drawingml/2006/main" w="0">
+            <a:noFill/>
+          </a:ln>
+        </p:spPr>
+        <p:txBody>
+          <a:bodyPr xmlns:a="http://schemas.openxmlformats.org/drawingml/2006/main"/>
+          <a:lstStyle xmlns:a="http://schemas.openxmlformats.org/drawingml/2006/main">
+            <a:defPPr>
+              <a:defRPr sz="1800" b="1">
+                <a:solidFill>
+                  <a:srgbClr val="D5E8B6"/>
+                </a:solidFill>
+                <a:latin typeface="Liberation Sans"/>
+                <a:ea typeface="Liberation Sans"/>
+                <a:cs typeface="Liberation Sans"/>
+              </a:defRPr>
+            </a:defPPr>
+          </a:lstStyle>
+          <a:p xmlns:a="http://schemas.openxmlformats.org/drawingml/2006/main">
+            <a:pPr>
+              <a:defRPr sz="1800" b="1">
+                <a:solidFill>
+                  <a:srgbClr val="D5E8B6"/>
+                </a:solidFill>
+                <a:latin typeface="Liberation Sans"/>
+                <a:ea typeface="Liberation Sans"/>
+                <a:cs typeface="Liberation Sans"/>
+              </a:defRPr>
+            </a:pPr>
+            <a:r>
+              <a:rPr sz="1800" b="1">
+                <a:solidFill>
+                  <a:srgbClr val="D5E8B6"/>
+                </a:solidFill>
+                <a:latin typeface="Liberation Sans"/>
+                <a:ea typeface="Liberation Sans"/>
+                <a:cs typeface="Liberation Sans"/>
+              </a:rPr>
+              <a:t>QorAI</a:t>
             </a:r>
           </a:p>
         </p:txBody>
@@ -4955,7 +6102,7 @@
     </p:spTree>
     <p:extLst>
       <p:ext uri="{BB962C8B-B14F-4D97-AF65-F5344CB8AC3E}">
-        <p14:creationId xmlns:p14="http://schemas.microsoft.com/office/powerpoint/2010/main" val="338511414"/>
+        <p14:creationId xmlns:p14="http://schemas.microsoft.com/office/powerpoint/2010/main" val="100034931"/>
       </p:ext>
     </p:extLst>
   </p:cSld>
@@ -4968,7 +6115,7 @@
     <p:bg>
       <p:bgPr>
         <a:solidFill xmlns:a="http://schemas.openxmlformats.org/drawingml/2006/main">
-          <a:srgbClr val="F7F8F5"/>
+          <a:srgbClr val="F5F6F0"/>
         </a:solidFill>
       </p:bgPr>
     </p:bg>
@@ -4983,10 +6130,10 @@
       </p:grpSpPr>
       <p:sp>
         <p:nvSpPr>
-          <p:cNvPr id="6" name="">
+          <p:cNvPr id="8" name="">
             <a:extLst xmlns:a="http://schemas.openxmlformats.org/drawingml/2006/main">
               <a:ext uri="{FF2B5EF4-FFF2-40B4-BE49-F238E27FC236}">
-                <a16:creationId xmlns:a16="http://schemas.microsoft.com/office/drawing/2014/main" id="{F62A9F81-59D1-4A92-B531-27767F1EC28E}"/>
+                <a16:creationId xmlns:a16="http://schemas.microsoft.com/office/drawing/2014/main" id="{4BBFE6AF-A5FF-402B-AB27-E8B60C35ECD6}"/>
               </a:ext>
             </a:extLst>
           </p:cNvPr>
@@ -4997,8 +6144,8 @@
         </p:nvSpPr>
         <p:spPr>
           <a:xfrm xmlns:a="http://schemas.openxmlformats.org/drawingml/2006/main">
-            <a:off x="685800" y="361950"/>
-            <a:ext cx="4762500" cy="381000"/>
+            <a:off x="10553700" y="323850"/>
+            <a:ext cx="1143000" cy="266700"/>
           </a:xfrm>
           <a:prstGeom xmlns:a="http://schemas.openxmlformats.org/drawingml/2006/main" prst="rect">
             <a:avLst/>
@@ -5012,9 +6159,9 @@
           <a:bodyPr xmlns:a="http://schemas.openxmlformats.org/drawingml/2006/main"/>
           <a:lstStyle xmlns:a="http://schemas.openxmlformats.org/drawingml/2006/main">
             <a:defPPr>
-              <a:defRPr sz="1650" b="1">
-                <a:solidFill>
-                  <a:srgbClr val="668354"/>
+              <a:defRPr sz="1200" b="0">
+                <a:solidFill>
+                  <a:srgbClr val="667B6D"/>
                 </a:solidFill>
                 <a:latin typeface="Liberation Sans"/>
                 <a:ea typeface="Liberation Sans"/>
@@ -5024,25 +6171,25 @@
           </a:lstStyle>
           <a:p xmlns:a="http://schemas.openxmlformats.org/drawingml/2006/main">
             <a:pPr>
-              <a:defRPr sz="1650" b="1">
-                <a:solidFill>
-                  <a:srgbClr val="668354"/>
-                </a:solidFill>
-                <a:latin typeface="Liberation Sans"/>
-                <a:ea typeface="Liberation Sans"/>
-                <a:cs typeface="Liberation Sans"/>
-              </a:defRPr>
-            </a:pPr>
-            <a:r>
-              <a:rPr sz="1650" b="1">
-                <a:solidFill>
-                  <a:srgbClr val="668354"/>
-                </a:solidFill>
-                <a:latin typeface="Liberation Sans"/>
-                <a:ea typeface="Liberation Sans"/>
-                <a:cs typeface="Liberation Sans"/>
-              </a:rPr>
-              <a:t>QorAI</a:t>
+              <a:defRPr sz="1200" b="0">
+                <a:solidFill>
+                  <a:srgbClr val="667B6D"/>
+                </a:solidFill>
+                <a:latin typeface="Liberation Sans"/>
+                <a:ea typeface="Liberation Sans"/>
+                <a:cs typeface="Liberation Sans"/>
+              </a:defRPr>
+            </a:pPr>
+            <a:r>
+              <a:rPr sz="1200" b="0">
+                <a:solidFill>
+                  <a:srgbClr val="667B6D"/>
+                </a:solidFill>
+                <a:latin typeface="Liberation Sans"/>
+                <a:ea typeface="Liberation Sans"/>
+                <a:cs typeface="Liberation Sans"/>
+              </a:rPr>
+              <a:t>05 / 10</a:t>
             </a:r>
           </a:p>
         </p:txBody>
@@ -5052,7 +6199,7 @@
           <p:cNvPr id="2" name="">
             <a:extLst xmlns:a="http://schemas.openxmlformats.org/drawingml/2006/main">
               <a:ext uri="{FF2B5EF4-FFF2-40B4-BE49-F238E27FC236}">
-                <a16:creationId xmlns:a16="http://schemas.microsoft.com/office/drawing/2014/main" id="{76547B61-817E-40F9-956A-6ECD51C5888D}"/>
+                <a16:creationId xmlns:a16="http://schemas.microsoft.com/office/drawing/2014/main" id="{7744C825-5349-417C-921A-29D8560AAA0D}"/>
               </a:ext>
             </a:extLst>
           </p:cNvPr>
@@ -5063,8 +6210,8 @@
         </p:nvSpPr>
         <p:spPr>
           <a:xfrm xmlns:a="http://schemas.openxmlformats.org/drawingml/2006/main">
-            <a:off x="10810875" y="381000"/>
-            <a:ext cx="666750" cy="333375"/>
+            <a:off x="552450" y="1104900"/>
+            <a:ext cx="11001375" cy="1209675"/>
           </a:xfrm>
           <a:prstGeom xmlns:a="http://schemas.openxmlformats.org/drawingml/2006/main" prst="rect">
             <a:avLst/>
@@ -5078,9 +6225,9 @@
           <a:bodyPr xmlns:a="http://schemas.openxmlformats.org/drawingml/2006/main"/>
           <a:lstStyle xmlns:a="http://schemas.openxmlformats.org/drawingml/2006/main">
             <a:defPPr>
-              <a:defRPr sz="1350" b="0">
-                <a:solidFill>
-                  <a:srgbClr val="668354"/>
+              <a:defRPr sz="3750" b="1">
+                <a:solidFill>
+                  <a:srgbClr val="1C382E"/>
                 </a:solidFill>
                 <a:latin typeface="Liberation Sans"/>
                 <a:ea typeface="Liberation Sans"/>
@@ -5090,25 +6237,48 @@
           </a:lstStyle>
           <a:p xmlns:a="http://schemas.openxmlformats.org/drawingml/2006/main">
             <a:pPr>
-              <a:defRPr sz="1350" b="0">
-                <a:solidFill>
-                  <a:srgbClr val="668354"/>
-                </a:solidFill>
-                <a:latin typeface="Liberation Sans"/>
-                <a:ea typeface="Liberation Sans"/>
-                <a:cs typeface="Liberation Sans"/>
-              </a:defRPr>
-            </a:pPr>
-            <a:r>
-              <a:rPr sz="1350" b="0">
-                <a:solidFill>
-                  <a:srgbClr val="668354"/>
-                </a:solidFill>
-                <a:latin typeface="Liberation Sans"/>
-                <a:ea typeface="Liberation Sans"/>
-                <a:cs typeface="Liberation Sans"/>
-              </a:rPr>
-              <a:t>05</a:t>
+              <a:defRPr sz="3750" b="1">
+                <a:solidFill>
+                  <a:srgbClr val="1C382E"/>
+                </a:solidFill>
+                <a:latin typeface="Liberation Sans"/>
+                <a:ea typeface="Liberation Sans"/>
+                <a:cs typeface="Liberation Sans"/>
+              </a:defRPr>
+            </a:pPr>
+            <a:r>
+              <a:rPr sz="3750" b="1">
+                <a:solidFill>
+                  <a:srgbClr val="1C382E"/>
+                </a:solidFill>
+                <a:latin typeface="Liberation Sans"/>
+                <a:ea typeface="Liberation Sans"/>
+                <a:cs typeface="Liberation Sans"/>
+              </a:rPr>
+              <a:t>QorAI подсказывает,</a:t>
+            </a:r>
+          </a:p>
+          <a:p xmlns:a="http://schemas.openxmlformats.org/drawingml/2006/main">
+            <a:pPr>
+              <a:defRPr sz="3750" b="1">
+                <a:solidFill>
+                  <a:srgbClr val="1C382E"/>
+                </a:solidFill>
+                <a:latin typeface="Liberation Sans"/>
+                <a:ea typeface="Liberation Sans"/>
+                <a:cs typeface="Liberation Sans"/>
+              </a:defRPr>
+            </a:pPr>
+            <a:r>
+              <a:rPr sz="3750" b="1">
+                <a:solidFill>
+                  <a:srgbClr val="1C382E"/>
+                </a:solidFill>
+                <a:latin typeface="Liberation Sans"/>
+                <a:ea typeface="Liberation Sans"/>
+                <a:cs typeface="Liberation Sans"/>
+              </a:rPr>
+              <a:t>сколько докупить</a:t>
             </a:r>
           </a:p>
         </p:txBody>
@@ -5118,7 +6288,7 @@
           <p:cNvPr id="3" name="">
             <a:extLst xmlns:a="http://schemas.openxmlformats.org/drawingml/2006/main">
               <a:ext uri="{FF2B5EF4-FFF2-40B4-BE49-F238E27FC236}">
-                <a16:creationId xmlns:a16="http://schemas.microsoft.com/office/drawing/2014/main" id="{C3ACF996-6E2D-4A4C-A8A4-886749F697EA}"/>
+                <a16:creationId xmlns:a16="http://schemas.microsoft.com/office/drawing/2014/main" id="{39290607-7C35-4412-A78E-C15478065A4E}"/>
               </a:ext>
             </a:extLst>
           </p:cNvPr>
@@ -5129,8 +6299,8 @@
         </p:nvSpPr>
         <p:spPr>
           <a:xfrm xmlns:a="http://schemas.openxmlformats.org/drawingml/2006/main">
-            <a:off x="685800" y="1171575"/>
-            <a:ext cx="10820400" cy="1476375"/>
+            <a:off x="590550" y="3048000"/>
+            <a:ext cx="3524250" cy="1476375"/>
           </a:xfrm>
           <a:prstGeom xmlns:a="http://schemas.openxmlformats.org/drawingml/2006/main" prst="rect">
             <a:avLst/>
@@ -5144,9 +6314,9 @@
           <a:bodyPr xmlns:a="http://schemas.openxmlformats.org/drawingml/2006/main"/>
           <a:lstStyle xmlns:a="http://schemas.openxmlformats.org/drawingml/2006/main">
             <a:defPPr>
-              <a:defRPr sz="4350" b="1">
-                <a:solidFill>
-                  <a:srgbClr val="233C32"/>
+              <a:defRPr sz="2400" b="1">
+                <a:solidFill>
+                  <a:srgbClr val="24664F"/>
                 </a:solidFill>
                 <a:latin typeface="Liberation Sans"/>
                 <a:ea typeface="Liberation Sans"/>
@@ -5156,48 +6326,71 @@
           </a:lstStyle>
           <a:p xmlns:a="http://schemas.openxmlformats.org/drawingml/2006/main">
             <a:pPr>
-              <a:defRPr sz="4350" b="1">
-                <a:solidFill>
-                  <a:srgbClr val="233C32"/>
-                </a:solidFill>
-                <a:latin typeface="Liberation Sans"/>
-                <a:ea typeface="Liberation Sans"/>
-                <a:cs typeface="Liberation Sans"/>
-              </a:defRPr>
-            </a:pPr>
-            <a:r>
-              <a:rPr sz="4350" b="1">
-                <a:solidFill>
-                  <a:srgbClr val="233C32"/>
-                </a:solidFill>
-                <a:latin typeface="Liberation Sans"/>
-                <a:ea typeface="Liberation Sans"/>
-                <a:cs typeface="Liberation Sans"/>
-              </a:rPr>
-              <a:t>Первые клиенты</a:t>
-            </a:r>
-          </a:p>
-          <a:p xmlns:a="http://schemas.openxmlformats.org/drawingml/2006/main">
-            <a:pPr>
-              <a:defRPr sz="4350" b="1">
-                <a:solidFill>
-                  <a:srgbClr val="233C32"/>
-                </a:solidFill>
-                <a:latin typeface="Liberation Sans"/>
-                <a:ea typeface="Liberation Sans"/>
-                <a:cs typeface="Liberation Sans"/>
-              </a:defRPr>
-            </a:pPr>
-            <a:r>
-              <a:rPr sz="4350" b="1">
-                <a:solidFill>
-                  <a:srgbClr val="233C32"/>
-                </a:solidFill>
-                <a:latin typeface="Liberation Sans"/>
-                <a:ea typeface="Liberation Sans"/>
-                <a:cs typeface="Liberation Sans"/>
-              </a:rPr>
-              <a:t>рядом с нами</a:t>
+              <a:defRPr sz="2400" b="1">
+                <a:solidFill>
+                  <a:srgbClr val="24664F"/>
+                </a:solidFill>
+                <a:latin typeface="Liberation Sans"/>
+                <a:ea typeface="Liberation Sans"/>
+                <a:cs typeface="Liberation Sans"/>
+              </a:defRPr>
+            </a:pPr>
+            <a:r>
+              <a:rPr sz="2400" b="1">
+                <a:solidFill>
+                  <a:srgbClr val="24664F"/>
+                </a:solidFill>
+                <a:latin typeface="Liberation Sans"/>
+                <a:ea typeface="Liberation Sans"/>
+                <a:cs typeface="Liberation Sans"/>
+              </a:rPr>
+              <a:t>Расход за день</a:t>
+            </a:r>
+          </a:p>
+          <a:p xmlns:a="http://schemas.openxmlformats.org/drawingml/2006/main">
+            <a:pPr>
+              <a:defRPr sz="2400" b="1">
+                <a:solidFill>
+                  <a:srgbClr val="24664F"/>
+                </a:solidFill>
+                <a:latin typeface="Liberation Sans"/>
+                <a:ea typeface="Liberation Sans"/>
+                <a:cs typeface="Liberation Sans"/>
+              </a:defRPr>
+            </a:pPr>
+            <a:r>
+              <a:rPr sz="2400" b="1">
+                <a:solidFill>
+                  <a:srgbClr val="24664F"/>
+                </a:solidFill>
+                <a:latin typeface="Liberation Sans"/>
+                <a:ea typeface="Liberation Sans"/>
+                <a:cs typeface="Liberation Sans"/>
+              </a:rPr>
+              <a:t>× дни покрытия</a:t>
+            </a:r>
+          </a:p>
+          <a:p xmlns:a="http://schemas.openxmlformats.org/drawingml/2006/main">
+            <a:pPr>
+              <a:defRPr sz="2400" b="1">
+                <a:solidFill>
+                  <a:srgbClr val="24664F"/>
+                </a:solidFill>
+                <a:latin typeface="Liberation Sans"/>
+                <a:ea typeface="Liberation Sans"/>
+                <a:cs typeface="Liberation Sans"/>
+              </a:defRPr>
+            </a:pPr>
+            <a:r>
+              <a:rPr sz="2400" b="1">
+                <a:solidFill>
+                  <a:srgbClr val="24664F"/>
+                </a:solidFill>
+                <a:latin typeface="Liberation Sans"/>
+                <a:ea typeface="Liberation Sans"/>
+                <a:cs typeface="Liberation Sans"/>
+              </a:rPr>
+              <a:t>− пригодный остаток</a:t>
             </a:r>
           </a:p>
         </p:txBody>
@@ -5207,7 +6400,7 @@
           <p:cNvPr id="4" name="">
             <a:extLst xmlns:a="http://schemas.openxmlformats.org/drawingml/2006/main">
               <a:ext uri="{FF2B5EF4-FFF2-40B4-BE49-F238E27FC236}">
-                <a16:creationId xmlns:a16="http://schemas.microsoft.com/office/drawing/2014/main" id="{8111F616-222A-48BC-B45E-81EABE4BC082}"/>
+                <a16:creationId xmlns:a16="http://schemas.microsoft.com/office/drawing/2014/main" id="{1BB9860A-1825-4691-8978-516CDC8F7332}"/>
               </a:ext>
             </a:extLst>
           </p:cNvPr>
@@ -5218,8 +6411,8 @@
         </p:nvSpPr>
         <p:spPr>
           <a:xfrm xmlns:a="http://schemas.openxmlformats.org/drawingml/2006/main">
-            <a:off x="723900" y="2809875"/>
-            <a:ext cx="10477500" cy="571500"/>
+            <a:off x="609600" y="4924425"/>
+            <a:ext cx="3381375" cy="857250"/>
           </a:xfrm>
           <a:prstGeom xmlns:a="http://schemas.openxmlformats.org/drawingml/2006/main" prst="rect">
             <a:avLst/>
@@ -5233,9 +6426,9 @@
           <a:bodyPr xmlns:a="http://schemas.openxmlformats.org/drawingml/2006/main"/>
           <a:lstStyle xmlns:a="http://schemas.openxmlformats.org/drawingml/2006/main">
             <a:defPPr>
-              <a:defRPr sz="1950" b="0">
-                <a:solidFill>
-                  <a:srgbClr val="668354"/>
+              <a:defRPr sz="1875" b="0">
+                <a:solidFill>
+                  <a:srgbClr val="667B6D"/>
                 </a:solidFill>
                 <a:latin typeface="Liberation Sans"/>
                 <a:ea typeface="Liberation Sans"/>
@@ -5245,47 +6438,99 @@
           </a:lstStyle>
           <a:p xmlns:a="http://schemas.openxmlformats.org/drawingml/2006/main">
             <a:pPr>
-              <a:defRPr sz="1950" b="0">
-                <a:solidFill>
-                  <a:srgbClr val="668354"/>
-                </a:solidFill>
-                <a:latin typeface="Liberation Sans"/>
-                <a:ea typeface="Liberation Sans"/>
-                <a:cs typeface="Liberation Sans"/>
-              </a:defRPr>
-            </a:pPr>
-            <a:r>
-              <a:rPr sz="1950" b="0">
-                <a:solidFill>
-                  <a:srgbClr val="668354"/>
-                </a:solidFill>
-                <a:latin typeface="Liberation Sans"/>
-                <a:ea typeface="Liberation Sans"/>
-                <a:cs typeface="Liberation Sans"/>
-              </a:rPr>
-              <a:t>Начинаем с независимых точек Тараза</a:t>
-            </a:r>
-          </a:p>
-        </p:txBody>
-      </p:sp>
-      <p:sp>
-        <p:nvSpPr>
+              <a:defRPr sz="1875" b="0">
+                <a:solidFill>
+                  <a:srgbClr val="667B6D"/>
+                </a:solidFill>
+                <a:latin typeface="Liberation Sans"/>
+                <a:ea typeface="Liberation Sans"/>
+                <a:cs typeface="Liberation Sans"/>
+              </a:defRPr>
+            </a:pPr>
+            <a:r>
+              <a:rPr sz="1875" b="0">
+                <a:solidFill>
+                  <a:srgbClr val="667B6D"/>
+                </a:solidFill>
+                <a:latin typeface="Liberation Sans"/>
+                <a:ea typeface="Liberation Sans"/>
+                <a:cs typeface="Liberation Sans"/>
+              </a:rPr>
+              <a:t>Учитываем срок поставки</a:t>
+            </a:r>
+          </a:p>
+          <a:p xmlns:a="http://schemas.openxmlformats.org/drawingml/2006/main">
+            <a:pPr>
+              <a:defRPr sz="1875" b="0">
+                <a:solidFill>
+                  <a:srgbClr val="667B6D"/>
+                </a:solidFill>
+                <a:latin typeface="Liberation Sans"/>
+                <a:ea typeface="Liberation Sans"/>
+                <a:cs typeface="Liberation Sans"/>
+              </a:defRPr>
+            </a:pPr>
+            <a:r>
+              <a:rPr sz="1875" b="0">
+                <a:solidFill>
+                  <a:srgbClr val="667B6D"/>
+                </a:solidFill>
+                <a:latin typeface="Liberation Sans"/>
+                <a:ea typeface="Liberation Sans"/>
+                <a:cs typeface="Liberation Sans"/>
+              </a:rPr>
+              <a:t>и минимальный запас.</a:t>
+            </a:r>
+          </a:p>
+        </p:txBody>
+      </p:sp>
+      <p:pic>
+        <p:nvPicPr>
           <p:cNvPr id="5" name="">
             <a:extLst xmlns:a="http://schemas.openxmlformats.org/drawingml/2006/main">
               <a:ext uri="{FF2B5EF4-FFF2-40B4-BE49-F238E27FC236}">
-                <a16:creationId xmlns:a16="http://schemas.microsoft.com/office/drawing/2014/main" id="{DAE3433B-D918-4DDE-8400-BE9874B960F8}"/>
+                <a16:creationId xmlns:a16="http://schemas.microsoft.com/office/drawing/2014/main" id="{5B8E2A7E-B85D-4883-93CA-4944857F3695}"/>
               </a:ext>
             </a:extLst>
           </p:cNvPr>
-          <p:cNvSpPr>
-            <a:spLocks xmlns:a="http://schemas.openxmlformats.org/drawingml/2006/main" noGrp="1"/>
-          </p:cNvSpPr>
+          <p:cNvPicPr>
+            <a:picLocks xmlns:a="http://schemas.openxmlformats.org/drawingml/2006/main" noChangeAspect="1"/>
+          </p:cNvPicPr>
           <p:nvPr/>
-        </p:nvSpPr>
+        </p:nvPicPr>
+        <p:blipFill>
+          <a:blip xmlns:r="http://schemas.openxmlformats.org/officeDocument/2006/relationships" xmlns:a="http://schemas.openxmlformats.org/drawingml/2006/main" r:embed="R045607847e4c4f4d"/>
+          <a:srcRect xmlns:a="http://schemas.openxmlformats.org/drawingml/2006/main" l="19000" t="31000" r="2000" b="20000"/>
+          <a:stretch xmlns:a="http://schemas.openxmlformats.org/drawingml/2006/main"/>
+        </p:blipFill>
         <p:spPr>
           <a:xfrm xmlns:a="http://schemas.openxmlformats.org/drawingml/2006/main">
-            <a:off x="723900" y="3714750"/>
-            <a:ext cx="10668000" cy="2381250"/>
+            <a:off x="4257675" y="2628900"/>
+            <a:ext cx="7419975" cy="3171825"/>
+          </a:xfrm>
+          <a:prstGeom xmlns:a="http://schemas.openxmlformats.org/drawingml/2006/main" prst="rect">
+            <a:avLst/>
+          </a:prstGeom>
+        </p:spPr>
+      </p:pic>
+      <p:sp>
+        <p:nvSpPr>
+          <p:cNvPr id="6" name="">
+            <a:extLst xmlns:a="http://schemas.openxmlformats.org/drawingml/2006/main">
+              <a:ext uri="{FF2B5EF4-FFF2-40B4-BE49-F238E27FC236}">
+                <a16:creationId xmlns:a16="http://schemas.microsoft.com/office/drawing/2014/main" id="{3DBD09A0-3FC9-446B-A054-81DC154F544B}"/>
+              </a:ext>
+            </a:extLst>
+          </p:cNvPr>
+          <p:cNvSpPr>
+            <a:spLocks xmlns:a="http://schemas.openxmlformats.org/drawingml/2006/main" noGrp="1"/>
+          </p:cNvSpPr>
+          <p:nvPr/>
+        </p:nvSpPr>
+        <p:spPr>
+          <a:xfrm xmlns:a="http://schemas.openxmlformats.org/drawingml/2006/main">
+            <a:off x="571500" y="6400800"/>
+            <a:ext cx="11010900" cy="266700"/>
           </a:xfrm>
           <a:prstGeom xmlns:a="http://schemas.openxmlformats.org/drawingml/2006/main" prst="rect">
             <a:avLst/>
@@ -5299,9 +6544,9 @@
           <a:bodyPr xmlns:a="http://schemas.openxmlformats.org/drawingml/2006/main"/>
           <a:lstStyle xmlns:a="http://schemas.openxmlformats.org/drawingml/2006/main">
             <a:defPPr>
-              <a:defRPr sz="2025" b="0">
-                <a:solidFill>
-                  <a:srgbClr val="233C32"/>
+              <a:defRPr sz="1275" b="0">
+                <a:solidFill>
+                  <a:srgbClr val="667B6D"/>
                 </a:solidFill>
                 <a:latin typeface="Liberation Sans"/>
                 <a:ea typeface="Liberation Sans"/>
@@ -5311,104 +6556,91 @@
           </a:lstStyle>
           <a:p xmlns:a="http://schemas.openxmlformats.org/drawingml/2006/main">
             <a:pPr>
-              <a:defRPr sz="2025" b="0">
-                <a:solidFill>
-                  <a:srgbClr val="233C32"/>
-                </a:solidFill>
-                <a:latin typeface="Liberation Sans"/>
-                <a:ea typeface="Liberation Sans"/>
-                <a:cs typeface="Liberation Sans"/>
-              </a:defRPr>
-            </a:pPr>
-            <a:r>
-              <a:rPr sz="2025" b="0">
-                <a:solidFill>
-                  <a:srgbClr val="233C32"/>
-                </a:solidFill>
-                <a:latin typeface="Liberation Sans"/>
-                <a:ea typeface="Liberation Sans"/>
-                <a:cs typeface="Liberation Sans"/>
-              </a:rPr>
-              <a:t>Кофейни, мини-маркеты, небольшие кафе</a:t>
-            </a:r>
-          </a:p>
-          <a:p xmlns:a="http://schemas.openxmlformats.org/drawingml/2006/main">
-            <a:r>
-              <a:t/>
-            </a:r>
-          </a:p>
-          <a:p xmlns:a="http://schemas.openxmlformats.org/drawingml/2006/main">
-            <a:pPr>
-              <a:defRPr sz="2025" b="0">
-                <a:solidFill>
-                  <a:srgbClr val="233C32"/>
-                </a:solidFill>
-                <a:latin typeface="Liberation Sans"/>
-                <a:ea typeface="Liberation Sans"/>
-                <a:cs typeface="Liberation Sans"/>
-              </a:defRPr>
-            </a:pPr>
-            <a:r>
-              <a:rPr sz="2025" b="0">
-                <a:solidFill>
-                  <a:srgbClr val="233C32"/>
-                </a:solidFill>
-                <a:latin typeface="Liberation Sans"/>
-                <a:ea typeface="Liberation Sans"/>
-                <a:cs typeface="Liberation Sans"/>
-              </a:rPr>
-              <a:t>План проверки: 10 интервью и 3 пилотные точки</a:t>
-            </a:r>
-          </a:p>
-          <a:p xmlns:a="http://schemas.openxmlformats.org/drawingml/2006/main">
-            <a:pPr>
-              <a:defRPr sz="2025" b="0">
-                <a:solidFill>
-                  <a:srgbClr val="233C32"/>
-                </a:solidFill>
-                <a:latin typeface="Liberation Sans"/>
-                <a:ea typeface="Liberation Sans"/>
-                <a:cs typeface="Liberation Sans"/>
-              </a:defRPr>
-            </a:pPr>
-            <a:r>
-              <a:rPr sz="2025" b="0">
-                <a:solidFill>
-                  <a:srgbClr val="233C32"/>
-                </a:solidFill>
-                <a:latin typeface="Liberation Sans"/>
-                <a:ea typeface="Liberation Sans"/>
-                <a:cs typeface="Liberation Sans"/>
-              </a:rPr>
-              <a:t>Критерии: время ввода, ошибки, ежедневное использование</a:t>
-            </a:r>
-          </a:p>
-          <a:p xmlns:a="http://schemas.openxmlformats.org/drawingml/2006/main">
-            <a:r>
-              <a:t/>
-            </a:r>
-          </a:p>
-          <a:p xmlns:a="http://schemas.openxmlformats.org/drawingml/2006/main">
-            <a:pPr>
-              <a:defRPr sz="2025" b="0">
-                <a:solidFill>
-                  <a:srgbClr val="233C32"/>
-                </a:solidFill>
-                <a:latin typeface="Liberation Sans"/>
-                <a:ea typeface="Liberation Sans"/>
-                <a:cs typeface="Liberation Sans"/>
-              </a:defRPr>
-            </a:pPr>
-            <a:r>
-              <a:rPr sz="2025" b="0">
-                <a:solidFill>
-                  <a:srgbClr val="233C32"/>
-                </a:solidFill>
-                <a:latin typeface="Liberation Sans"/>
-                <a:ea typeface="Liberation Sans"/>
-                <a:cs typeface="Liberation Sans"/>
-              </a:rPr>
-              <a:t>Расширение после проверки спроса</a:t>
+              <a:defRPr sz="1275" b="0">
+                <a:solidFill>
+                  <a:srgbClr val="667B6D"/>
+                </a:solidFill>
+                <a:latin typeface="Liberation Sans"/>
+                <a:ea typeface="Liberation Sans"/>
+                <a:cs typeface="Liberation Sans"/>
+              </a:defRPr>
+            </a:pPr>
+            <a:r>
+              <a:rPr sz="1275" b="0">
+                <a:solidFill>
+                  <a:srgbClr val="667B6D"/>
+                </a:solidFill>
+                <a:latin typeface="Liberation Sans"/>
+                <a:ea typeface="Liberation Sans"/>
+                <a:cs typeface="Liberation Sans"/>
+              </a:rPr>
+              <a:t>Погодные поправки и коэффициенты выходных пока остаются гипотезой MVP.</a:t>
+            </a:r>
+          </a:p>
+        </p:txBody>
+      </p:sp>
+      <p:sp>
+        <p:nvSpPr>
+          <p:cNvPr id="7" name="">
+            <a:extLst xmlns:a="http://schemas.openxmlformats.org/drawingml/2006/main">
+              <a:ext uri="{FF2B5EF4-FFF2-40B4-BE49-F238E27FC236}">
+                <a16:creationId xmlns:a16="http://schemas.microsoft.com/office/drawing/2014/main" id="{FBA99525-AC12-4A13-9CE1-411F5AB88FD4}"/>
+              </a:ext>
+            </a:extLst>
+          </p:cNvPr>
+          <p:cNvSpPr>
+            <a:spLocks xmlns:a="http://schemas.openxmlformats.org/drawingml/2006/main" noGrp="1"/>
+          </p:cNvSpPr>
+          <p:nvPr/>
+        </p:nvSpPr>
+        <p:spPr>
+          <a:xfrm xmlns:a="http://schemas.openxmlformats.org/drawingml/2006/main">
+            <a:off x="552450" y="285750"/>
+            <a:ext cx="1524000" cy="381000"/>
+          </a:xfrm>
+          <a:prstGeom xmlns:a="http://schemas.openxmlformats.org/drawingml/2006/main" prst="rect">
+            <a:avLst/>
+          </a:prstGeom>
+          <a:noFill xmlns:a="http://schemas.openxmlformats.org/drawingml/2006/main"/>
+          <a:ln xmlns:a="http://schemas.openxmlformats.org/drawingml/2006/main" w="0">
+            <a:noFill/>
+          </a:ln>
+        </p:spPr>
+        <p:txBody>
+          <a:bodyPr xmlns:a="http://schemas.openxmlformats.org/drawingml/2006/main"/>
+          <a:lstStyle xmlns:a="http://schemas.openxmlformats.org/drawingml/2006/main">
+            <a:defPPr>
+              <a:defRPr sz="1800" b="1">
+                <a:solidFill>
+                  <a:srgbClr val="24664F"/>
+                </a:solidFill>
+                <a:latin typeface="Liberation Sans"/>
+                <a:ea typeface="Liberation Sans"/>
+                <a:cs typeface="Liberation Sans"/>
+              </a:defRPr>
+            </a:defPPr>
+          </a:lstStyle>
+          <a:p xmlns:a="http://schemas.openxmlformats.org/drawingml/2006/main">
+            <a:pPr>
+              <a:defRPr sz="1800" b="1">
+                <a:solidFill>
+                  <a:srgbClr val="24664F"/>
+                </a:solidFill>
+                <a:latin typeface="Liberation Sans"/>
+                <a:ea typeface="Liberation Sans"/>
+                <a:cs typeface="Liberation Sans"/>
+              </a:defRPr>
+            </a:pPr>
+            <a:r>
+              <a:rPr sz="1800" b="1">
+                <a:solidFill>
+                  <a:srgbClr val="24664F"/>
+                </a:solidFill>
+                <a:latin typeface="Liberation Sans"/>
+                <a:ea typeface="Liberation Sans"/>
+                <a:cs typeface="Liberation Sans"/>
+              </a:rPr>
+              <a:t>QorAI</a:t>
             </a:r>
           </a:p>
         </p:txBody>
@@ -5416,7 +6648,7 @@
     </p:spTree>
     <p:extLst>
       <p:ext uri="{BB962C8B-B14F-4D97-AF65-F5344CB8AC3E}">
-        <p14:creationId xmlns:p14="http://schemas.microsoft.com/office/powerpoint/2010/main" val="1674614888"/>
+        <p14:creationId xmlns:p14="http://schemas.microsoft.com/office/powerpoint/2010/main" val="263714812"/>
       </p:ext>
     </p:extLst>
   </p:cSld>
@@ -5429,7 +6661,7 @@
     <p:bg>
       <p:bgPr>
         <a:solidFill xmlns:a="http://schemas.openxmlformats.org/drawingml/2006/main">
-          <a:srgbClr val="F7F8F5"/>
+          <a:srgbClr val="F5F6F0"/>
         </a:solidFill>
       </p:bgPr>
     </p:bg>
@@ -5444,10 +6676,10 @@
       </p:grpSpPr>
       <p:sp>
         <p:nvSpPr>
-          <p:cNvPr id="8" name="">
+          <p:cNvPr id="10" name="">
             <a:extLst xmlns:a="http://schemas.openxmlformats.org/drawingml/2006/main">
               <a:ext uri="{FF2B5EF4-FFF2-40B4-BE49-F238E27FC236}">
-                <a16:creationId xmlns:a16="http://schemas.microsoft.com/office/drawing/2014/main" id="{9F1AE9B4-77B4-4283-B611-23F32BD0F53D}"/>
+                <a16:creationId xmlns:a16="http://schemas.microsoft.com/office/drawing/2014/main" id="{CD8EA821-8F14-4DEB-994D-707066CC4A78}"/>
               </a:ext>
             </a:extLst>
           </p:cNvPr>
@@ -5458,8 +6690,8 @@
         </p:nvSpPr>
         <p:spPr>
           <a:xfrm xmlns:a="http://schemas.openxmlformats.org/drawingml/2006/main">
-            <a:off x="685800" y="361950"/>
-            <a:ext cx="4762500" cy="381000"/>
+            <a:off x="10553700" y="323850"/>
+            <a:ext cx="1143000" cy="266700"/>
           </a:xfrm>
           <a:prstGeom xmlns:a="http://schemas.openxmlformats.org/drawingml/2006/main" prst="rect">
             <a:avLst/>
@@ -5473,9 +6705,9 @@
           <a:bodyPr xmlns:a="http://schemas.openxmlformats.org/drawingml/2006/main"/>
           <a:lstStyle xmlns:a="http://schemas.openxmlformats.org/drawingml/2006/main">
             <a:defPPr>
-              <a:defRPr sz="1650" b="1">
-                <a:solidFill>
-                  <a:srgbClr val="668354"/>
+              <a:defRPr sz="1200" b="0">
+                <a:solidFill>
+                  <a:srgbClr val="667B6D"/>
                 </a:solidFill>
                 <a:latin typeface="Liberation Sans"/>
                 <a:ea typeface="Liberation Sans"/>
@@ -5485,25 +6717,25 @@
           </a:lstStyle>
           <a:p xmlns:a="http://schemas.openxmlformats.org/drawingml/2006/main">
             <a:pPr>
-              <a:defRPr sz="1650" b="1">
-                <a:solidFill>
-                  <a:srgbClr val="668354"/>
-                </a:solidFill>
-                <a:latin typeface="Liberation Sans"/>
-                <a:ea typeface="Liberation Sans"/>
-                <a:cs typeface="Liberation Sans"/>
-              </a:defRPr>
-            </a:pPr>
-            <a:r>
-              <a:rPr sz="1650" b="1">
-                <a:solidFill>
-                  <a:srgbClr val="668354"/>
-                </a:solidFill>
-                <a:latin typeface="Liberation Sans"/>
-                <a:ea typeface="Liberation Sans"/>
-                <a:cs typeface="Liberation Sans"/>
-              </a:rPr>
-              <a:t>QorAI</a:t>
+              <a:defRPr sz="1200" b="0">
+                <a:solidFill>
+                  <a:srgbClr val="667B6D"/>
+                </a:solidFill>
+                <a:latin typeface="Liberation Sans"/>
+                <a:ea typeface="Liberation Sans"/>
+                <a:cs typeface="Liberation Sans"/>
+              </a:defRPr>
+            </a:pPr>
+            <a:r>
+              <a:rPr sz="1200" b="0">
+                <a:solidFill>
+                  <a:srgbClr val="667B6D"/>
+                </a:solidFill>
+                <a:latin typeface="Liberation Sans"/>
+                <a:ea typeface="Liberation Sans"/>
+                <a:cs typeface="Liberation Sans"/>
+              </a:rPr>
+              <a:t>06 / 10</a:t>
             </a:r>
           </a:p>
         </p:txBody>
@@ -5513,7 +6745,7 @@
           <p:cNvPr id="2" name="">
             <a:extLst xmlns:a="http://schemas.openxmlformats.org/drawingml/2006/main">
               <a:ext uri="{FF2B5EF4-FFF2-40B4-BE49-F238E27FC236}">
-                <a16:creationId xmlns:a16="http://schemas.microsoft.com/office/drawing/2014/main" id="{507EB08E-52AC-415C-8198-C16A536E89C7}"/>
+                <a16:creationId xmlns:a16="http://schemas.microsoft.com/office/drawing/2014/main" id="{324DA1EE-E9B9-454A-B96A-5A526D875088}"/>
               </a:ext>
             </a:extLst>
           </p:cNvPr>
@@ -5524,8 +6756,8 @@
         </p:nvSpPr>
         <p:spPr>
           <a:xfrm xmlns:a="http://schemas.openxmlformats.org/drawingml/2006/main">
-            <a:off x="10810875" y="381000"/>
-            <a:ext cx="666750" cy="333375"/>
+            <a:off x="552450" y="1143000"/>
+            <a:ext cx="5981700" cy="1238250"/>
           </a:xfrm>
           <a:prstGeom xmlns:a="http://schemas.openxmlformats.org/drawingml/2006/main" prst="rect">
             <a:avLst/>
@@ -5539,9 +6771,9 @@
           <a:bodyPr xmlns:a="http://schemas.openxmlformats.org/drawingml/2006/main"/>
           <a:lstStyle xmlns:a="http://schemas.openxmlformats.org/drawingml/2006/main">
             <a:defPPr>
-              <a:defRPr sz="1350" b="0">
-                <a:solidFill>
-                  <a:srgbClr val="668354"/>
+              <a:defRPr sz="3675" b="1">
+                <a:solidFill>
+                  <a:srgbClr val="1C382E"/>
                 </a:solidFill>
                 <a:latin typeface="Liberation Sans"/>
                 <a:ea typeface="Liberation Sans"/>
@@ -5551,25 +6783,48 @@
           </a:lstStyle>
           <a:p xmlns:a="http://schemas.openxmlformats.org/drawingml/2006/main">
             <a:pPr>
-              <a:defRPr sz="1350" b="0">
-                <a:solidFill>
-                  <a:srgbClr val="668354"/>
-                </a:solidFill>
-                <a:latin typeface="Liberation Sans"/>
-                <a:ea typeface="Liberation Sans"/>
-                <a:cs typeface="Liberation Sans"/>
-              </a:defRPr>
-            </a:pPr>
-            <a:r>
-              <a:rPr sz="1350" b="0">
-                <a:solidFill>
-                  <a:srgbClr val="668354"/>
-                </a:solidFill>
-                <a:latin typeface="Liberation Sans"/>
-                <a:ea typeface="Liberation Sans"/>
-                <a:cs typeface="Liberation Sans"/>
-              </a:rPr>
-              <a:t>06</a:t>
+              <a:defRPr sz="3675" b="1">
+                <a:solidFill>
+                  <a:srgbClr val="1C382E"/>
+                </a:solidFill>
+                <a:latin typeface="Liberation Sans"/>
+                <a:ea typeface="Liberation Sans"/>
+                <a:cs typeface="Liberation Sans"/>
+              </a:defRPr>
+            </a:pPr>
+            <a:r>
+              <a:rPr sz="3675" b="1">
+                <a:solidFill>
+                  <a:srgbClr val="1C382E"/>
+                </a:solidFill>
+                <a:latin typeface="Liberation Sans"/>
+                <a:ea typeface="Liberation Sans"/>
+                <a:cs typeface="Liberation Sans"/>
+              </a:rPr>
+              <a:t>Поставщик сохранён.</a:t>
+            </a:r>
+          </a:p>
+          <a:p xmlns:a="http://schemas.openxmlformats.org/drawingml/2006/main">
+            <a:pPr>
+              <a:defRPr sz="3675" b="1">
+                <a:solidFill>
+                  <a:srgbClr val="1C382E"/>
+                </a:solidFill>
+                <a:latin typeface="Liberation Sans"/>
+                <a:ea typeface="Liberation Sans"/>
+                <a:cs typeface="Liberation Sans"/>
+              </a:defRPr>
+            </a:pPr>
+            <a:r>
+              <a:rPr sz="3675" b="1">
+                <a:solidFill>
+                  <a:srgbClr val="1C382E"/>
+                </a:solidFill>
+                <a:latin typeface="Liberation Sans"/>
+                <a:ea typeface="Liberation Sans"/>
+                <a:cs typeface="Liberation Sans"/>
+              </a:rPr>
+              <a:t>Заказ уже в черновике.</a:t>
             </a:r>
           </a:p>
         </p:txBody>
@@ -5579,7 +6834,7 @@
           <p:cNvPr id="3" name="">
             <a:extLst xmlns:a="http://schemas.openxmlformats.org/drawingml/2006/main">
               <a:ext uri="{FF2B5EF4-FFF2-40B4-BE49-F238E27FC236}">
-                <a16:creationId xmlns:a16="http://schemas.microsoft.com/office/drawing/2014/main" id="{512BFFAB-D91D-4295-8461-D4B25846E17F}"/>
+                <a16:creationId xmlns:a16="http://schemas.microsoft.com/office/drawing/2014/main" id="{E515C0CA-7E34-4640-BDDD-FFDE09329755}"/>
               </a:ext>
             </a:extLst>
           </p:cNvPr>
@@ -5590,8 +6845,8 @@
         </p:nvSpPr>
         <p:spPr>
           <a:xfrm xmlns:a="http://schemas.openxmlformats.org/drawingml/2006/main">
-            <a:off x="685800" y="1190625"/>
-            <a:ext cx="10820400" cy="1428750"/>
+            <a:off x="590550" y="2962275"/>
+            <a:ext cx="3476625" cy="1190625"/>
           </a:xfrm>
           <a:prstGeom xmlns:a="http://schemas.openxmlformats.org/drawingml/2006/main" prst="rect">
             <a:avLst/>
@@ -5605,9 +6860,9 @@
           <a:bodyPr xmlns:a="http://schemas.openxmlformats.org/drawingml/2006/main"/>
           <a:lstStyle xmlns:a="http://schemas.openxmlformats.org/drawingml/2006/main">
             <a:defPPr>
-              <a:defRPr sz="4350" b="1">
-                <a:solidFill>
-                  <a:srgbClr val="233C32"/>
+              <a:defRPr sz="2025" b="0">
+                <a:solidFill>
+                  <a:srgbClr val="667B6D"/>
                 </a:solidFill>
                 <a:latin typeface="Liberation Sans"/>
                 <a:ea typeface="Liberation Sans"/>
@@ -5617,48 +6872,71 @@
           </a:lstStyle>
           <a:p xmlns:a="http://schemas.openxmlformats.org/drawingml/2006/main">
             <a:pPr>
-              <a:defRPr sz="4350" b="1">
-                <a:solidFill>
-                  <a:srgbClr val="233C32"/>
-                </a:solidFill>
-                <a:latin typeface="Liberation Sans"/>
-                <a:ea typeface="Liberation Sans"/>
-                <a:cs typeface="Liberation Sans"/>
-              </a:defRPr>
-            </a:pPr>
-            <a:r>
-              <a:rPr sz="4350" b="1">
-                <a:solidFill>
-                  <a:srgbClr val="233C32"/>
-                </a:solidFill>
-                <a:latin typeface="Liberation Sans"/>
-                <a:ea typeface="Liberation Sans"/>
-                <a:cs typeface="Liberation Sans"/>
-              </a:rPr>
-              <a:t>Подписка за одну</a:t>
-            </a:r>
-          </a:p>
-          <a:p xmlns:a="http://schemas.openxmlformats.org/drawingml/2006/main">
-            <a:pPr>
-              <a:defRPr sz="4350" b="1">
-                <a:solidFill>
-                  <a:srgbClr val="233C32"/>
-                </a:solidFill>
-                <a:latin typeface="Liberation Sans"/>
-                <a:ea typeface="Liberation Sans"/>
-                <a:cs typeface="Liberation Sans"/>
-              </a:defRPr>
-            </a:pPr>
-            <a:r>
-              <a:rPr sz="4350" b="1">
-                <a:solidFill>
-                  <a:srgbClr val="233C32"/>
-                </a:solidFill>
-                <a:latin typeface="Liberation Sans"/>
-                <a:ea typeface="Liberation Sans"/>
-                <a:cs typeface="Liberation Sans"/>
-              </a:rPr>
-              <a:t>торговую точку</a:t>
+              <a:defRPr sz="2025" b="0">
+                <a:solidFill>
+                  <a:srgbClr val="667B6D"/>
+                </a:solidFill>
+                <a:latin typeface="Liberation Sans"/>
+                <a:ea typeface="Liberation Sans"/>
+                <a:cs typeface="Liberation Sans"/>
+              </a:defRPr>
+            </a:pPr>
+            <a:r>
+              <a:rPr sz="2025" b="0">
+                <a:solidFill>
+                  <a:srgbClr val="667B6D"/>
+                </a:solidFill>
+                <a:latin typeface="Liberation Sans"/>
+                <a:ea typeface="Liberation Sans"/>
+                <a:cs typeface="Liberation Sans"/>
+              </a:rPr>
+              <a:t>Имя, номер, Telegram</a:t>
+            </a:r>
+          </a:p>
+          <a:p xmlns:a="http://schemas.openxmlformats.org/drawingml/2006/main">
+            <a:pPr>
+              <a:defRPr sz="2025" b="0">
+                <a:solidFill>
+                  <a:srgbClr val="667B6D"/>
+                </a:solidFill>
+                <a:latin typeface="Liberation Sans"/>
+                <a:ea typeface="Liberation Sans"/>
+                <a:cs typeface="Liberation Sans"/>
+              </a:defRPr>
+            </a:pPr>
+            <a:r>
+              <a:rPr sz="2025" b="0">
+                <a:solidFill>
+                  <a:srgbClr val="667B6D"/>
+                </a:solidFill>
+                <a:latin typeface="Liberation Sans"/>
+                <a:ea typeface="Liberation Sans"/>
+                <a:cs typeface="Liberation Sans"/>
+              </a:rPr>
+              <a:t>и условия поставки</a:t>
+            </a:r>
+          </a:p>
+          <a:p xmlns:a="http://schemas.openxmlformats.org/drawingml/2006/main">
+            <a:pPr>
+              <a:defRPr sz="2025" b="0">
+                <a:solidFill>
+                  <a:srgbClr val="667B6D"/>
+                </a:solidFill>
+                <a:latin typeface="Liberation Sans"/>
+                <a:ea typeface="Liberation Sans"/>
+                <a:cs typeface="Liberation Sans"/>
+              </a:defRPr>
+            </a:pPr>
+            <a:r>
+              <a:rPr sz="2025" b="0">
+                <a:solidFill>
+                  <a:srgbClr val="667B6D"/>
+                </a:solidFill>
+                <a:latin typeface="Liberation Sans"/>
+                <a:ea typeface="Liberation Sans"/>
+                <a:cs typeface="Liberation Sans"/>
+              </a:rPr>
+              <a:t>в одном контакте.</a:t>
             </a:r>
           </a:p>
         </p:txBody>
@@ -5668,7 +6946,7 @@
           <p:cNvPr id="4" name="">
             <a:extLst xmlns:a="http://schemas.openxmlformats.org/drawingml/2006/main">
               <a:ext uri="{FF2B5EF4-FFF2-40B4-BE49-F238E27FC236}">
-                <a16:creationId xmlns:a16="http://schemas.microsoft.com/office/drawing/2014/main" id="{4576924D-A963-44B9-BD29-F413FAAAD9D2}"/>
+                <a16:creationId xmlns:a16="http://schemas.microsoft.com/office/drawing/2014/main" id="{54216F1D-EBA0-4609-825A-0E8BE245E3BF}"/>
               </a:ext>
             </a:extLst>
           </p:cNvPr>
@@ -5679,8 +6957,8 @@
         </p:nvSpPr>
         <p:spPr>
           <a:xfrm xmlns:a="http://schemas.openxmlformats.org/drawingml/2006/main">
-            <a:off x="714375" y="2743200"/>
-            <a:ext cx="10763250" cy="476250"/>
+            <a:off x="590550" y="4781550"/>
+            <a:ext cx="3857625" cy="428625"/>
           </a:xfrm>
           <a:prstGeom xmlns:a="http://schemas.openxmlformats.org/drawingml/2006/main" prst="rect">
             <a:avLst/>
@@ -5694,9 +6972,9 @@
           <a:bodyPr xmlns:a="http://schemas.openxmlformats.org/drawingml/2006/main"/>
           <a:lstStyle xmlns:a="http://schemas.openxmlformats.org/drawingml/2006/main">
             <a:defPPr>
-              <a:defRPr sz="1875" b="0">
-                <a:solidFill>
-                  <a:srgbClr val="668354"/>
+              <a:defRPr sz="1950" b="1">
+                <a:solidFill>
+                  <a:srgbClr val="24664F"/>
                 </a:solidFill>
                 <a:latin typeface="Liberation Sans"/>
                 <a:ea typeface="Liberation Sans"/>
@@ -5706,25 +6984,25 @@
           </a:lstStyle>
           <a:p xmlns:a="http://schemas.openxmlformats.org/drawingml/2006/main">
             <a:pPr>
-              <a:defRPr sz="1875" b="0">
-                <a:solidFill>
-                  <a:srgbClr val="668354"/>
-                </a:solidFill>
-                <a:latin typeface="Liberation Sans"/>
-                <a:ea typeface="Liberation Sans"/>
-                <a:cs typeface="Liberation Sans"/>
-              </a:defRPr>
-            </a:pPr>
-            <a:r>
-              <a:rPr sz="1875" b="0">
-                <a:solidFill>
-                  <a:srgbClr val="668354"/>
-                </a:solidFill>
-                <a:latin typeface="Liberation Sans"/>
-                <a:ea typeface="Liberation Sans"/>
-                <a:cs typeface="Liberation Sans"/>
-              </a:rPr>
-              <a:t>Ценовая гипотеза для проверки на пилоте</a:t>
+              <a:defRPr sz="1950" b="1">
+                <a:solidFill>
+                  <a:srgbClr val="24664F"/>
+                </a:solidFill>
+                <a:latin typeface="Liberation Sans"/>
+                <a:ea typeface="Liberation Sans"/>
+                <a:cs typeface="Liberation Sans"/>
+              </a:defRPr>
+            </a:pPr>
+            <a:r>
+              <a:rPr sz="1950" b="1">
+                <a:solidFill>
+                  <a:srgbClr val="24664F"/>
+                </a:solidFill>
+                <a:latin typeface="Liberation Sans"/>
+                <a:ea typeface="Liberation Sans"/>
+                <a:cs typeface="Liberation Sans"/>
+              </a:rPr>
+              <a:t>WhatsApp или Telegram</a:t>
             </a:r>
           </a:p>
         </p:txBody>
@@ -5734,7 +7012,7 @@
           <p:cNvPr id="5" name="">
             <a:extLst xmlns:a="http://schemas.openxmlformats.org/drawingml/2006/main">
               <a:ext uri="{FF2B5EF4-FFF2-40B4-BE49-F238E27FC236}">
-                <a16:creationId xmlns:a16="http://schemas.microsoft.com/office/drawing/2014/main" id="{CB2AA430-21A5-4082-B468-6E2B0D4ACC31}"/>
+                <a16:creationId xmlns:a16="http://schemas.microsoft.com/office/drawing/2014/main" id="{8147C681-2E90-40DE-9780-AE323C458368}"/>
               </a:ext>
             </a:extLst>
           </p:cNvPr>
@@ -5745,8 +7023,8 @@
         </p:nvSpPr>
         <p:spPr>
           <a:xfrm xmlns:a="http://schemas.openxmlformats.org/drawingml/2006/main">
-            <a:off x="685800" y="3571875"/>
-            <a:ext cx="4953000" cy="952500"/>
+            <a:off x="590550" y="5257800"/>
+            <a:ext cx="3762375" cy="857250"/>
           </a:xfrm>
           <a:prstGeom xmlns:a="http://schemas.openxmlformats.org/drawingml/2006/main" prst="rect">
             <a:avLst/>
@@ -5760,9 +7038,9 @@
           <a:bodyPr xmlns:a="http://schemas.openxmlformats.org/drawingml/2006/main"/>
           <a:lstStyle xmlns:a="http://schemas.openxmlformats.org/drawingml/2006/main">
             <a:defPPr>
-              <a:defRPr sz="5850" b="1">
-                <a:solidFill>
-                  <a:srgbClr val="233C32"/>
+              <a:defRPr sz="1875" b="0">
+                <a:solidFill>
+                  <a:srgbClr val="667B6D"/>
                 </a:solidFill>
                 <a:latin typeface="Liberation Sans"/>
                 <a:ea typeface="Liberation Sans"/>
@@ -5772,47 +7050,128 @@
           </a:lstStyle>
           <a:p xmlns:a="http://schemas.openxmlformats.org/drawingml/2006/main">
             <a:pPr>
-              <a:defRPr sz="5850" b="1">
-                <a:solidFill>
-                  <a:srgbClr val="233C32"/>
-                </a:solidFill>
-                <a:latin typeface="Liberation Sans"/>
-                <a:ea typeface="Liberation Sans"/>
-                <a:cs typeface="Liberation Sans"/>
-              </a:defRPr>
-            </a:pPr>
-            <a:r>
-              <a:rPr sz="5850" b="1">
-                <a:solidFill>
-                  <a:srgbClr val="233C32"/>
-                </a:solidFill>
-                <a:latin typeface="Liberation Sans"/>
-                <a:ea typeface="Liberation Sans"/>
-                <a:cs typeface="Liberation Sans"/>
-              </a:rPr>
-              <a:t>9 900 ₸</a:t>
-            </a:r>
-          </a:p>
-        </p:txBody>
-      </p:sp>
-      <p:sp>
-        <p:nvSpPr>
+              <a:defRPr sz="1875" b="0">
+                <a:solidFill>
+                  <a:srgbClr val="667B6D"/>
+                </a:solidFill>
+                <a:latin typeface="Liberation Sans"/>
+                <a:ea typeface="Liberation Sans"/>
+                <a:cs typeface="Liberation Sans"/>
+              </a:defRPr>
+            </a:pPr>
+            <a:r>
+              <a:rPr sz="1875" b="0">
+                <a:solidFill>
+                  <a:srgbClr val="667B6D"/>
+                </a:solidFill>
+                <a:latin typeface="Liberation Sans"/>
+                <a:ea typeface="Liberation Sans"/>
+                <a:cs typeface="Liberation Sans"/>
+              </a:rPr>
+              <a:t>Вы проверяете заказ</a:t>
+            </a:r>
+          </a:p>
+          <a:p xmlns:a="http://schemas.openxmlformats.org/drawingml/2006/main">
+            <a:pPr>
+              <a:defRPr sz="1875" b="0">
+                <a:solidFill>
+                  <a:srgbClr val="667B6D"/>
+                </a:solidFill>
+                <a:latin typeface="Liberation Sans"/>
+                <a:ea typeface="Liberation Sans"/>
+                <a:cs typeface="Liberation Sans"/>
+              </a:defRPr>
+            </a:pPr>
+            <a:r>
+              <a:rPr sz="1875" b="0">
+                <a:solidFill>
+                  <a:srgbClr val="667B6D"/>
+                </a:solidFill>
+                <a:latin typeface="Liberation Sans"/>
+                <a:ea typeface="Liberation Sans"/>
+                <a:cs typeface="Liberation Sans"/>
+              </a:rPr>
+              <a:t>и отправляете сообщение.</a:t>
+            </a:r>
+          </a:p>
+        </p:txBody>
+      </p:sp>
+      <p:pic>
+        <p:nvPicPr>
           <p:cNvPr id="6" name="">
             <a:extLst xmlns:a="http://schemas.openxmlformats.org/drawingml/2006/main">
               <a:ext uri="{FF2B5EF4-FFF2-40B4-BE49-F238E27FC236}">
-                <a16:creationId xmlns:a16="http://schemas.microsoft.com/office/drawing/2014/main" id="{8E4B73B9-B774-4BA5-B539-BB3C02145B7E}"/>
+                <a16:creationId xmlns:a16="http://schemas.microsoft.com/office/drawing/2014/main" id="{871BED79-635D-40CA-B86E-5E51C81B5A14}"/>
               </a:ext>
             </a:extLst>
           </p:cNvPr>
-          <p:cNvSpPr>
-            <a:spLocks xmlns:a="http://schemas.openxmlformats.org/drawingml/2006/main" noGrp="1"/>
-          </p:cNvSpPr>
+          <p:cNvPicPr>
+            <a:picLocks xmlns:a="http://schemas.openxmlformats.org/drawingml/2006/main" noChangeAspect="1"/>
+          </p:cNvPicPr>
           <p:nvPr/>
-        </p:nvSpPr>
+        </p:nvPicPr>
+        <p:blipFill>
+          <a:blip xmlns:r="http://schemas.openxmlformats.org/officeDocument/2006/relationships" xmlns:a="http://schemas.openxmlformats.org/drawingml/2006/main" r:embed="R9a83b951576c413d"/>
+          <a:srcRect xmlns:a="http://schemas.openxmlformats.org/drawingml/2006/main" l="19800" t="37800" r="55200" b="25500"/>
+          <a:stretch xmlns:a="http://schemas.openxmlformats.org/drawingml/2006/main"/>
+        </p:blipFill>
         <p:spPr>
           <a:xfrm xmlns:a="http://schemas.openxmlformats.org/drawingml/2006/main">
-            <a:off x="723900" y="4572000"/>
-            <a:ext cx="4953000" cy="428625"/>
+            <a:off x="4581525" y="2752725"/>
+            <a:ext cx="2800350" cy="3162300"/>
+          </a:xfrm>
+          <a:prstGeom xmlns:a="http://schemas.openxmlformats.org/drawingml/2006/main" prst="rect">
+            <a:avLst/>
+          </a:prstGeom>
+        </p:spPr>
+      </p:pic>
+      <p:pic>
+        <p:nvPicPr>
+          <p:cNvPr id="7" name="">
+            <a:extLst xmlns:a="http://schemas.openxmlformats.org/drawingml/2006/main">
+              <a:ext uri="{FF2B5EF4-FFF2-40B4-BE49-F238E27FC236}">
+                <a16:creationId xmlns:a16="http://schemas.microsoft.com/office/drawing/2014/main" id="{2D1F65E3-0520-4B94-9BC5-F86712560D02}"/>
+              </a:ext>
+            </a:extLst>
+          </p:cNvPr>
+          <p:cNvPicPr>
+            <a:picLocks xmlns:a="http://schemas.openxmlformats.org/drawingml/2006/main" noChangeAspect="1"/>
+          </p:cNvPicPr>
+          <p:nvPr/>
+        </p:nvPicPr>
+        <p:blipFill>
+          <a:blip xmlns:r="http://schemas.openxmlformats.org/officeDocument/2006/relationships" xmlns:a="http://schemas.openxmlformats.org/drawingml/2006/main" r:embed="R6c7d731d03be4cd3"/>
+          <a:srcRect xmlns:a="http://schemas.openxmlformats.org/drawingml/2006/main" l="32300" t="18600" r="32300" b="18600"/>
+          <a:stretch xmlns:a="http://schemas.openxmlformats.org/drawingml/2006/main"/>
+        </p:blipFill>
+        <p:spPr>
+          <a:xfrm xmlns:a="http://schemas.openxmlformats.org/drawingml/2006/main">
+            <a:off x="7915275" y="1152525"/>
+            <a:ext cx="3676650" cy="4895850"/>
+          </a:xfrm>
+          <a:prstGeom xmlns:a="http://schemas.openxmlformats.org/drawingml/2006/main" prst="rect">
+            <a:avLst/>
+          </a:prstGeom>
+        </p:spPr>
+      </p:pic>
+      <p:sp>
+        <p:nvSpPr>
+          <p:cNvPr id="8" name="">
+            <a:extLst xmlns:a="http://schemas.openxmlformats.org/drawingml/2006/main">
+              <a:ext uri="{FF2B5EF4-FFF2-40B4-BE49-F238E27FC236}">
+                <a16:creationId xmlns:a16="http://schemas.microsoft.com/office/drawing/2014/main" id="{8A9AB8CF-5C46-47A5-8C54-DA4333AA7F67}"/>
+              </a:ext>
+            </a:extLst>
+          </p:cNvPr>
+          <p:cNvSpPr>
+            <a:spLocks xmlns:a="http://schemas.openxmlformats.org/drawingml/2006/main" noGrp="1"/>
+          </p:cNvSpPr>
+          <p:nvPr/>
+        </p:nvSpPr>
+        <p:spPr>
+          <a:xfrm xmlns:a="http://schemas.openxmlformats.org/drawingml/2006/main">
+            <a:off x="571500" y="6400800"/>
+            <a:ext cx="11010900" cy="266700"/>
           </a:xfrm>
           <a:prstGeom xmlns:a="http://schemas.openxmlformats.org/drawingml/2006/main" prst="rect">
             <a:avLst/>
@@ -5826,9 +7185,9 @@
           <a:bodyPr xmlns:a="http://schemas.openxmlformats.org/drawingml/2006/main"/>
           <a:lstStyle xmlns:a="http://schemas.openxmlformats.org/drawingml/2006/main">
             <a:defPPr>
-              <a:defRPr sz="1875" b="0">
-                <a:solidFill>
-                  <a:srgbClr val="668354"/>
+              <a:defRPr sz="1275" b="0">
+                <a:solidFill>
+                  <a:srgbClr val="667B6D"/>
                 </a:solidFill>
                 <a:latin typeface="Liberation Sans"/>
                 <a:ea typeface="Liberation Sans"/>
@@ -5838,35 +7197,35 @@
           </a:lstStyle>
           <a:p xmlns:a="http://schemas.openxmlformats.org/drawingml/2006/main">
             <a:pPr>
-              <a:defRPr sz="1875" b="0">
-                <a:solidFill>
-                  <a:srgbClr val="668354"/>
-                </a:solidFill>
-                <a:latin typeface="Liberation Sans"/>
-                <a:ea typeface="Liberation Sans"/>
-                <a:cs typeface="Liberation Sans"/>
-              </a:defRPr>
-            </a:pPr>
-            <a:r>
-              <a:rPr sz="1875" b="0">
-                <a:solidFill>
-                  <a:srgbClr val="668354"/>
-                </a:solidFill>
-                <a:latin typeface="Liberation Sans"/>
-                <a:ea typeface="Liberation Sans"/>
-                <a:cs typeface="Liberation Sans"/>
-              </a:rPr>
-              <a:t>в месяц за точку</a:t>
-            </a:r>
-          </a:p>
-        </p:txBody>
-      </p:sp>
-      <p:sp>
-        <p:nvSpPr>
-          <p:cNvPr id="7" name="">
+              <a:defRPr sz="1275" b="0">
+                <a:solidFill>
+                  <a:srgbClr val="667B6D"/>
+                </a:solidFill>
+                <a:latin typeface="Liberation Sans"/>
+                <a:ea typeface="Liberation Sans"/>
+                <a:cs typeface="Liberation Sans"/>
+              </a:defRPr>
+            </a:pPr>
+            <a:r>
+              <a:rPr sz="1275" b="0">
+                <a:solidFill>
+                  <a:srgbClr val="667B6D"/>
+                </a:solidFill>
+                <a:latin typeface="Liberation Sans"/>
+                <a:ea typeface="Liberation Sans"/>
+                <a:cs typeface="Liberation Sans"/>
+              </a:rPr>
+              <a:t>Снимки рабочего интерфейса. Контакт поставщика учебный.</a:t>
+            </a:r>
+          </a:p>
+        </p:txBody>
+      </p:sp>
+      <p:sp>
+        <p:nvSpPr>
+          <p:cNvPr id="9" name="">
             <a:extLst xmlns:a="http://schemas.openxmlformats.org/drawingml/2006/main">
               <a:ext uri="{FF2B5EF4-FFF2-40B4-BE49-F238E27FC236}">
-                <a16:creationId xmlns:a16="http://schemas.microsoft.com/office/drawing/2014/main" id="{4939477F-8DA1-46DE-893F-5319F68B31A4}"/>
+                <a16:creationId xmlns:a16="http://schemas.microsoft.com/office/drawing/2014/main" id="{BB2C047E-4E38-45CA-8A08-91C2D75051B1}"/>
               </a:ext>
             </a:extLst>
           </p:cNvPr>
@@ -5877,8 +7236,8 @@
         </p:nvSpPr>
         <p:spPr>
           <a:xfrm xmlns:a="http://schemas.openxmlformats.org/drawingml/2006/main">
-            <a:off x="6191250" y="3714750"/>
-            <a:ext cx="5048250" cy="1809750"/>
+            <a:off x="552450" y="285750"/>
+            <a:ext cx="1524000" cy="381000"/>
           </a:xfrm>
           <a:prstGeom xmlns:a="http://schemas.openxmlformats.org/drawingml/2006/main" prst="rect">
             <a:avLst/>
@@ -5892,9 +7251,9 @@
           <a:bodyPr xmlns:a="http://schemas.openxmlformats.org/drawingml/2006/main"/>
           <a:lstStyle xmlns:a="http://schemas.openxmlformats.org/drawingml/2006/main">
             <a:defPPr>
-              <a:defRPr sz="1800" b="0">
-                <a:solidFill>
-                  <a:srgbClr val="233C32"/>
+              <a:defRPr sz="1800" b="1">
+                <a:solidFill>
+                  <a:srgbClr val="24664F"/>
                 </a:solidFill>
                 <a:latin typeface="Liberation Sans"/>
                 <a:ea typeface="Liberation Sans"/>
@@ -5904,76 +7263,25 @@
           </a:lstStyle>
           <a:p xmlns:a="http://schemas.openxmlformats.org/drawingml/2006/main">
             <a:pPr>
-              <a:defRPr sz="1800" b="0">
-                <a:solidFill>
-                  <a:srgbClr val="233C32"/>
-                </a:solidFill>
-                <a:latin typeface="Liberation Sans"/>
-                <a:ea typeface="Liberation Sans"/>
-                <a:cs typeface="Liberation Sans"/>
-              </a:defRPr>
-            </a:pPr>
-            <a:r>
-              <a:rPr sz="1800" b="0">
-                <a:solidFill>
-                  <a:srgbClr val="233C32"/>
-                </a:solidFill>
-                <a:latin typeface="Liberation Sans"/>
-                <a:ea typeface="Liberation Sans"/>
-                <a:cs typeface="Liberation Sans"/>
-              </a:rPr>
-              <a:t>30 точек = 297 000 ₸ выручки</a:t>
-            </a:r>
-          </a:p>
-          <a:p xmlns:a="http://schemas.openxmlformats.org/drawingml/2006/main">
-            <a:pPr>
-              <a:defRPr sz="1800" b="0">
-                <a:solidFill>
-                  <a:srgbClr val="233C32"/>
-                </a:solidFill>
-                <a:latin typeface="Liberation Sans"/>
-                <a:ea typeface="Liberation Sans"/>
-                <a:cs typeface="Liberation Sans"/>
-              </a:defRPr>
-            </a:pPr>
-            <a:r>
-              <a:rPr sz="1800" b="0">
-                <a:solidFill>
-                  <a:srgbClr val="233C32"/>
-                </a:solidFill>
-                <a:latin typeface="Liberation Sans"/>
-                <a:ea typeface="Liberation Sans"/>
-                <a:cs typeface="Liberation Sans"/>
-              </a:rPr>
-              <a:t>До расходов на ИИ, хостинг и поддержку</a:t>
-            </a:r>
-          </a:p>
-          <a:p xmlns:a="http://schemas.openxmlformats.org/drawingml/2006/main">
-            <a:r>
-              <a:t/>
-            </a:r>
-          </a:p>
-          <a:p xmlns:a="http://schemas.openxmlformats.org/drawingml/2006/main">
-            <a:pPr>
-              <a:defRPr sz="1800" b="0">
-                <a:solidFill>
-                  <a:srgbClr val="233C32"/>
-                </a:solidFill>
-                <a:latin typeface="Liberation Sans"/>
-                <a:ea typeface="Liberation Sans"/>
-                <a:cs typeface="Liberation Sans"/>
-              </a:defRPr>
-            </a:pPr>
-            <a:r>
-              <a:rPr sz="1800" b="0">
-                <a:solidFill>
-                  <a:srgbClr val="233C32"/>
-                </a:solidFill>
-                <a:latin typeface="Liberation Sans"/>
-                <a:ea typeface="Liberation Sans"/>
-                <a:cs typeface="Liberation Sans"/>
-              </a:rPr>
-              <a:t>Цену и спрос проверим на пилоте</a:t>
+              <a:defRPr sz="1800" b="1">
+                <a:solidFill>
+                  <a:srgbClr val="24664F"/>
+                </a:solidFill>
+                <a:latin typeface="Liberation Sans"/>
+                <a:ea typeface="Liberation Sans"/>
+                <a:cs typeface="Liberation Sans"/>
+              </a:defRPr>
+            </a:pPr>
+            <a:r>
+              <a:rPr sz="1800" b="1">
+                <a:solidFill>
+                  <a:srgbClr val="24664F"/>
+                </a:solidFill>
+                <a:latin typeface="Liberation Sans"/>
+                <a:ea typeface="Liberation Sans"/>
+                <a:cs typeface="Liberation Sans"/>
+              </a:rPr>
+              <a:t>QorAI</a:t>
             </a:r>
           </a:p>
         </p:txBody>
@@ -5981,7 +7289,7 @@
     </p:spTree>
     <p:extLst>
       <p:ext uri="{BB962C8B-B14F-4D97-AF65-F5344CB8AC3E}">
-        <p14:creationId xmlns:p14="http://schemas.microsoft.com/office/powerpoint/2010/main" val="741291447"/>
+        <p14:creationId xmlns:p14="http://schemas.microsoft.com/office/powerpoint/2010/main" val="1045330279"/>
       </p:ext>
     </p:extLst>
   </p:cSld>
@@ -5994,7 +7302,7 @@
     <p:bg>
       <p:bgPr>
         <a:solidFill xmlns:a="http://schemas.openxmlformats.org/drawingml/2006/main">
-          <a:srgbClr val="F7F8F5"/>
+          <a:srgbClr val="F5F6F0"/>
         </a:solidFill>
       </p:bgPr>
     </p:bg>
@@ -6009,10 +7317,10 @@
       </p:grpSpPr>
       <p:sp>
         <p:nvSpPr>
-          <p:cNvPr id="6" name="">
+          <p:cNvPr id="10" name="">
             <a:extLst xmlns:a="http://schemas.openxmlformats.org/drawingml/2006/main">
               <a:ext uri="{FF2B5EF4-FFF2-40B4-BE49-F238E27FC236}">
-                <a16:creationId xmlns:a16="http://schemas.microsoft.com/office/drawing/2014/main" id="{7855A399-63CE-4822-93A2-9A28980CB0E6}"/>
+                <a16:creationId xmlns:a16="http://schemas.microsoft.com/office/drawing/2014/main" id="{6A96A6AF-78E8-4AE6-8A10-2B6C8AD13A41}"/>
               </a:ext>
             </a:extLst>
           </p:cNvPr>
@@ -6023,8 +7331,8 @@
         </p:nvSpPr>
         <p:spPr>
           <a:xfrm xmlns:a="http://schemas.openxmlformats.org/drawingml/2006/main">
-            <a:off x="685800" y="361950"/>
-            <a:ext cx="4762500" cy="381000"/>
+            <a:off x="10553700" y="323850"/>
+            <a:ext cx="1143000" cy="266700"/>
           </a:xfrm>
           <a:prstGeom xmlns:a="http://schemas.openxmlformats.org/drawingml/2006/main" prst="rect">
             <a:avLst/>
@@ -6038,9 +7346,9 @@
           <a:bodyPr xmlns:a="http://schemas.openxmlformats.org/drawingml/2006/main"/>
           <a:lstStyle xmlns:a="http://schemas.openxmlformats.org/drawingml/2006/main">
             <a:defPPr>
-              <a:defRPr sz="1650" b="1">
-                <a:solidFill>
-                  <a:srgbClr val="668354"/>
+              <a:defRPr sz="1200" b="0">
+                <a:solidFill>
+                  <a:srgbClr val="667B6D"/>
                 </a:solidFill>
                 <a:latin typeface="Liberation Sans"/>
                 <a:ea typeface="Liberation Sans"/>
@@ -6050,25 +7358,25 @@
           </a:lstStyle>
           <a:p xmlns:a="http://schemas.openxmlformats.org/drawingml/2006/main">
             <a:pPr>
-              <a:defRPr sz="1650" b="1">
-                <a:solidFill>
-                  <a:srgbClr val="668354"/>
-                </a:solidFill>
-                <a:latin typeface="Liberation Sans"/>
-                <a:ea typeface="Liberation Sans"/>
-                <a:cs typeface="Liberation Sans"/>
-              </a:defRPr>
-            </a:pPr>
-            <a:r>
-              <a:rPr sz="1650" b="1">
-                <a:solidFill>
-                  <a:srgbClr val="668354"/>
-                </a:solidFill>
-                <a:latin typeface="Liberation Sans"/>
-                <a:ea typeface="Liberation Sans"/>
-                <a:cs typeface="Liberation Sans"/>
-              </a:rPr>
-              <a:t>QorAI</a:t>
+              <a:defRPr sz="1200" b="0">
+                <a:solidFill>
+                  <a:srgbClr val="667B6D"/>
+                </a:solidFill>
+                <a:latin typeface="Liberation Sans"/>
+                <a:ea typeface="Liberation Sans"/>
+                <a:cs typeface="Liberation Sans"/>
+              </a:defRPr>
+            </a:pPr>
+            <a:r>
+              <a:rPr sz="1200" b="0">
+                <a:solidFill>
+                  <a:srgbClr val="667B6D"/>
+                </a:solidFill>
+                <a:latin typeface="Liberation Sans"/>
+                <a:ea typeface="Liberation Sans"/>
+                <a:cs typeface="Liberation Sans"/>
+              </a:rPr>
+              <a:t>07 / 10</a:t>
             </a:r>
           </a:p>
         </p:txBody>
@@ -6078,7 +7386,7 @@
           <p:cNvPr id="2" name="">
             <a:extLst xmlns:a="http://schemas.openxmlformats.org/drawingml/2006/main">
               <a:ext uri="{FF2B5EF4-FFF2-40B4-BE49-F238E27FC236}">
-                <a16:creationId xmlns:a16="http://schemas.microsoft.com/office/drawing/2014/main" id="{EAFAC75C-9ABB-46DD-A80E-0B76A236A73A}"/>
+                <a16:creationId xmlns:a16="http://schemas.microsoft.com/office/drawing/2014/main" id="{9D1937B4-3522-4F5F-9923-76C4CBC01216}"/>
               </a:ext>
             </a:extLst>
           </p:cNvPr>
@@ -6089,8 +7397,8 @@
         </p:nvSpPr>
         <p:spPr>
           <a:xfrm xmlns:a="http://schemas.openxmlformats.org/drawingml/2006/main">
-            <a:off x="10810875" y="381000"/>
-            <a:ext cx="666750" cy="333375"/>
+            <a:off x="552450" y="1419225"/>
+            <a:ext cx="5429250" cy="1314450"/>
           </a:xfrm>
           <a:prstGeom xmlns:a="http://schemas.openxmlformats.org/drawingml/2006/main" prst="rect">
             <a:avLst/>
@@ -6104,9 +7412,9 @@
           <a:bodyPr xmlns:a="http://schemas.openxmlformats.org/drawingml/2006/main"/>
           <a:lstStyle xmlns:a="http://schemas.openxmlformats.org/drawingml/2006/main">
             <a:defPPr>
-              <a:defRPr sz="1350" b="0">
-                <a:solidFill>
-                  <a:srgbClr val="668354"/>
+              <a:defRPr sz="3750" b="1">
+                <a:solidFill>
+                  <a:srgbClr val="1C382E"/>
                 </a:solidFill>
                 <a:latin typeface="Liberation Sans"/>
                 <a:ea typeface="Liberation Sans"/>
@@ -6116,25 +7424,48 @@
           </a:lstStyle>
           <a:p xmlns:a="http://schemas.openxmlformats.org/drawingml/2006/main">
             <a:pPr>
-              <a:defRPr sz="1350" b="0">
-                <a:solidFill>
-                  <a:srgbClr val="668354"/>
-                </a:solidFill>
-                <a:latin typeface="Liberation Sans"/>
-                <a:ea typeface="Liberation Sans"/>
-                <a:cs typeface="Liberation Sans"/>
-              </a:defRPr>
-            </a:pPr>
-            <a:r>
-              <a:rPr sz="1350" b="0">
-                <a:solidFill>
-                  <a:srgbClr val="668354"/>
-                </a:solidFill>
-                <a:latin typeface="Liberation Sans"/>
-                <a:ea typeface="Liberation Sans"/>
-                <a:cs typeface="Liberation Sans"/>
-              </a:rPr>
-              <a:t>07</a:t>
+              <a:defRPr sz="3750" b="1">
+                <a:solidFill>
+                  <a:srgbClr val="1C382E"/>
+                </a:solidFill>
+                <a:latin typeface="Liberation Sans"/>
+                <a:ea typeface="Liberation Sans"/>
+                <a:cs typeface="Liberation Sans"/>
+              </a:defRPr>
+            </a:pPr>
+            <a:r>
+              <a:rPr sz="3750" b="1">
+                <a:solidFill>
+                  <a:srgbClr val="1C382E"/>
+                </a:solidFill>
+                <a:latin typeface="Liberation Sans"/>
+                <a:ea typeface="Liberation Sans"/>
+                <a:cs typeface="Liberation Sans"/>
+              </a:rPr>
+              <a:t>Склад под рукой.</a:t>
+            </a:r>
+          </a:p>
+          <a:p xmlns:a="http://schemas.openxmlformats.org/drawingml/2006/main">
+            <a:pPr>
+              <a:defRPr sz="3750" b="1">
+                <a:solidFill>
+                  <a:srgbClr val="1C382E"/>
+                </a:solidFill>
+                <a:latin typeface="Liberation Sans"/>
+                <a:ea typeface="Liberation Sans"/>
+                <a:cs typeface="Liberation Sans"/>
+              </a:defRPr>
+            </a:pPr>
+            <a:r>
+              <a:rPr sz="3750" b="1">
+                <a:solidFill>
+                  <a:srgbClr val="1C382E"/>
+                </a:solidFill>
+                <a:latin typeface="Liberation Sans"/>
+                <a:ea typeface="Liberation Sans"/>
+                <a:cs typeface="Liberation Sans"/>
+              </a:rPr>
+              <a:t>Даже со смартфона.</a:t>
             </a:r>
           </a:p>
         </p:txBody>
@@ -6144,7 +7475,7 @@
           <p:cNvPr id="3" name="">
             <a:extLst xmlns:a="http://schemas.openxmlformats.org/drawingml/2006/main">
               <a:ext uri="{FF2B5EF4-FFF2-40B4-BE49-F238E27FC236}">
-                <a16:creationId xmlns:a16="http://schemas.microsoft.com/office/drawing/2014/main" id="{3CA22A2E-9A51-4118-9914-303C22F5731F}"/>
+                <a16:creationId xmlns:a16="http://schemas.microsoft.com/office/drawing/2014/main" id="{0DE121D7-3D61-444E-8EC7-E55D1F10024B}"/>
               </a:ext>
             </a:extLst>
           </p:cNvPr>
@@ -6155,8 +7486,8 @@
         </p:nvSpPr>
         <p:spPr>
           <a:xfrm xmlns:a="http://schemas.openxmlformats.org/drawingml/2006/main">
-            <a:off x="685800" y="1171575"/>
-            <a:ext cx="10820400" cy="1476375"/>
+            <a:off x="590550" y="3667125"/>
+            <a:ext cx="5362575" cy="1457325"/>
           </a:xfrm>
           <a:prstGeom xmlns:a="http://schemas.openxmlformats.org/drawingml/2006/main" prst="rect">
             <a:avLst/>
@@ -6170,9 +7501,9 @@
           <a:bodyPr xmlns:a="http://schemas.openxmlformats.org/drawingml/2006/main"/>
           <a:lstStyle xmlns:a="http://schemas.openxmlformats.org/drawingml/2006/main">
             <a:defPPr>
-              <a:defRPr sz="4350" b="1">
-                <a:solidFill>
-                  <a:srgbClr val="233C32"/>
+              <a:defRPr sz="1950" b="0">
+                <a:solidFill>
+                  <a:srgbClr val="667B6D"/>
                 </a:solidFill>
                 <a:latin typeface="Liberation Sans"/>
                 <a:ea typeface="Liberation Sans"/>
@@ -6182,48 +7513,71 @@
           </a:lstStyle>
           <a:p xmlns:a="http://schemas.openxmlformats.org/drawingml/2006/main">
             <a:pPr>
-              <a:defRPr sz="4350" b="1">
-                <a:solidFill>
-                  <a:srgbClr val="233C32"/>
-                </a:solidFill>
-                <a:latin typeface="Liberation Sans"/>
-                <a:ea typeface="Liberation Sans"/>
-                <a:cs typeface="Liberation Sans"/>
-              </a:defRPr>
-            </a:pPr>
-            <a:r>
-              <a:rPr sz="4350" b="1">
-                <a:solidFill>
-                  <a:srgbClr val="233C32"/>
-                </a:solidFill>
-                <a:latin typeface="Liberation Sans"/>
-                <a:ea typeface="Liberation Sans"/>
-                <a:cs typeface="Liberation Sans"/>
-              </a:rPr>
-              <a:t>Рабочий MVP</a:t>
-            </a:r>
-          </a:p>
-          <a:p xmlns:a="http://schemas.openxmlformats.org/drawingml/2006/main">
-            <a:pPr>
-              <a:defRPr sz="4350" b="1">
-                <a:solidFill>
-                  <a:srgbClr val="233C32"/>
-                </a:solidFill>
-                <a:latin typeface="Liberation Sans"/>
-                <a:ea typeface="Liberation Sans"/>
-                <a:cs typeface="Liberation Sans"/>
-              </a:defRPr>
-            </a:pPr>
-            <a:r>
-              <a:rPr sz="4350" b="1">
-                <a:solidFill>
-                  <a:srgbClr val="233C32"/>
-                </a:solidFill>
-                <a:latin typeface="Liberation Sans"/>
-                <a:ea typeface="Liberation Sans"/>
-                <a:cs typeface="Liberation Sans"/>
-              </a:rPr>
-              <a:t>для первого пилота</a:t>
+              <a:defRPr sz="1950" b="0">
+                <a:solidFill>
+                  <a:srgbClr val="667B6D"/>
+                </a:solidFill>
+                <a:latin typeface="Liberation Sans"/>
+                <a:ea typeface="Liberation Sans"/>
+                <a:cs typeface="Liberation Sans"/>
+              </a:defRPr>
+            </a:pPr>
+            <a:r>
+              <a:rPr sz="1950" b="0">
+                <a:solidFill>
+                  <a:srgbClr val="667B6D"/>
+                </a:solidFill>
+                <a:latin typeface="Liberation Sans"/>
+                <a:ea typeface="Liberation Sans"/>
+                <a:cs typeface="Liberation Sans"/>
+              </a:rPr>
+              <a:t>Личный аккаунт хранит данные.</a:t>
+            </a:r>
+          </a:p>
+          <a:p xmlns:a="http://schemas.openxmlformats.org/drawingml/2006/main">
+            <a:pPr>
+              <a:defRPr sz="1950" b="0">
+                <a:solidFill>
+                  <a:srgbClr val="667B6D"/>
+                </a:solidFill>
+                <a:latin typeface="Liberation Sans"/>
+                <a:ea typeface="Liberation Sans"/>
+                <a:cs typeface="Liberation Sans"/>
+              </a:defRPr>
+            </a:pPr>
+            <a:r>
+              <a:rPr sz="1950" b="0">
+                <a:solidFill>
+                  <a:srgbClr val="667B6D"/>
+                </a:solidFill>
+                <a:latin typeface="Liberation Sans"/>
+                <a:ea typeface="Liberation Sans"/>
+                <a:cs typeface="Liberation Sans"/>
+              </a:rPr>
+              <a:t>PWA открывается на телефоне.</a:t>
+            </a:r>
+          </a:p>
+          <a:p xmlns:a="http://schemas.openxmlformats.org/drawingml/2006/main">
+            <a:pPr>
+              <a:defRPr sz="1950" b="0">
+                <a:solidFill>
+                  <a:srgbClr val="667B6D"/>
+                </a:solidFill>
+                <a:latin typeface="Liberation Sans"/>
+                <a:ea typeface="Liberation Sans"/>
+                <a:cs typeface="Liberation Sans"/>
+              </a:defRPr>
+            </a:pPr>
+            <a:r>
+              <a:rPr sz="1950" b="0">
+                <a:solidFill>
+                  <a:srgbClr val="667B6D"/>
+                </a:solidFill>
+                <a:latin typeface="Liberation Sans"/>
+                <a:ea typeface="Liberation Sans"/>
+                <a:cs typeface="Liberation Sans"/>
+              </a:rPr>
+              <a:t>Экспорт доступен в CSV и JSON.</a:t>
             </a:r>
           </a:p>
         </p:txBody>
@@ -6233,7 +7587,7 @@
           <p:cNvPr id="4" name="">
             <a:extLst xmlns:a="http://schemas.openxmlformats.org/drawingml/2006/main">
               <a:ext uri="{FF2B5EF4-FFF2-40B4-BE49-F238E27FC236}">
-                <a16:creationId xmlns:a16="http://schemas.microsoft.com/office/drawing/2014/main" id="{2C2DCF49-76FA-43CA-AFDA-CFA970D95C01}"/>
+                <a16:creationId xmlns:a16="http://schemas.microsoft.com/office/drawing/2014/main" id="{3FA57534-6F88-4ECF-B607-191B15F0CCC7}"/>
               </a:ext>
             </a:extLst>
           </p:cNvPr>
@@ -6244,8 +7598,8 @@
         </p:nvSpPr>
         <p:spPr>
           <a:xfrm xmlns:a="http://schemas.openxmlformats.org/drawingml/2006/main">
-            <a:off x="723900" y="2809875"/>
-            <a:ext cx="10477500" cy="571500"/>
+            <a:off x="6534150" y="866775"/>
+            <a:ext cx="2238375" cy="333375"/>
           </a:xfrm>
           <a:prstGeom xmlns:a="http://schemas.openxmlformats.org/drawingml/2006/main" prst="rect">
             <a:avLst/>
@@ -6259,9 +7613,9 @@
           <a:bodyPr xmlns:a="http://schemas.openxmlformats.org/drawingml/2006/main"/>
           <a:lstStyle xmlns:a="http://schemas.openxmlformats.org/drawingml/2006/main">
             <a:defPPr>
-              <a:defRPr sz="1950" b="0">
-                <a:solidFill>
-                  <a:srgbClr val="668354"/>
+              <a:defRPr sz="1725" b="1">
+                <a:solidFill>
+                  <a:srgbClr val="24664F"/>
                 </a:solidFill>
                 <a:latin typeface="Liberation Sans"/>
                 <a:ea typeface="Liberation Sans"/>
@@ -6271,25 +7625,25 @@
           </a:lstStyle>
           <a:p xmlns:a="http://schemas.openxmlformats.org/drawingml/2006/main">
             <a:pPr>
-              <a:defRPr sz="1950" b="0">
-                <a:solidFill>
-                  <a:srgbClr val="668354"/>
-                </a:solidFill>
-                <a:latin typeface="Liberation Sans"/>
-                <a:ea typeface="Liberation Sans"/>
-                <a:cs typeface="Liberation Sans"/>
-              </a:defRPr>
-            </a:pPr>
-            <a:r>
-              <a:rPr sz="1950" b="0">
-                <a:solidFill>
-                  <a:srgbClr val="668354"/>
-                </a:solidFill>
-                <a:latin typeface="Liberation Sans"/>
-                <a:ea typeface="Liberation Sans"/>
-                <a:cs typeface="Liberation Sans"/>
-              </a:rPr>
-              <a:t>Сайт и сервер работают вместе</a:t>
+              <a:defRPr sz="1725" b="1">
+                <a:solidFill>
+                  <a:srgbClr val="24664F"/>
+                </a:solidFill>
+                <a:latin typeface="Liberation Sans"/>
+                <a:ea typeface="Liberation Sans"/>
+                <a:cs typeface="Liberation Sans"/>
+              </a:defRPr>
+            </a:pPr>
+            <a:r>
+              <a:rPr sz="1725" b="1">
+                <a:solidFill>
+                  <a:srgbClr val="24664F"/>
+                </a:solidFill>
+                <a:latin typeface="Liberation Sans"/>
+                <a:ea typeface="Liberation Sans"/>
+                <a:cs typeface="Liberation Sans"/>
+              </a:rPr>
+              <a:t>Обзор</a:t>
             </a:r>
           </a:p>
         </p:txBody>
@@ -6299,7 +7653,7 @@
           <p:cNvPr id="5" name="">
             <a:extLst xmlns:a="http://schemas.openxmlformats.org/drawingml/2006/main">
               <a:ext uri="{FF2B5EF4-FFF2-40B4-BE49-F238E27FC236}">
-                <a16:creationId xmlns:a16="http://schemas.microsoft.com/office/drawing/2014/main" id="{1BEADA27-1D4D-4532-9CD0-FCF6B2EB8983}"/>
+                <a16:creationId xmlns:a16="http://schemas.microsoft.com/office/drawing/2014/main" id="{6509DE85-3BB1-4E63-BEF0-30ED6774A013}"/>
               </a:ext>
             </a:extLst>
           </p:cNvPr>
@@ -6310,8 +7664,8 @@
         </p:nvSpPr>
         <p:spPr>
           <a:xfrm xmlns:a="http://schemas.openxmlformats.org/drawingml/2006/main">
-            <a:off x="723900" y="3714750"/>
-            <a:ext cx="10668000" cy="2381250"/>
+            <a:off x="9324975" y="866775"/>
+            <a:ext cx="2238375" cy="333375"/>
           </a:xfrm>
           <a:prstGeom xmlns:a="http://schemas.openxmlformats.org/drawingml/2006/main" prst="rect">
             <a:avLst/>
@@ -6325,9 +7679,9 @@
           <a:bodyPr xmlns:a="http://schemas.openxmlformats.org/drawingml/2006/main"/>
           <a:lstStyle xmlns:a="http://schemas.openxmlformats.org/drawingml/2006/main">
             <a:defPPr>
-              <a:defRPr sz="2025" b="0">
-                <a:solidFill>
-                  <a:srgbClr val="233C32"/>
+              <a:defRPr sz="1725" b="1">
+                <a:solidFill>
+                  <a:srgbClr val="24664F"/>
                 </a:solidFill>
                 <a:latin typeface="Liberation Sans"/>
                 <a:ea typeface="Liberation Sans"/>
@@ -6337,122 +7691,215 @@
           </a:lstStyle>
           <a:p xmlns:a="http://schemas.openxmlformats.org/drawingml/2006/main">
             <a:pPr>
-              <a:defRPr sz="2025" b="0">
-                <a:solidFill>
-                  <a:srgbClr val="233C32"/>
-                </a:solidFill>
-                <a:latin typeface="Liberation Sans"/>
-                <a:ea typeface="Liberation Sans"/>
-                <a:cs typeface="Liberation Sans"/>
-              </a:defRPr>
-            </a:pPr>
-            <a:r>
-              <a:rPr sz="2025" b="0">
-                <a:solidFill>
-                  <a:srgbClr val="233C32"/>
-                </a:solidFill>
-                <a:latin typeface="Liberation Sans"/>
-                <a:ea typeface="Liberation Sans"/>
-                <a:cs typeface="Liberation Sans"/>
-              </a:rPr>
-              <a:t>Склад и операции сохраняются в базе</a:t>
-            </a:r>
-          </a:p>
-          <a:p xmlns:a="http://schemas.openxmlformats.org/drawingml/2006/main">
-            <a:pPr>
-              <a:defRPr sz="2025" b="0">
-                <a:solidFill>
-                  <a:srgbClr val="233C32"/>
-                </a:solidFill>
-                <a:latin typeface="Liberation Sans"/>
-                <a:ea typeface="Liberation Sans"/>
-                <a:cs typeface="Liberation Sans"/>
-              </a:defRPr>
-            </a:pPr>
-            <a:r>
-              <a:rPr sz="2025" b="0">
-                <a:solidFill>
-                  <a:srgbClr val="233C32"/>
-                </a:solidFill>
-                <a:latin typeface="Liberation Sans"/>
-                <a:ea typeface="Liberation Sans"/>
-                <a:cs typeface="Liberation Sans"/>
-              </a:rPr>
-              <a:t>Аккаунты разделяют данные пользователей</a:t>
-            </a:r>
-          </a:p>
-          <a:p xmlns:a="http://schemas.openxmlformats.org/drawingml/2006/main">
-            <a:pPr>
-              <a:defRPr sz="2025" b="0">
-                <a:solidFill>
-                  <a:srgbClr val="233C32"/>
-                </a:solidFill>
-                <a:latin typeface="Liberation Sans"/>
-                <a:ea typeface="Liberation Sans"/>
-                <a:cs typeface="Liberation Sans"/>
-              </a:defRPr>
-            </a:pPr>
-            <a:r>
-              <a:rPr sz="2025" b="0">
-                <a:solidFill>
-                  <a:srgbClr val="233C32"/>
-                </a:solidFill>
-                <a:latin typeface="Liberation Sans"/>
-                <a:ea typeface="Liberation Sans"/>
-                <a:cs typeface="Liberation Sans"/>
-              </a:rPr>
-              <a:t>PWA открывается со смартфона</a:t>
-            </a:r>
-          </a:p>
-          <a:p xmlns:a="http://schemas.openxmlformats.org/drawingml/2006/main">
-            <a:pPr>
-              <a:defRPr sz="2025" b="0">
-                <a:solidFill>
-                  <a:srgbClr val="233C32"/>
-                </a:solidFill>
-                <a:latin typeface="Liberation Sans"/>
-                <a:ea typeface="Liberation Sans"/>
-                <a:cs typeface="Liberation Sans"/>
-              </a:defRPr>
-            </a:pPr>
-            <a:r>
-              <a:rPr sz="2025" b="0">
-                <a:solidFill>
-                  <a:srgbClr val="233C32"/>
-                </a:solidFill>
-                <a:latin typeface="Liberation Sans"/>
-                <a:ea typeface="Liberation Sans"/>
-                <a:cs typeface="Liberation Sans"/>
-              </a:rPr>
-              <a:t>CSV и JSON позволяют выгрузить данные</a:t>
-            </a:r>
-          </a:p>
-          <a:p xmlns:a="http://schemas.openxmlformats.org/drawingml/2006/main">
-            <a:r>
-              <a:t/>
-            </a:r>
-          </a:p>
-          <a:p xmlns:a="http://schemas.openxmlformats.org/drawingml/2006/main">
-            <a:pPr>
-              <a:defRPr sz="2025" b="0">
-                <a:solidFill>
-                  <a:srgbClr val="233C32"/>
-                </a:solidFill>
-                <a:latin typeface="Liberation Sans"/>
-                <a:ea typeface="Liberation Sans"/>
-                <a:cs typeface="Liberation Sans"/>
-              </a:defRPr>
-            </a:pPr>
-            <a:r>
-              <a:rPr sz="2025" b="0">
-                <a:solidFill>
-                  <a:srgbClr val="233C32"/>
-                </a:solidFill>
-                <a:latin typeface="Liberation Sans"/>
-                <a:ea typeface="Liberation Sans"/>
-                <a:cs typeface="Liberation Sans"/>
-              </a:rPr>
-              <a:t>Далее: пилот, измерения, улучшение прогноза</a:t>
+              <a:defRPr sz="1725" b="1">
+                <a:solidFill>
+                  <a:srgbClr val="24664F"/>
+                </a:solidFill>
+                <a:latin typeface="Liberation Sans"/>
+                <a:ea typeface="Liberation Sans"/>
+                <a:cs typeface="Liberation Sans"/>
+              </a:defRPr>
+            </a:pPr>
+            <a:r>
+              <a:rPr sz="1725" b="1">
+                <a:solidFill>
+                  <a:srgbClr val="24664F"/>
+                </a:solidFill>
+                <a:latin typeface="Liberation Sans"/>
+                <a:ea typeface="Liberation Sans"/>
+                <a:cs typeface="Liberation Sans"/>
+              </a:rPr>
+              <a:t>Склад</a:t>
+            </a:r>
+          </a:p>
+        </p:txBody>
+      </p:sp>
+      <p:pic>
+        <p:nvPicPr>
+          <p:cNvPr id="6" name="">
+            <a:extLst xmlns:a="http://schemas.openxmlformats.org/drawingml/2006/main">
+              <a:ext uri="{FF2B5EF4-FFF2-40B4-BE49-F238E27FC236}">
+                <a16:creationId xmlns:a16="http://schemas.microsoft.com/office/drawing/2014/main" id="{670C3F7A-DA3C-4E0E-B7CA-5BFC915FEF5E}"/>
+              </a:ext>
+            </a:extLst>
+          </p:cNvPr>
+          <p:cNvPicPr>
+            <a:picLocks xmlns:a="http://schemas.openxmlformats.org/drawingml/2006/main" noChangeAspect="1"/>
+          </p:cNvPicPr>
+          <p:nvPr/>
+        </p:nvPicPr>
+        <p:blipFill>
+          <a:blip xmlns:r="http://schemas.openxmlformats.org/officeDocument/2006/relationships" xmlns:a="http://schemas.openxmlformats.org/drawingml/2006/main" r:embed="R3743fd5dcf984806"/>
+          <a:srcRect xmlns:a="http://schemas.openxmlformats.org/drawingml/2006/main" l="0" t="0" r="2800" b="0"/>
+          <a:stretch xmlns:a="http://schemas.openxmlformats.org/drawingml/2006/main"/>
+        </p:blipFill>
+        <p:spPr>
+          <a:xfrm xmlns:a="http://schemas.openxmlformats.org/drawingml/2006/main">
+            <a:off x="6486525" y="1304925"/>
+            <a:ext cx="2333625" cy="5048250"/>
+          </a:xfrm>
+          <a:prstGeom xmlns:a="http://schemas.openxmlformats.org/drawingml/2006/main" prst="rect">
+            <a:avLst/>
+          </a:prstGeom>
+        </p:spPr>
+      </p:pic>
+      <p:pic>
+        <p:nvPicPr>
+          <p:cNvPr id="7" name="">
+            <a:extLst xmlns:a="http://schemas.openxmlformats.org/drawingml/2006/main">
+              <a:ext uri="{FF2B5EF4-FFF2-40B4-BE49-F238E27FC236}">
+                <a16:creationId xmlns:a16="http://schemas.microsoft.com/office/drawing/2014/main" id="{1D3DDB4A-BF1D-4C77-8512-2513CDDE45F8}"/>
+              </a:ext>
+            </a:extLst>
+          </p:cNvPr>
+          <p:cNvPicPr>
+            <a:picLocks xmlns:a="http://schemas.openxmlformats.org/drawingml/2006/main" noChangeAspect="1"/>
+          </p:cNvPicPr>
+          <p:nvPr/>
+        </p:nvPicPr>
+        <p:blipFill>
+          <a:blip xmlns:r="http://schemas.openxmlformats.org/officeDocument/2006/relationships" xmlns:a="http://schemas.openxmlformats.org/drawingml/2006/main" r:embed="R3a857a50bcf34925"/>
+          <a:srcRect xmlns:a="http://schemas.openxmlformats.org/drawingml/2006/main" l="0" t="0" r="2800" b="0"/>
+          <a:stretch xmlns:a="http://schemas.openxmlformats.org/drawingml/2006/main"/>
+        </p:blipFill>
+        <p:spPr>
+          <a:xfrm xmlns:a="http://schemas.openxmlformats.org/drawingml/2006/main">
+            <a:off x="9267825" y="1304925"/>
+            <a:ext cx="2333625" cy="5048250"/>
+          </a:xfrm>
+          <a:prstGeom xmlns:a="http://schemas.openxmlformats.org/drawingml/2006/main" prst="rect">
+            <a:avLst/>
+          </a:prstGeom>
+        </p:spPr>
+      </p:pic>
+      <p:sp>
+        <p:nvSpPr>
+          <p:cNvPr id="8" name="">
+            <a:extLst xmlns:a="http://schemas.openxmlformats.org/drawingml/2006/main">
+              <a:ext uri="{FF2B5EF4-FFF2-40B4-BE49-F238E27FC236}">
+                <a16:creationId xmlns:a16="http://schemas.microsoft.com/office/drawing/2014/main" id="{190E3A2E-5926-4965-9054-A2DFA1D1C624}"/>
+              </a:ext>
+            </a:extLst>
+          </p:cNvPr>
+          <p:cNvSpPr>
+            <a:spLocks xmlns:a="http://schemas.openxmlformats.org/drawingml/2006/main" noGrp="1"/>
+          </p:cNvSpPr>
+          <p:nvPr/>
+        </p:nvSpPr>
+        <p:spPr>
+          <a:xfrm xmlns:a="http://schemas.openxmlformats.org/drawingml/2006/main">
+            <a:off x="571500" y="6400800"/>
+            <a:ext cx="11010900" cy="266700"/>
+          </a:xfrm>
+          <a:prstGeom xmlns:a="http://schemas.openxmlformats.org/drawingml/2006/main" prst="rect">
+            <a:avLst/>
+          </a:prstGeom>
+          <a:noFill xmlns:a="http://schemas.openxmlformats.org/drawingml/2006/main"/>
+          <a:ln xmlns:a="http://schemas.openxmlformats.org/drawingml/2006/main" w="0">
+            <a:noFill/>
+          </a:ln>
+        </p:spPr>
+        <p:txBody>
+          <a:bodyPr xmlns:a="http://schemas.openxmlformats.org/drawingml/2006/main"/>
+          <a:lstStyle xmlns:a="http://schemas.openxmlformats.org/drawingml/2006/main">
+            <a:defPPr>
+              <a:defRPr sz="1275" b="0">
+                <a:solidFill>
+                  <a:srgbClr val="667B6D"/>
+                </a:solidFill>
+                <a:latin typeface="Liberation Sans"/>
+                <a:ea typeface="Liberation Sans"/>
+                <a:cs typeface="Liberation Sans"/>
+              </a:defRPr>
+            </a:defPPr>
+          </a:lstStyle>
+          <a:p xmlns:a="http://schemas.openxmlformats.org/drawingml/2006/main">
+            <a:pPr>
+              <a:defRPr sz="1275" b="0">
+                <a:solidFill>
+                  <a:srgbClr val="667B6D"/>
+                </a:solidFill>
+                <a:latin typeface="Liberation Sans"/>
+                <a:ea typeface="Liberation Sans"/>
+                <a:cs typeface="Liberation Sans"/>
+              </a:defRPr>
+            </a:pPr>
+            <a:r>
+              <a:rPr sz="1275" b="0">
+                <a:solidFill>
+                  <a:srgbClr val="667B6D"/>
+                </a:solidFill>
+                <a:latin typeface="Liberation Sans"/>
+                <a:ea typeface="Liberation Sans"/>
+                <a:cs typeface="Liberation Sans"/>
+              </a:rPr>
+              <a:t>Реальные мобильные экраны QorAI.</a:t>
+            </a:r>
+          </a:p>
+        </p:txBody>
+      </p:sp>
+      <p:sp>
+        <p:nvSpPr>
+          <p:cNvPr id="9" name="">
+            <a:extLst xmlns:a="http://schemas.openxmlformats.org/drawingml/2006/main">
+              <a:ext uri="{FF2B5EF4-FFF2-40B4-BE49-F238E27FC236}">
+                <a16:creationId xmlns:a16="http://schemas.microsoft.com/office/drawing/2014/main" id="{DE0FA921-FFC2-4210-8F7E-5A4474A295B8}"/>
+              </a:ext>
+            </a:extLst>
+          </p:cNvPr>
+          <p:cNvSpPr>
+            <a:spLocks xmlns:a="http://schemas.openxmlformats.org/drawingml/2006/main" noGrp="1"/>
+          </p:cNvSpPr>
+          <p:nvPr/>
+        </p:nvSpPr>
+        <p:spPr>
+          <a:xfrm xmlns:a="http://schemas.openxmlformats.org/drawingml/2006/main">
+            <a:off x="552450" y="285750"/>
+            <a:ext cx="1524000" cy="381000"/>
+          </a:xfrm>
+          <a:prstGeom xmlns:a="http://schemas.openxmlformats.org/drawingml/2006/main" prst="rect">
+            <a:avLst/>
+          </a:prstGeom>
+          <a:noFill xmlns:a="http://schemas.openxmlformats.org/drawingml/2006/main"/>
+          <a:ln xmlns:a="http://schemas.openxmlformats.org/drawingml/2006/main" w="0">
+            <a:noFill/>
+          </a:ln>
+        </p:spPr>
+        <p:txBody>
+          <a:bodyPr xmlns:a="http://schemas.openxmlformats.org/drawingml/2006/main"/>
+          <a:lstStyle xmlns:a="http://schemas.openxmlformats.org/drawingml/2006/main">
+            <a:defPPr>
+              <a:defRPr sz="1800" b="1">
+                <a:solidFill>
+                  <a:srgbClr val="24664F"/>
+                </a:solidFill>
+                <a:latin typeface="Liberation Sans"/>
+                <a:ea typeface="Liberation Sans"/>
+                <a:cs typeface="Liberation Sans"/>
+              </a:defRPr>
+            </a:defPPr>
+          </a:lstStyle>
+          <a:p xmlns:a="http://schemas.openxmlformats.org/drawingml/2006/main">
+            <a:pPr>
+              <a:defRPr sz="1800" b="1">
+                <a:solidFill>
+                  <a:srgbClr val="24664F"/>
+                </a:solidFill>
+                <a:latin typeface="Liberation Sans"/>
+                <a:ea typeface="Liberation Sans"/>
+                <a:cs typeface="Liberation Sans"/>
+              </a:defRPr>
+            </a:pPr>
+            <a:r>
+              <a:rPr sz="1800" b="1">
+                <a:solidFill>
+                  <a:srgbClr val="24664F"/>
+                </a:solidFill>
+                <a:latin typeface="Liberation Sans"/>
+                <a:ea typeface="Liberation Sans"/>
+                <a:cs typeface="Liberation Sans"/>
+              </a:rPr>
+              <a:t>QorAI</a:t>
             </a:r>
           </a:p>
         </p:txBody>
@@ -6460,7 +7907,7 @@
     </p:spTree>
     <p:extLst>
       <p:ext uri="{BB962C8B-B14F-4D97-AF65-F5344CB8AC3E}">
-        <p14:creationId xmlns:p14="http://schemas.microsoft.com/office/powerpoint/2010/main" val="1972986995"/>
+        <p14:creationId xmlns:p14="http://schemas.microsoft.com/office/powerpoint/2010/main" val="504920159"/>
       </p:ext>
     </p:extLst>
   </p:cSld>
@@ -6473,7 +7920,7 @@
     <p:bg>
       <p:bgPr>
         <a:solidFill xmlns:a="http://schemas.openxmlformats.org/drawingml/2006/main">
-          <a:srgbClr val="142E25"/>
+          <a:srgbClr val="F5F6F0"/>
         </a:solidFill>
       </p:bgPr>
     </p:bg>
@@ -6488,10 +7935,10 @@
       </p:grpSpPr>
       <p:sp>
         <p:nvSpPr>
-          <p:cNvPr id="6" name="">
+          <p:cNvPr id="11" name="">
             <a:extLst xmlns:a="http://schemas.openxmlformats.org/drawingml/2006/main">
               <a:ext uri="{FF2B5EF4-FFF2-40B4-BE49-F238E27FC236}">
-                <a16:creationId xmlns:a16="http://schemas.microsoft.com/office/drawing/2014/main" id="{DE57B84A-6D3F-4232-BFF6-73B4E1DF8285}"/>
+                <a16:creationId xmlns:a16="http://schemas.microsoft.com/office/drawing/2014/main" id="{C5845EC5-5F50-4E0B-A036-B83B27A086F0}"/>
               </a:ext>
             </a:extLst>
           </p:cNvPr>
@@ -6502,8 +7949,8 @@
         </p:nvSpPr>
         <p:spPr>
           <a:xfrm xmlns:a="http://schemas.openxmlformats.org/drawingml/2006/main">
-            <a:off x="685800" y="361950"/>
-            <a:ext cx="4762500" cy="381000"/>
+            <a:off x="10553700" y="323850"/>
+            <a:ext cx="1143000" cy="266700"/>
           </a:xfrm>
           <a:prstGeom xmlns:a="http://schemas.openxmlformats.org/drawingml/2006/main" prst="rect">
             <a:avLst/>
@@ -6517,9 +7964,9 @@
           <a:bodyPr xmlns:a="http://schemas.openxmlformats.org/drawingml/2006/main"/>
           <a:lstStyle xmlns:a="http://schemas.openxmlformats.org/drawingml/2006/main">
             <a:defPPr>
-              <a:defRPr sz="1650" b="1">
-                <a:solidFill>
-                  <a:srgbClr val="A5C99A"/>
+              <a:defRPr sz="1200" b="0">
+                <a:solidFill>
+                  <a:srgbClr val="667B6D"/>
                 </a:solidFill>
                 <a:latin typeface="Liberation Sans"/>
                 <a:ea typeface="Liberation Sans"/>
@@ -6529,47 +7976,76 @@
           </a:lstStyle>
           <a:p xmlns:a="http://schemas.openxmlformats.org/drawingml/2006/main">
             <a:pPr>
-              <a:defRPr sz="1650" b="1">
-                <a:solidFill>
-                  <a:srgbClr val="A5C99A"/>
-                </a:solidFill>
-                <a:latin typeface="Liberation Sans"/>
-                <a:ea typeface="Liberation Sans"/>
-                <a:cs typeface="Liberation Sans"/>
-              </a:defRPr>
-            </a:pPr>
-            <a:r>
-              <a:rPr sz="1650" b="1">
-                <a:solidFill>
-                  <a:srgbClr val="A5C99A"/>
-                </a:solidFill>
-                <a:latin typeface="Liberation Sans"/>
-                <a:ea typeface="Liberation Sans"/>
-                <a:cs typeface="Liberation Sans"/>
-              </a:rPr>
-              <a:t>QorAI</a:t>
-            </a:r>
-          </a:p>
-        </p:txBody>
-      </p:sp>
-      <p:sp>
-        <p:nvSpPr>
+              <a:defRPr sz="1200" b="0">
+                <a:solidFill>
+                  <a:srgbClr val="667B6D"/>
+                </a:solidFill>
+                <a:latin typeface="Liberation Sans"/>
+                <a:ea typeface="Liberation Sans"/>
+                <a:cs typeface="Liberation Sans"/>
+              </a:defRPr>
+            </a:pPr>
+            <a:r>
+              <a:rPr sz="1200" b="0">
+                <a:solidFill>
+                  <a:srgbClr val="667B6D"/>
+                </a:solidFill>
+                <a:latin typeface="Liberation Sans"/>
+                <a:ea typeface="Liberation Sans"/>
+                <a:cs typeface="Liberation Sans"/>
+              </a:rPr>
+              <a:t>08 / 10</a:t>
+            </a:r>
+          </a:p>
+        </p:txBody>
+      </p:sp>
+      <p:pic>
+        <p:nvPicPr>
           <p:cNvPr id="2" name="">
             <a:extLst xmlns:a="http://schemas.openxmlformats.org/drawingml/2006/main">
               <a:ext uri="{FF2B5EF4-FFF2-40B4-BE49-F238E27FC236}">
-                <a16:creationId xmlns:a16="http://schemas.microsoft.com/office/drawing/2014/main" id="{BE3E2F69-D9C5-44C8-A42B-8F9509ABCA1D}"/>
+                <a16:creationId xmlns:a16="http://schemas.microsoft.com/office/drawing/2014/main" id="{D1573BD2-3235-4C01-AB9C-386E65183A5C}"/>
               </a:ext>
             </a:extLst>
           </p:cNvPr>
-          <p:cNvSpPr>
-            <a:spLocks xmlns:a="http://schemas.openxmlformats.org/drawingml/2006/main" noGrp="1"/>
-          </p:cNvSpPr>
+          <p:cNvPicPr>
+            <a:picLocks xmlns:a="http://schemas.openxmlformats.org/drawingml/2006/main" noChangeAspect="1"/>
+          </p:cNvPicPr>
           <p:nvPr/>
-        </p:nvSpPr>
+        </p:nvPicPr>
+        <p:blipFill>
+          <a:blip xmlns:r="http://schemas.openxmlformats.org/officeDocument/2006/relationships" xmlns:a="http://schemas.openxmlformats.org/drawingml/2006/main" r:embed="R0a37510dd7174d24"/>
+          <a:srcRect xmlns:a="http://schemas.openxmlformats.org/drawingml/2006/main" l="23000" t="3000" r="31000" b="3000"/>
+          <a:stretch xmlns:a="http://schemas.openxmlformats.org/drawingml/2006/main"/>
+        </p:blipFill>
         <p:spPr>
           <a:xfrm xmlns:a="http://schemas.openxmlformats.org/drawingml/2006/main">
-            <a:off x="10810875" y="381000"/>
-            <a:ext cx="666750" cy="333375"/>
+            <a:off x="0" y="0"/>
+            <a:ext cx="5038725" cy="6858000"/>
+          </a:xfrm>
+          <a:prstGeom xmlns:a="http://schemas.openxmlformats.org/drawingml/2006/main" prst="rect">
+            <a:avLst/>
+          </a:prstGeom>
+        </p:spPr>
+      </p:pic>
+      <p:sp>
+        <p:nvSpPr>
+          <p:cNvPr id="3" name="">
+            <a:extLst xmlns:a="http://schemas.openxmlformats.org/drawingml/2006/main">
+              <a:ext uri="{FF2B5EF4-FFF2-40B4-BE49-F238E27FC236}">
+                <a16:creationId xmlns:a16="http://schemas.microsoft.com/office/drawing/2014/main" id="{41953B7C-2F45-43DA-993D-5EF2E95AB240}"/>
+              </a:ext>
+            </a:extLst>
+          </p:cNvPr>
+          <p:cNvSpPr>
+            <a:spLocks xmlns:a="http://schemas.openxmlformats.org/drawingml/2006/main" noGrp="1"/>
+          </p:cNvSpPr>
+          <p:nvPr/>
+        </p:nvSpPr>
+        <p:spPr>
+          <a:xfrm xmlns:a="http://schemas.openxmlformats.org/drawingml/2006/main">
+            <a:off x="5514975" y="285750"/>
+            <a:ext cx="1524000" cy="381000"/>
           </a:xfrm>
           <a:prstGeom xmlns:a="http://schemas.openxmlformats.org/drawingml/2006/main" prst="rect">
             <a:avLst/>
@@ -6583,9 +8059,9 @@
           <a:bodyPr xmlns:a="http://schemas.openxmlformats.org/drawingml/2006/main"/>
           <a:lstStyle xmlns:a="http://schemas.openxmlformats.org/drawingml/2006/main">
             <a:defPPr>
-              <a:defRPr sz="1350" b="0">
-                <a:solidFill>
-                  <a:srgbClr val="A5C99A"/>
+              <a:defRPr sz="1800" b="1">
+                <a:solidFill>
+                  <a:srgbClr val="24664F"/>
                 </a:solidFill>
                 <a:latin typeface="Liberation Sans"/>
                 <a:ea typeface="Liberation Sans"/>
@@ -6595,35 +8071,35 @@
           </a:lstStyle>
           <a:p xmlns:a="http://schemas.openxmlformats.org/drawingml/2006/main">
             <a:pPr>
-              <a:defRPr sz="1350" b="0">
-                <a:solidFill>
-                  <a:srgbClr val="A5C99A"/>
-                </a:solidFill>
-                <a:latin typeface="Liberation Sans"/>
-                <a:ea typeface="Liberation Sans"/>
-                <a:cs typeface="Liberation Sans"/>
-              </a:defRPr>
-            </a:pPr>
-            <a:r>
-              <a:rPr sz="1350" b="0">
-                <a:solidFill>
-                  <a:srgbClr val="A5C99A"/>
-                </a:solidFill>
-                <a:latin typeface="Liberation Sans"/>
-                <a:ea typeface="Liberation Sans"/>
-                <a:cs typeface="Liberation Sans"/>
-              </a:rPr>
-              <a:t>08</a:t>
-            </a:r>
-          </a:p>
-        </p:txBody>
-      </p:sp>
-      <p:sp>
-        <p:nvSpPr>
-          <p:cNvPr id="3" name="">
+              <a:defRPr sz="1800" b="1">
+                <a:solidFill>
+                  <a:srgbClr val="24664F"/>
+                </a:solidFill>
+                <a:latin typeface="Liberation Sans"/>
+                <a:ea typeface="Liberation Sans"/>
+                <a:cs typeface="Liberation Sans"/>
+              </a:defRPr>
+            </a:pPr>
+            <a:r>
+              <a:rPr sz="1800" b="1">
+                <a:solidFill>
+                  <a:srgbClr val="24664F"/>
+                </a:solidFill>
+                <a:latin typeface="Liberation Sans"/>
+                <a:ea typeface="Liberation Sans"/>
+                <a:cs typeface="Liberation Sans"/>
+              </a:rPr>
+              <a:t>QorAI</a:t>
+            </a:r>
+          </a:p>
+        </p:txBody>
+      </p:sp>
+      <p:sp>
+        <p:nvSpPr>
+          <p:cNvPr id="4" name="">
             <a:extLst xmlns:a="http://schemas.openxmlformats.org/drawingml/2006/main">
               <a:ext uri="{FF2B5EF4-FFF2-40B4-BE49-F238E27FC236}">
-                <a16:creationId xmlns:a16="http://schemas.microsoft.com/office/drawing/2014/main" id="{893EE30E-EEE8-41B2-ABDE-E0AF863F2C84}"/>
+                <a16:creationId xmlns:a16="http://schemas.microsoft.com/office/drawing/2014/main" id="{2ED31B1E-A1E7-489A-BB4B-6885A3F04ECF}"/>
               </a:ext>
             </a:extLst>
           </p:cNvPr>
@@ -6634,8 +8110,8 @@
         </p:nvSpPr>
         <p:spPr>
           <a:xfrm xmlns:a="http://schemas.openxmlformats.org/drawingml/2006/main">
-            <a:off x="685800" y="1314450"/>
-            <a:ext cx="10477500" cy="1238250"/>
+            <a:off x="5514975" y="1209675"/>
+            <a:ext cx="6048375" cy="1809750"/>
           </a:xfrm>
           <a:prstGeom xmlns:a="http://schemas.openxmlformats.org/drawingml/2006/main" prst="rect">
             <a:avLst/>
@@ -6649,9 +8125,9 @@
           <a:bodyPr xmlns:a="http://schemas.openxmlformats.org/drawingml/2006/main"/>
           <a:lstStyle xmlns:a="http://schemas.openxmlformats.org/drawingml/2006/main">
             <a:defPPr>
-              <a:defRPr sz="8100" b="1">
-                <a:solidFill>
-                  <a:srgbClr val="E5EEDF"/>
+              <a:defRPr sz="3825" b="1">
+                <a:solidFill>
+                  <a:srgbClr val="1C382E"/>
                 </a:solidFill>
                 <a:latin typeface="Liberation Sans"/>
                 <a:ea typeface="Liberation Sans"/>
@@ -6661,35 +8137,81 @@
           </a:lstStyle>
           <a:p xmlns:a="http://schemas.openxmlformats.org/drawingml/2006/main">
             <a:pPr>
-              <a:defRPr sz="8100" b="1">
-                <a:solidFill>
-                  <a:srgbClr val="E5EEDF"/>
-                </a:solidFill>
-                <a:latin typeface="Liberation Sans"/>
-                <a:ea typeface="Liberation Sans"/>
-                <a:cs typeface="Liberation Sans"/>
-              </a:defRPr>
-            </a:pPr>
-            <a:r>
-              <a:rPr sz="8100" b="1">
-                <a:solidFill>
-                  <a:srgbClr val="E5EEDF"/>
-                </a:solidFill>
-                <a:latin typeface="Liberation Sans"/>
-                <a:ea typeface="Liberation Sans"/>
-                <a:cs typeface="Liberation Sans"/>
-              </a:rPr>
-              <a:t>QorAI</a:t>
-            </a:r>
-          </a:p>
-        </p:txBody>
-      </p:sp>
-      <p:sp>
-        <p:nvSpPr>
-          <p:cNvPr id="4" name="">
+              <a:defRPr sz="3825" b="1">
+                <a:solidFill>
+                  <a:srgbClr val="1C382E"/>
+                </a:solidFill>
+                <a:latin typeface="Liberation Sans"/>
+                <a:ea typeface="Liberation Sans"/>
+                <a:cs typeface="Liberation Sans"/>
+              </a:defRPr>
+            </a:pPr>
+            <a:r>
+              <a:rPr sz="3825" b="1">
+                <a:solidFill>
+                  <a:srgbClr val="1C382E"/>
+                </a:solidFill>
+                <a:latin typeface="Liberation Sans"/>
+                <a:ea typeface="Liberation Sans"/>
+                <a:cs typeface="Liberation Sans"/>
+              </a:rPr>
+              <a:t>Начинаем</a:t>
+            </a:r>
+          </a:p>
+          <a:p xmlns:a="http://schemas.openxmlformats.org/drawingml/2006/main">
+            <a:pPr>
+              <a:defRPr sz="3825" b="1">
+                <a:solidFill>
+                  <a:srgbClr val="1C382E"/>
+                </a:solidFill>
+                <a:latin typeface="Liberation Sans"/>
+                <a:ea typeface="Liberation Sans"/>
+                <a:cs typeface="Liberation Sans"/>
+              </a:defRPr>
+            </a:pPr>
+            <a:r>
+              <a:rPr sz="3825" b="1">
+                <a:solidFill>
+                  <a:srgbClr val="1C382E"/>
+                </a:solidFill>
+                <a:latin typeface="Liberation Sans"/>
+                <a:ea typeface="Liberation Sans"/>
+                <a:cs typeface="Liberation Sans"/>
+              </a:rPr>
+              <a:t>с малого бизнеса</a:t>
+            </a:r>
+          </a:p>
+          <a:p xmlns:a="http://schemas.openxmlformats.org/drawingml/2006/main">
+            <a:pPr>
+              <a:defRPr sz="3825" b="1">
+                <a:solidFill>
+                  <a:srgbClr val="1C382E"/>
+                </a:solidFill>
+                <a:latin typeface="Liberation Sans"/>
+                <a:ea typeface="Liberation Sans"/>
+                <a:cs typeface="Liberation Sans"/>
+              </a:defRPr>
+            </a:pPr>
+            <a:r>
+              <a:rPr sz="3825" b="1">
+                <a:solidFill>
+                  <a:srgbClr val="1C382E"/>
+                </a:solidFill>
+                <a:latin typeface="Liberation Sans"/>
+                <a:ea typeface="Liberation Sans"/>
+                <a:cs typeface="Liberation Sans"/>
+              </a:rPr>
+              <a:t>Тараза</a:t>
+            </a:r>
+          </a:p>
+        </p:txBody>
+      </p:sp>
+      <p:sp>
+        <p:nvSpPr>
+          <p:cNvPr id="5" name="">
             <a:extLst xmlns:a="http://schemas.openxmlformats.org/drawingml/2006/main">
               <a:ext uri="{FF2B5EF4-FFF2-40B4-BE49-F238E27FC236}">
-                <a16:creationId xmlns:a16="http://schemas.microsoft.com/office/drawing/2014/main" id="{7AB33600-AC84-423A-B4D8-6032F44149AC}"/>
+                <a16:creationId xmlns:a16="http://schemas.microsoft.com/office/drawing/2014/main" id="{D63BC456-012E-4ADD-AEC3-49E7F60246DC}"/>
               </a:ext>
             </a:extLst>
           </p:cNvPr>
@@ -6700,8 +8222,8 @@
         </p:nvSpPr>
         <p:spPr>
           <a:xfrm xmlns:a="http://schemas.openxmlformats.org/drawingml/2006/main">
-            <a:off x="723900" y="2876550"/>
-            <a:ext cx="10572750" cy="1524000"/>
+            <a:off x="5543550" y="3409950"/>
+            <a:ext cx="5810250" cy="304800"/>
           </a:xfrm>
           <a:prstGeom xmlns:a="http://schemas.openxmlformats.org/drawingml/2006/main" prst="rect">
             <a:avLst/>
@@ -6715,9 +8237,9 @@
           <a:bodyPr xmlns:a="http://schemas.openxmlformats.org/drawingml/2006/main"/>
           <a:lstStyle xmlns:a="http://schemas.openxmlformats.org/drawingml/2006/main">
             <a:defPPr>
-              <a:defRPr sz="3600" b="0">
-                <a:solidFill>
-                  <a:srgbClr val="A5C99A"/>
+              <a:defRPr sz="1425" b="1">
+                <a:solidFill>
+                  <a:srgbClr val="667B6D"/>
                 </a:solidFill>
                 <a:latin typeface="Liberation Sans"/>
                 <a:ea typeface="Liberation Sans"/>
@@ -6727,58 +8249,35 @@
           </a:lstStyle>
           <a:p xmlns:a="http://schemas.openxmlformats.org/drawingml/2006/main">
             <a:pPr>
-              <a:defRPr sz="3600" b="0">
-                <a:solidFill>
-                  <a:srgbClr val="A5C99A"/>
-                </a:solidFill>
-                <a:latin typeface="Liberation Sans"/>
-                <a:ea typeface="Liberation Sans"/>
-                <a:cs typeface="Liberation Sans"/>
-              </a:defRPr>
-            </a:pPr>
-            <a:r>
-              <a:rPr sz="3600" b="0">
-                <a:solidFill>
-                  <a:srgbClr val="A5C99A"/>
-                </a:solidFill>
-                <a:latin typeface="Liberation Sans"/>
-                <a:ea typeface="Liberation Sans"/>
-                <a:cs typeface="Liberation Sans"/>
-              </a:rPr>
-              <a:t>Чтобы завтра на складе</a:t>
-            </a:r>
-          </a:p>
-          <a:p xmlns:a="http://schemas.openxmlformats.org/drawingml/2006/main">
-            <a:pPr>
-              <a:defRPr sz="3600" b="0">
-                <a:solidFill>
-                  <a:srgbClr val="A5C99A"/>
-                </a:solidFill>
-                <a:latin typeface="Liberation Sans"/>
-                <a:ea typeface="Liberation Sans"/>
-                <a:cs typeface="Liberation Sans"/>
-              </a:defRPr>
-            </a:pPr>
-            <a:r>
-              <a:rPr sz="3600" b="0">
-                <a:solidFill>
-                  <a:srgbClr val="A5C99A"/>
-                </a:solidFill>
-                <a:latin typeface="Liberation Sans"/>
-                <a:ea typeface="Liberation Sans"/>
-                <a:cs typeface="Liberation Sans"/>
-              </a:rPr>
-              <a:t>было именно то, что нужно</a:t>
-            </a:r>
-          </a:p>
-        </p:txBody>
-      </p:sp>
-      <p:sp>
-        <p:nvSpPr>
-          <p:cNvPr id="5" name="">
+              <a:defRPr sz="1425" b="1">
+                <a:solidFill>
+                  <a:srgbClr val="667B6D"/>
+                </a:solidFill>
+                <a:latin typeface="Liberation Sans"/>
+                <a:ea typeface="Liberation Sans"/>
+                <a:cs typeface="Liberation Sans"/>
+              </a:defRPr>
+            </a:pPr>
+            <a:r>
+              <a:rPr sz="1425" b="1">
+                <a:solidFill>
+                  <a:srgbClr val="667B6D"/>
+                </a:solidFill>
+                <a:latin typeface="Liberation Sans"/>
+                <a:ea typeface="Liberation Sans"/>
+                <a:cs typeface="Liberation Sans"/>
+              </a:rPr>
+              <a:t>ПЛАН ПИЛОТА</a:t>
+            </a:r>
+          </a:p>
+        </p:txBody>
+      </p:sp>
+      <p:sp>
+        <p:nvSpPr>
+          <p:cNvPr id="6" name="">
             <a:extLst xmlns:a="http://schemas.openxmlformats.org/drawingml/2006/main">
               <a:ext uri="{FF2B5EF4-FFF2-40B4-BE49-F238E27FC236}">
-                <a16:creationId xmlns:a16="http://schemas.microsoft.com/office/drawing/2014/main" id="{D8BB16DA-BA04-4D7B-AF91-6B429A50CF57}"/>
+                <a16:creationId xmlns:a16="http://schemas.microsoft.com/office/drawing/2014/main" id="{36729BA5-B31E-4563-B111-37A174FEB01D}"/>
               </a:ext>
             </a:extLst>
           </p:cNvPr>
@@ -6789,8 +8288,8 @@
         </p:nvSpPr>
         <p:spPr>
           <a:xfrm xmlns:a="http://schemas.openxmlformats.org/drawingml/2006/main">
-            <a:off x="733425" y="5048250"/>
-            <a:ext cx="10477500" cy="666750"/>
+            <a:off x="5486400" y="3952875"/>
+            <a:ext cx="2095500" cy="952500"/>
           </a:xfrm>
           <a:prstGeom xmlns:a="http://schemas.openxmlformats.org/drawingml/2006/main" prst="rect">
             <a:avLst/>
@@ -6804,9 +8303,9 @@
           <a:bodyPr xmlns:a="http://schemas.openxmlformats.org/drawingml/2006/main"/>
           <a:lstStyle xmlns:a="http://schemas.openxmlformats.org/drawingml/2006/main">
             <a:defPPr>
-              <a:defRPr sz="1875" b="0">
-                <a:solidFill>
-                  <a:srgbClr val="E5EEDF"/>
+              <a:defRPr sz="6300" b="1">
+                <a:solidFill>
+                  <a:srgbClr val="24664F"/>
                 </a:solidFill>
                 <a:latin typeface="Liberation Sans"/>
                 <a:ea typeface="Liberation Sans"/>
@@ -6816,76 +8315,335 @@
           </a:lstStyle>
           <a:p xmlns:a="http://schemas.openxmlformats.org/drawingml/2006/main">
             <a:pPr>
-              <a:defRPr sz="1875" b="0">
-                <a:solidFill>
-                  <a:srgbClr val="E5EEDF"/>
-                </a:solidFill>
-                <a:latin typeface="Liberation Sans"/>
-                <a:ea typeface="Liberation Sans"/>
-                <a:cs typeface="Liberation Sans"/>
-              </a:defRPr>
-            </a:pPr>
-            <a:r>
-              <a:rPr sz="1875" b="0">
-                <a:solidFill>
-                  <a:srgbClr val="E5EEDF"/>
-                </a:solidFill>
-                <a:latin typeface="Liberation Sans"/>
-                <a:ea typeface="Liberation Sans"/>
-                <a:cs typeface="Liberation Sans"/>
-              </a:rPr>
-              <a:t>Ищем 3 кафе или магазина Тараза для пилота</a:t>
-            </a:r>
-          </a:p>
-          <a:p xmlns:a="http://schemas.openxmlformats.org/drawingml/2006/main">
-            <a:r>
-              <a:t/>
-            </a:r>
-          </a:p>
-          <a:p xmlns:a="http://schemas.openxmlformats.org/drawingml/2006/main">
-            <a:pPr>
-              <a:defRPr sz="1875" b="0">
-                <a:solidFill>
-                  <a:srgbClr val="E5EEDF"/>
-                </a:solidFill>
-                <a:latin typeface="Liberation Sans"/>
-                <a:ea typeface="Liberation Sans"/>
-                <a:cs typeface="Liberation Sans"/>
-              </a:defRPr>
-            </a:pPr>
-            <a:r>
-              <a:rPr sz="1875" b="0">
-                <a:solidFill>
-                  <a:srgbClr val="E5EEDF"/>
-                </a:solidFill>
-                <a:latin typeface="Liberation Sans"/>
-                <a:ea typeface="Liberation Sans"/>
-                <a:cs typeface="Liberation Sans"/>
-              </a:rPr>
-              <a:t>Команда QorAI</a:t>
-            </a:r>
-          </a:p>
-          <a:p xmlns:a="http://schemas.openxmlformats.org/drawingml/2006/main">
-            <a:pPr>
-              <a:defRPr sz="1875" b="0">
-                <a:solidFill>
-                  <a:srgbClr val="E5EEDF"/>
-                </a:solidFill>
-                <a:latin typeface="Liberation Sans"/>
-                <a:ea typeface="Liberation Sans"/>
-                <a:cs typeface="Liberation Sans"/>
-              </a:defRPr>
-            </a:pPr>
-            <a:r>
-              <a:rPr sz="1875" b="0">
-                <a:solidFill>
-                  <a:srgbClr val="E5EEDF"/>
-                </a:solidFill>
-                <a:latin typeface="Liberation Sans"/>
-                <a:ea typeface="Liberation Sans"/>
-                <a:cs typeface="Liberation Sans"/>
-              </a:rPr>
-              <a:t>Idea Battle · 22 октября 2026</a:t>
+              <a:defRPr sz="6300" b="1">
+                <a:solidFill>
+                  <a:srgbClr val="24664F"/>
+                </a:solidFill>
+                <a:latin typeface="Liberation Sans"/>
+                <a:ea typeface="Liberation Sans"/>
+                <a:cs typeface="Liberation Sans"/>
+              </a:defRPr>
+            </a:pPr>
+            <a:r>
+              <a:rPr sz="6300" b="1">
+                <a:solidFill>
+                  <a:srgbClr val="24664F"/>
+                </a:solidFill>
+                <a:latin typeface="Liberation Sans"/>
+                <a:ea typeface="Liberation Sans"/>
+                <a:cs typeface="Liberation Sans"/>
+              </a:rPr>
+              <a:t>10</a:t>
+            </a:r>
+          </a:p>
+        </p:txBody>
+      </p:sp>
+      <p:sp>
+        <p:nvSpPr>
+          <p:cNvPr id="7" name="">
+            <a:extLst xmlns:a="http://schemas.openxmlformats.org/drawingml/2006/main">
+              <a:ext uri="{FF2B5EF4-FFF2-40B4-BE49-F238E27FC236}">
+                <a16:creationId xmlns:a16="http://schemas.microsoft.com/office/drawing/2014/main" id="{8D404B41-702E-4BF1-A382-BC4CE420C65D}"/>
+              </a:ext>
+            </a:extLst>
+          </p:cNvPr>
+          <p:cNvSpPr>
+            <a:spLocks xmlns:a="http://schemas.openxmlformats.org/drawingml/2006/main" noGrp="1"/>
+          </p:cNvSpPr>
+          <p:nvPr/>
+        </p:nvSpPr>
+        <p:spPr>
+          <a:xfrm xmlns:a="http://schemas.openxmlformats.org/drawingml/2006/main">
+            <a:off x="8572500" y="3952875"/>
+            <a:ext cx="1619250" cy="952500"/>
+          </a:xfrm>
+          <a:prstGeom xmlns:a="http://schemas.openxmlformats.org/drawingml/2006/main" prst="rect">
+            <a:avLst/>
+          </a:prstGeom>
+          <a:noFill xmlns:a="http://schemas.openxmlformats.org/drawingml/2006/main"/>
+          <a:ln xmlns:a="http://schemas.openxmlformats.org/drawingml/2006/main" w="0">
+            <a:noFill/>
+          </a:ln>
+        </p:spPr>
+        <p:txBody>
+          <a:bodyPr xmlns:a="http://schemas.openxmlformats.org/drawingml/2006/main"/>
+          <a:lstStyle xmlns:a="http://schemas.openxmlformats.org/drawingml/2006/main">
+            <a:defPPr>
+              <a:defRPr sz="6300" b="1">
+                <a:solidFill>
+                  <a:srgbClr val="24664F"/>
+                </a:solidFill>
+                <a:latin typeface="Liberation Sans"/>
+                <a:ea typeface="Liberation Sans"/>
+                <a:cs typeface="Liberation Sans"/>
+              </a:defRPr>
+            </a:defPPr>
+          </a:lstStyle>
+          <a:p xmlns:a="http://schemas.openxmlformats.org/drawingml/2006/main">
+            <a:pPr>
+              <a:defRPr sz="6300" b="1">
+                <a:solidFill>
+                  <a:srgbClr val="24664F"/>
+                </a:solidFill>
+                <a:latin typeface="Liberation Sans"/>
+                <a:ea typeface="Liberation Sans"/>
+                <a:cs typeface="Liberation Sans"/>
+              </a:defRPr>
+            </a:pPr>
+            <a:r>
+              <a:rPr sz="6300" b="1">
+                <a:solidFill>
+                  <a:srgbClr val="24664F"/>
+                </a:solidFill>
+                <a:latin typeface="Liberation Sans"/>
+                <a:ea typeface="Liberation Sans"/>
+                <a:cs typeface="Liberation Sans"/>
+              </a:rPr>
+              <a:t>3</a:t>
+            </a:r>
+          </a:p>
+        </p:txBody>
+      </p:sp>
+      <p:sp>
+        <p:nvSpPr>
+          <p:cNvPr id="8" name="">
+            <a:extLst xmlns:a="http://schemas.openxmlformats.org/drawingml/2006/main">
+              <a:ext uri="{FF2B5EF4-FFF2-40B4-BE49-F238E27FC236}">
+                <a16:creationId xmlns:a16="http://schemas.microsoft.com/office/drawing/2014/main" id="{5AFE2A77-FDD2-465C-9018-A76AF945521E}"/>
+              </a:ext>
+            </a:extLst>
+          </p:cNvPr>
+          <p:cNvSpPr>
+            <a:spLocks xmlns:a="http://schemas.openxmlformats.org/drawingml/2006/main" noGrp="1"/>
+          </p:cNvSpPr>
+          <p:nvPr/>
+        </p:nvSpPr>
+        <p:spPr>
+          <a:xfrm xmlns:a="http://schemas.openxmlformats.org/drawingml/2006/main">
+            <a:off x="5543550" y="4953000"/>
+            <a:ext cx="2762250" cy="762000"/>
+          </a:xfrm>
+          <a:prstGeom xmlns:a="http://schemas.openxmlformats.org/drawingml/2006/main" prst="rect">
+            <a:avLst/>
+          </a:prstGeom>
+          <a:noFill xmlns:a="http://schemas.openxmlformats.org/drawingml/2006/main"/>
+          <a:ln xmlns:a="http://schemas.openxmlformats.org/drawingml/2006/main" w="0">
+            <a:noFill/>
+          </a:ln>
+        </p:spPr>
+        <p:txBody>
+          <a:bodyPr xmlns:a="http://schemas.openxmlformats.org/drawingml/2006/main"/>
+          <a:lstStyle xmlns:a="http://schemas.openxmlformats.org/drawingml/2006/main">
+            <a:defPPr>
+              <a:defRPr sz="1950" b="0">
+                <a:solidFill>
+                  <a:srgbClr val="667B6D"/>
+                </a:solidFill>
+                <a:latin typeface="Liberation Sans"/>
+                <a:ea typeface="Liberation Sans"/>
+                <a:cs typeface="Liberation Sans"/>
+              </a:defRPr>
+            </a:defPPr>
+          </a:lstStyle>
+          <a:p xmlns:a="http://schemas.openxmlformats.org/drawingml/2006/main">
+            <a:pPr>
+              <a:defRPr sz="1950" b="0">
+                <a:solidFill>
+                  <a:srgbClr val="667B6D"/>
+                </a:solidFill>
+                <a:latin typeface="Liberation Sans"/>
+                <a:ea typeface="Liberation Sans"/>
+                <a:cs typeface="Liberation Sans"/>
+              </a:defRPr>
+            </a:pPr>
+            <a:r>
+              <a:rPr sz="1950" b="0">
+                <a:solidFill>
+                  <a:srgbClr val="667B6D"/>
+                </a:solidFill>
+                <a:latin typeface="Liberation Sans"/>
+                <a:ea typeface="Liberation Sans"/>
+                <a:cs typeface="Liberation Sans"/>
+              </a:rPr>
+              <a:t>интервью</a:t>
+            </a:r>
+          </a:p>
+          <a:p xmlns:a="http://schemas.openxmlformats.org/drawingml/2006/main">
+            <a:pPr>
+              <a:defRPr sz="1950" b="0">
+                <a:solidFill>
+                  <a:srgbClr val="667B6D"/>
+                </a:solidFill>
+                <a:latin typeface="Liberation Sans"/>
+                <a:ea typeface="Liberation Sans"/>
+                <a:cs typeface="Liberation Sans"/>
+              </a:defRPr>
+            </a:pPr>
+            <a:r>
+              <a:rPr sz="1950" b="0">
+                <a:solidFill>
+                  <a:srgbClr val="667B6D"/>
+                </a:solidFill>
+                <a:latin typeface="Liberation Sans"/>
+                <a:ea typeface="Liberation Sans"/>
+                <a:cs typeface="Liberation Sans"/>
+              </a:rPr>
+              <a:t>с владельцами</a:t>
+            </a:r>
+          </a:p>
+        </p:txBody>
+      </p:sp>
+      <p:sp>
+        <p:nvSpPr>
+          <p:cNvPr id="9" name="">
+            <a:extLst xmlns:a="http://schemas.openxmlformats.org/drawingml/2006/main">
+              <a:ext uri="{FF2B5EF4-FFF2-40B4-BE49-F238E27FC236}">
+                <a16:creationId xmlns:a16="http://schemas.microsoft.com/office/drawing/2014/main" id="{D57D28EC-A559-4D97-B1DD-2388E6EA4BF1}"/>
+              </a:ext>
+            </a:extLst>
+          </p:cNvPr>
+          <p:cNvSpPr>
+            <a:spLocks xmlns:a="http://schemas.openxmlformats.org/drawingml/2006/main" noGrp="1"/>
+          </p:cNvSpPr>
+          <p:nvPr/>
+        </p:nvSpPr>
+        <p:spPr>
+          <a:xfrm xmlns:a="http://schemas.openxmlformats.org/drawingml/2006/main">
+            <a:off x="8620125" y="4953000"/>
+            <a:ext cx="2762250" cy="762000"/>
+          </a:xfrm>
+          <a:prstGeom xmlns:a="http://schemas.openxmlformats.org/drawingml/2006/main" prst="rect">
+            <a:avLst/>
+          </a:prstGeom>
+          <a:noFill xmlns:a="http://schemas.openxmlformats.org/drawingml/2006/main"/>
+          <a:ln xmlns:a="http://schemas.openxmlformats.org/drawingml/2006/main" w="0">
+            <a:noFill/>
+          </a:ln>
+        </p:spPr>
+        <p:txBody>
+          <a:bodyPr xmlns:a="http://schemas.openxmlformats.org/drawingml/2006/main"/>
+          <a:lstStyle xmlns:a="http://schemas.openxmlformats.org/drawingml/2006/main">
+            <a:defPPr>
+              <a:defRPr sz="1950" b="0">
+                <a:solidFill>
+                  <a:srgbClr val="667B6D"/>
+                </a:solidFill>
+                <a:latin typeface="Liberation Sans"/>
+                <a:ea typeface="Liberation Sans"/>
+                <a:cs typeface="Liberation Sans"/>
+              </a:defRPr>
+            </a:defPPr>
+          </a:lstStyle>
+          <a:p xmlns:a="http://schemas.openxmlformats.org/drawingml/2006/main">
+            <a:pPr>
+              <a:defRPr sz="1950" b="0">
+                <a:solidFill>
+                  <a:srgbClr val="667B6D"/>
+                </a:solidFill>
+                <a:latin typeface="Liberation Sans"/>
+                <a:ea typeface="Liberation Sans"/>
+                <a:cs typeface="Liberation Sans"/>
+              </a:defRPr>
+            </a:pPr>
+            <a:r>
+              <a:rPr sz="1950" b="0">
+                <a:solidFill>
+                  <a:srgbClr val="667B6D"/>
+                </a:solidFill>
+                <a:latin typeface="Liberation Sans"/>
+                <a:ea typeface="Liberation Sans"/>
+                <a:cs typeface="Liberation Sans"/>
+              </a:rPr>
+              <a:t>пилотные</a:t>
+            </a:r>
+          </a:p>
+          <a:p xmlns:a="http://schemas.openxmlformats.org/drawingml/2006/main">
+            <a:pPr>
+              <a:defRPr sz="1950" b="0">
+                <a:solidFill>
+                  <a:srgbClr val="667B6D"/>
+                </a:solidFill>
+                <a:latin typeface="Liberation Sans"/>
+                <a:ea typeface="Liberation Sans"/>
+                <a:cs typeface="Liberation Sans"/>
+              </a:defRPr>
+            </a:pPr>
+            <a:r>
+              <a:rPr sz="1950" b="0">
+                <a:solidFill>
+                  <a:srgbClr val="667B6D"/>
+                </a:solidFill>
+                <a:latin typeface="Liberation Sans"/>
+                <a:ea typeface="Liberation Sans"/>
+                <a:cs typeface="Liberation Sans"/>
+              </a:rPr>
+              <a:t>точки</a:t>
+            </a:r>
+          </a:p>
+        </p:txBody>
+      </p:sp>
+      <p:sp>
+        <p:nvSpPr>
+          <p:cNvPr id="10" name="">
+            <a:extLst xmlns:a="http://schemas.openxmlformats.org/drawingml/2006/main">
+              <a:ext uri="{FF2B5EF4-FFF2-40B4-BE49-F238E27FC236}">
+                <a16:creationId xmlns:a16="http://schemas.microsoft.com/office/drawing/2014/main" id="{B1BBF0F0-5172-4BBA-929A-9FBCA7FD6BE7}"/>
+              </a:ext>
+            </a:extLst>
+          </p:cNvPr>
+          <p:cNvSpPr>
+            <a:spLocks xmlns:a="http://schemas.openxmlformats.org/drawingml/2006/main" noGrp="1"/>
+          </p:cNvSpPr>
+          <p:nvPr/>
+        </p:nvSpPr>
+        <p:spPr>
+          <a:xfrm xmlns:a="http://schemas.openxmlformats.org/drawingml/2006/main">
+            <a:off x="5534025" y="6057900"/>
+            <a:ext cx="5924550" cy="590550"/>
+          </a:xfrm>
+          <a:prstGeom xmlns:a="http://schemas.openxmlformats.org/drawingml/2006/main" prst="rect">
+            <a:avLst/>
+          </a:prstGeom>
+          <a:noFill xmlns:a="http://schemas.openxmlformats.org/drawingml/2006/main"/>
+          <a:ln xmlns:a="http://schemas.openxmlformats.org/drawingml/2006/main" w="0">
+            <a:noFill/>
+          </a:ln>
+        </p:spPr>
+        <p:txBody>
+          <a:bodyPr xmlns:a="http://schemas.openxmlformats.org/drawingml/2006/main"/>
+          <a:lstStyle xmlns:a="http://schemas.openxmlformats.org/drawingml/2006/main">
+            <a:defPPr>
+              <a:defRPr sz="1650" b="0">
+                <a:solidFill>
+                  <a:srgbClr val="1C382E"/>
+                </a:solidFill>
+                <a:latin typeface="Liberation Sans"/>
+                <a:ea typeface="Liberation Sans"/>
+                <a:cs typeface="Liberation Sans"/>
+              </a:defRPr>
+            </a:defPPr>
+          </a:lstStyle>
+          <a:p xmlns:a="http://schemas.openxmlformats.org/drawingml/2006/main">
+            <a:pPr>
+              <a:defRPr sz="1650" b="0">
+                <a:solidFill>
+                  <a:srgbClr val="1C382E"/>
+                </a:solidFill>
+                <a:latin typeface="Liberation Sans"/>
+                <a:ea typeface="Liberation Sans"/>
+                <a:cs typeface="Liberation Sans"/>
+              </a:defRPr>
+            </a:pPr>
+            <a:r>
+              <a:rPr sz="1650" b="0">
+                <a:solidFill>
+                  <a:srgbClr val="1C382E"/>
+                </a:solidFill>
+                <a:latin typeface="Liberation Sans"/>
+                <a:ea typeface="Liberation Sans"/>
+                <a:cs typeface="Liberation Sans"/>
+              </a:rPr>
+              <a:t>Измерим время ввода, ошибки и регулярность работы.</a:t>
             </a:r>
           </a:p>
         </p:txBody>
@@ -6893,7 +8651,610 @@
     </p:spTree>
     <p:extLst>
       <p:ext uri="{BB962C8B-B14F-4D97-AF65-F5344CB8AC3E}">
-        <p14:creationId xmlns:p14="http://schemas.microsoft.com/office/powerpoint/2010/main" val="308276887"/>
+        <p14:creationId xmlns:p14="http://schemas.microsoft.com/office/powerpoint/2010/main" val="1011864631"/>
+      </p:ext>
+    </p:extLst>
+  </p:cSld>
+</p:sld>
+</file>
+
+<file path=ppt/slides/slide9.xml><?xml version="1.0" encoding="utf-8"?>
+<p:sld xmlns:p="http://schemas.openxmlformats.org/presentationml/2006/main">
+  <p:cSld>
+    <p:bg>
+      <p:bgPr>
+        <a:solidFill xmlns:a="http://schemas.openxmlformats.org/drawingml/2006/main">
+          <a:srgbClr val="173F33"/>
+        </a:solidFill>
+      </p:bgPr>
+    </p:bg>
+    <p:spTree>
+      <p:nvGrpSpPr>
+        <p:cNvPr id="1" name=""/>
+        <p:cNvGrpSpPr/>
+        <p:nvPr/>
+      </p:nvGrpSpPr>
+      <p:grpSpPr>
+        <a:xfrm xmlns:a="http://schemas.openxmlformats.org/drawingml/2006/main"/>
+      </p:grpSpPr>
+      <p:sp>
+        <p:nvSpPr>
+          <p:cNvPr id="9" name="">
+            <a:extLst xmlns:a="http://schemas.openxmlformats.org/drawingml/2006/main">
+              <a:ext uri="{FF2B5EF4-FFF2-40B4-BE49-F238E27FC236}">
+                <a16:creationId xmlns:a16="http://schemas.microsoft.com/office/drawing/2014/main" id="{0BA9FE83-C225-48E0-9E19-E8A182D9E7AD}"/>
+              </a:ext>
+            </a:extLst>
+          </p:cNvPr>
+          <p:cNvSpPr>
+            <a:spLocks xmlns:a="http://schemas.openxmlformats.org/drawingml/2006/main" noGrp="1"/>
+          </p:cNvSpPr>
+          <p:nvPr/>
+        </p:nvSpPr>
+        <p:spPr>
+          <a:xfrm xmlns:a="http://schemas.openxmlformats.org/drawingml/2006/main">
+            <a:off x="10553700" y="323850"/>
+            <a:ext cx="1143000" cy="266700"/>
+          </a:xfrm>
+          <a:prstGeom xmlns:a="http://schemas.openxmlformats.org/drawingml/2006/main" prst="rect">
+            <a:avLst/>
+          </a:prstGeom>
+          <a:noFill xmlns:a="http://schemas.openxmlformats.org/drawingml/2006/main"/>
+          <a:ln xmlns:a="http://schemas.openxmlformats.org/drawingml/2006/main" w="0">
+            <a:noFill/>
+          </a:ln>
+        </p:spPr>
+        <p:txBody>
+          <a:bodyPr xmlns:a="http://schemas.openxmlformats.org/drawingml/2006/main"/>
+          <a:lstStyle xmlns:a="http://schemas.openxmlformats.org/drawingml/2006/main">
+            <a:defPPr>
+              <a:defRPr sz="1200" b="0">
+                <a:solidFill>
+                  <a:srgbClr val="D5E8B6"/>
+                </a:solidFill>
+                <a:latin typeface="Liberation Sans"/>
+                <a:ea typeface="Liberation Sans"/>
+                <a:cs typeface="Liberation Sans"/>
+              </a:defRPr>
+            </a:defPPr>
+          </a:lstStyle>
+          <a:p xmlns:a="http://schemas.openxmlformats.org/drawingml/2006/main">
+            <a:pPr>
+              <a:defRPr sz="1200" b="0">
+                <a:solidFill>
+                  <a:srgbClr val="D5E8B6"/>
+                </a:solidFill>
+                <a:latin typeface="Liberation Sans"/>
+                <a:ea typeface="Liberation Sans"/>
+                <a:cs typeface="Liberation Sans"/>
+              </a:defRPr>
+            </a:pPr>
+            <a:r>
+              <a:rPr sz="1200" b="0">
+                <a:solidFill>
+                  <a:srgbClr val="D5E8B6"/>
+                </a:solidFill>
+                <a:latin typeface="Liberation Sans"/>
+                <a:ea typeface="Liberation Sans"/>
+                <a:cs typeface="Liberation Sans"/>
+              </a:rPr>
+              <a:t>09 / 10</a:t>
+            </a:r>
+          </a:p>
+        </p:txBody>
+      </p:sp>
+      <p:sp>
+        <p:nvSpPr>
+          <p:cNvPr id="2" name="">
+            <a:extLst xmlns:a="http://schemas.openxmlformats.org/drawingml/2006/main">
+              <a:ext uri="{FF2B5EF4-FFF2-40B4-BE49-F238E27FC236}">
+                <a16:creationId xmlns:a16="http://schemas.microsoft.com/office/drawing/2014/main" id="{63D77279-AE22-4134-B229-F0A6768A18E9}"/>
+              </a:ext>
+            </a:extLst>
+          </p:cNvPr>
+          <p:cNvSpPr>
+            <a:spLocks xmlns:a="http://schemas.openxmlformats.org/drawingml/2006/main" noGrp="1"/>
+          </p:cNvSpPr>
+          <p:nvPr/>
+        </p:nvSpPr>
+        <p:spPr>
+          <a:xfrm xmlns:a="http://schemas.openxmlformats.org/drawingml/2006/main">
+            <a:off x="552450" y="1190625"/>
+            <a:ext cx="10839450" cy="1247775"/>
+          </a:xfrm>
+          <a:prstGeom xmlns:a="http://schemas.openxmlformats.org/drawingml/2006/main" prst="rect">
+            <a:avLst/>
+          </a:prstGeom>
+          <a:noFill xmlns:a="http://schemas.openxmlformats.org/drawingml/2006/main"/>
+          <a:ln xmlns:a="http://schemas.openxmlformats.org/drawingml/2006/main" w="0">
+            <a:noFill/>
+          </a:ln>
+        </p:spPr>
+        <p:txBody>
+          <a:bodyPr xmlns:a="http://schemas.openxmlformats.org/drawingml/2006/main"/>
+          <a:lstStyle xmlns:a="http://schemas.openxmlformats.org/drawingml/2006/main">
+            <a:defPPr>
+              <a:defRPr sz="3975" b="1">
+                <a:solidFill>
+                  <a:srgbClr val="FFFFFF"/>
+                </a:solidFill>
+                <a:latin typeface="Liberation Sans"/>
+                <a:ea typeface="Liberation Sans"/>
+                <a:cs typeface="Liberation Sans"/>
+              </a:defRPr>
+            </a:defPPr>
+          </a:lstStyle>
+          <a:p xmlns:a="http://schemas.openxmlformats.org/drawingml/2006/main">
+            <a:pPr>
+              <a:defRPr sz="3975" b="1">
+                <a:solidFill>
+                  <a:srgbClr val="FFFFFF"/>
+                </a:solidFill>
+                <a:latin typeface="Liberation Sans"/>
+                <a:ea typeface="Liberation Sans"/>
+                <a:cs typeface="Liberation Sans"/>
+              </a:defRPr>
+            </a:pPr>
+            <a:r>
+              <a:rPr sz="3975" b="1">
+                <a:solidFill>
+                  <a:srgbClr val="FFFFFF"/>
+                </a:solidFill>
+                <a:latin typeface="Liberation Sans"/>
+                <a:ea typeface="Liberation Sans"/>
+                <a:cs typeface="Liberation Sans"/>
+              </a:rPr>
+              <a:t>Подписка за одну</a:t>
+            </a:r>
+          </a:p>
+          <a:p xmlns:a="http://schemas.openxmlformats.org/drawingml/2006/main">
+            <a:pPr>
+              <a:defRPr sz="3975" b="1">
+                <a:solidFill>
+                  <a:srgbClr val="FFFFFF"/>
+                </a:solidFill>
+                <a:latin typeface="Liberation Sans"/>
+                <a:ea typeface="Liberation Sans"/>
+                <a:cs typeface="Liberation Sans"/>
+              </a:defRPr>
+            </a:pPr>
+            <a:r>
+              <a:rPr sz="3975" b="1">
+                <a:solidFill>
+                  <a:srgbClr val="FFFFFF"/>
+                </a:solidFill>
+                <a:latin typeface="Liberation Sans"/>
+                <a:ea typeface="Liberation Sans"/>
+                <a:cs typeface="Liberation Sans"/>
+              </a:rPr>
+              <a:t>торговую точку</a:t>
+            </a:r>
+          </a:p>
+        </p:txBody>
+      </p:sp>
+      <p:sp>
+        <p:nvSpPr>
+          <p:cNvPr id="3" name="">
+            <a:extLst xmlns:a="http://schemas.openxmlformats.org/drawingml/2006/main">
+              <a:ext uri="{FF2B5EF4-FFF2-40B4-BE49-F238E27FC236}">
+                <a16:creationId xmlns:a16="http://schemas.microsoft.com/office/drawing/2014/main" id="{0F14D70C-376A-4B36-B0F1-81E4B0DD68BC}"/>
+              </a:ext>
+            </a:extLst>
+          </p:cNvPr>
+          <p:cNvSpPr>
+            <a:spLocks xmlns:a="http://schemas.openxmlformats.org/drawingml/2006/main" noGrp="1"/>
+          </p:cNvSpPr>
+          <p:nvPr/>
+        </p:nvSpPr>
+        <p:spPr>
+          <a:xfrm xmlns:a="http://schemas.openxmlformats.org/drawingml/2006/main">
+            <a:off x="504825" y="2838450"/>
+            <a:ext cx="7239000" cy="1381125"/>
+          </a:xfrm>
+          <a:prstGeom xmlns:a="http://schemas.openxmlformats.org/drawingml/2006/main" prst="rect">
+            <a:avLst/>
+          </a:prstGeom>
+          <a:noFill xmlns:a="http://schemas.openxmlformats.org/drawingml/2006/main"/>
+          <a:ln xmlns:a="http://schemas.openxmlformats.org/drawingml/2006/main" w="0">
+            <a:noFill/>
+          </a:ln>
+        </p:spPr>
+        <p:txBody>
+          <a:bodyPr xmlns:a="http://schemas.openxmlformats.org/drawingml/2006/main"/>
+          <a:lstStyle xmlns:a="http://schemas.openxmlformats.org/drawingml/2006/main">
+            <a:defPPr>
+              <a:defRPr sz="8700" b="1">
+                <a:solidFill>
+                  <a:srgbClr val="D5E8B6"/>
+                </a:solidFill>
+                <a:latin typeface="Liberation Sans"/>
+                <a:ea typeface="Liberation Sans"/>
+                <a:cs typeface="Liberation Sans"/>
+              </a:defRPr>
+            </a:defPPr>
+          </a:lstStyle>
+          <a:p xmlns:a="http://schemas.openxmlformats.org/drawingml/2006/main">
+            <a:pPr>
+              <a:defRPr sz="8700" b="1">
+                <a:solidFill>
+                  <a:srgbClr val="D5E8B6"/>
+                </a:solidFill>
+                <a:latin typeface="Liberation Sans"/>
+                <a:ea typeface="Liberation Sans"/>
+                <a:cs typeface="Liberation Sans"/>
+              </a:defRPr>
+            </a:pPr>
+            <a:r>
+              <a:rPr sz="8700" b="1">
+                <a:solidFill>
+                  <a:srgbClr val="D5E8B6"/>
+                </a:solidFill>
+                <a:latin typeface="Liberation Sans"/>
+                <a:ea typeface="Liberation Sans"/>
+                <a:cs typeface="Liberation Sans"/>
+              </a:rPr>
+              <a:t>9 900 ₸</a:t>
+            </a:r>
+          </a:p>
+        </p:txBody>
+      </p:sp>
+      <p:sp>
+        <p:nvSpPr>
+          <p:cNvPr id="4" name="">
+            <a:extLst xmlns:a="http://schemas.openxmlformats.org/drawingml/2006/main">
+              <a:ext uri="{FF2B5EF4-FFF2-40B4-BE49-F238E27FC236}">
+                <a16:creationId xmlns:a16="http://schemas.microsoft.com/office/drawing/2014/main" id="{3203F631-11AA-4F87-B41D-CFE83D0F9DA7}"/>
+              </a:ext>
+            </a:extLst>
+          </p:cNvPr>
+          <p:cNvSpPr>
+            <a:spLocks xmlns:a="http://schemas.openxmlformats.org/drawingml/2006/main" noGrp="1"/>
+          </p:cNvSpPr>
+          <p:nvPr/>
+        </p:nvSpPr>
+        <p:spPr>
+          <a:xfrm xmlns:a="http://schemas.openxmlformats.org/drawingml/2006/main">
+            <a:off x="619125" y="4314825"/>
+            <a:ext cx="5715000" cy="523875"/>
+          </a:xfrm>
+          <a:prstGeom xmlns:a="http://schemas.openxmlformats.org/drawingml/2006/main" prst="rect">
+            <a:avLst/>
+          </a:prstGeom>
+          <a:noFill xmlns:a="http://schemas.openxmlformats.org/drawingml/2006/main"/>
+          <a:ln xmlns:a="http://schemas.openxmlformats.org/drawingml/2006/main" w="0">
+            <a:noFill/>
+          </a:ln>
+        </p:spPr>
+        <p:txBody>
+          <a:bodyPr xmlns:a="http://schemas.openxmlformats.org/drawingml/2006/main"/>
+          <a:lstStyle xmlns:a="http://schemas.openxmlformats.org/drawingml/2006/main">
+            <a:defPPr>
+              <a:defRPr sz="2400" b="0">
+                <a:solidFill>
+                  <a:srgbClr val="FFFFFF"/>
+                </a:solidFill>
+                <a:latin typeface="Liberation Sans"/>
+                <a:ea typeface="Liberation Sans"/>
+                <a:cs typeface="Liberation Sans"/>
+              </a:defRPr>
+            </a:defPPr>
+          </a:lstStyle>
+          <a:p xmlns:a="http://schemas.openxmlformats.org/drawingml/2006/main">
+            <a:pPr>
+              <a:defRPr sz="2400" b="0">
+                <a:solidFill>
+                  <a:srgbClr val="FFFFFF"/>
+                </a:solidFill>
+                <a:latin typeface="Liberation Sans"/>
+                <a:ea typeface="Liberation Sans"/>
+                <a:cs typeface="Liberation Sans"/>
+              </a:defRPr>
+            </a:pPr>
+            <a:r>
+              <a:rPr sz="2400" b="0">
+                <a:solidFill>
+                  <a:srgbClr val="FFFFFF"/>
+                </a:solidFill>
+                <a:latin typeface="Liberation Sans"/>
+                <a:ea typeface="Liberation Sans"/>
+                <a:cs typeface="Liberation Sans"/>
+              </a:rPr>
+              <a:t>в месяц</a:t>
+            </a:r>
+          </a:p>
+        </p:txBody>
+      </p:sp>
+      <p:sp>
+        <p:nvSpPr>
+          <p:cNvPr id="5" name="">
+            <a:extLst xmlns:a="http://schemas.openxmlformats.org/drawingml/2006/main">
+              <a:ext uri="{FF2B5EF4-FFF2-40B4-BE49-F238E27FC236}">
+                <a16:creationId xmlns:a16="http://schemas.microsoft.com/office/drawing/2014/main" id="{D81B8CCB-408B-424B-95C5-A95C3A19316D}"/>
+              </a:ext>
+            </a:extLst>
+          </p:cNvPr>
+          <p:cNvSpPr>
+            <a:spLocks xmlns:a="http://schemas.openxmlformats.org/drawingml/2006/main" noGrp="1"/>
+          </p:cNvSpPr>
+          <p:nvPr/>
+        </p:nvSpPr>
+        <p:spPr>
+          <a:xfrm xmlns:a="http://schemas.openxmlformats.org/drawingml/2006/main">
+            <a:off x="7734300" y="3076575"/>
+            <a:ext cx="3810000" cy="895350"/>
+          </a:xfrm>
+          <a:prstGeom xmlns:a="http://schemas.openxmlformats.org/drawingml/2006/main" prst="rect">
+            <a:avLst/>
+          </a:prstGeom>
+          <a:noFill xmlns:a="http://schemas.openxmlformats.org/drawingml/2006/main"/>
+          <a:ln xmlns:a="http://schemas.openxmlformats.org/drawingml/2006/main" w="0">
+            <a:noFill/>
+          </a:ln>
+        </p:spPr>
+        <p:txBody>
+          <a:bodyPr xmlns:a="http://schemas.openxmlformats.org/drawingml/2006/main"/>
+          <a:lstStyle xmlns:a="http://schemas.openxmlformats.org/drawingml/2006/main">
+            <a:defPPr>
+              <a:defRPr sz="2100" b="0">
+                <a:solidFill>
+                  <a:srgbClr val="D5E8B6"/>
+                </a:solidFill>
+                <a:latin typeface="Liberation Sans"/>
+                <a:ea typeface="Liberation Sans"/>
+                <a:cs typeface="Liberation Sans"/>
+              </a:defRPr>
+            </a:defPPr>
+          </a:lstStyle>
+          <a:p xmlns:a="http://schemas.openxmlformats.org/drawingml/2006/main">
+            <a:pPr>
+              <a:defRPr sz="2100" b="0">
+                <a:solidFill>
+                  <a:srgbClr val="D5E8B6"/>
+                </a:solidFill>
+                <a:latin typeface="Liberation Sans"/>
+                <a:ea typeface="Liberation Sans"/>
+                <a:cs typeface="Liberation Sans"/>
+              </a:defRPr>
+            </a:pPr>
+            <a:r>
+              <a:rPr sz="2100" b="0">
+                <a:solidFill>
+                  <a:srgbClr val="D5E8B6"/>
+                </a:solidFill>
+                <a:latin typeface="Liberation Sans"/>
+                <a:ea typeface="Liberation Sans"/>
+                <a:cs typeface="Liberation Sans"/>
+              </a:rPr>
+              <a:t>Ценовая гипотеза</a:t>
+            </a:r>
+          </a:p>
+          <a:p xmlns:a="http://schemas.openxmlformats.org/drawingml/2006/main">
+            <a:pPr>
+              <a:defRPr sz="2100" b="0">
+                <a:solidFill>
+                  <a:srgbClr val="D5E8B6"/>
+                </a:solidFill>
+                <a:latin typeface="Liberation Sans"/>
+                <a:ea typeface="Liberation Sans"/>
+                <a:cs typeface="Liberation Sans"/>
+              </a:defRPr>
+            </a:pPr>
+            <a:r>
+              <a:rPr sz="2100" b="0">
+                <a:solidFill>
+                  <a:srgbClr val="D5E8B6"/>
+                </a:solidFill>
+                <a:latin typeface="Liberation Sans"/>
+                <a:ea typeface="Liberation Sans"/>
+                <a:cs typeface="Liberation Sans"/>
+              </a:rPr>
+              <a:t>для проверки на пилоте</a:t>
+            </a:r>
+          </a:p>
+        </p:txBody>
+      </p:sp>
+      <p:sp>
+        <p:nvSpPr>
+          <p:cNvPr id="6" name="">
+            <a:extLst xmlns:a="http://schemas.openxmlformats.org/drawingml/2006/main">
+              <a:ext uri="{FF2B5EF4-FFF2-40B4-BE49-F238E27FC236}">
+                <a16:creationId xmlns:a16="http://schemas.microsoft.com/office/drawing/2014/main" id="{702C7146-0989-4CB3-9E4D-40F2B9D9824E}"/>
+              </a:ext>
+            </a:extLst>
+          </p:cNvPr>
+          <p:cNvSpPr>
+            <a:spLocks xmlns:a="http://schemas.openxmlformats.org/drawingml/2006/main" noGrp="1"/>
+          </p:cNvSpPr>
+          <p:nvPr/>
+        </p:nvSpPr>
+        <p:spPr>
+          <a:xfrm xmlns:a="http://schemas.openxmlformats.org/drawingml/2006/main">
+            <a:off x="609600" y="5400675"/>
+            <a:ext cx="10858500" cy="466725"/>
+          </a:xfrm>
+          <a:prstGeom xmlns:a="http://schemas.openxmlformats.org/drawingml/2006/main" prst="rect">
+            <a:avLst/>
+          </a:prstGeom>
+          <a:noFill xmlns:a="http://schemas.openxmlformats.org/drawingml/2006/main"/>
+          <a:ln xmlns:a="http://schemas.openxmlformats.org/drawingml/2006/main" w="0">
+            <a:noFill/>
+          </a:ln>
+        </p:spPr>
+        <p:txBody>
+          <a:bodyPr xmlns:a="http://schemas.openxmlformats.org/drawingml/2006/main"/>
+          <a:lstStyle xmlns:a="http://schemas.openxmlformats.org/drawingml/2006/main">
+            <a:defPPr>
+              <a:defRPr sz="2400" b="1">
+                <a:solidFill>
+                  <a:srgbClr val="FFFFFF"/>
+                </a:solidFill>
+                <a:latin typeface="Liberation Sans"/>
+                <a:ea typeface="Liberation Sans"/>
+                <a:cs typeface="Liberation Sans"/>
+              </a:defRPr>
+            </a:defPPr>
+          </a:lstStyle>
+          <a:p xmlns:a="http://schemas.openxmlformats.org/drawingml/2006/main">
+            <a:pPr>
+              <a:defRPr sz="2400" b="1">
+                <a:solidFill>
+                  <a:srgbClr val="FFFFFF"/>
+                </a:solidFill>
+                <a:latin typeface="Liberation Sans"/>
+                <a:ea typeface="Liberation Sans"/>
+                <a:cs typeface="Liberation Sans"/>
+              </a:defRPr>
+            </a:pPr>
+            <a:r>
+              <a:rPr sz="2400" b="1">
+                <a:solidFill>
+                  <a:srgbClr val="FFFFFF"/>
+                </a:solidFill>
+                <a:latin typeface="Liberation Sans"/>
+                <a:ea typeface="Liberation Sans"/>
+                <a:cs typeface="Liberation Sans"/>
+              </a:rPr>
+              <a:t>30 точек = 297 000 ₸ / месяц</a:t>
+            </a:r>
+          </a:p>
+        </p:txBody>
+      </p:sp>
+      <p:sp>
+        <p:nvSpPr>
+          <p:cNvPr id="7" name="">
+            <a:extLst xmlns:a="http://schemas.openxmlformats.org/drawingml/2006/main">
+              <a:ext uri="{FF2B5EF4-FFF2-40B4-BE49-F238E27FC236}">
+                <a16:creationId xmlns:a16="http://schemas.microsoft.com/office/drawing/2014/main" id="{E9248B09-8C17-4F1B-80D7-5065CF09B0F4}"/>
+              </a:ext>
+            </a:extLst>
+          </p:cNvPr>
+          <p:cNvSpPr>
+            <a:spLocks xmlns:a="http://schemas.openxmlformats.org/drawingml/2006/main" noGrp="1"/>
+          </p:cNvSpPr>
+          <p:nvPr/>
+        </p:nvSpPr>
+        <p:spPr>
+          <a:xfrm xmlns:a="http://schemas.openxmlformats.org/drawingml/2006/main">
+            <a:off x="571500" y="6400800"/>
+            <a:ext cx="11010900" cy="266700"/>
+          </a:xfrm>
+          <a:prstGeom xmlns:a="http://schemas.openxmlformats.org/drawingml/2006/main" prst="rect">
+            <a:avLst/>
+          </a:prstGeom>
+          <a:noFill xmlns:a="http://schemas.openxmlformats.org/drawingml/2006/main"/>
+          <a:ln xmlns:a="http://schemas.openxmlformats.org/drawingml/2006/main" w="0">
+            <a:noFill/>
+          </a:ln>
+        </p:spPr>
+        <p:txBody>
+          <a:bodyPr xmlns:a="http://schemas.openxmlformats.org/drawingml/2006/main"/>
+          <a:lstStyle xmlns:a="http://schemas.openxmlformats.org/drawingml/2006/main">
+            <a:defPPr>
+              <a:defRPr sz="1275" b="0">
+                <a:solidFill>
+                  <a:srgbClr val="D5E8B6"/>
+                </a:solidFill>
+                <a:latin typeface="Liberation Sans"/>
+                <a:ea typeface="Liberation Sans"/>
+                <a:cs typeface="Liberation Sans"/>
+              </a:defRPr>
+            </a:defPPr>
+          </a:lstStyle>
+          <a:p xmlns:a="http://schemas.openxmlformats.org/drawingml/2006/main">
+            <a:pPr>
+              <a:defRPr sz="1275" b="0">
+                <a:solidFill>
+                  <a:srgbClr val="D5E8B6"/>
+                </a:solidFill>
+                <a:latin typeface="Liberation Sans"/>
+                <a:ea typeface="Liberation Sans"/>
+                <a:cs typeface="Liberation Sans"/>
+              </a:defRPr>
+            </a:pPr>
+            <a:r>
+              <a:rPr sz="1275" b="0">
+                <a:solidFill>
+                  <a:srgbClr val="D5E8B6"/>
+                </a:solidFill>
+                <a:latin typeface="Liberation Sans"/>
+                <a:ea typeface="Liberation Sans"/>
+                <a:cs typeface="Liberation Sans"/>
+              </a:rPr>
+              <a:t>Сценарий выручки до расходов на ИИ, хостинг и поддержку.</a:t>
+            </a:r>
+          </a:p>
+        </p:txBody>
+      </p:sp>
+      <p:sp>
+        <p:nvSpPr>
+          <p:cNvPr id="8" name="">
+            <a:extLst xmlns:a="http://schemas.openxmlformats.org/drawingml/2006/main">
+              <a:ext uri="{FF2B5EF4-FFF2-40B4-BE49-F238E27FC236}">
+                <a16:creationId xmlns:a16="http://schemas.microsoft.com/office/drawing/2014/main" id="{10BB60DA-A93C-46A3-A016-83EBF55D1CD5}"/>
+              </a:ext>
+            </a:extLst>
+          </p:cNvPr>
+          <p:cNvSpPr>
+            <a:spLocks xmlns:a="http://schemas.openxmlformats.org/drawingml/2006/main" noGrp="1"/>
+          </p:cNvSpPr>
+          <p:nvPr/>
+        </p:nvSpPr>
+        <p:spPr>
+          <a:xfrm xmlns:a="http://schemas.openxmlformats.org/drawingml/2006/main">
+            <a:off x="552450" y="285750"/>
+            <a:ext cx="1524000" cy="381000"/>
+          </a:xfrm>
+          <a:prstGeom xmlns:a="http://schemas.openxmlformats.org/drawingml/2006/main" prst="rect">
+            <a:avLst/>
+          </a:prstGeom>
+          <a:noFill xmlns:a="http://schemas.openxmlformats.org/drawingml/2006/main"/>
+          <a:ln xmlns:a="http://schemas.openxmlformats.org/drawingml/2006/main" w="0">
+            <a:noFill/>
+          </a:ln>
+        </p:spPr>
+        <p:txBody>
+          <a:bodyPr xmlns:a="http://schemas.openxmlformats.org/drawingml/2006/main"/>
+          <a:lstStyle xmlns:a="http://schemas.openxmlformats.org/drawingml/2006/main">
+            <a:defPPr>
+              <a:defRPr sz="1800" b="1">
+                <a:solidFill>
+                  <a:srgbClr val="D5E8B6"/>
+                </a:solidFill>
+                <a:latin typeface="Liberation Sans"/>
+                <a:ea typeface="Liberation Sans"/>
+                <a:cs typeface="Liberation Sans"/>
+              </a:defRPr>
+            </a:defPPr>
+          </a:lstStyle>
+          <a:p xmlns:a="http://schemas.openxmlformats.org/drawingml/2006/main">
+            <a:pPr>
+              <a:defRPr sz="1800" b="1">
+                <a:solidFill>
+                  <a:srgbClr val="D5E8B6"/>
+                </a:solidFill>
+                <a:latin typeface="Liberation Sans"/>
+                <a:ea typeface="Liberation Sans"/>
+                <a:cs typeface="Liberation Sans"/>
+              </a:defRPr>
+            </a:pPr>
+            <a:r>
+              <a:rPr sz="1800" b="1">
+                <a:solidFill>
+                  <a:srgbClr val="D5E8B6"/>
+                </a:solidFill>
+                <a:latin typeface="Liberation Sans"/>
+                <a:ea typeface="Liberation Sans"/>
+                <a:cs typeface="Liberation Sans"/>
+              </a:rPr>
+              <a:t>QorAI</a:t>
+            </a:r>
+          </a:p>
+        </p:txBody>
+      </p:sp>
+    </p:spTree>
+    <p:extLst>
+      <p:ext uri="{BB962C8B-B14F-4D97-AF65-F5344CB8AC3E}">
+        <p14:creationId xmlns:p14="http://schemas.microsoft.com/office/powerpoint/2010/main" val="708287504"/>
       </p:ext>
     </p:extLst>
   </p:cSld>

--- a/docs/QorAI-Idea-Battle.pptx
+++ b/docs/QorAI-Idea-Battle.pptx
@@ -2,22 +2,22 @@
 <file path=ppt/presentation.xml><?xml version="1.0" encoding="utf-8"?>
 <p:presentation xmlns:p="http://schemas.openxmlformats.org/presentationml/2006/main">
   <p:sldMasterIdLst>
-    <p:sldMasterId xmlns:r="http://schemas.openxmlformats.org/officeDocument/2006/relationships" id="2147483648" r:id="Re9249e6ca72e4ba0"/>
+    <p:sldMasterId xmlns:r="http://schemas.openxmlformats.org/officeDocument/2006/relationships" id="2147483648" r:id="Re4eb98fb8cc442a4"/>
   </p:sldMasterIdLst>
   <p:notesMasterIdLst>
-    <p:notesMasterId xmlns:r="http://schemas.openxmlformats.org/officeDocument/2006/relationships" r:id="R376dac87d9f14b78"/>
+    <p:notesMasterId xmlns:r="http://schemas.openxmlformats.org/officeDocument/2006/relationships" r:id="R1812eda35fd047fa"/>
   </p:notesMasterIdLst>
   <p:sldIdLst>
-    <p:sldId xmlns:r="http://schemas.openxmlformats.org/officeDocument/2006/relationships" id="256" r:id="R1f7fcd71650c4934"/>
-    <p:sldId xmlns:r="http://schemas.openxmlformats.org/officeDocument/2006/relationships" id="257" r:id="R009c443a023345df"/>
-    <p:sldId xmlns:r="http://schemas.openxmlformats.org/officeDocument/2006/relationships" id="258" r:id="Rb81f9657c3df48d0"/>
-    <p:sldId xmlns:r="http://schemas.openxmlformats.org/officeDocument/2006/relationships" id="259" r:id="Rabdb852f40564e3a"/>
-    <p:sldId xmlns:r="http://schemas.openxmlformats.org/officeDocument/2006/relationships" id="260" r:id="R50b96f92114242e2"/>
-    <p:sldId xmlns:r="http://schemas.openxmlformats.org/officeDocument/2006/relationships" id="261" r:id="R37a5e0ff810e48a5"/>
-    <p:sldId xmlns:r="http://schemas.openxmlformats.org/officeDocument/2006/relationships" id="262" r:id="R439ffbd2823745c5"/>
-    <p:sldId xmlns:r="http://schemas.openxmlformats.org/officeDocument/2006/relationships" id="263" r:id="R40333ec326004bdb"/>
-    <p:sldId xmlns:r="http://schemas.openxmlformats.org/officeDocument/2006/relationships" id="264" r:id="R94f9d9d2832a4b1d"/>
-    <p:sldId xmlns:r="http://schemas.openxmlformats.org/officeDocument/2006/relationships" id="265" r:id="Re4358ef50bf6495c"/>
+    <p:sldId xmlns:r="http://schemas.openxmlformats.org/officeDocument/2006/relationships" id="256" r:id="R710ca99cb2314989"/>
+    <p:sldId xmlns:r="http://schemas.openxmlformats.org/officeDocument/2006/relationships" id="257" r:id="R68a46794254048cf"/>
+    <p:sldId xmlns:r="http://schemas.openxmlformats.org/officeDocument/2006/relationships" id="258" r:id="R83db7d1a493a4de6"/>
+    <p:sldId xmlns:r="http://schemas.openxmlformats.org/officeDocument/2006/relationships" id="259" r:id="Rcf88bac8d49e44c6"/>
+    <p:sldId xmlns:r="http://schemas.openxmlformats.org/officeDocument/2006/relationships" id="260" r:id="R5a184b5a3f994868"/>
+    <p:sldId xmlns:r="http://schemas.openxmlformats.org/officeDocument/2006/relationships" id="261" r:id="R4f940690bed84802"/>
+    <p:sldId xmlns:r="http://schemas.openxmlformats.org/officeDocument/2006/relationships" id="262" r:id="Re68e640086ca44e4"/>
+    <p:sldId xmlns:r="http://schemas.openxmlformats.org/officeDocument/2006/relationships" id="263" r:id="Rda3ca9e62554463d"/>
+    <p:sldId xmlns:r="http://schemas.openxmlformats.org/officeDocument/2006/relationships" id="264" r:id="Ra8d85ebb4eee40f8"/>
+    <p:sldId xmlns:r="http://schemas.openxmlformats.org/officeDocument/2006/relationships" id="265" r:id="R0ecf7bf74c354808"/>
   </p:sldIdLst>
   <p:sldSz cx="12192000" cy="6858000"/>
   <p:notesSz cx="6858000" cy="9144000"/>
@@ -556,7 +556,7 @@
           </a:p>
           <a:p xmlns:a="http://schemas.openxmlformats.org/drawingml/2006/main">
             <a:r>
-              <a:t>Сейчас у нас есть публичный сайт с демонстрацией, склад с сохранением данных, история операций, план закупок и контакты поставщиков с переходом в мессенджеры. Следующий шаг — три пилотные точки в Таразе. Ищем владельцев, с которыми сможем проверить сценарий на реальных приходах и продажах. Откройте демонстрацию по ссылке на экране. Спасибо! Мы команда QorAI.</a:t>
+              <a:t>Сейчас у нас есть публичный сайт с демонстрацией, склад с сохранением данных, история операций, план закупок и контакты поставщиков с переходом в мессенджеры. Следующий шаг — три пилотные точки в Таразе. Ищем владельцев, с которыми сможем проверить сценарий на реальных приходах и продажах. Откройте репозиторий по ссылке на экране: в нём есть ссылка на демонстрацию. Спасибо! Мы команда QorAI.</a:t>
             </a:r>
           </a:p>
           <a:p xmlns:a="http://schemas.openxmlformats.org/drawingml/2006/main">
@@ -931,7 +931,7 @@
           </a:p>
           <a:p xmlns:a="http://schemas.openxmlformats.org/drawingml/2006/main">
             <a:r>
-              <a:t>Расчёт спроса в исходниках: src/lib/domain.ts. Поправки на погоду и выходные не являются обученной ML-моделью. Экономия не измерена.</a:t>
+              <a:t>Расчёт спроса в исходниках: lib/domain.ts. Поправки на погоду и выходные не являются обученной ML-моделью. Экономия не измерена.</a:t>
             </a:r>
           </a:p>
         </p:txBody>
@@ -1333,7 +1333,7 @@
           <p:cNvPr id="3" name="Title">
             <a:extLst xmlns:a="http://schemas.openxmlformats.org/drawingml/2006/main">
               <a:ext uri="{FF2B5EF4-FFF2-40B4-BE49-F238E27FC236}">
-                <a16:creationId xmlns:a16="http://schemas.microsoft.com/office/drawing/2014/main" id="{85FAF772-43C3-40EC-973F-D5BCE1CF7897}"/>
+                <a16:creationId xmlns:a16="http://schemas.microsoft.com/office/drawing/2014/main" id="{D74BDABC-A6DF-4F71-974B-44C96594390C}"/>
               </a:ext>
             </a:extLst>
           </p:cNvPr>
@@ -1490,7 +1490,7 @@
           <p:cNvPr id="2" name="Subtitle">
             <a:extLst xmlns:a="http://schemas.openxmlformats.org/drawingml/2006/main">
               <a:ext uri="{FF2B5EF4-FFF2-40B4-BE49-F238E27FC236}">
-                <a16:creationId xmlns:a16="http://schemas.microsoft.com/office/drawing/2014/main" id="{664B1038-12CE-4A07-8020-82D7E99F623D}"/>
+                <a16:creationId xmlns:a16="http://schemas.microsoft.com/office/drawing/2014/main" id="{F31128AB-C304-42A7-A4B9-7129B742A8ED}"/>
               </a:ext>
             </a:extLst>
           </p:cNvPr>
@@ -1664,7 +1664,7 @@
           <p:cNvPr id="2" name="Section title">
             <a:extLst xmlns:a="http://schemas.openxmlformats.org/drawingml/2006/main">
               <a:ext uri="{FF2B5EF4-FFF2-40B4-BE49-F238E27FC236}">
-                <a16:creationId xmlns:a16="http://schemas.microsoft.com/office/drawing/2014/main" id="{23AAC2A1-6519-4EE8-9661-A8848844EB38}"/>
+                <a16:creationId xmlns:a16="http://schemas.microsoft.com/office/drawing/2014/main" id="{CD712041-8CC1-4276-B4C3-1A1910B240FD}"/>
               </a:ext>
             </a:extLst>
           </p:cNvPr>
@@ -1838,7 +1838,7 @@
           <p:cNvPr id="3" name="Title">
             <a:extLst xmlns:a="http://schemas.openxmlformats.org/drawingml/2006/main">
               <a:ext uri="{FF2B5EF4-FFF2-40B4-BE49-F238E27FC236}">
-                <a16:creationId xmlns:a16="http://schemas.microsoft.com/office/drawing/2014/main" id="{B8A19BC0-9B5E-4944-8E30-AAD8559EBAFC}"/>
+                <a16:creationId xmlns:a16="http://schemas.microsoft.com/office/drawing/2014/main" id="{E4EFF15F-64BE-45FD-807D-CB7F2403D36B}"/>
               </a:ext>
             </a:extLst>
           </p:cNvPr>
@@ -1995,7 +1995,7 @@
           <p:cNvPr id="2" name="Body">
             <a:extLst xmlns:a="http://schemas.openxmlformats.org/drawingml/2006/main">
               <a:ext uri="{FF2B5EF4-FFF2-40B4-BE49-F238E27FC236}">
-                <a16:creationId xmlns:a16="http://schemas.microsoft.com/office/drawing/2014/main" id="{2FCB1E4D-855A-46DB-BB63-A8D36B46D353}"/>
+                <a16:creationId xmlns:a16="http://schemas.microsoft.com/office/drawing/2014/main" id="{09363158-D659-447A-BAF7-C5B5603F9457}"/>
               </a:ext>
             </a:extLst>
           </p:cNvPr>
@@ -2169,7 +2169,7 @@
           <p:cNvPr id="4" name="Title">
             <a:extLst xmlns:a="http://schemas.openxmlformats.org/drawingml/2006/main">
               <a:ext uri="{FF2B5EF4-FFF2-40B4-BE49-F238E27FC236}">
-                <a16:creationId xmlns:a16="http://schemas.microsoft.com/office/drawing/2014/main" id="{4F8ADF0A-D189-4DC5-A612-1BBB4DB5F495}"/>
+                <a16:creationId xmlns:a16="http://schemas.microsoft.com/office/drawing/2014/main" id="{55067A46-74F0-4F47-B6BF-256A61B7981A}"/>
               </a:ext>
             </a:extLst>
           </p:cNvPr>
@@ -2326,7 +2326,7 @@
           <p:cNvPr id="2" name="Left column">
             <a:extLst xmlns:a="http://schemas.openxmlformats.org/drawingml/2006/main">
               <a:ext uri="{FF2B5EF4-FFF2-40B4-BE49-F238E27FC236}">
-                <a16:creationId xmlns:a16="http://schemas.microsoft.com/office/drawing/2014/main" id="{30F13DA3-8AA7-45E9-814F-492240292F6D}"/>
+                <a16:creationId xmlns:a16="http://schemas.microsoft.com/office/drawing/2014/main" id="{6147C793-751A-444C-AF37-4B721BD63C43}"/>
               </a:ext>
             </a:extLst>
           </p:cNvPr>
@@ -2483,7 +2483,7 @@
           <p:cNvPr id="3" name="Right column">
             <a:extLst xmlns:a="http://schemas.openxmlformats.org/drawingml/2006/main">
               <a:ext uri="{FF2B5EF4-FFF2-40B4-BE49-F238E27FC236}">
-                <a16:creationId xmlns:a16="http://schemas.microsoft.com/office/drawing/2014/main" id="{BE76B2E9-9C27-4E04-9069-0D24E286BA29}"/>
+                <a16:creationId xmlns:a16="http://schemas.microsoft.com/office/drawing/2014/main" id="{AE93E5DF-40E4-4805-B075-3651D0DEC80B}"/>
               </a:ext>
             </a:extLst>
           </p:cNvPr>
@@ -2657,7 +2657,7 @@
           <p:cNvPr id="3" name="Title">
             <a:extLst xmlns:a="http://schemas.openxmlformats.org/drawingml/2006/main">
               <a:ext uri="{FF2B5EF4-FFF2-40B4-BE49-F238E27FC236}">
-                <a16:creationId xmlns:a16="http://schemas.microsoft.com/office/drawing/2014/main" id="{90597E9A-D85A-4D9B-822E-AC7EB4D7770A}"/>
+                <a16:creationId xmlns:a16="http://schemas.microsoft.com/office/drawing/2014/main" id="{33CB47B6-E4EA-439E-8C1E-F6F142370426}"/>
               </a:ext>
             </a:extLst>
           </p:cNvPr>
@@ -2814,7 +2814,7 @@
           <p:cNvPr id="2" name="Left column">
             <a:extLst xmlns:a="http://schemas.openxmlformats.org/drawingml/2006/main">
               <a:ext uri="{FF2B5EF4-FFF2-40B4-BE49-F238E27FC236}">
-                <a16:creationId xmlns:a16="http://schemas.microsoft.com/office/drawing/2014/main" id="{5809051F-19BF-48CB-9F63-712799CFC338}"/>
+                <a16:creationId xmlns:a16="http://schemas.microsoft.com/office/drawing/2014/main" id="{BF8F5488-8CBC-4CF4-98A2-395D732164B8}"/>
               </a:ext>
             </a:extLst>
           </p:cNvPr>
@@ -3009,12 +3009,12 @@
   </p:cSld>
   <p:clrMap bg1="lt1" tx1="dk1" bg2="lt2" tx2="dk2" accent1="accent1" accent2="accent2" accent3="accent3" accent4="accent4" accent5="accent5" accent6="accent6" hlink="hlink" folHlink="folHlink"/>
   <p:sldLayoutIdLst>
-    <p:sldLayoutId xmlns:r="http://schemas.openxmlformats.org/officeDocument/2006/relationships" id="2147483649" r:id="R84ba9c0873704f20"/>
-    <p:sldLayoutId xmlns:r="http://schemas.openxmlformats.org/officeDocument/2006/relationships" id="2147483650" r:id="R0cfa4a4f32e34cd0"/>
-    <p:sldLayoutId xmlns:r="http://schemas.openxmlformats.org/officeDocument/2006/relationships" id="2147483651" r:id="Rdba0e7151386471f"/>
-    <p:sldLayoutId xmlns:r="http://schemas.openxmlformats.org/officeDocument/2006/relationships" id="2147483652" r:id="Rb8a7be30f6da47b2"/>
-    <p:sldLayoutId xmlns:r="http://schemas.openxmlformats.org/officeDocument/2006/relationships" id="2147483653" r:id="R8da053bd8b03461c"/>
-    <p:sldLayoutId xmlns:r="http://schemas.openxmlformats.org/officeDocument/2006/relationships" id="2147483654" r:id="R755c41e450734435"/>
+    <p:sldLayoutId xmlns:r="http://schemas.openxmlformats.org/officeDocument/2006/relationships" id="2147483649" r:id="Rc6a8de6f23a34c66"/>
+    <p:sldLayoutId xmlns:r="http://schemas.openxmlformats.org/officeDocument/2006/relationships" id="2147483650" r:id="R7f53302939a0440d"/>
+    <p:sldLayoutId xmlns:r="http://schemas.openxmlformats.org/officeDocument/2006/relationships" id="2147483651" r:id="Rb1211b0cfd30488c"/>
+    <p:sldLayoutId xmlns:r="http://schemas.openxmlformats.org/officeDocument/2006/relationships" id="2147483652" r:id="Rd4b2ec1ed01e4217"/>
+    <p:sldLayoutId xmlns:r="http://schemas.openxmlformats.org/officeDocument/2006/relationships" id="2147483653" r:id="R76ed8953482848cc"/>
+    <p:sldLayoutId xmlns:r="http://schemas.openxmlformats.org/officeDocument/2006/relationships" id="2147483654" r:id="R5524a1028ea54cd8"/>
   </p:sldLayoutIdLst>
   <p:txStyles>
     <p:titleStyle>
@@ -3565,7 +3565,7 @@
           <p:cNvPr id="7" name="">
             <a:extLst xmlns:a="http://schemas.openxmlformats.org/drawingml/2006/main">
               <a:ext uri="{FF2B5EF4-FFF2-40B4-BE49-F238E27FC236}">
-                <a16:creationId xmlns:a16="http://schemas.microsoft.com/office/drawing/2014/main" id="{1922F5AB-5BC9-4156-8AAE-4F02DE7FCCA1}"/>
+                <a16:creationId xmlns:a16="http://schemas.microsoft.com/office/drawing/2014/main" id="{3B13C1C0-E43C-40EA-893D-339C684D5A01}"/>
               </a:ext>
             </a:extLst>
           </p:cNvPr>
@@ -3575,7 +3575,7 @@
           <p:nvPr/>
         </p:nvPicPr>
         <p:blipFill>
-          <a:blip xmlns:r="http://schemas.openxmlformats.org/officeDocument/2006/relationships" xmlns:a="http://schemas.openxmlformats.org/drawingml/2006/main" r:embed="Rd9e41e2e87ed43a9"/>
+          <a:blip xmlns:r="http://schemas.openxmlformats.org/officeDocument/2006/relationships" xmlns:a="http://schemas.openxmlformats.org/drawingml/2006/main" r:embed="R468b3bf60519471e"/>
           <a:srcRect xmlns:a="http://schemas.openxmlformats.org/drawingml/2006/main" l="30000" t="0" r="5000" b="0"/>
           <a:stretch xmlns:a="http://schemas.openxmlformats.org/drawingml/2006/main"/>
         </p:blipFill>
@@ -3594,7 +3594,7 @@
           <p:cNvPr id="2" name="">
             <a:extLst xmlns:a="http://schemas.openxmlformats.org/drawingml/2006/main">
               <a:ext uri="{FF2B5EF4-FFF2-40B4-BE49-F238E27FC236}">
-                <a16:creationId xmlns:a16="http://schemas.microsoft.com/office/drawing/2014/main" id="{1CEE1F10-9BE2-4649-BB53-65F435DE8911}"/>
+                <a16:creationId xmlns:a16="http://schemas.microsoft.com/office/drawing/2014/main" id="{14A7D8D3-0B06-4C64-B119-9638B2F75734}"/>
               </a:ext>
             </a:extLst>
           </p:cNvPr>
@@ -3660,7 +3660,7 @@
           <p:cNvPr id="3" name="">
             <a:extLst xmlns:a="http://schemas.openxmlformats.org/drawingml/2006/main">
               <a:ext uri="{FF2B5EF4-FFF2-40B4-BE49-F238E27FC236}">
-                <a16:creationId xmlns:a16="http://schemas.microsoft.com/office/drawing/2014/main" id="{23A78FEF-0C62-4608-B2E8-19359B5BDBCE}"/>
+                <a16:creationId xmlns:a16="http://schemas.microsoft.com/office/drawing/2014/main" id="{D55CA879-2741-4AC0-8CFE-EB4BB17C618D}"/>
               </a:ext>
             </a:extLst>
           </p:cNvPr>
@@ -3726,7 +3726,7 @@
           <p:cNvPr id="4" name="">
             <a:extLst xmlns:a="http://schemas.openxmlformats.org/drawingml/2006/main">
               <a:ext uri="{FF2B5EF4-FFF2-40B4-BE49-F238E27FC236}">
-                <a16:creationId xmlns:a16="http://schemas.microsoft.com/office/drawing/2014/main" id="{1C751980-FA12-4851-90B8-35C14123787B}"/>
+                <a16:creationId xmlns:a16="http://schemas.microsoft.com/office/drawing/2014/main" id="{B970D394-CA80-4658-8114-81D339E51B53}"/>
               </a:ext>
             </a:extLst>
           </p:cNvPr>
@@ -3815,7 +3815,7 @@
           <p:cNvPr id="5" name="">
             <a:extLst xmlns:a="http://schemas.openxmlformats.org/drawingml/2006/main">
               <a:ext uri="{FF2B5EF4-FFF2-40B4-BE49-F238E27FC236}">
-                <a16:creationId xmlns:a16="http://schemas.microsoft.com/office/drawing/2014/main" id="{4F5156B1-F924-4B4B-AA6C-8153D4FD4D2C}"/>
+                <a16:creationId xmlns:a16="http://schemas.microsoft.com/office/drawing/2014/main" id="{488DFB55-F32F-4F2B-9DEF-C60410C7033E}"/>
               </a:ext>
             </a:extLst>
           </p:cNvPr>
@@ -3904,7 +3904,7 @@
           <p:cNvPr id="6" name="">
             <a:extLst xmlns:a="http://schemas.openxmlformats.org/drawingml/2006/main">
               <a:ext uri="{FF2B5EF4-FFF2-40B4-BE49-F238E27FC236}">
-                <a16:creationId xmlns:a16="http://schemas.microsoft.com/office/drawing/2014/main" id="{82C4D9D4-3013-42DE-8AC4-946542AF0CAF}"/>
+                <a16:creationId xmlns:a16="http://schemas.microsoft.com/office/drawing/2014/main" id="{714E1225-655C-45F3-B29A-0C244F9D1494}"/>
               </a:ext>
             </a:extLst>
           </p:cNvPr>
@@ -3968,7 +3968,7 @@
     </p:spTree>
     <p:extLst>
       <p:ext uri="{BB962C8B-B14F-4D97-AF65-F5344CB8AC3E}">
-        <p14:creationId xmlns:p14="http://schemas.microsoft.com/office/powerpoint/2010/main" val="384529866"/>
+        <p14:creationId xmlns:p14="http://schemas.microsoft.com/office/powerpoint/2010/main" val="2039608609"/>
       </p:ext>
     </p:extLst>
   </p:cSld>
@@ -3999,7 +3999,7 @@
           <p:cNvPr id="8" name="">
             <a:extLst xmlns:a="http://schemas.openxmlformats.org/drawingml/2006/main">
               <a:ext uri="{FF2B5EF4-FFF2-40B4-BE49-F238E27FC236}">
-                <a16:creationId xmlns:a16="http://schemas.microsoft.com/office/drawing/2014/main" id="{A6F3ADF8-68ED-4116-AE38-322F8FD0332E}"/>
+                <a16:creationId xmlns:a16="http://schemas.microsoft.com/office/drawing/2014/main" id="{0C7326DE-51C4-4B20-A980-3C54AEA9DF4F}"/>
               </a:ext>
             </a:extLst>
           </p:cNvPr>
@@ -4065,7 +4065,7 @@
           <p:cNvPr id="2" name="">
             <a:extLst xmlns:a="http://schemas.openxmlformats.org/drawingml/2006/main">
               <a:ext uri="{FF2B5EF4-FFF2-40B4-BE49-F238E27FC236}">
-                <a16:creationId xmlns:a16="http://schemas.microsoft.com/office/drawing/2014/main" id="{9774AA4D-E28F-40AF-A64A-993F5CBAD57E}"/>
+                <a16:creationId xmlns:a16="http://schemas.microsoft.com/office/drawing/2014/main" id="{70B0DD51-1330-4CCA-A320-41EB7C5EA32C}"/>
               </a:ext>
             </a:extLst>
           </p:cNvPr>
@@ -4177,7 +4177,7 @@
           <p:cNvPr id="3" name="">
             <a:extLst xmlns:a="http://schemas.openxmlformats.org/drawingml/2006/main">
               <a:ext uri="{FF2B5EF4-FFF2-40B4-BE49-F238E27FC236}">
-                <a16:creationId xmlns:a16="http://schemas.microsoft.com/office/drawing/2014/main" id="{D782E199-DF73-47D1-B5F2-BC171D86C3FD}"/>
+                <a16:creationId xmlns:a16="http://schemas.microsoft.com/office/drawing/2014/main" id="{EBC7EC14-830C-4359-ABC9-CB4761B6A353}"/>
               </a:ext>
             </a:extLst>
           </p:cNvPr>
@@ -4233,7 +4233,7 @@
                 <a:ea typeface="Liberation Sans"/>
                 <a:cs typeface="Liberation Sans"/>
               </a:rPr>
-              <a:t>Демо открыто для всех</a:t>
+              <a:t>Демо и исходники проекта</a:t>
             </a:r>
           </a:p>
         </p:txBody>
@@ -4243,7 +4243,7 @@
           <p:cNvPr id="4" name="">
             <a:extLst xmlns:a="http://schemas.openxmlformats.org/drawingml/2006/main">
               <a:ext uri="{FF2B5EF4-FFF2-40B4-BE49-F238E27FC236}">
-                <a16:creationId xmlns:a16="http://schemas.microsoft.com/office/drawing/2014/main" id="{44F1AC7A-6052-4484-A80F-3807FB6FA59B}"/>
+                <a16:creationId xmlns:a16="http://schemas.microsoft.com/office/drawing/2014/main" id="{E1A22E4F-114B-4789-A3C3-85BC8E265F1B}"/>
               </a:ext>
             </a:extLst>
           </p:cNvPr>
@@ -4299,7 +4299,7 @@
                 <a:ea typeface="Liberation Sans"/>
                 <a:cs typeface="Liberation Sans"/>
               </a:rPr>
-              <a:t>qorai-taraz.nursultantulegen11.chatgpt.site</a:t>
+              <a:t>github.com/nursultantulegen11-commits/qorai</a:t>
             </a:r>
           </a:p>
         </p:txBody>
@@ -4309,7 +4309,7 @@
           <p:cNvPr id="5" name="">
             <a:extLst xmlns:a="http://schemas.openxmlformats.org/drawingml/2006/main">
               <a:ext uri="{FF2B5EF4-FFF2-40B4-BE49-F238E27FC236}">
-                <a16:creationId xmlns:a16="http://schemas.microsoft.com/office/drawing/2014/main" id="{64FC9B93-A6E9-4767-8CDC-157FEA414CCD}"/>
+                <a16:creationId xmlns:a16="http://schemas.microsoft.com/office/drawing/2014/main" id="{F26DF66C-7722-423A-B809-848E038B2BA6}"/>
               </a:ext>
             </a:extLst>
           </p:cNvPr>
@@ -4398,7 +4398,7 @@
           <p:cNvPr id="6" name="">
             <a:extLst xmlns:a="http://schemas.openxmlformats.org/drawingml/2006/main">
               <a:ext uri="{FF2B5EF4-FFF2-40B4-BE49-F238E27FC236}">
-                <a16:creationId xmlns:a16="http://schemas.microsoft.com/office/drawing/2014/main" id="{C6B5C768-F31C-4433-8477-1A9E849AB449}"/>
+                <a16:creationId xmlns:a16="http://schemas.microsoft.com/office/drawing/2014/main" id="{5C8157C9-6F16-46A2-B9DC-09CE7C70D6C8}"/>
               </a:ext>
             </a:extLst>
           </p:cNvPr>
@@ -4408,7 +4408,7 @@
           <p:nvPr/>
         </p:nvPicPr>
         <p:blipFill>
-          <a:blip xmlns:r="http://schemas.openxmlformats.org/officeDocument/2006/relationships" xmlns:a="http://schemas.openxmlformats.org/drawingml/2006/main" r:embed="R8112e4b8374246b0"/>
+          <a:blip xmlns:r="http://schemas.openxmlformats.org/officeDocument/2006/relationships" xmlns:a="http://schemas.openxmlformats.org/drawingml/2006/main" r:embed="Rff73d5be8d35464c"/>
           <a:srcRect xmlns:a="http://schemas.openxmlformats.org/drawingml/2006/main" l="19000" t="7500" r="2000" b="4000"/>
           <a:stretch xmlns:a="http://schemas.openxmlformats.org/drawingml/2006/main"/>
         </p:blipFill>
@@ -4427,7 +4427,7 @@
           <p:cNvPr id="7" name="">
             <a:extLst xmlns:a="http://schemas.openxmlformats.org/drawingml/2006/main">
               <a:ext uri="{FF2B5EF4-FFF2-40B4-BE49-F238E27FC236}">
-                <a16:creationId xmlns:a16="http://schemas.microsoft.com/office/drawing/2014/main" id="{1A488AEC-19A5-4266-96F5-5CFD845B18EB}"/>
+                <a16:creationId xmlns:a16="http://schemas.microsoft.com/office/drawing/2014/main" id="{7A72FB22-8452-4AD3-92C6-C6F310FF9BC3}"/>
               </a:ext>
             </a:extLst>
           </p:cNvPr>
@@ -4491,7 +4491,7 @@
     </p:spTree>
     <p:extLst>
       <p:ext uri="{BB962C8B-B14F-4D97-AF65-F5344CB8AC3E}">
-        <p14:creationId xmlns:p14="http://schemas.microsoft.com/office/powerpoint/2010/main" val="736211834"/>
+        <p14:creationId xmlns:p14="http://schemas.microsoft.com/office/powerpoint/2010/main" val="189028034"/>
       </p:ext>
     </p:extLst>
   </p:cSld>
@@ -4522,7 +4522,7 @@
           <p:cNvPr id="7" name="">
             <a:extLst xmlns:a="http://schemas.openxmlformats.org/drawingml/2006/main">
               <a:ext uri="{FF2B5EF4-FFF2-40B4-BE49-F238E27FC236}">
-                <a16:creationId xmlns:a16="http://schemas.microsoft.com/office/drawing/2014/main" id="{B65D9887-28F2-4881-BBA7-00D779580CC6}"/>
+                <a16:creationId xmlns:a16="http://schemas.microsoft.com/office/drawing/2014/main" id="{732A434C-DF72-4773-A7E7-3BFD48026D8B}"/>
               </a:ext>
             </a:extLst>
           </p:cNvPr>
@@ -4532,7 +4532,7 @@
           <p:nvPr/>
         </p:nvPicPr>
         <p:blipFill>
-          <a:blip xmlns:r="http://schemas.openxmlformats.org/officeDocument/2006/relationships" xmlns:a="http://schemas.openxmlformats.org/drawingml/2006/main" r:embed="Rd2db8592f9e2483a"/>
+          <a:blip xmlns:r="http://schemas.openxmlformats.org/officeDocument/2006/relationships" xmlns:a="http://schemas.openxmlformats.org/drawingml/2006/main" r:embed="Rb98a98dccd164c23"/>
           <a:srcRect xmlns:a="http://schemas.openxmlformats.org/drawingml/2006/main" l="14000" t="0" r="20000" b="0"/>
           <a:stretch xmlns:a="http://schemas.openxmlformats.org/drawingml/2006/main"/>
         </p:blipFill>
@@ -4551,7 +4551,7 @@
           <p:cNvPr id="2" name="">
             <a:extLst xmlns:a="http://schemas.openxmlformats.org/drawingml/2006/main">
               <a:ext uri="{FF2B5EF4-FFF2-40B4-BE49-F238E27FC236}">
-                <a16:creationId xmlns:a16="http://schemas.microsoft.com/office/drawing/2014/main" id="{0CD6EB52-0CC6-41CE-AF87-932C9EAE0A4B}"/>
+                <a16:creationId xmlns:a16="http://schemas.microsoft.com/office/drawing/2014/main" id="{D952F0A8-DC19-4522-98C3-D0EAF9C361C1}"/>
               </a:ext>
             </a:extLst>
           </p:cNvPr>
@@ -4663,7 +4663,7 @@
           <p:cNvPr id="3" name="">
             <a:extLst xmlns:a="http://schemas.openxmlformats.org/drawingml/2006/main">
               <a:ext uri="{FF2B5EF4-FFF2-40B4-BE49-F238E27FC236}">
-                <a16:creationId xmlns:a16="http://schemas.microsoft.com/office/drawing/2014/main" id="{BF28F64C-1D35-454C-AC15-A5F4C5C09A2E}"/>
+                <a16:creationId xmlns:a16="http://schemas.microsoft.com/office/drawing/2014/main" id="{13BA992A-95D4-4D2C-BF95-6F51DBDA52B8}"/>
               </a:ext>
             </a:extLst>
           </p:cNvPr>
@@ -4785,7 +4785,7 @@
           <p:cNvPr id="4" name="">
             <a:extLst xmlns:a="http://schemas.openxmlformats.org/drawingml/2006/main">
               <a:ext uri="{FF2B5EF4-FFF2-40B4-BE49-F238E27FC236}">
-                <a16:creationId xmlns:a16="http://schemas.microsoft.com/office/drawing/2014/main" id="{32AB8B75-D700-43B1-AF08-F862EF6C21CD}"/>
+                <a16:creationId xmlns:a16="http://schemas.microsoft.com/office/drawing/2014/main" id="{FA9A1DB2-5C16-4F71-9990-E4F073878299}"/>
               </a:ext>
             </a:extLst>
           </p:cNvPr>
@@ -4851,7 +4851,7 @@
           <p:cNvPr id="5" name="">
             <a:extLst xmlns:a="http://schemas.openxmlformats.org/drawingml/2006/main">
               <a:ext uri="{FF2B5EF4-FFF2-40B4-BE49-F238E27FC236}">
-                <a16:creationId xmlns:a16="http://schemas.microsoft.com/office/drawing/2014/main" id="{33238D30-4AC4-452B-A7F9-49B30E95892F}"/>
+                <a16:creationId xmlns:a16="http://schemas.microsoft.com/office/drawing/2014/main" id="{1326E907-7E9E-4B58-AD5F-D8F7052849D3}"/>
               </a:ext>
             </a:extLst>
           </p:cNvPr>
@@ -4917,7 +4917,7 @@
           <p:cNvPr id="6" name="">
             <a:extLst xmlns:a="http://schemas.openxmlformats.org/drawingml/2006/main">
               <a:ext uri="{FF2B5EF4-FFF2-40B4-BE49-F238E27FC236}">
-                <a16:creationId xmlns:a16="http://schemas.microsoft.com/office/drawing/2014/main" id="{F96A944E-920D-4105-9181-0E19F1D9CCC2}"/>
+                <a16:creationId xmlns:a16="http://schemas.microsoft.com/office/drawing/2014/main" id="{CE9E3B59-1D44-4060-840F-B8AF26551C1F}"/>
               </a:ext>
             </a:extLst>
           </p:cNvPr>
@@ -4981,7 +4981,7 @@
     </p:spTree>
     <p:extLst>
       <p:ext uri="{BB962C8B-B14F-4D97-AF65-F5344CB8AC3E}">
-        <p14:creationId xmlns:p14="http://schemas.microsoft.com/office/powerpoint/2010/main" val="1213761075"/>
+        <p14:creationId xmlns:p14="http://schemas.microsoft.com/office/powerpoint/2010/main" val="1001001814"/>
       </p:ext>
     </p:extLst>
   </p:cSld>
@@ -5012,7 +5012,7 @@
           <p:cNvPr id="7" name="">
             <a:extLst xmlns:a="http://schemas.openxmlformats.org/drawingml/2006/main">
               <a:ext uri="{FF2B5EF4-FFF2-40B4-BE49-F238E27FC236}">
-                <a16:creationId xmlns:a16="http://schemas.microsoft.com/office/drawing/2014/main" id="{D9FE1029-1AF1-40EE-99A8-3A9DBCF9941B}"/>
+                <a16:creationId xmlns:a16="http://schemas.microsoft.com/office/drawing/2014/main" id="{F941B7AC-A2BD-4583-A729-5674DA931971}"/>
               </a:ext>
             </a:extLst>
           </p:cNvPr>
@@ -5078,7 +5078,7 @@
           <p:cNvPr id="2" name="">
             <a:extLst xmlns:a="http://schemas.openxmlformats.org/drawingml/2006/main">
               <a:ext uri="{FF2B5EF4-FFF2-40B4-BE49-F238E27FC236}">
-                <a16:creationId xmlns:a16="http://schemas.microsoft.com/office/drawing/2014/main" id="{F7B9D48F-1D01-44BF-947F-4B757E9A2491}"/>
+                <a16:creationId xmlns:a16="http://schemas.microsoft.com/office/drawing/2014/main" id="{0923811B-B64F-4969-9544-43408F6245DE}"/>
               </a:ext>
             </a:extLst>
           </p:cNvPr>
@@ -5190,7 +5190,7 @@
           <p:cNvPr id="3" name="">
             <a:extLst xmlns:a="http://schemas.openxmlformats.org/drawingml/2006/main">
               <a:ext uri="{FF2B5EF4-FFF2-40B4-BE49-F238E27FC236}">
-                <a16:creationId xmlns:a16="http://schemas.microsoft.com/office/drawing/2014/main" id="{9FB2FC81-82D0-44B4-9CAD-99D079948800}"/>
+                <a16:creationId xmlns:a16="http://schemas.microsoft.com/office/drawing/2014/main" id="{FC39A3D5-9239-4369-9188-89377D46BE11}"/>
               </a:ext>
             </a:extLst>
           </p:cNvPr>
@@ -5302,7 +5302,7 @@
           <p:cNvPr id="4" name="">
             <a:extLst xmlns:a="http://schemas.openxmlformats.org/drawingml/2006/main">
               <a:ext uri="{FF2B5EF4-FFF2-40B4-BE49-F238E27FC236}">
-                <a16:creationId xmlns:a16="http://schemas.microsoft.com/office/drawing/2014/main" id="{E7985EE9-AC0F-46C2-BF07-BBF145C9722B}"/>
+                <a16:creationId xmlns:a16="http://schemas.microsoft.com/office/drawing/2014/main" id="{C776535D-C2C3-494B-9DD5-D56A8EFE303F}"/>
               </a:ext>
             </a:extLst>
           </p:cNvPr>
@@ -5312,7 +5312,7 @@
           <p:nvPr/>
         </p:nvPicPr>
         <p:blipFill>
-          <a:blip xmlns:r="http://schemas.openxmlformats.org/officeDocument/2006/relationships" xmlns:a="http://schemas.openxmlformats.org/drawingml/2006/main" r:embed="R4e5970df815c43a6"/>
+          <a:blip xmlns:r="http://schemas.openxmlformats.org/officeDocument/2006/relationships" xmlns:a="http://schemas.openxmlformats.org/drawingml/2006/main" r:embed="R7409ab4f5fa24e31"/>
           <a:srcRect xmlns:a="http://schemas.openxmlformats.org/drawingml/2006/main" l="0" t="4500" r="0" b="46000"/>
           <a:stretch xmlns:a="http://schemas.openxmlformats.org/drawingml/2006/main"/>
         </p:blipFill>
@@ -5331,7 +5331,7 @@
           <p:cNvPr id="5" name="">
             <a:extLst xmlns:a="http://schemas.openxmlformats.org/drawingml/2006/main">
               <a:ext uri="{FF2B5EF4-FFF2-40B4-BE49-F238E27FC236}">
-                <a16:creationId xmlns:a16="http://schemas.microsoft.com/office/drawing/2014/main" id="{F4A7D750-FC18-4ACD-B841-5E8EF43B67C4}"/>
+                <a16:creationId xmlns:a16="http://schemas.microsoft.com/office/drawing/2014/main" id="{2C498159-CCB6-4C07-8E8C-2FB556178679}"/>
               </a:ext>
             </a:extLst>
           </p:cNvPr>
@@ -5397,7 +5397,7 @@
           <p:cNvPr id="6" name="">
             <a:extLst xmlns:a="http://schemas.openxmlformats.org/drawingml/2006/main">
               <a:ext uri="{FF2B5EF4-FFF2-40B4-BE49-F238E27FC236}">
-                <a16:creationId xmlns:a16="http://schemas.microsoft.com/office/drawing/2014/main" id="{85A4108C-053B-4516-B4E4-4B5984F38B1E}"/>
+                <a16:creationId xmlns:a16="http://schemas.microsoft.com/office/drawing/2014/main" id="{230E175E-F0CF-4238-8EE0-DBC83B098228}"/>
               </a:ext>
             </a:extLst>
           </p:cNvPr>
@@ -5461,7 +5461,7 @@
     </p:spTree>
     <p:extLst>
       <p:ext uri="{BB962C8B-B14F-4D97-AF65-F5344CB8AC3E}">
-        <p14:creationId xmlns:p14="http://schemas.microsoft.com/office/powerpoint/2010/main" val="1953414228"/>
+        <p14:creationId xmlns:p14="http://schemas.microsoft.com/office/powerpoint/2010/main" val="651616713"/>
       </p:ext>
     </p:extLst>
   </p:cSld>
@@ -5492,7 +5492,7 @@
           <p:cNvPr id="10" name="">
             <a:extLst xmlns:a="http://schemas.openxmlformats.org/drawingml/2006/main">
               <a:ext uri="{FF2B5EF4-FFF2-40B4-BE49-F238E27FC236}">
-                <a16:creationId xmlns:a16="http://schemas.microsoft.com/office/drawing/2014/main" id="{27421E1E-3EBE-4A74-9245-93862A5CFA04}"/>
+                <a16:creationId xmlns:a16="http://schemas.microsoft.com/office/drawing/2014/main" id="{CF2049EB-71C8-4845-B6A5-38670E14EA26}"/>
               </a:ext>
             </a:extLst>
           </p:cNvPr>
@@ -5558,7 +5558,7 @@
           <p:cNvPr id="2" name="">
             <a:extLst xmlns:a="http://schemas.openxmlformats.org/drawingml/2006/main">
               <a:ext uri="{FF2B5EF4-FFF2-40B4-BE49-F238E27FC236}">
-                <a16:creationId xmlns:a16="http://schemas.microsoft.com/office/drawing/2014/main" id="{9D261FB0-522D-4911-9634-78FCB658567F}"/>
+                <a16:creationId xmlns:a16="http://schemas.microsoft.com/office/drawing/2014/main" id="{CF0A16BA-EBA2-4475-B097-EAAF6D799820}"/>
               </a:ext>
             </a:extLst>
           </p:cNvPr>
@@ -5670,7 +5670,7 @@
           <p:cNvPr id="3" name="">
             <a:extLst xmlns:a="http://schemas.openxmlformats.org/drawingml/2006/main">
               <a:ext uri="{FF2B5EF4-FFF2-40B4-BE49-F238E27FC236}">
-                <a16:creationId xmlns:a16="http://schemas.microsoft.com/office/drawing/2014/main" id="{164C1E83-2C6B-4BA4-82EF-1647CC0399B6}"/>
+                <a16:creationId xmlns:a16="http://schemas.microsoft.com/office/drawing/2014/main" id="{46CD204E-F3C6-4D59-B445-6866C5C51835}"/>
               </a:ext>
             </a:extLst>
           </p:cNvPr>
@@ -5782,7 +5782,7 @@
           <p:cNvPr id="4" name="">
             <a:extLst xmlns:a="http://schemas.openxmlformats.org/drawingml/2006/main">
               <a:ext uri="{FF2B5EF4-FFF2-40B4-BE49-F238E27FC236}">
-                <a16:creationId xmlns:a16="http://schemas.microsoft.com/office/drawing/2014/main" id="{BB579632-3352-431B-8837-3B7CD31D9DCA}"/>
+                <a16:creationId xmlns:a16="http://schemas.microsoft.com/office/drawing/2014/main" id="{6C6C93DA-CDC3-4754-8671-7FFB58285C19}"/>
               </a:ext>
             </a:extLst>
           </p:cNvPr>
@@ -5848,7 +5848,7 @@
           <p:cNvPr id="5" name="">
             <a:extLst xmlns:a="http://schemas.openxmlformats.org/drawingml/2006/main">
               <a:ext uri="{FF2B5EF4-FFF2-40B4-BE49-F238E27FC236}">
-                <a16:creationId xmlns:a16="http://schemas.microsoft.com/office/drawing/2014/main" id="{F8930CE5-07D8-4E18-B774-D39CCC4FD7E3}"/>
+                <a16:creationId xmlns:a16="http://schemas.microsoft.com/office/drawing/2014/main" id="{D9D7A68A-D8D0-4C8C-A4E0-DCDBAED8061F}"/>
               </a:ext>
             </a:extLst>
           </p:cNvPr>
@@ -5914,7 +5914,7 @@
           <p:cNvPr id="6" name="">
             <a:extLst xmlns:a="http://schemas.openxmlformats.org/drawingml/2006/main">
               <a:ext uri="{FF2B5EF4-FFF2-40B4-BE49-F238E27FC236}">
-                <a16:creationId xmlns:a16="http://schemas.microsoft.com/office/drawing/2014/main" id="{DC27F432-168A-4517-B324-70D1AE1852D6}"/>
+                <a16:creationId xmlns:a16="http://schemas.microsoft.com/office/drawing/2014/main" id="{3EEC1394-0437-4812-B5DD-3413B48B6C15}"/>
               </a:ext>
             </a:extLst>
           </p:cNvPr>
@@ -5924,7 +5924,7 @@
           <p:nvPr/>
         </p:nvPicPr>
         <p:blipFill>
-          <a:blip xmlns:r="http://schemas.openxmlformats.org/officeDocument/2006/relationships" xmlns:a="http://schemas.openxmlformats.org/drawingml/2006/main" r:embed="R8813e4597bbd4046"/>
+          <a:blip xmlns:r="http://schemas.openxmlformats.org/officeDocument/2006/relationships" xmlns:a="http://schemas.openxmlformats.org/drawingml/2006/main" r:embed="R544f874d5d374301"/>
           <a:srcRect xmlns:a="http://schemas.openxmlformats.org/drawingml/2006/main" l="2000" t="28000" r="2000" b="2000"/>
           <a:stretch xmlns:a="http://schemas.openxmlformats.org/drawingml/2006/main"/>
         </p:blipFill>
@@ -5943,7 +5943,7 @@
           <p:cNvPr id="7" name="">
             <a:extLst xmlns:a="http://schemas.openxmlformats.org/drawingml/2006/main">
               <a:ext uri="{FF2B5EF4-FFF2-40B4-BE49-F238E27FC236}">
-                <a16:creationId xmlns:a16="http://schemas.microsoft.com/office/drawing/2014/main" id="{E81C2364-28A2-40D1-8D46-0053FCF56607}"/>
+                <a16:creationId xmlns:a16="http://schemas.microsoft.com/office/drawing/2014/main" id="{C35BD5B3-735D-40E6-A73D-F72AC7DC8632}"/>
               </a:ext>
             </a:extLst>
           </p:cNvPr>
@@ -5953,7 +5953,7 @@
           <p:nvPr/>
         </p:nvPicPr>
         <p:blipFill>
-          <a:blip xmlns:r="http://schemas.openxmlformats.org/officeDocument/2006/relationships" xmlns:a="http://schemas.openxmlformats.org/drawingml/2006/main" r:embed="Rcaee248a0b5e4c7d"/>
+          <a:blip xmlns:r="http://schemas.openxmlformats.org/officeDocument/2006/relationships" xmlns:a="http://schemas.openxmlformats.org/drawingml/2006/main" r:embed="Rf5cdb73c16294ce3"/>
           <a:srcRect xmlns:a="http://schemas.openxmlformats.org/drawingml/2006/main" l="2000" t="5500" r="2000" b="2000"/>
           <a:stretch xmlns:a="http://schemas.openxmlformats.org/drawingml/2006/main"/>
         </p:blipFill>
@@ -5972,7 +5972,7 @@
           <p:cNvPr id="8" name="">
             <a:extLst xmlns:a="http://schemas.openxmlformats.org/drawingml/2006/main">
               <a:ext uri="{FF2B5EF4-FFF2-40B4-BE49-F238E27FC236}">
-                <a16:creationId xmlns:a16="http://schemas.microsoft.com/office/drawing/2014/main" id="{34EC0840-C0C1-4923-8637-C1F5F2CB461F}"/>
+                <a16:creationId xmlns:a16="http://schemas.microsoft.com/office/drawing/2014/main" id="{4802E9D7-19D1-46C0-ACC7-DF18B4437CE8}"/>
               </a:ext>
             </a:extLst>
           </p:cNvPr>
@@ -6038,7 +6038,7 @@
           <p:cNvPr id="9" name="">
             <a:extLst xmlns:a="http://schemas.openxmlformats.org/drawingml/2006/main">
               <a:ext uri="{FF2B5EF4-FFF2-40B4-BE49-F238E27FC236}">
-                <a16:creationId xmlns:a16="http://schemas.microsoft.com/office/drawing/2014/main" id="{C8781B96-D0D8-4BC9-896A-458246DBBA88}"/>
+                <a16:creationId xmlns:a16="http://schemas.microsoft.com/office/drawing/2014/main" id="{7C8DD731-0027-4F06-B57C-B3679B6E96AE}"/>
               </a:ext>
             </a:extLst>
           </p:cNvPr>
@@ -6102,7 +6102,7 @@
     </p:spTree>
     <p:extLst>
       <p:ext uri="{BB962C8B-B14F-4D97-AF65-F5344CB8AC3E}">
-        <p14:creationId xmlns:p14="http://schemas.microsoft.com/office/powerpoint/2010/main" val="100034931"/>
+        <p14:creationId xmlns:p14="http://schemas.microsoft.com/office/powerpoint/2010/main" val="1923458526"/>
       </p:ext>
     </p:extLst>
   </p:cSld>
@@ -6133,7 +6133,7 @@
           <p:cNvPr id="8" name="">
             <a:extLst xmlns:a="http://schemas.openxmlformats.org/drawingml/2006/main">
               <a:ext uri="{FF2B5EF4-FFF2-40B4-BE49-F238E27FC236}">
-                <a16:creationId xmlns:a16="http://schemas.microsoft.com/office/drawing/2014/main" id="{4BBFE6AF-A5FF-402B-AB27-E8B60C35ECD6}"/>
+                <a16:creationId xmlns:a16="http://schemas.microsoft.com/office/drawing/2014/main" id="{32ED808A-F308-42A6-BAD5-DB4E582E5DD1}"/>
               </a:ext>
             </a:extLst>
           </p:cNvPr>
@@ -6199,7 +6199,7 @@
           <p:cNvPr id="2" name="">
             <a:extLst xmlns:a="http://schemas.openxmlformats.org/drawingml/2006/main">
               <a:ext uri="{FF2B5EF4-FFF2-40B4-BE49-F238E27FC236}">
-                <a16:creationId xmlns:a16="http://schemas.microsoft.com/office/drawing/2014/main" id="{7744C825-5349-417C-921A-29D8560AAA0D}"/>
+                <a16:creationId xmlns:a16="http://schemas.microsoft.com/office/drawing/2014/main" id="{45B5BC73-9192-4557-97BC-188DA1D17ABA}"/>
               </a:ext>
             </a:extLst>
           </p:cNvPr>
@@ -6288,7 +6288,7 @@
           <p:cNvPr id="3" name="">
             <a:extLst xmlns:a="http://schemas.openxmlformats.org/drawingml/2006/main">
               <a:ext uri="{FF2B5EF4-FFF2-40B4-BE49-F238E27FC236}">
-                <a16:creationId xmlns:a16="http://schemas.microsoft.com/office/drawing/2014/main" id="{39290607-7C35-4412-A78E-C15478065A4E}"/>
+                <a16:creationId xmlns:a16="http://schemas.microsoft.com/office/drawing/2014/main" id="{E74CFD92-0938-4234-A454-949B3BDD974E}"/>
               </a:ext>
             </a:extLst>
           </p:cNvPr>
@@ -6400,7 +6400,7 @@
           <p:cNvPr id="4" name="">
             <a:extLst xmlns:a="http://schemas.openxmlformats.org/drawingml/2006/main">
               <a:ext uri="{FF2B5EF4-FFF2-40B4-BE49-F238E27FC236}">
-                <a16:creationId xmlns:a16="http://schemas.microsoft.com/office/drawing/2014/main" id="{1BB9860A-1825-4691-8978-516CDC8F7332}"/>
+                <a16:creationId xmlns:a16="http://schemas.microsoft.com/office/drawing/2014/main" id="{F97963A7-8AA7-49E3-89C8-9A7B82831A7E}"/>
               </a:ext>
             </a:extLst>
           </p:cNvPr>
@@ -6489,7 +6489,7 @@
           <p:cNvPr id="5" name="">
             <a:extLst xmlns:a="http://schemas.openxmlformats.org/drawingml/2006/main">
               <a:ext uri="{FF2B5EF4-FFF2-40B4-BE49-F238E27FC236}">
-                <a16:creationId xmlns:a16="http://schemas.microsoft.com/office/drawing/2014/main" id="{5B8E2A7E-B85D-4883-93CA-4944857F3695}"/>
+                <a16:creationId xmlns:a16="http://schemas.microsoft.com/office/drawing/2014/main" id="{4A8CCFCB-1692-429B-996D-B7DBF483769F}"/>
               </a:ext>
             </a:extLst>
           </p:cNvPr>
@@ -6499,7 +6499,7 @@
           <p:nvPr/>
         </p:nvPicPr>
         <p:blipFill>
-          <a:blip xmlns:r="http://schemas.openxmlformats.org/officeDocument/2006/relationships" xmlns:a="http://schemas.openxmlformats.org/drawingml/2006/main" r:embed="R045607847e4c4f4d"/>
+          <a:blip xmlns:r="http://schemas.openxmlformats.org/officeDocument/2006/relationships" xmlns:a="http://schemas.openxmlformats.org/drawingml/2006/main" r:embed="R5e2728741950486e"/>
           <a:srcRect xmlns:a="http://schemas.openxmlformats.org/drawingml/2006/main" l="19000" t="31000" r="2000" b="20000"/>
           <a:stretch xmlns:a="http://schemas.openxmlformats.org/drawingml/2006/main"/>
         </p:blipFill>
@@ -6518,7 +6518,7 @@
           <p:cNvPr id="6" name="">
             <a:extLst xmlns:a="http://schemas.openxmlformats.org/drawingml/2006/main">
               <a:ext uri="{FF2B5EF4-FFF2-40B4-BE49-F238E27FC236}">
-                <a16:creationId xmlns:a16="http://schemas.microsoft.com/office/drawing/2014/main" id="{3DBD09A0-3FC9-446B-A054-81DC154F544B}"/>
+                <a16:creationId xmlns:a16="http://schemas.microsoft.com/office/drawing/2014/main" id="{3790FE3A-3F4B-40DA-928A-6EC408EC4002}"/>
               </a:ext>
             </a:extLst>
           </p:cNvPr>
@@ -6584,7 +6584,7 @@
           <p:cNvPr id="7" name="">
             <a:extLst xmlns:a="http://schemas.openxmlformats.org/drawingml/2006/main">
               <a:ext uri="{FF2B5EF4-FFF2-40B4-BE49-F238E27FC236}">
-                <a16:creationId xmlns:a16="http://schemas.microsoft.com/office/drawing/2014/main" id="{FBA99525-AC12-4A13-9CE1-411F5AB88FD4}"/>
+                <a16:creationId xmlns:a16="http://schemas.microsoft.com/office/drawing/2014/main" id="{53407B95-C5BA-4BD4-9EAF-430F4BA793DD}"/>
               </a:ext>
             </a:extLst>
           </p:cNvPr>
@@ -6648,7 +6648,7 @@
     </p:spTree>
     <p:extLst>
       <p:ext uri="{BB962C8B-B14F-4D97-AF65-F5344CB8AC3E}">
-        <p14:creationId xmlns:p14="http://schemas.microsoft.com/office/powerpoint/2010/main" val="263714812"/>
+        <p14:creationId xmlns:p14="http://schemas.microsoft.com/office/powerpoint/2010/main" val="1382328587"/>
       </p:ext>
     </p:extLst>
   </p:cSld>
@@ -6679,7 +6679,7 @@
           <p:cNvPr id="10" name="">
             <a:extLst xmlns:a="http://schemas.openxmlformats.org/drawingml/2006/main">
               <a:ext uri="{FF2B5EF4-FFF2-40B4-BE49-F238E27FC236}">
-                <a16:creationId xmlns:a16="http://schemas.microsoft.com/office/drawing/2014/main" id="{CD8EA821-8F14-4DEB-994D-707066CC4A78}"/>
+                <a16:creationId xmlns:a16="http://schemas.microsoft.com/office/drawing/2014/main" id="{C2D3C7CF-991D-46A1-8630-2783A50C92BC}"/>
               </a:ext>
             </a:extLst>
           </p:cNvPr>
@@ -6745,7 +6745,7 @@
           <p:cNvPr id="2" name="">
             <a:extLst xmlns:a="http://schemas.openxmlformats.org/drawingml/2006/main">
               <a:ext uri="{FF2B5EF4-FFF2-40B4-BE49-F238E27FC236}">
-                <a16:creationId xmlns:a16="http://schemas.microsoft.com/office/drawing/2014/main" id="{324DA1EE-E9B9-454A-B96A-5A526D875088}"/>
+                <a16:creationId xmlns:a16="http://schemas.microsoft.com/office/drawing/2014/main" id="{21D25A36-1B09-4E3F-9F92-8DB41CA33B71}"/>
               </a:ext>
             </a:extLst>
           </p:cNvPr>
@@ -6834,7 +6834,7 @@
           <p:cNvPr id="3" name="">
             <a:extLst xmlns:a="http://schemas.openxmlformats.org/drawingml/2006/main">
               <a:ext uri="{FF2B5EF4-FFF2-40B4-BE49-F238E27FC236}">
-                <a16:creationId xmlns:a16="http://schemas.microsoft.com/office/drawing/2014/main" id="{E515C0CA-7E34-4640-BDDD-FFDE09329755}"/>
+                <a16:creationId xmlns:a16="http://schemas.microsoft.com/office/drawing/2014/main" id="{52E15528-83A4-4EDD-A790-A882EC27D45F}"/>
               </a:ext>
             </a:extLst>
           </p:cNvPr>
@@ -6946,7 +6946,7 @@
           <p:cNvPr id="4" name="">
             <a:extLst xmlns:a="http://schemas.openxmlformats.org/drawingml/2006/main">
               <a:ext uri="{FF2B5EF4-FFF2-40B4-BE49-F238E27FC236}">
-                <a16:creationId xmlns:a16="http://schemas.microsoft.com/office/drawing/2014/main" id="{54216F1D-EBA0-4609-825A-0E8BE245E3BF}"/>
+                <a16:creationId xmlns:a16="http://schemas.microsoft.com/office/drawing/2014/main" id="{3406146A-D752-4036-8DB6-E3637636BCD4}"/>
               </a:ext>
             </a:extLst>
           </p:cNvPr>
@@ -7012,7 +7012,7 @@
           <p:cNvPr id="5" name="">
             <a:extLst xmlns:a="http://schemas.openxmlformats.org/drawingml/2006/main">
               <a:ext uri="{FF2B5EF4-FFF2-40B4-BE49-F238E27FC236}">
-                <a16:creationId xmlns:a16="http://schemas.microsoft.com/office/drawing/2014/main" id="{8147C681-2E90-40DE-9780-AE323C458368}"/>
+                <a16:creationId xmlns:a16="http://schemas.microsoft.com/office/drawing/2014/main" id="{FEA10848-CBF5-498B-AF69-EE32354F876D}"/>
               </a:ext>
             </a:extLst>
           </p:cNvPr>
@@ -7101,7 +7101,7 @@
           <p:cNvPr id="6" name="">
             <a:extLst xmlns:a="http://schemas.openxmlformats.org/drawingml/2006/main">
               <a:ext uri="{FF2B5EF4-FFF2-40B4-BE49-F238E27FC236}">
-                <a16:creationId xmlns:a16="http://schemas.microsoft.com/office/drawing/2014/main" id="{871BED79-635D-40CA-B86E-5E51C81B5A14}"/>
+                <a16:creationId xmlns:a16="http://schemas.microsoft.com/office/drawing/2014/main" id="{FA492A7E-FCA4-4DBF-99F8-70EEC25F4729}"/>
               </a:ext>
             </a:extLst>
           </p:cNvPr>
@@ -7111,7 +7111,7 @@
           <p:nvPr/>
         </p:nvPicPr>
         <p:blipFill>
-          <a:blip xmlns:r="http://schemas.openxmlformats.org/officeDocument/2006/relationships" xmlns:a="http://schemas.openxmlformats.org/drawingml/2006/main" r:embed="R9a83b951576c413d"/>
+          <a:blip xmlns:r="http://schemas.openxmlformats.org/officeDocument/2006/relationships" xmlns:a="http://schemas.openxmlformats.org/drawingml/2006/main" r:embed="R1a83f862d30d47dd"/>
           <a:srcRect xmlns:a="http://schemas.openxmlformats.org/drawingml/2006/main" l="19800" t="37800" r="55200" b="25500"/>
           <a:stretch xmlns:a="http://schemas.openxmlformats.org/drawingml/2006/main"/>
         </p:blipFill>
@@ -7130,7 +7130,7 @@
           <p:cNvPr id="7" name="">
             <a:extLst xmlns:a="http://schemas.openxmlformats.org/drawingml/2006/main">
               <a:ext uri="{FF2B5EF4-FFF2-40B4-BE49-F238E27FC236}">
-                <a16:creationId xmlns:a16="http://schemas.microsoft.com/office/drawing/2014/main" id="{2D1F65E3-0520-4B94-9BC5-F86712560D02}"/>
+                <a16:creationId xmlns:a16="http://schemas.microsoft.com/office/drawing/2014/main" id="{6ECBDD7A-5503-4CB9-9BF0-D8ECA984F01D}"/>
               </a:ext>
             </a:extLst>
           </p:cNvPr>
@@ -7140,7 +7140,7 @@
           <p:nvPr/>
         </p:nvPicPr>
         <p:blipFill>
-          <a:blip xmlns:r="http://schemas.openxmlformats.org/officeDocument/2006/relationships" xmlns:a="http://schemas.openxmlformats.org/drawingml/2006/main" r:embed="R6c7d731d03be4cd3"/>
+          <a:blip xmlns:r="http://schemas.openxmlformats.org/officeDocument/2006/relationships" xmlns:a="http://schemas.openxmlformats.org/drawingml/2006/main" r:embed="R4e0df1223ffe4ec0"/>
           <a:srcRect xmlns:a="http://schemas.openxmlformats.org/drawingml/2006/main" l="32300" t="18600" r="32300" b="18600"/>
           <a:stretch xmlns:a="http://schemas.openxmlformats.org/drawingml/2006/main"/>
         </p:blipFill>
@@ -7159,7 +7159,7 @@
           <p:cNvPr id="8" name="">
             <a:extLst xmlns:a="http://schemas.openxmlformats.org/drawingml/2006/main">
               <a:ext uri="{FF2B5EF4-FFF2-40B4-BE49-F238E27FC236}">
-                <a16:creationId xmlns:a16="http://schemas.microsoft.com/office/drawing/2014/main" id="{8A9AB8CF-5C46-47A5-8C54-DA4333AA7F67}"/>
+                <a16:creationId xmlns:a16="http://schemas.microsoft.com/office/drawing/2014/main" id="{D12DC31A-6CE5-4A84-A70E-EF538A7B5DF4}"/>
               </a:ext>
             </a:extLst>
           </p:cNvPr>
@@ -7225,7 +7225,7 @@
           <p:cNvPr id="9" name="">
             <a:extLst xmlns:a="http://schemas.openxmlformats.org/drawingml/2006/main">
               <a:ext uri="{FF2B5EF4-FFF2-40B4-BE49-F238E27FC236}">
-                <a16:creationId xmlns:a16="http://schemas.microsoft.com/office/drawing/2014/main" id="{BB2C047E-4E38-45CA-8A08-91C2D75051B1}"/>
+                <a16:creationId xmlns:a16="http://schemas.microsoft.com/office/drawing/2014/main" id="{D975B3E6-9E47-4B18-AC6B-30DBC1C6F70F}"/>
               </a:ext>
             </a:extLst>
           </p:cNvPr>
@@ -7289,7 +7289,7 @@
     </p:spTree>
     <p:extLst>
       <p:ext uri="{BB962C8B-B14F-4D97-AF65-F5344CB8AC3E}">
-        <p14:creationId xmlns:p14="http://schemas.microsoft.com/office/powerpoint/2010/main" val="1045330279"/>
+        <p14:creationId xmlns:p14="http://schemas.microsoft.com/office/powerpoint/2010/main" val="1984151212"/>
       </p:ext>
     </p:extLst>
   </p:cSld>
@@ -7320,7 +7320,7 @@
           <p:cNvPr id="10" name="">
             <a:extLst xmlns:a="http://schemas.openxmlformats.org/drawingml/2006/main">
               <a:ext uri="{FF2B5EF4-FFF2-40B4-BE49-F238E27FC236}">
-                <a16:creationId xmlns:a16="http://schemas.microsoft.com/office/drawing/2014/main" id="{6A96A6AF-78E8-4AE6-8A10-2B6C8AD13A41}"/>
+                <a16:creationId xmlns:a16="http://schemas.microsoft.com/office/drawing/2014/main" id="{87C052A7-F04E-4E00-866C-A19A96272F57}"/>
               </a:ext>
             </a:extLst>
           </p:cNvPr>
@@ -7386,7 +7386,7 @@
           <p:cNvPr id="2" name="">
             <a:extLst xmlns:a="http://schemas.openxmlformats.org/drawingml/2006/main">
               <a:ext uri="{FF2B5EF4-FFF2-40B4-BE49-F238E27FC236}">
-                <a16:creationId xmlns:a16="http://schemas.microsoft.com/office/drawing/2014/main" id="{9D1937B4-3522-4F5F-9923-76C4CBC01216}"/>
+                <a16:creationId xmlns:a16="http://schemas.microsoft.com/office/drawing/2014/main" id="{EC6817F5-A3FE-4FEC-ABA2-A65535CDBE3C}"/>
               </a:ext>
             </a:extLst>
           </p:cNvPr>
@@ -7475,7 +7475,7 @@
           <p:cNvPr id="3" name="">
             <a:extLst xmlns:a="http://schemas.openxmlformats.org/drawingml/2006/main">
               <a:ext uri="{FF2B5EF4-FFF2-40B4-BE49-F238E27FC236}">
-                <a16:creationId xmlns:a16="http://schemas.microsoft.com/office/drawing/2014/main" id="{0DE121D7-3D61-444E-8EC7-E55D1F10024B}"/>
+                <a16:creationId xmlns:a16="http://schemas.microsoft.com/office/drawing/2014/main" id="{3499C75F-CF45-405D-B358-B2AEF587C2B5}"/>
               </a:ext>
             </a:extLst>
           </p:cNvPr>
@@ -7587,7 +7587,7 @@
           <p:cNvPr id="4" name="">
             <a:extLst xmlns:a="http://schemas.openxmlformats.org/drawingml/2006/main">
               <a:ext uri="{FF2B5EF4-FFF2-40B4-BE49-F238E27FC236}">
-                <a16:creationId xmlns:a16="http://schemas.microsoft.com/office/drawing/2014/main" id="{3FA57534-6F88-4ECF-B607-191B15F0CCC7}"/>
+                <a16:creationId xmlns:a16="http://schemas.microsoft.com/office/drawing/2014/main" id="{EBF46EFA-7FA3-41CE-B82A-4E88B7213540}"/>
               </a:ext>
             </a:extLst>
           </p:cNvPr>
@@ -7653,7 +7653,7 @@
           <p:cNvPr id="5" name="">
             <a:extLst xmlns:a="http://schemas.openxmlformats.org/drawingml/2006/main">
               <a:ext uri="{FF2B5EF4-FFF2-40B4-BE49-F238E27FC236}">
-                <a16:creationId xmlns:a16="http://schemas.microsoft.com/office/drawing/2014/main" id="{6509DE85-3BB1-4E63-BEF0-30ED6774A013}"/>
+                <a16:creationId xmlns:a16="http://schemas.microsoft.com/office/drawing/2014/main" id="{6AC6CBE7-F1A5-4A7D-B294-C4D477F2F3F8}"/>
               </a:ext>
             </a:extLst>
           </p:cNvPr>
@@ -7719,7 +7719,7 @@
           <p:cNvPr id="6" name="">
             <a:extLst xmlns:a="http://schemas.openxmlformats.org/drawingml/2006/main">
               <a:ext uri="{FF2B5EF4-FFF2-40B4-BE49-F238E27FC236}">
-                <a16:creationId xmlns:a16="http://schemas.microsoft.com/office/drawing/2014/main" id="{670C3F7A-DA3C-4E0E-B7CA-5BFC915FEF5E}"/>
+                <a16:creationId xmlns:a16="http://schemas.microsoft.com/office/drawing/2014/main" id="{EBF2616F-8EA5-4B87-82A9-C38061537654}"/>
               </a:ext>
             </a:extLst>
           </p:cNvPr>
@@ -7729,7 +7729,7 @@
           <p:nvPr/>
         </p:nvPicPr>
         <p:blipFill>
-          <a:blip xmlns:r="http://schemas.openxmlformats.org/officeDocument/2006/relationships" xmlns:a="http://schemas.openxmlformats.org/drawingml/2006/main" r:embed="R3743fd5dcf984806"/>
+          <a:blip xmlns:r="http://schemas.openxmlformats.org/officeDocument/2006/relationships" xmlns:a="http://schemas.openxmlformats.org/drawingml/2006/main" r:embed="R73c4656b773f4755"/>
           <a:srcRect xmlns:a="http://schemas.openxmlformats.org/drawingml/2006/main" l="0" t="0" r="2800" b="0"/>
           <a:stretch xmlns:a="http://schemas.openxmlformats.org/drawingml/2006/main"/>
         </p:blipFill>
@@ -7748,7 +7748,7 @@
           <p:cNvPr id="7" name="">
             <a:extLst xmlns:a="http://schemas.openxmlformats.org/drawingml/2006/main">
               <a:ext uri="{FF2B5EF4-FFF2-40B4-BE49-F238E27FC236}">
-                <a16:creationId xmlns:a16="http://schemas.microsoft.com/office/drawing/2014/main" id="{1D3DDB4A-BF1D-4C77-8512-2513CDDE45F8}"/>
+                <a16:creationId xmlns:a16="http://schemas.microsoft.com/office/drawing/2014/main" id="{FF7EB0E0-13E3-4FA7-9B96-0CA0B1802005}"/>
               </a:ext>
             </a:extLst>
           </p:cNvPr>
@@ -7758,7 +7758,7 @@
           <p:nvPr/>
         </p:nvPicPr>
         <p:blipFill>
-          <a:blip xmlns:r="http://schemas.openxmlformats.org/officeDocument/2006/relationships" xmlns:a="http://schemas.openxmlformats.org/drawingml/2006/main" r:embed="R3a857a50bcf34925"/>
+          <a:blip xmlns:r="http://schemas.openxmlformats.org/officeDocument/2006/relationships" xmlns:a="http://schemas.openxmlformats.org/drawingml/2006/main" r:embed="Rac911173ad4a484c"/>
           <a:srcRect xmlns:a="http://schemas.openxmlformats.org/drawingml/2006/main" l="0" t="0" r="2800" b="0"/>
           <a:stretch xmlns:a="http://schemas.openxmlformats.org/drawingml/2006/main"/>
         </p:blipFill>
@@ -7777,7 +7777,7 @@
           <p:cNvPr id="8" name="">
             <a:extLst xmlns:a="http://schemas.openxmlformats.org/drawingml/2006/main">
               <a:ext uri="{FF2B5EF4-FFF2-40B4-BE49-F238E27FC236}">
-                <a16:creationId xmlns:a16="http://schemas.microsoft.com/office/drawing/2014/main" id="{190E3A2E-5926-4965-9054-A2DFA1D1C624}"/>
+                <a16:creationId xmlns:a16="http://schemas.microsoft.com/office/drawing/2014/main" id="{3B84C508-2E0E-4737-B002-76724D8B20FE}"/>
               </a:ext>
             </a:extLst>
           </p:cNvPr>
@@ -7843,7 +7843,7 @@
           <p:cNvPr id="9" name="">
             <a:extLst xmlns:a="http://schemas.openxmlformats.org/drawingml/2006/main">
               <a:ext uri="{FF2B5EF4-FFF2-40B4-BE49-F238E27FC236}">
-                <a16:creationId xmlns:a16="http://schemas.microsoft.com/office/drawing/2014/main" id="{DE0FA921-FFC2-4210-8F7E-5A4474A295B8}"/>
+                <a16:creationId xmlns:a16="http://schemas.microsoft.com/office/drawing/2014/main" id="{E7F52E69-85F1-4922-A448-FD7AB02B17C2}"/>
               </a:ext>
             </a:extLst>
           </p:cNvPr>
@@ -7907,7 +7907,7 @@
     </p:spTree>
     <p:extLst>
       <p:ext uri="{BB962C8B-B14F-4D97-AF65-F5344CB8AC3E}">
-        <p14:creationId xmlns:p14="http://schemas.microsoft.com/office/powerpoint/2010/main" val="504920159"/>
+        <p14:creationId xmlns:p14="http://schemas.microsoft.com/office/powerpoint/2010/main" val="1688108160"/>
       </p:ext>
     </p:extLst>
   </p:cSld>
@@ -7938,7 +7938,7 @@
           <p:cNvPr id="11" name="">
             <a:extLst xmlns:a="http://schemas.openxmlformats.org/drawingml/2006/main">
               <a:ext uri="{FF2B5EF4-FFF2-40B4-BE49-F238E27FC236}">
-                <a16:creationId xmlns:a16="http://schemas.microsoft.com/office/drawing/2014/main" id="{C5845EC5-5F50-4E0B-A036-B83B27A086F0}"/>
+                <a16:creationId xmlns:a16="http://schemas.microsoft.com/office/drawing/2014/main" id="{710D6FAC-4BDA-4015-9152-F87EB98C15F6}"/>
               </a:ext>
             </a:extLst>
           </p:cNvPr>
@@ -8004,7 +8004,7 @@
           <p:cNvPr id="2" name="">
             <a:extLst xmlns:a="http://schemas.openxmlformats.org/drawingml/2006/main">
               <a:ext uri="{FF2B5EF4-FFF2-40B4-BE49-F238E27FC236}">
-                <a16:creationId xmlns:a16="http://schemas.microsoft.com/office/drawing/2014/main" id="{D1573BD2-3235-4C01-AB9C-386E65183A5C}"/>
+                <a16:creationId xmlns:a16="http://schemas.microsoft.com/office/drawing/2014/main" id="{368FF9FA-DB26-4855-BF39-F79D5BED523B}"/>
               </a:ext>
             </a:extLst>
           </p:cNvPr>
@@ -8014,7 +8014,7 @@
           <p:nvPr/>
         </p:nvPicPr>
         <p:blipFill>
-          <a:blip xmlns:r="http://schemas.openxmlformats.org/officeDocument/2006/relationships" xmlns:a="http://schemas.openxmlformats.org/drawingml/2006/main" r:embed="R0a37510dd7174d24"/>
+          <a:blip xmlns:r="http://schemas.openxmlformats.org/officeDocument/2006/relationships" xmlns:a="http://schemas.openxmlformats.org/drawingml/2006/main" r:embed="Rd8f8016fe840449b"/>
           <a:srcRect xmlns:a="http://schemas.openxmlformats.org/drawingml/2006/main" l="23000" t="3000" r="31000" b="3000"/>
           <a:stretch xmlns:a="http://schemas.openxmlformats.org/drawingml/2006/main"/>
         </p:blipFill>
@@ -8033,7 +8033,7 @@
           <p:cNvPr id="3" name="">
             <a:extLst xmlns:a="http://schemas.openxmlformats.org/drawingml/2006/main">
               <a:ext uri="{FF2B5EF4-FFF2-40B4-BE49-F238E27FC236}">
-                <a16:creationId xmlns:a16="http://schemas.microsoft.com/office/drawing/2014/main" id="{41953B7C-2F45-43DA-993D-5EF2E95AB240}"/>
+                <a16:creationId xmlns:a16="http://schemas.microsoft.com/office/drawing/2014/main" id="{A2E1115E-097D-47F2-A375-85A860A22925}"/>
               </a:ext>
             </a:extLst>
           </p:cNvPr>
@@ -8099,7 +8099,7 @@
           <p:cNvPr id="4" name="">
             <a:extLst xmlns:a="http://schemas.openxmlformats.org/drawingml/2006/main">
               <a:ext uri="{FF2B5EF4-FFF2-40B4-BE49-F238E27FC236}">
-                <a16:creationId xmlns:a16="http://schemas.microsoft.com/office/drawing/2014/main" id="{2ED31B1E-A1E7-489A-BB4B-6885A3F04ECF}"/>
+                <a16:creationId xmlns:a16="http://schemas.microsoft.com/office/drawing/2014/main" id="{1C6BDFCC-4163-47D5-AFFE-0B9D86862FE4}"/>
               </a:ext>
             </a:extLst>
           </p:cNvPr>
@@ -8211,7 +8211,7 @@
           <p:cNvPr id="5" name="">
             <a:extLst xmlns:a="http://schemas.openxmlformats.org/drawingml/2006/main">
               <a:ext uri="{FF2B5EF4-FFF2-40B4-BE49-F238E27FC236}">
-                <a16:creationId xmlns:a16="http://schemas.microsoft.com/office/drawing/2014/main" id="{D63BC456-012E-4ADD-AEC3-49E7F60246DC}"/>
+                <a16:creationId xmlns:a16="http://schemas.microsoft.com/office/drawing/2014/main" id="{67FC295F-172B-4833-9811-ED2541DB451D}"/>
               </a:ext>
             </a:extLst>
           </p:cNvPr>
@@ -8277,7 +8277,7 @@
           <p:cNvPr id="6" name="">
             <a:extLst xmlns:a="http://schemas.openxmlformats.org/drawingml/2006/main">
               <a:ext uri="{FF2B5EF4-FFF2-40B4-BE49-F238E27FC236}">
-                <a16:creationId xmlns:a16="http://schemas.microsoft.com/office/drawing/2014/main" id="{36729BA5-B31E-4563-B111-37A174FEB01D}"/>
+                <a16:creationId xmlns:a16="http://schemas.microsoft.com/office/drawing/2014/main" id="{40524874-047E-4016-9992-0ABBF771E054}"/>
               </a:ext>
             </a:extLst>
           </p:cNvPr>
@@ -8343,7 +8343,7 @@
           <p:cNvPr id="7" name="">
             <a:extLst xmlns:a="http://schemas.openxmlformats.org/drawingml/2006/main">
               <a:ext uri="{FF2B5EF4-FFF2-40B4-BE49-F238E27FC236}">
-                <a16:creationId xmlns:a16="http://schemas.microsoft.com/office/drawing/2014/main" id="{8D404B41-702E-4BF1-A382-BC4CE420C65D}"/>
+                <a16:creationId xmlns:a16="http://schemas.microsoft.com/office/drawing/2014/main" id="{94AAE4B0-9E40-43ED-A466-AA9B3E7407F7}"/>
               </a:ext>
             </a:extLst>
           </p:cNvPr>
@@ -8409,7 +8409,7 @@
           <p:cNvPr id="8" name="">
             <a:extLst xmlns:a="http://schemas.openxmlformats.org/drawingml/2006/main">
               <a:ext uri="{FF2B5EF4-FFF2-40B4-BE49-F238E27FC236}">
-                <a16:creationId xmlns:a16="http://schemas.microsoft.com/office/drawing/2014/main" id="{5AFE2A77-FDD2-465C-9018-A76AF945521E}"/>
+                <a16:creationId xmlns:a16="http://schemas.microsoft.com/office/drawing/2014/main" id="{45B50B12-F804-4D92-8D03-4981C2F96D06}"/>
               </a:ext>
             </a:extLst>
           </p:cNvPr>
@@ -8498,7 +8498,7 @@
           <p:cNvPr id="9" name="">
             <a:extLst xmlns:a="http://schemas.openxmlformats.org/drawingml/2006/main">
               <a:ext uri="{FF2B5EF4-FFF2-40B4-BE49-F238E27FC236}">
-                <a16:creationId xmlns:a16="http://schemas.microsoft.com/office/drawing/2014/main" id="{D57D28EC-A559-4D97-B1DD-2388E6EA4BF1}"/>
+                <a16:creationId xmlns:a16="http://schemas.microsoft.com/office/drawing/2014/main" id="{956399EC-03D0-40C6-9C6E-0C58216D30D0}"/>
               </a:ext>
             </a:extLst>
           </p:cNvPr>
@@ -8587,7 +8587,7 @@
           <p:cNvPr id="10" name="">
             <a:extLst xmlns:a="http://schemas.openxmlformats.org/drawingml/2006/main">
               <a:ext uri="{FF2B5EF4-FFF2-40B4-BE49-F238E27FC236}">
-                <a16:creationId xmlns:a16="http://schemas.microsoft.com/office/drawing/2014/main" id="{B1BBF0F0-5172-4BBA-929A-9FBCA7FD6BE7}"/>
+                <a16:creationId xmlns:a16="http://schemas.microsoft.com/office/drawing/2014/main" id="{033D2DAE-3C4E-440C-8A8E-2AB9BBAEE98A}"/>
               </a:ext>
             </a:extLst>
           </p:cNvPr>
@@ -8651,7 +8651,7 @@
     </p:spTree>
     <p:extLst>
       <p:ext uri="{BB962C8B-B14F-4D97-AF65-F5344CB8AC3E}">
-        <p14:creationId xmlns:p14="http://schemas.microsoft.com/office/powerpoint/2010/main" val="1011864631"/>
+        <p14:creationId xmlns:p14="http://schemas.microsoft.com/office/powerpoint/2010/main" val="331491586"/>
       </p:ext>
     </p:extLst>
   </p:cSld>
@@ -8682,7 +8682,7 @@
           <p:cNvPr id="9" name="">
             <a:extLst xmlns:a="http://schemas.openxmlformats.org/drawingml/2006/main">
               <a:ext uri="{FF2B5EF4-FFF2-40B4-BE49-F238E27FC236}">
-                <a16:creationId xmlns:a16="http://schemas.microsoft.com/office/drawing/2014/main" id="{0BA9FE83-C225-48E0-9E19-E8A182D9E7AD}"/>
+                <a16:creationId xmlns:a16="http://schemas.microsoft.com/office/drawing/2014/main" id="{E2427133-5808-41E6-ACBB-D404FDB71CA8}"/>
               </a:ext>
             </a:extLst>
           </p:cNvPr>
@@ -8748,7 +8748,7 @@
           <p:cNvPr id="2" name="">
             <a:extLst xmlns:a="http://schemas.openxmlformats.org/drawingml/2006/main">
               <a:ext uri="{FF2B5EF4-FFF2-40B4-BE49-F238E27FC236}">
-                <a16:creationId xmlns:a16="http://schemas.microsoft.com/office/drawing/2014/main" id="{63D77279-AE22-4134-B229-F0A6768A18E9}"/>
+                <a16:creationId xmlns:a16="http://schemas.microsoft.com/office/drawing/2014/main" id="{D3220A09-5583-4C33-8391-F4493276A7CB}"/>
               </a:ext>
             </a:extLst>
           </p:cNvPr>
@@ -8837,7 +8837,7 @@
           <p:cNvPr id="3" name="">
             <a:extLst xmlns:a="http://schemas.openxmlformats.org/drawingml/2006/main">
               <a:ext uri="{FF2B5EF4-FFF2-40B4-BE49-F238E27FC236}">
-                <a16:creationId xmlns:a16="http://schemas.microsoft.com/office/drawing/2014/main" id="{0F14D70C-376A-4B36-B0F1-81E4B0DD68BC}"/>
+                <a16:creationId xmlns:a16="http://schemas.microsoft.com/office/drawing/2014/main" id="{1FD5BB65-17E0-4C08-A5DD-DF84FBE6E00D}"/>
               </a:ext>
             </a:extLst>
           </p:cNvPr>
@@ -8903,7 +8903,7 @@
           <p:cNvPr id="4" name="">
             <a:extLst xmlns:a="http://schemas.openxmlformats.org/drawingml/2006/main">
               <a:ext uri="{FF2B5EF4-FFF2-40B4-BE49-F238E27FC236}">
-                <a16:creationId xmlns:a16="http://schemas.microsoft.com/office/drawing/2014/main" id="{3203F631-11AA-4F87-B41D-CFE83D0F9DA7}"/>
+                <a16:creationId xmlns:a16="http://schemas.microsoft.com/office/drawing/2014/main" id="{ACA59FCC-CE3C-4ED2-98F7-75894E348F01}"/>
               </a:ext>
             </a:extLst>
           </p:cNvPr>
@@ -8969,7 +8969,7 @@
           <p:cNvPr id="5" name="">
             <a:extLst xmlns:a="http://schemas.openxmlformats.org/drawingml/2006/main">
               <a:ext uri="{FF2B5EF4-FFF2-40B4-BE49-F238E27FC236}">
-                <a16:creationId xmlns:a16="http://schemas.microsoft.com/office/drawing/2014/main" id="{D81B8CCB-408B-424B-95C5-A95C3A19316D}"/>
+                <a16:creationId xmlns:a16="http://schemas.microsoft.com/office/drawing/2014/main" id="{7EC1A6B8-7872-4F32-8E90-00A35F58ED0F}"/>
               </a:ext>
             </a:extLst>
           </p:cNvPr>
@@ -9058,7 +9058,7 @@
           <p:cNvPr id="6" name="">
             <a:extLst xmlns:a="http://schemas.openxmlformats.org/drawingml/2006/main">
               <a:ext uri="{FF2B5EF4-FFF2-40B4-BE49-F238E27FC236}">
-                <a16:creationId xmlns:a16="http://schemas.microsoft.com/office/drawing/2014/main" id="{702C7146-0989-4CB3-9E4D-40F2B9D9824E}"/>
+                <a16:creationId xmlns:a16="http://schemas.microsoft.com/office/drawing/2014/main" id="{5559EB4C-2C23-4B07-B2E4-26760DBCDF1E}"/>
               </a:ext>
             </a:extLst>
           </p:cNvPr>
@@ -9124,7 +9124,7 @@
           <p:cNvPr id="7" name="">
             <a:extLst xmlns:a="http://schemas.openxmlformats.org/drawingml/2006/main">
               <a:ext uri="{FF2B5EF4-FFF2-40B4-BE49-F238E27FC236}">
-                <a16:creationId xmlns:a16="http://schemas.microsoft.com/office/drawing/2014/main" id="{E9248B09-8C17-4F1B-80D7-5065CF09B0F4}"/>
+                <a16:creationId xmlns:a16="http://schemas.microsoft.com/office/drawing/2014/main" id="{B9C20843-5F73-447B-AD6C-1D188F420CB6}"/>
               </a:ext>
             </a:extLst>
           </p:cNvPr>
@@ -9190,7 +9190,7 @@
           <p:cNvPr id="8" name="">
             <a:extLst xmlns:a="http://schemas.openxmlformats.org/drawingml/2006/main">
               <a:ext uri="{FF2B5EF4-FFF2-40B4-BE49-F238E27FC236}">
-                <a16:creationId xmlns:a16="http://schemas.microsoft.com/office/drawing/2014/main" id="{10BB60DA-A93C-46A3-A016-83EBF55D1CD5}"/>
+                <a16:creationId xmlns:a16="http://schemas.microsoft.com/office/drawing/2014/main" id="{1CA702C1-526F-48AC-9B69-1E4225C302A6}"/>
               </a:ext>
             </a:extLst>
           </p:cNvPr>
@@ -9254,7 +9254,7 @@
     </p:spTree>
     <p:extLst>
       <p:ext uri="{BB962C8B-B14F-4D97-AF65-F5344CB8AC3E}">
-        <p14:creationId xmlns:p14="http://schemas.microsoft.com/office/powerpoint/2010/main" val="708287504"/>
+        <p14:creationId xmlns:p14="http://schemas.microsoft.com/office/powerpoint/2010/main" val="2031090203"/>
       </p:ext>
     </p:extLst>
   </p:cSld>
